--- a/experiments/nerf/talk/defense_talk_5min.pptx
+++ b/experiments/nerf/talk/defense_talk_5min.pptx
@@ -11,6 +11,7 @@
     <p:sldId id="259" r:id="rId11"/>
     <p:sldId id="260" r:id="rId12"/>
     <p:sldId id="261" r:id="rId13"/>
+    <p:sldId id="262" r:id="rId14"/>
   </p:sldIdLst>
   <p:sldSz cx="12191695" cy="6858000" type="screen4x3"/>
   <p:notesSz cx="6858000" cy="9144000"/>
@@ -513,32 +514,33 @@
           <a:p/>
           <a:p>
             <a:r>
-              <a:t>In the next five minutes I'll show you a NeRF variant where we kept the</a:t>
-            </a:r>
-          </a:p>
-          <a:p>
-            <a:r>
-              <a:t>architecture from Mildenhall et al. and replaced everything optical with</a:t>
-            </a:r>
-          </a:p>
-          <a:p>
-            <a:r>
-              <a:t>physics. The result reconstructs a 3D gas density field from 1D absorption</a:t>
-            </a:r>
-          </a:p>
-          <a:p>
-            <a:r>
-              <a:t>spectra. Frame it as sparse-view 3D reconstruction, where the rendering</a:t>
-            </a:r>
-          </a:p>
-          <a:p>
-            <a:r>
-              <a:t>operator is the Lyman-alpha optical depth integral instead of the radiance</a:t>
-            </a:r>
-          </a:p>
-          <a:p>
-            <a:r>
-              <a:t>integral.</a:t>
+              <a:t>I'll show you a NeRF variant for an unusual reconstruction problem: recovering</a:t>
+            </a:r>
+          </a:p>
+          <a:p>
+            <a:r>
+              <a:t>a 3D field of intergalactic gas from sparse 1D absorption spectra. The</a:t>
+            </a:r>
+          </a:p>
+          <a:p>
+            <a:r>
+              <a:t>architecture is NeRF; the rendering operator is physics. The contribution is</a:t>
+            </a:r>
+          </a:p>
+          <a:p>
+            <a:r>
+              <a:t>how those two things glue together.</a:t>
+            </a:r>
+          </a:p>
+          <a:p/>
+          <a:p>
+            <a:r>
+              <a:t>I'll spend the first minute on the astrophysical setup so the analogy makes</a:t>
+            </a:r>
+          </a:p>
+          <a:p>
+            <a:r>
+              <a:t>sense, then four minutes on the method, results, and what's next.</a:t>
             </a:r>
           </a:p>
         </p:txBody>
@@ -608,75 +610,116 @@
           <a:lstStyle/>
           <a:p>
             <a:r>
-              <a:t>[0:20 – 1:10]</a:t>
+              <a:t>[0:20 – 1:20]</a:t>
             </a:r>
           </a:p>
           <a:p/>
           <a:p>
             <a:r>
-              <a:t>In CV terms: sparse-view 3D reconstruction. The volume is 60 Mpc on a side.</a:t>
-            </a:r>
-          </a:p>
-          <a:p>
-            <a:r>
-              <a:t>The cameras are quasars behind the volume; the rays are sightlines through</a:t>
-            </a:r>
-          </a:p>
-          <a:p>
-            <a:r>
-              <a:t>the gas. Each ray gives us a 1D absorption profile — how much light got</a:t>
-            </a:r>
-          </a:p>
-          <a:p>
-            <a:r>
-              <a:t>absorbed at each velocity along the line.</a:t>
+              <a:t>Quick orientation. The volume on top is a 60 Mpc-per-h cube — the size of a</a:t>
+            </a:r>
+          </a:p>
+          <a:p>
+            <a:r>
+              <a:t>piece of the universe at redshift 0.3. It comes from the Sherwood</a:t>
+            </a:r>
+          </a:p>
+          <a:p>
+            <a:r>
+              <a:t>hydrodynamic simulation, which evolves dark matter and gas under gravity</a:t>
+            </a:r>
+          </a:p>
+          <a:p>
+            <a:r>
+              <a:t>plus four different feedback recipes. The gas inside the box is described</a:t>
+            </a:r>
+          </a:p>
+          <a:p>
+            <a:r>
+              <a:t>by four scalar fields at every point: density rho, temperature T, neutral</a:t>
+            </a:r>
+          </a:p>
+          <a:p>
+            <a:r>
+              <a:t>hydrogen fraction X_HI, and peculiar velocity v_pec — that last one is gas</a:t>
+            </a:r>
+          </a:p>
+          <a:p>
+            <a:r>
+              <a:t>motion relative to the Hubble flow.</a:t>
             </a:r>
           </a:p>
           <a:p/>
           <a:p>
             <a:r>
-              <a:t>Three things make this not a standard NeRF problem:</a:t>
-            </a:r>
-          </a:p>
-          <a:p>
-            <a:r>
-              <a:t>1. The image is 1D, not 2D RGB.</a:t>
-            </a:r>
-          </a:p>
-          <a:p>
-            <a:r>
-              <a:t>2. The forward operator is the Lyman-alpha optical depth integral — known,</a:t>
-            </a:r>
-          </a:p>
-          <a:p>
-            <a:r>
-              <a:t>   nonlinear, fully differentiable.</a:t>
-            </a:r>
-          </a:p>
-          <a:p>
-            <a:r>
-              <a:t>3. The target distribution is heavy-tailed: most of the spectrum sits in a</a:t>
-            </a:r>
-          </a:p>
-          <a:p>
-            <a:r>
-              <a:t>   narrow optical-depth range, but rare saturated absorbers (DLAs) reach</a:t>
-            </a:r>
-          </a:p>
-          <a:p>
-            <a:r>
-              <a:t>   τ ≈ 10⁷, which destroys per-pixel MSE.</a:t>
+              <a:t>The yellow line is a sightline. A bright background quasar emits across the</a:t>
+            </a:r>
+          </a:p>
+          <a:p>
+            <a:r>
+              <a:t>electromagnetic spectrum; gas in the foreground absorbs at the Lyman-alpha</a:t>
+            </a:r>
+          </a:p>
+          <a:p>
+            <a:r>
+              <a:t>line of neutral hydrogen — at 1216 angstroms in the rest frame, redshifted</a:t>
+            </a:r>
+          </a:p>
+          <a:p>
+            <a:r>
+              <a:t>into the visible. The amount of absorption at each velocity along that line</a:t>
+            </a:r>
+          </a:p>
+          <a:p>
+            <a:r>
+              <a:t>is set by how much neutral hydrogen the photon encountered, weighted by a</a:t>
+            </a:r>
+          </a:p>
+          <a:p>
+            <a:r>
+              <a:t>Voigt profile that depends on local temperature and gas motion.</a:t>
             </a:r>
           </a:p>
           <a:p/>
           <a:p>
             <a:r>
-              <a:t>The reconstruction question: given a few hundred to a few thousand of these</a:t>
-            </a:r>
-          </a:p>
-          <a:p>
-            <a:r>
-              <a:t>spectra, can we recover the underlying 3D density-temperature-velocity field?</a:t>
+              <a:t>The result is the bottom plot — what an observer's spectrograph sees: a 1D</a:t>
+            </a:r>
+          </a:p>
+          <a:p>
+            <a:r>
+              <a:t>optical-depth profile as a function of observed velocity. Most of it is the</a:t>
+            </a:r>
+          </a:p>
+          <a:p>
+            <a:r>
+              <a:t>'Lyman-alpha forest' — many narrow absorbers from underdense gas. A tiny</a:t>
+            </a:r>
+          </a:p>
+          <a:p>
+            <a:r>
+              <a:t>fraction of sightlines hit dense neutral systems and saturate completely;</a:t>
+            </a:r>
+          </a:p>
+          <a:p>
+            <a:r>
+              <a:t>those are the heavy-tailed outliers.</a:t>
+            </a:r>
+          </a:p>
+          <a:p/>
+          <a:p>
+            <a:r>
+              <a:t>Surveys like DESI will give us millions of these spectra. Each one is a 1D</a:t>
+            </a:r>
+          </a:p>
+          <a:p>
+            <a:r>
+              <a:t>pencil through 3D structure. The reconstruction question is: how do we</a:t>
+            </a:r>
+          </a:p>
+          <a:p>
+            <a:r>
+              <a:t>recover the 3D fields from these pencils?</a:t>
             </a:r>
           </a:p>
         </p:txBody>
@@ -746,91 +789,115 @@
           <a:lstStyle/>
           <a:p>
             <a:r>
-              <a:t>[1:10 – 2:30]</a:t>
+              <a:t>[1:20 – 2:00]</a:t>
             </a:r>
           </a:p>
           <a:p/>
           <a:p>
             <a:r>
-              <a:t>Make the analogy explicit. Same MLP. Same Fourier positional encoding at</a:t>
-            </a:r>
-          </a:p>
-          <a:p>
-            <a:r>
-              <a:t>L=10. Same skip connection at layer 4. The first half of the network is</a:t>
-            </a:r>
-          </a:p>
-          <a:p>
-            <a:r>
-              <a:t>byte-identical to Mildenhall.</a:t>
+              <a:t>Why NeRF? Look at the analogy column-by-column.</a:t>
             </a:r>
           </a:p>
           <a:p/>
           <a:p>
             <a:r>
-              <a:t>Where we diverge — the salmon boxes:</a:t>
+              <a:t>3D position: the same — both are 3D scene coordinates.</a:t>
             </a:r>
           </a:p>
           <a:p/>
           <a:p>
             <a:r>
-              <a:t>— No view direction in the input. Gas density doesn't depend on viewing</a:t>
-            </a:r>
-          </a:p>
-          <a:p>
-            <a:r>
-              <a:t>  angle.</a:t>
-            </a:r>
-          </a:p>
-          <a:p>
-            <a:r>
-              <a:t>— The output is four physical fields, not RGB plus density: gas density ρ,</a:t>
-            </a:r>
-          </a:p>
-          <a:p>
-            <a:r>
-              <a:t>  temperature T, neutral hydrogen fraction X_HI, peculiar velocity v_pec.</a:t>
-            </a:r>
-          </a:p>
-          <a:p>
-            <a:r>
-              <a:t>  All bounded with physics-aware activations to enforce positivity and</a:t>
-            </a:r>
-          </a:p>
-          <a:p>
-            <a:r>
-              <a:t>  realistic ranges.</a:t>
-            </a:r>
-          </a:p>
-          <a:p>
-            <a:r>
-              <a:t>— The rendering operator is the Voigt–Hjerting kernel — a nonlinear</a:t>
-            </a:r>
-          </a:p>
-          <a:p>
-            <a:r>
-              <a:t>  convolution in velocity space — instead of the volume-rendering integral.</a:t>
-            </a:r>
-          </a:p>
-          <a:p>
-            <a:r>
-              <a:t>— The 'image' is a 1D spectrum at the camera, not a 2D RGB image.</a:t>
-            </a:r>
-          </a:p>
-          <a:p>
-            <a:r>
-              <a:t>— The loss handles a heavy-tailed target — separate slide.</a:t>
+              <a:t>Positional encoding: identical. Cosmic structure is filaments + voids —</a:t>
+            </a:r>
+          </a:p>
+          <a:p>
+            <a:r>
+              <a:t>high-frequency, multi-scale. Same Fourier basis at L=10.</a:t>
             </a:r>
           </a:p>
           <a:p/>
           <a:p>
             <a:r>
-              <a:t>Bottom line: the architecture is NeRF. The rendering operator is physics.</a:t>
-            </a:r>
-          </a:p>
-          <a:p>
-            <a:r>
-              <a:t>That's the contribution.</a:t>
+              <a:t>Density: in NeRF, sigma is opacity per unit length along the ray. In our</a:t>
+            </a:r>
+          </a:p>
+          <a:p>
+            <a:r>
+              <a:t>case, the analogue is the neutral hydrogen density — gas density times</a:t>
+            </a:r>
+          </a:p>
+          <a:p>
+            <a:r>
+              <a:t>ionization fraction — and it determines how much absorption happens per</a:t>
+            </a:r>
+          </a:p>
+          <a:p>
+            <a:r>
+              <a:t>unit length.</a:t>
+            </a:r>
+          </a:p>
+          <a:p/>
+          <a:p>
+            <a:r>
+              <a:t>Color: in NeRF, color at a sample depends on direction. Our analogue is the</a:t>
+            </a:r>
+          </a:p>
+          <a:p>
+            <a:r>
+              <a:t>Voigt absorption kernel — which photons get absorbed at this sample as a</a:t>
+            </a:r>
+          </a:p>
+          <a:p>
+            <a:r>
+              <a:t>function of velocity offset. Crucially, ours is a *known closed-form* with</a:t>
+            </a:r>
+          </a:p>
+          <a:p>
+            <a:r>
+              <a:t>a *known dependence* on local temperature, not a learned head.</a:t>
+            </a:r>
+          </a:p>
+          <a:p/>
+          <a:p>
+            <a:r>
+              <a:t>View direction: NeRF needs it because reflected light is angle-dependent.</a:t>
+            </a:r>
+          </a:p>
+          <a:p>
+            <a:r>
+              <a:t>We don't — gas density doesn't change with viewing angle. There's a</a:t>
+            </a:r>
+          </a:p>
+          <a:p>
+            <a:r>
+              <a:t>peculiar-velocity Doppler effect that *would* depend on viewing direction</a:t>
+            </a:r>
+          </a:p>
+          <a:p>
+            <a:r>
+              <a:t>in principle, but Sherwood sightlines are pre-aligned along the simulation</a:t>
+            </a:r>
+          </a:p>
+          <a:p>
+            <a:r>
+              <a:t>z-axis, so we predict only the LOS-projected velocity.</a:t>
+            </a:r>
+          </a:p>
+          <a:p/>
+          <a:p>
+            <a:r>
+              <a:t>Volume rendering integral: line integral along the ray. Same structure.</a:t>
+            </a:r>
+          </a:p>
+          <a:p>
+            <a:r>
+              <a:t>Different operator.</a:t>
+            </a:r>
+          </a:p>
+          <a:p/>
+          <a:p>
+            <a:r>
+              <a:t>The MLP doesn't care which integral it's feeding — autograd handles either.</a:t>
             </a:r>
           </a:p>
         </p:txBody>
@@ -900,138 +967,68 @@
           <a:lstStyle/>
           <a:p>
             <a:r>
-              <a:t>[2:30 – 3:30]</a:t>
+              <a:t>[2:00 – 2:50]</a:t>
             </a:r>
           </a:p>
           <a:p/>
           <a:p>
             <a:r>
-              <a:t>The forward model. One equation. Optical depth at observation velocity v_obs</a:t>
-            </a:r>
-          </a:p>
-          <a:p>
-            <a:r>
-              <a:t>is a sum over source bins of gas density times the Voigt absorption kernel.</a:t>
+              <a:t>Concretely: same MLP, same Fourier encoding at L=10, same skip connection</a:t>
+            </a:r>
+          </a:p>
+          <a:p>
+            <a:r>
+              <a:t>at layer 4. The first half of the network is byte-identical to Mildenhall.</a:t>
             </a:r>
           </a:p>
           <a:p/>
           <a:p>
             <a:r>
-              <a:t>CV translation: n_HI plays the role of σ — local opacity. H(a,x) is the</a:t>
-            </a:r>
-          </a:p>
-          <a:p>
-            <a:r>
-              <a:t>radiance equivalent — but it's a known closed-form kernel, not a learned</a:t>
-            </a:r>
-          </a:p>
-          <a:p>
-            <a:r>
-              <a:t>function. b is the thermal Doppler width — this is the kernel bandwidth,</a:t>
-            </a:r>
-          </a:p>
-          <a:p>
-            <a:r>
-              <a:t>and it depends on local gas temperature, so the kernel itself varies across</a:t>
-            </a:r>
-          </a:p>
-          <a:p>
-            <a:r>
-              <a:t>the volume. 𝒜 is a single learnable amplitude that absorbs all global</a:t>
-            </a:r>
-          </a:p>
-          <a:p>
-            <a:r>
-              <a:t>constants.</a:t>
+              <a:t>Salmon boxes are where we diverge:</a:t>
             </a:r>
           </a:p>
           <a:p/>
           <a:p>
             <a:r>
-              <a:t>This entire forward pass is autograd-compatible. We added a numerical Taylor</a:t>
-            </a:r>
-          </a:p>
-          <a:p>
-            <a:r>
-              <a:t>branch for the kernel near zero — small detail, eliminates a defense-panel</a:t>
-            </a:r>
-          </a:p>
-          <a:p>
-            <a:r>
-              <a:t>attack vector.</a:t>
+              <a:t>The input: 3D, no view direction.</a:t>
             </a:r>
           </a:p>
           <a:p/>
           <a:p>
             <a:r>
-              <a:t>Loss. The targets are optical depths. Most of the volume has τ in the range</a:t>
-            </a:r>
-          </a:p>
-          <a:p>
-            <a:r>
-              <a:t>0 to 5. But a tiny fraction — damped Lyman-alpha systems — has τ at 10⁷.</a:t>
-            </a:r>
-          </a:p>
-          <a:p>
-            <a:r>
-              <a:t>Per-pixel MSE collapses onto these.</a:t>
+              <a:t>The output head: four physical fields with bounded activations to enforce</a:t>
+            </a:r>
+          </a:p>
+          <a:p>
+            <a:r>
+              <a:t>positivity and realistic ranges. Density and temperature are softplus-ed,</a:t>
+            </a:r>
+          </a:p>
+          <a:p>
+            <a:r>
+              <a:t>ionization fraction is sigmoid, peculiar velocity is tanh-rescaled to a</a:t>
+            </a:r>
+          </a:p>
+          <a:p>
+            <a:r>
+              <a:t>physical band of plus or minus 500 km per second.</a:t>
             </a:r>
           </a:p>
           <a:p/>
           <a:p>
             <a:r>
-              <a:t>Three coupled fixes:</a:t>
-            </a:r>
-          </a:p>
-          <a:p>
-            <a:r>
-              <a:t>1. Mask out the saturated cores entirely from the loss.</a:t>
-            </a:r>
-          </a:p>
-          <a:p>
-            <a:r>
-              <a:t>2. Cap the surviving forest at τ_max = 10. We did NOT pick this number —</a:t>
-            </a:r>
-          </a:p>
-          <a:p>
-            <a:r>
-              <a:t>   we ran a sensitivity sweep at τ_max in {5, 10, 20} and the change in</a:t>
-            </a:r>
-          </a:p>
-          <a:p>
-            <a:r>
-              <a:t>   downstream flux power was 0.018%, two orders of magnitude under our</a:t>
-            </a:r>
-          </a:p>
-          <a:p>
-            <a:r>
-              <a:t>   pass criterion. The bottom-left figure is that sensitivity result.</a:t>
-            </a:r>
-          </a:p>
-          <a:p>
-            <a:r>
-              <a:t>3. Log1p-transform before MSE. The IGM opacity distribution is</a:t>
-            </a:r>
-          </a:p>
-          <a:p>
-            <a:r>
-              <a:t>   approximately log-normal — Fluctuating Gunn-Peterson Approximation,</a:t>
-            </a:r>
-          </a:p>
-          <a:p>
-            <a:r>
-              <a:t>   Bi &amp; Davidsen 1997 — so log-space supervision matches the natural</a:t>
-            </a:r>
-          </a:p>
-          <a:p>
-            <a:r>
-              <a:t>   noise model.</a:t>
+              <a:t>The rendering operator: the Voigt-Hjerting kernel convolved with redshift-</a:t>
+            </a:r>
+          </a:p>
+          <a:p>
+            <a:r>
+              <a:t>space distortion, instead of the radiance integral.</a:t>
             </a:r>
           </a:p>
           <a:p/>
           <a:p>
             <a:r>
-              <a:t>Each part has a physical justification, not a tuning argument.</a:t>
+              <a:t>Bottom line: NeRF's representation, physics rendering.</a:t>
             </a:r>
           </a:p>
         </p:txBody>
@@ -1101,82 +1098,149 @@
           <a:lstStyle/>
           <a:p>
             <a:r>
-              <a:t>[3:30 – 4:20]</a:t>
+              <a:t>[2:50 – 3:50]</a:t>
             </a:r>
           </a:p>
           <a:p/>
           <a:p>
             <a:r>
-              <a:t>Here's what's done. Four physics variants — same dark matter, different</a:t>
-            </a:r>
-          </a:p>
-          <a:p>
-            <a:r>
-              <a:t>feedback recipes (no feedback, stellar wind only, stellar wind plus AGN,</a:t>
-            </a:r>
-          </a:p>
-          <a:p>
-            <a:r>
-              <a:t>strong AGN). Each gets its own MLP fit.</a:t>
+              <a:t>The forward model. One equation. Optical depth at observation velocity v_obs</a:t>
+            </a:r>
+          </a:p>
+          <a:p>
+            <a:r>
+              <a:t>is a sum over source bins of gas density times the Voigt absorption kernel.</a:t>
             </a:r>
           </a:p>
           <a:p/>
           <a:p>
             <a:r>
-              <a:t>At Tier-1 sparsity — 64 sightlines through the 60 Mpc box — every variant</a:t>
-            </a:r>
-          </a:p>
-          <a:p>
-            <a:r>
-              <a:t>recovers the mean transmitted flux to within 0.66 percent across the four</a:t>
-            </a:r>
-          </a:p>
-          <a:p>
-            <a:r>
-              <a:t>physics: 0.9247 to 0.9308, against the observational anchor 0.877.</a:t>
+              <a:t>CV translation: n_HI plays the role of σ — local opacity. H(a,x) is the</a:t>
+            </a:r>
+          </a:p>
+          <a:p>
+            <a:r>
+              <a:t>radiance equivalent — but it's a known closed-form kernel, not a learned</a:t>
+            </a:r>
+          </a:p>
+          <a:p>
+            <a:r>
+              <a:t>function. b is the thermal Doppler width — kernel bandwidth, varying across</a:t>
+            </a:r>
+          </a:p>
+          <a:p>
+            <a:r>
+              <a:t>the volume because temperature does. 𝒜 is a single learnable amplitude</a:t>
+            </a:r>
+          </a:p>
+          <a:p>
+            <a:r>
+              <a:t>absorbing all global constants.</a:t>
             </a:r>
           </a:p>
           <a:p/>
           <a:p>
             <a:r>
-              <a:t>Cell entries are mean-flux divided by the learned amplitude 𝒜. The</a:t>
-            </a:r>
-          </a:p>
-          <a:p>
-            <a:r>
-              <a:t>mean-flux numbers are the headline; 𝒜 absorbs the global scale.</a:t>
+              <a:t>Crucially, the kernel argument x depends on peculiar velocity — gas motion</a:t>
+            </a:r>
+          </a:p>
+          <a:p>
+            <a:r>
+              <a:t>shifts the absorption frequency along v_obs. This is redshift-space</a:t>
+            </a:r>
+          </a:p>
+          <a:p>
+            <a:r>
+              <a:t>distortion. It enters the convolution kernel itself.</a:t>
             </a:r>
           </a:p>
           <a:p/>
           <a:p>
             <a:r>
-              <a:t>The empty cells are the rest of the 4×4 ablation matrix — sightline</a:t>
-            </a:r>
-          </a:p>
-          <a:p>
-            <a:r>
-              <a:t>densities of 256, 1024, and 16,384. The architecture is identical; the</a:t>
-            </a:r>
-          </a:p>
-          <a:p>
-            <a:r>
-              <a:t>compute is the gate. Tier 4 alone is 792 GPU-hours.</a:t>
+              <a:t>This entire forward pass is autograd-compatible. We added a numerical Taylor</a:t>
+            </a:r>
+          </a:p>
+          <a:p>
+            <a:r>
+              <a:t>branch for the kernel near zero — small detail, but it disarms an attack</a:t>
+            </a:r>
+          </a:p>
+          <a:p>
+            <a:r>
+              <a:t>vector at the line center where the analytic limit has a removable</a:t>
+            </a:r>
+          </a:p>
+          <a:p>
+            <a:r>
+              <a:t>singularity.</a:t>
             </a:r>
           </a:p>
           <a:p/>
           <a:p>
             <a:r>
-              <a:t>Across the matrix, the headline claim we want to demonstrate is the</a:t>
-            </a:r>
-          </a:p>
-          <a:p>
-            <a:r>
-              <a:t>degradation curve — how reconstruction quality drops as sightlines get</a:t>
-            </a:r>
-          </a:p>
-          <a:p>
-            <a:r>
-              <a:t>sparser. That's the CVPR contribution.</a:t>
+              <a:t>Loss. The targets are optical depths. Most of the volume is τ in zero to</a:t>
+            </a:r>
+          </a:p>
+          <a:p>
+            <a:r>
+              <a:t>five. A tiny fraction — damped Lyman-alpha systems — has τ at ten million.</a:t>
+            </a:r>
+          </a:p>
+          <a:p>
+            <a:r>
+              <a:t>Per-pixel MSE collapses onto these.</a:t>
+            </a:r>
+          </a:p>
+          <a:p/>
+          <a:p>
+            <a:r>
+              <a:t>Three coupled fixes:</a:t>
+            </a:r>
+          </a:p>
+          <a:p>
+            <a:r>
+              <a:t>1. Mask out the saturated cores entirely.</a:t>
+            </a:r>
+          </a:p>
+          <a:p>
+            <a:r>
+              <a:t>2. Cap the surviving forest at τ_max equals ten. We did NOT pick this</a:t>
+            </a:r>
+          </a:p>
+          <a:p>
+            <a:r>
+              <a:t>   number. We ran a sensitivity sweep at τ_max in 5, 10, 20 and the</a:t>
+            </a:r>
+          </a:p>
+          <a:p>
+            <a:r>
+              <a:t>   change in downstream flux power was 0.018 percent — two orders of</a:t>
+            </a:r>
+          </a:p>
+          <a:p>
+            <a:r>
+              <a:t>   magnitude under the pass criterion. The figure shows that gate.</a:t>
+            </a:r>
+          </a:p>
+          <a:p>
+            <a:r>
+              <a:t>3. Log1p-transform before MSE. The IGM opacity distribution is</a:t>
+            </a:r>
+          </a:p>
+          <a:p>
+            <a:r>
+              <a:t>   approximately log-normal. Log-space supervision matches the natural</a:t>
+            </a:r>
+          </a:p>
+          <a:p>
+            <a:r>
+              <a:t>   noise model — analogous to log-depth supervision in CV.</a:t>
+            </a:r>
+          </a:p>
+          <a:p/>
+          <a:p>
+            <a:r>
+              <a:t>Each part is physically motivated, not tuned.</a:t>
             </a:r>
           </a:p>
         </p:txBody>
@@ -1246,12 +1310,152 @@
           <a:lstStyle/>
           <a:p>
             <a:r>
-              <a:t>[4:20 – 5:00]</a:t>
+              <a:t>[3:50 – 4:30]</a:t>
             </a:r>
           </a:p>
           <a:p/>
           <a:p>
             <a:r>
+              <a:t>Here's what's done. Four physics variants — same dark matter, different</a:t>
+            </a:r>
+          </a:p>
+          <a:p>
+            <a:r>
+              <a:t>feedback recipes (no feedback, stellar wind only, stellar wind plus AGN,</a:t>
+            </a:r>
+          </a:p>
+          <a:p>
+            <a:r>
+              <a:t>strong AGN). Each gets its own MLP fit.</a:t>
+            </a:r>
+          </a:p>
+          <a:p/>
+          <a:p>
+            <a:r>
+              <a:t>At Tier-1 sparsity — 64 sightlines through the 60 Mpc box — every variant</a:t>
+            </a:r>
+          </a:p>
+          <a:p>
+            <a:r>
+              <a:t>recovers the mean transmitted flux to within 0.66 percent across the four</a:t>
+            </a:r>
+          </a:p>
+          <a:p>
+            <a:r>
+              <a:t>physics: 0.9247 to 0.9308, against the observational anchor 0.877.</a:t>
+            </a:r>
+          </a:p>
+          <a:p/>
+          <a:p>
+            <a:r>
+              <a:t>Cell entries are mean-flux divided by the learned amplitude 𝒜.</a:t>
+            </a:r>
+          </a:p>
+          <a:p/>
+          <a:p>
+            <a:r>
+              <a:t>The empty cells are the rest of the 4×4 ablation matrix — sightline</a:t>
+            </a:r>
+          </a:p>
+          <a:p>
+            <a:r>
+              <a:t>densities of 256, 1024, and 16,384. The architecture is identical; the</a:t>
+            </a:r>
+          </a:p>
+          <a:p>
+            <a:r>
+              <a:t>compute is the gate. Tier 4 alone is 792 GPU-hours.</a:t>
+            </a:r>
+          </a:p>
+          <a:p/>
+          <a:p>
+            <a:r>
+              <a:t>Across the matrix, the headline claim is the *degradation curve* — how</a:t>
+            </a:r>
+          </a:p>
+          <a:p>
+            <a:r>
+              <a:t>reconstruction quality drops as sightlines get sparser. That's the CVPR</a:t>
+            </a:r>
+          </a:p>
+          <a:p>
+            <a:r>
+              <a:t>contribution.</a:t>
+            </a:r>
+          </a:p>
+        </p:txBody>
+      </p:sp>
+      <p:sp>
+        <p:nvSpPr>
+          <p:cNvPr id="4" name="Slide Number Placeholder 3"/>
+          <p:cNvSpPr>
+            <a:spLocks noGrp="1"/>
+          </p:cNvSpPr>
+          <p:nvPr>
+            <p:ph type="sldNum" idx="5" sz="quarter"/>
+          </p:nvPr>
+        </p:nvSpPr>
+        <p:spPr/>
+      </p:sp>
+    </p:spTree>
+  </p:cSld>
+  <p:clrMapOvr>
+    <a:masterClrMapping/>
+  </p:clrMapOvr>
+</p:notes>
+</file>
+
+<file path=ppt/notesSlides/notesSlide7.xml><?xml version="1.0" encoding="utf-8"?>
+<p:notes xmlns:a="http://schemas.openxmlformats.org/drawingml/2006/main" xmlns:p="http://schemas.openxmlformats.org/presentationml/2006/main" xmlns:r="http://schemas.openxmlformats.org/officeDocument/2006/relationships">
+  <p:cSld>
+    <p:spTree>
+      <p:nvGrpSpPr>
+        <p:cNvPr id="1" name=""/>
+        <p:cNvGrpSpPr/>
+        <p:nvPr/>
+      </p:nvGrpSpPr>
+      <p:grpSpPr>
+        <a:xfrm>
+          <a:off x="0" y="0"/>
+          <a:ext cx="0" cy="0"/>
+          <a:chOff x="0" y="0"/>
+          <a:chExt cx="0" cy="0"/>
+        </a:xfrm>
+      </p:grpSpPr>
+      <p:sp>
+        <p:nvSpPr>
+          <p:cNvPr id="2" name="Slide Image Placeholder 1"/>
+          <p:cNvSpPr>
+            <a:spLocks noGrp="1"/>
+          </p:cNvSpPr>
+          <p:nvPr>
+            <p:ph type="sldImg" idx="2"/>
+          </p:nvPr>
+        </p:nvSpPr>
+        <p:spPr/>
+      </p:sp>
+      <p:sp>
+        <p:nvSpPr>
+          <p:cNvPr id="3" name="Notes Placeholder 2"/>
+          <p:cNvSpPr>
+            <a:spLocks noGrp="1"/>
+          </p:cNvSpPr>
+          <p:nvPr>
+            <p:ph type="body" idx="3" sz="quarter"/>
+          </p:nvPr>
+        </p:nvSpPr>
+        <p:spPr/>
+        <p:txBody>
+          <a:bodyPr/>
+          <a:lstStyle/>
+          <a:p>
+            <a:r>
+              <a:t>[4:30 – 5:00]</a:t>
+            </a:r>
+          </a:p>
+          <a:p/>
+          <a:p>
+            <a:r>
               <a:t>What's next. Production sweep across the remaining 12 cells of the ablation</a:t>
             </a:r>
           </a:p>
@@ -1267,12 +1471,7 @@
           </a:p>
           <a:p>
             <a:r>
-              <a:t>density, and Kolmogorov-Smirnov distance on the flux PDF. These are the</a:t>
-            </a:r>
-          </a:p>
-          <a:p>
-            <a:r>
-              <a:t>three gates the methodology is committed to passing.</a:t>
+              <a:t>density, and Kolmogorov-Smirnov distance on the flux PDF.</a:t>
             </a:r>
           </a:p>
           <a:p/>
@@ -4335,7 +4534,7 @@
         </p:nvSpPr>
         <p:spPr>
           <a:xfrm>
-            <a:off x="914400" y="2194560"/>
+            <a:off x="914400" y="2103120"/>
             <a:ext cx="10332720" cy="1097280"/>
           </a:xfrm>
           <a:prstGeom prst="rect">
@@ -4369,7 +4568,7 @@
         </p:nvSpPr>
         <p:spPr>
           <a:xfrm>
-            <a:off x="914400" y="3200400"/>
+            <a:off x="914400" y="3108960"/>
             <a:ext cx="10332720" cy="640080"/>
           </a:xfrm>
           <a:prstGeom prst="rect">
@@ -4385,12 +4584,12 @@
           <a:p>
             <a:pPr algn="ctr"/>
             <a:r>
-              <a:rPr sz="2600">
+              <a:rPr sz="2400">
                 <a:solidFill>
                   <a:srgbClr val="555555"/>
                 </a:solidFill>
               </a:rPr>
-              <a:t>NeRF for 3D reconstruction from 1D absorption spectra</a:t>
+              <a:t>3D reconstruction of intergalactic gas from 1D quasar absorption spectra</a:t>
             </a:r>
           </a:p>
         </p:txBody>
@@ -4424,7 +4623,7 @@
                   <a:srgbClr val="102A43"/>
                 </a:solidFill>
               </a:rPr>
-              <a:t>We took NeRF's continuous-field representation and replaced its</a:t>
+              <a:t>We took NeRF's continuous-field representation and replaced its rendering</a:t>
             </a:r>
             <a:br/>
             <a:r>
@@ -4433,7 +4632,7 @@
                   <a:srgbClr val="102A43"/>
                 </a:solidFill>
               </a:rPr>
-              <a:t>rendering operator with physics. The result reconstructs 3D gas density</a:t>
+              <a:t>operator with physics. The same MLP backbone now reconstructs cosmological</a:t>
             </a:r>
             <a:br/>
             <a:r>
@@ -4442,16 +4641,7 @@
                   <a:srgbClr val="102A43"/>
                 </a:solidFill>
               </a:rPr>
-              <a:t>from 1D spectra — sparse-view 3D reconstruction with a non-photometric</a:t>
-            </a:r>
-            <a:br/>
-            <a:r>
-              <a:rPr sz="1800" i="1">
-                <a:solidFill>
-                  <a:srgbClr val="102A43"/>
-                </a:solidFill>
-              </a:rPr>
-              <a:t>forward model.</a:t>
+              <a:t>gas density from sparse 1D absorption signals.</a:t>
             </a:r>
           </a:p>
         </p:txBody>
@@ -4464,7 +4654,7 @@
         </p:nvSpPr>
         <p:spPr>
           <a:xfrm>
-            <a:off x="457200" y="6400800"/>
+            <a:off x="457200" y="6492240"/>
             <a:ext cx="11247120" cy="274320"/>
           </a:xfrm>
           <a:prstGeom prst="rect">
@@ -4485,7 +4675,7 @@
                   <a:srgbClr val="555555"/>
                 </a:solidFill>
               </a:rPr>
-              <a:t>5-minute talk · slide 1 / 6</a:t>
+              <a:t>5-minute talk · slide 1 / 7</a:t>
             </a:r>
           </a:p>
         </p:txBody>
@@ -4516,8 +4706,8 @@
         </p:nvSpPr>
         <p:spPr>
           <a:xfrm>
-            <a:off x="457200" y="228600"/>
-            <a:ext cx="11247120" cy="731520"/>
+            <a:off x="457200" y="182880"/>
+            <a:ext cx="11247120" cy="640080"/>
           </a:xfrm>
           <a:prstGeom prst="rect">
             <a:avLst/>
@@ -4532,26 +4722,50 @@
           <a:p>
             <a:pPr algn="l"/>
             <a:r>
-              <a:rPr sz="3200" b="1">
+              <a:rPr sz="2800" b="1">
                 <a:solidFill>
                   <a:srgbClr val="102A43"/>
                 </a:solidFill>
               </a:rPr>
-              <a:t>The problem, in CV terms</a:t>
-            </a:r>
-          </a:p>
-        </p:txBody>
-      </p:sp>
-      <p:sp>
-        <p:nvSpPr>
-          <p:cNvPr id="3" name="TextBox 2"/>
+              <a:t>What we are looking at: cosmological gas + quasar spectra</a:t>
+            </a:r>
+          </a:p>
+        </p:txBody>
+      </p:sp>
+      <p:pic>
+        <p:nvPicPr>
+          <p:cNvPr id="3" name="Picture 2" descr="cosmological_setup.png"/>
+          <p:cNvPicPr>
+            <a:picLocks noChangeAspect="1"/>
+          </p:cNvPicPr>
+          <p:nvPr/>
+        </p:nvPicPr>
+        <p:blipFill>
+          <a:blip r:embed="rId2"/>
+          <a:stretch>
+            <a:fillRect/>
+          </a:stretch>
+        </p:blipFill>
+        <p:spPr>
+          <a:xfrm>
+            <a:off x="365760" y="868680"/>
+            <a:ext cx="11430000" cy="6938432"/>
+          </a:xfrm>
+          <a:prstGeom prst="rect">
+            <a:avLst/>
+          </a:prstGeom>
+        </p:spPr>
+      </p:pic>
+      <p:sp>
+        <p:nvSpPr>
+          <p:cNvPr id="4" name="TextBox 3"/>
           <p:cNvSpPr txBox="1"/>
           <p:nvPr/>
         </p:nvSpPr>
         <p:spPr>
           <a:xfrm>
-            <a:off x="548640" y="1371600"/>
-            <a:ext cx="10972800" cy="3200400"/>
+            <a:off x="457200" y="6080760"/>
+            <a:ext cx="11247120" cy="411480"/>
           </a:xfrm>
           <a:prstGeom prst="rect">
             <a:avLst/>
@@ -4564,101 +4778,14 @@
           </a:bodyPr>
           <a:lstStyle/>
           <a:p>
-            <a:pPr/>
-            <a:r>
-              <a:rPr sz="2000">
+            <a:pPr algn="ctr"/>
+            <a:r>
+              <a:rPr sz="1400" b="0" i="1">
                 <a:solidFill>
                   <a:srgbClr val="102A43"/>
                 </a:solidFill>
               </a:rPr>
-              <a:t>•  Volume: 60 Mpc cosmological box (Sherwood simulation, four feedback variants)</a:t>
-            </a:r>
-          </a:p>
-          <a:p>
-            <a:pPr/>
-            <a:r>
-              <a:rPr sz="2000">
-                <a:solidFill>
-                  <a:srgbClr val="102A43"/>
-                </a:solidFill>
-              </a:rPr>
-              <a:t>•  "Cameras": background quasars; "rays": sightlines piercing the gas</a:t>
-            </a:r>
-          </a:p>
-          <a:p>
-            <a:pPr/>
-            <a:r>
-              <a:rPr sz="2000">
-                <a:solidFill>
-                  <a:srgbClr val="102A43"/>
-                </a:solidFill>
-              </a:rPr>
-              <a:t>•  "Image" per ray: a 1D absorption spectrum  — not RGB, not 2D</a:t>
-            </a:r>
-          </a:p>
-          <a:p>
-            <a:pPr/>
-            <a:r>
-              <a:rPr sz="2000">
-                <a:solidFill>
-                  <a:srgbClr val="102A43"/>
-                </a:solidFill>
-              </a:rPr>
-              <a:t>•  Forward model: known, differentiable, nonlinear — Voigt–Hjerting absorption</a:t>
-            </a:r>
-          </a:p>
-          <a:p>
-            <a:pPr/>
-            <a:r>
-              <a:rPr sz="2000">
-                <a:solidFill>
-                  <a:srgbClr val="102A43"/>
-                </a:solidFill>
-              </a:rPr>
-              <a:t>•  Reconstruct 3D fields  ρ, T, X_HI, v_pec  from a few 100 → few 1000 sightlines</a:t>
-            </a:r>
-          </a:p>
-        </p:txBody>
-      </p:sp>
-      <p:sp>
-        <p:nvSpPr>
-          <p:cNvPr id="4" name="TextBox 3"/>
-          <p:cNvSpPr txBox="1"/>
-          <p:nvPr/>
-        </p:nvSpPr>
-        <p:spPr>
-          <a:xfrm>
-            <a:off x="548640" y="4754880"/>
-            <a:ext cx="10972800" cy="1645920"/>
-          </a:xfrm>
-          <a:prstGeom prst="rect">
-            <a:avLst/>
-          </a:prstGeom>
-          <a:noFill/>
-        </p:spPr>
-        <p:txBody>
-          <a:bodyPr wrap="square">
-            <a:spAutoFit/>
-          </a:bodyPr>
-          <a:lstStyle/>
-          <a:p>
-            <a:r>
-              <a:rPr sz="1600" b="1">
-                <a:solidFill>
-                  <a:srgbClr val="C0392B"/>
-                </a:solidFill>
-              </a:rPr>
-              <a:t>CV analogy</a:t>
-            </a:r>
-          </a:p>
-          <a:p>
-            <a:r>
-              <a:rPr sz="1500">
-                <a:solidFill>
-                  <a:srgbClr val="102A43"/>
-                </a:solidFill>
-              </a:rPr>
-              <a:t>Sparse-view inverse rendering, but: (i) the "image" is 1D; (ii) the rendering operator is the Lyman-α optical-depth integral (not Lambertian radiance); (iii) the target distribution is heavy-tailed (τ ≈ 0–5 typical, τ ≈ 10⁷ at saturated absorbers) — naive per-pixel MSE breaks.</a:t>
+              <a:t>Each spectrum is a 1D pencil through a 3D scene  —  thousands of pencils is what we have to reconstruct the volume.</a:t>
             </a:r>
           </a:p>
         </p:txBody>
@@ -4671,7 +4798,7 @@
         </p:nvSpPr>
         <p:spPr>
           <a:xfrm>
-            <a:off x="457200" y="6400800"/>
+            <a:off x="457200" y="6492240"/>
             <a:ext cx="11247120" cy="274320"/>
           </a:xfrm>
           <a:prstGeom prst="rect">
@@ -4692,7 +4819,7 @@
                   <a:srgbClr val="555555"/>
                 </a:solidFill>
               </a:rPr>
-              <a:t>slide 2 / 6</a:t>
+              <a:t>slide 2 / 7  ·  the astrophysical setup</a:t>
             </a:r>
           </a:p>
         </p:txBody>
@@ -4723,8 +4850,8 @@
         </p:nvSpPr>
         <p:spPr>
           <a:xfrm>
-            <a:off x="457200" y="228600"/>
-            <a:ext cx="11247120" cy="731520"/>
+            <a:off x="457200" y="182880"/>
+            <a:ext cx="11247120" cy="640080"/>
           </a:xfrm>
           <a:prstGeom prst="rect">
             <a:avLst/>
@@ -4739,40 +4866,414 @@
           <a:p>
             <a:pPr algn="l"/>
             <a:r>
-              <a:rPr sz="3200" b="1">
+              <a:rPr sz="2800" b="1">
                 <a:solidFill>
                   <a:srgbClr val="102A43"/>
                 </a:solidFill>
               </a:rPr>
-              <a:t>What we kept from NeRF, what we replaced</a:t>
-            </a:r>
-          </a:p>
-        </p:txBody>
-      </p:sp>
-      <p:pic>
-        <p:nvPicPr>
-          <p:cNvPr id="3" name="Picture 2" descr="nerf_vs_igmnerf_arch.png"/>
-          <p:cNvPicPr>
-            <a:picLocks noChangeAspect="1"/>
-          </p:cNvPicPr>
+              <a:t>Why this looks like a NeRF problem</a:t>
+            </a:r>
+          </a:p>
+        </p:txBody>
+      </p:sp>
+      <p:graphicFrame>
+        <p:nvGraphicFramePr>
+          <p:cNvPr id="3" name="Table 2"/>
+          <p:cNvGraphicFramePr>
+            <a:graphicFrameLocks noGrp="1"/>
+          </p:cNvGraphicFramePr>
           <p:nvPr/>
-        </p:nvPicPr>
-        <p:blipFill>
-          <a:blip r:embed="rId2"/>
-          <a:stretch>
-            <a:fillRect/>
-          </a:stretch>
-        </p:blipFill>
-        <p:spPr>
-          <a:xfrm>
-            <a:off x="457200" y="960120"/>
-            <a:ext cx="11247120" cy="8490423"/>
-          </a:xfrm>
-          <a:prstGeom prst="rect">
-            <a:avLst/>
-          </a:prstGeom>
-        </p:spPr>
-      </p:pic>
+        </p:nvGraphicFramePr>
+        <p:xfrm>
+          <a:off x="457200" y="1005840"/>
+          <a:ext cx="11247120" cy="4846320"/>
+        </p:xfrm>
+        <a:graphic>
+          <a:graphicData uri="http://schemas.openxmlformats.org/drawingml/2006/table">
+            <a:tbl>
+              <a:tblPr firstRow="1" bandRow="1">
+                <a:tableStyleId>{5C22544A-7EE6-4342-B048-85BDC9FD1C3A}</a:tableStyleId>
+              </a:tblPr>
+              <a:tblGrid>
+                <a:gridCol w="3108960"/>
+                <a:gridCol w="3291840"/>
+                <a:gridCol w="4846320"/>
+              </a:tblGrid>
+              <a:tr h="692331">
+                <a:tc>
+                  <a:txBody>
+                    <a:bodyPr/>
+                    <a:lstStyle/>
+                    <a:p>
+                      <a:r>
+                        <a:rPr b="1" sz="1500">
+                          <a:solidFill>
+                            <a:srgbClr val="102A43"/>
+                          </a:solidFill>
+                        </a:rPr>
+                        <a:t>NeRF concept</a:t>
+                      </a:r>
+                    </a:p>
+                  </a:txBody>
+                  <a:tcPr/>
+                </a:tc>
+                <a:tc>
+                  <a:txBody>
+                    <a:bodyPr/>
+                    <a:lstStyle/>
+                    <a:p>
+                      <a:r>
+                        <a:rPr b="1" sz="1500">
+                          <a:solidFill>
+                            <a:srgbClr val="102A43"/>
+                          </a:solidFill>
+                        </a:rPr>
+                        <a:t>IGM NeRF analogue</a:t>
+                      </a:r>
+                    </a:p>
+                  </a:txBody>
+                  <a:tcPr/>
+                </a:tc>
+                <a:tc>
+                  <a:txBody>
+                    <a:bodyPr/>
+                    <a:lstStyle/>
+                    <a:p>
+                      <a:r>
+                        <a:rPr b="1" sz="1500">
+                          <a:solidFill>
+                            <a:srgbClr val="102A43"/>
+                          </a:solidFill>
+                        </a:rPr>
+                        <a:t>Why the analogy holds</a:t>
+                      </a:r>
+                    </a:p>
+                  </a:txBody>
+                  <a:tcPr/>
+                </a:tc>
+              </a:tr>
+              <a:tr h="692331">
+                <a:tc>
+                  <a:txBody>
+                    <a:bodyPr/>
+                    <a:lstStyle/>
+                    <a:p>
+                      <a:r>
+                        <a:rPr sz="1100">
+                          <a:solidFill>
+                            <a:srgbClr val="102A43"/>
+                          </a:solidFill>
+                        </a:rPr>
+                        <a:t>3D position  $(x, y, z)$</a:t>
+                      </a:r>
+                    </a:p>
+                  </a:txBody>
+                  <a:tcPr/>
+                </a:tc>
+                <a:tc>
+                  <a:txBody>
+                    <a:bodyPr/>
+                    <a:lstStyle/>
+                    <a:p>
+                      <a:r>
+                        <a:rPr sz="1100" b="1">
+                          <a:solidFill>
+                            <a:srgbClr val="C0392B"/>
+                          </a:solidFill>
+                        </a:rPr>
+                        <a:t>Comoving position in the volume</a:t>
+                      </a:r>
+                    </a:p>
+                  </a:txBody>
+                  <a:tcPr/>
+                </a:tc>
+                <a:tc>
+                  <a:txBody>
+                    <a:bodyPr/>
+                    <a:lstStyle/>
+                    <a:p>
+                      <a:r>
+                        <a:rPr sz="1100">
+                          <a:solidFill>
+                            <a:srgbClr val="102A43"/>
+                          </a:solidFill>
+                        </a:rPr>
+                        <a:t>Both index a 3D scalar/vector field over a bounded scene.</a:t>
+                      </a:r>
+                    </a:p>
+                  </a:txBody>
+                  <a:tcPr/>
+                </a:tc>
+              </a:tr>
+              <a:tr h="692331">
+                <a:tc>
+                  <a:txBody>
+                    <a:bodyPr/>
+                    <a:lstStyle/>
+                    <a:p>
+                      <a:r>
+                        <a:rPr sz="1100">
+                          <a:solidFill>
+                            <a:srgbClr val="102A43"/>
+                          </a:solidFill>
+                        </a:rPr>
+                        <a:t>Positional encoding  γ(x)</a:t>
+                      </a:r>
+                    </a:p>
+                  </a:txBody>
+                  <a:tcPr/>
+                </a:tc>
+                <a:tc>
+                  <a:txBody>
+                    <a:bodyPr/>
+                    <a:lstStyle/>
+                    <a:p>
+                      <a:r>
+                        <a:rPr sz="1100" b="1">
+                          <a:solidFill>
+                            <a:srgbClr val="C0392B"/>
+                          </a:solidFill>
+                        </a:rPr>
+                        <a:t>Fourier features, identical (L = 10)</a:t>
+                      </a:r>
+                    </a:p>
+                  </a:txBody>
+                  <a:tcPr/>
+                </a:tc>
+                <a:tc>
+                  <a:txBody>
+                    <a:bodyPr/>
+                    <a:lstStyle/>
+                    <a:p>
+                      <a:r>
+                        <a:rPr sz="1100">
+                          <a:solidFill>
+                            <a:srgbClr val="102A43"/>
+                          </a:solidFill>
+                        </a:rPr>
+                        <a:t>Cosmic structure is multi-scale: filaments + voids → high-frequency basis.</a:t>
+                      </a:r>
+                    </a:p>
+                  </a:txBody>
+                  <a:tcPr/>
+                </a:tc>
+              </a:tr>
+              <a:tr h="692331">
+                <a:tc>
+                  <a:txBody>
+                    <a:bodyPr/>
+                    <a:lstStyle/>
+                    <a:p>
+                      <a:r>
+                        <a:rPr sz="1100">
+                          <a:solidFill>
+                            <a:srgbClr val="102A43"/>
+                          </a:solidFill>
+                        </a:rPr>
+                        <a:t>Volume density  σ</a:t>
+                      </a:r>
+                    </a:p>
+                  </a:txBody>
+                  <a:tcPr/>
+                </a:tc>
+                <a:tc>
+                  <a:txBody>
+                    <a:bodyPr/>
+                    <a:lstStyle/>
+                    <a:p>
+                      <a:r>
+                        <a:rPr sz="1100" b="1">
+                          <a:solidFill>
+                            <a:srgbClr val="C0392B"/>
+                          </a:solidFill>
+                        </a:rPr>
+                        <a:t>Neutral hydrogen density  n_HI = ρ · X_HI</a:t>
+                      </a:r>
+                    </a:p>
+                  </a:txBody>
+                  <a:tcPr/>
+                </a:tc>
+                <a:tc>
+                  <a:txBody>
+                    <a:bodyPr/>
+                    <a:lstStyle/>
+                    <a:p>
+                      <a:r>
+                        <a:rPr sz="1100">
+                          <a:solidFill>
+                            <a:srgbClr val="102A43"/>
+                          </a:solidFill>
+                        </a:rPr>
+                        <a:t>Both are 'opacity per unit length' along a ray.</a:t>
+                      </a:r>
+                    </a:p>
+                  </a:txBody>
+                  <a:tcPr/>
+                </a:tc>
+              </a:tr>
+              <a:tr h="692331">
+                <a:tc>
+                  <a:txBody>
+                    <a:bodyPr/>
+                    <a:lstStyle/>
+                    <a:p>
+                      <a:r>
+                        <a:rPr sz="1100">
+                          <a:solidFill>
+                            <a:srgbClr val="102A43"/>
+                          </a:solidFill>
+                        </a:rPr>
+                        <a:t>View-dependent color  c(x, d)</a:t>
+                      </a:r>
+                    </a:p>
+                  </a:txBody>
+                  <a:tcPr/>
+                </a:tc>
+                <a:tc>
+                  <a:txBody>
+                    <a:bodyPr/>
+                    <a:lstStyle/>
+                    <a:p>
+                      <a:r>
+                        <a:rPr sz="1100" b="1">
+                          <a:solidFill>
+                            <a:srgbClr val="C0392B"/>
+                          </a:solidFill>
+                        </a:rPr>
+                        <a:t>Voigt absorption kernel  H(a, x) / (b√π)</a:t>
+                      </a:r>
+                    </a:p>
+                  </a:txBody>
+                  <a:tcPr/>
+                </a:tc>
+                <a:tc>
+                  <a:txBody>
+                    <a:bodyPr/>
+                    <a:lstStyle/>
+                    <a:p>
+                      <a:r>
+                        <a:rPr sz="1100">
+                          <a:solidFill>
+                            <a:srgbClr val="102A43"/>
+                          </a:solidFill>
+                        </a:rPr>
+                        <a:t>The 'what gets emitted/absorbed at a sample' function — but ours is a known closed-form, not learned.</a:t>
+                      </a:r>
+                    </a:p>
+                  </a:txBody>
+                  <a:tcPr/>
+                </a:tc>
+              </a:tr>
+              <a:tr h="692331">
+                <a:tc>
+                  <a:txBody>
+                    <a:bodyPr/>
+                    <a:lstStyle/>
+                    <a:p>
+                      <a:r>
+                        <a:rPr sz="1100">
+                          <a:solidFill>
+                            <a:srgbClr val="102A43"/>
+                          </a:solidFill>
+                        </a:rPr>
+                        <a:t>View direction  (θ, φ)</a:t>
+                      </a:r>
+                    </a:p>
+                  </a:txBody>
+                  <a:tcPr/>
+                </a:tc>
+                <a:tc>
+                  <a:txBody>
+                    <a:bodyPr/>
+                    <a:lstStyle/>
+                    <a:p>
+                      <a:r>
+                        <a:rPr sz="1100" b="1">
+                          <a:solidFill>
+                            <a:srgbClr val="C0392B"/>
+                          </a:solidFill>
+                        </a:rPr>
+                        <a:t>Line-of-sight orientation</a:t>
+                      </a:r>
+                    </a:p>
+                  </a:txBody>
+                  <a:tcPr/>
+                </a:tc>
+                <a:tc>
+                  <a:txBody>
+                    <a:bodyPr/>
+                    <a:lstStyle/>
+                    <a:p>
+                      <a:r>
+                        <a:rPr sz="1100">
+                          <a:solidFill>
+                            <a:srgbClr val="102A43"/>
+                          </a:solidFill>
+                        </a:rPr>
+                        <a:t>Sherwood sightlines are pre-aligned along z, so we predict only the LOS-projected v_pec — no view conditioning needed.</a:t>
+                      </a:r>
+                    </a:p>
+                  </a:txBody>
+                  <a:tcPr/>
+                </a:tc>
+              </a:tr>
+              <a:tr h="692334">
+                <a:tc>
+                  <a:txBody>
+                    <a:bodyPr/>
+                    <a:lstStyle/>
+                    <a:p>
+                      <a:r>
+                        <a:rPr sz="1100">
+                          <a:solidFill>
+                            <a:srgbClr val="102A43"/>
+                          </a:solidFill>
+                        </a:rPr>
+                        <a:t>Volume rendering integral</a:t>
+                      </a:r>
+                    </a:p>
+                  </a:txBody>
+                  <a:tcPr/>
+                </a:tc>
+                <a:tc>
+                  <a:txBody>
+                    <a:bodyPr/>
+                    <a:lstStyle/>
+                    <a:p>
+                      <a:r>
+                        <a:rPr sz="1100" b="1">
+                          <a:solidFill>
+                            <a:srgbClr val="C0392B"/>
+                          </a:solidFill>
+                        </a:rPr>
+                        <a:t>Optical depth integral (Voigt + RSD)</a:t>
+                      </a:r>
+                    </a:p>
+                  </a:txBody>
+                  <a:tcPr/>
+                </a:tc>
+                <a:tc>
+                  <a:txBody>
+                    <a:bodyPr/>
+                    <a:lstStyle/>
+                    <a:p>
+                      <a:r>
+                        <a:rPr sz="1100">
+                          <a:solidFill>
+                            <a:srgbClr val="102A43"/>
+                          </a:solidFill>
+                        </a:rPr>
+                        <a:t>Both are line integrals along a camera ray. Ours is convolutional in velocity space.</a:t>
+                      </a:r>
+                    </a:p>
+                  </a:txBody>
+                  <a:tcPr/>
+                </a:tc>
+              </a:tr>
+            </a:tbl>
+          </a:graphicData>
+        </a:graphic>
+      </p:graphicFrame>
       <p:sp>
         <p:nvSpPr>
           <p:cNvPr id="4" name="TextBox 3"/>
@@ -4781,7 +5282,7 @@
         </p:nvSpPr>
         <p:spPr>
           <a:xfrm>
-            <a:off x="457200" y="6400800"/>
+            <a:off x="457200" y="6492240"/>
             <a:ext cx="11247120" cy="274320"/>
           </a:xfrm>
           <a:prstGeom prst="rect">
@@ -4802,7 +5303,7 @@
                   <a:srgbClr val="555555"/>
                 </a:solidFill>
               </a:rPr>
-              <a:t>slide 3 / 6  ·  architecture diagram</a:t>
+              <a:t>slide 3 / 7  ·  the analogy bridge</a:t>
             </a:r>
           </a:p>
         </p:txBody>
@@ -4833,8 +5334,8 @@
         </p:nvSpPr>
         <p:spPr>
           <a:xfrm>
-            <a:off x="457200" y="228600"/>
-            <a:ext cx="11247120" cy="731520"/>
+            <a:off x="457200" y="182880"/>
+            <a:ext cx="11247120" cy="640080"/>
           </a:xfrm>
           <a:prstGeom prst="rect">
             <a:avLst/>
@@ -4849,248 +5350,19 @@
           <a:p>
             <a:pPr algn="l"/>
             <a:r>
-              <a:rPr sz="3200" b="1">
+              <a:rPr sz="2800" b="1">
                 <a:solidFill>
                   <a:srgbClr val="102A43"/>
                 </a:solidFill>
               </a:rPr>
-              <a:t>Differentiable physics rendering + loss design</a:t>
-            </a:r>
-          </a:p>
-        </p:txBody>
-      </p:sp>
-      <p:sp>
-        <p:nvSpPr>
-          <p:cNvPr id="3" name="TextBox 2"/>
-          <p:cNvSpPr txBox="1"/>
-          <p:nvPr/>
-        </p:nvSpPr>
-        <p:spPr>
-          <a:xfrm>
-            <a:off x="548640" y="1188720"/>
-            <a:ext cx="5943600" cy="2103120"/>
-          </a:xfrm>
-          <a:prstGeom prst="rect">
-            <a:avLst/>
-          </a:prstGeom>
-          <a:noFill/>
-        </p:spPr>
-        <p:txBody>
-          <a:bodyPr wrap="square">
-            <a:spAutoFit/>
-          </a:bodyPr>
-          <a:lstStyle/>
-          <a:p>
-            <a:r>
-              <a:rPr sz="1800" b="1">
-                <a:solidFill>
-                  <a:srgbClr val="C0392B"/>
-                </a:solidFill>
-              </a:rPr>
-              <a:t>Optical-depth rendering</a:t>
-            </a:r>
-          </a:p>
-          <a:p>
-            <a:r>
-              <a:rPr sz="2000" b="1">
-                <a:solidFill>
-                  <a:srgbClr val="102A43"/>
-                </a:solidFill>
-              </a:rPr>
-              <a:t>τ(v_obs)  =  𝒜 · Σ_src  n_HI · H(a, x) / (b√π)</a:t>
-            </a:r>
-          </a:p>
-          <a:p/>
-          <a:p>
-            <a:r>
-              <a:rPr sz="1400" i="1">
-                <a:solidFill>
-                  <a:srgbClr val="555555"/>
-                </a:solidFill>
-              </a:rPr>
-              <a:t>CV mapping:</a:t>
-            </a:r>
-          </a:p>
-          <a:p>
-            <a:r>
-              <a:rPr sz="1300">
-                <a:solidFill>
-                  <a:srgbClr val="102A43"/>
-                </a:solidFill>
-              </a:rPr>
-              <a:t>•  n_HI  ↔  σ in NeRF  (local opacity, positive)</a:t>
-            </a:r>
-          </a:p>
-          <a:p>
-            <a:r>
-              <a:rPr sz="1300">
-                <a:solidFill>
-                  <a:srgbClr val="102A43"/>
-                </a:solidFill>
-              </a:rPr>
-              <a:t>•  H(a, x)  ↔  c (radiance)  — but a known closed-form kernel</a:t>
-            </a:r>
-          </a:p>
-          <a:p>
-            <a:r>
-              <a:rPr sz="1300">
-                <a:solidFill>
-                  <a:srgbClr val="102A43"/>
-                </a:solidFill>
-              </a:rPr>
-              <a:t>•  v_obs  ↔  pixel coordinate (here 1D)</a:t>
-            </a:r>
-          </a:p>
-          <a:p>
-            <a:r>
-              <a:rPr sz="1300">
-                <a:solidFill>
-                  <a:srgbClr val="102A43"/>
-                </a:solidFill>
-              </a:rPr>
-              <a:t>•  𝒜  ↔  global brightness scalar  (one learnable parameter)</a:t>
-            </a:r>
-          </a:p>
-          <a:p>
-            <a:r>
-              <a:rPr sz="1300">
-                <a:solidFill>
-                  <a:srgbClr val="102A43"/>
-                </a:solidFill>
-              </a:rPr>
-              <a:t>•  b(T)  =  thermal Doppler width  (kernel bandwidth, T-dependent)</a:t>
-            </a:r>
-          </a:p>
-        </p:txBody>
-      </p:sp>
-      <p:sp>
-        <p:nvSpPr>
-          <p:cNvPr id="4" name="TextBox 3"/>
-          <p:cNvSpPr txBox="1"/>
-          <p:nvPr/>
-        </p:nvSpPr>
-        <p:spPr>
-          <a:xfrm>
-            <a:off x="6583680" y="1188720"/>
-            <a:ext cx="5212080" cy="4937760"/>
-          </a:xfrm>
-          <a:prstGeom prst="rect">
-            <a:avLst/>
-          </a:prstGeom>
-          <a:noFill/>
-        </p:spPr>
-        <p:txBody>
-          <a:bodyPr wrap="square">
-            <a:spAutoFit/>
-          </a:bodyPr>
-          <a:lstStyle/>
-          <a:p>
-            <a:r>
-              <a:rPr sz="1800" b="1">
-                <a:solidFill>
-                  <a:srgbClr val="C0392B"/>
-                </a:solidFill>
-              </a:rPr>
-              <a:t>Loss design (the methods contribution)</a:t>
-            </a:r>
-          </a:p>
-          <a:p/>
-          <a:p>
-            <a:r>
-              <a:rPr sz="1500" b="1">
-                <a:solidFill>
-                  <a:srgbClr val="102A43"/>
-                </a:solidFill>
-              </a:rPr>
-              <a:t>ℒ_data = ⟨ ( log(1 + τ̂_eff)  −  log(1 + τ_eff) )² ⟩_non-DLA</a:t>
-            </a:r>
-          </a:p>
-          <a:p>
-            <a:r>
-              <a:rPr sz="1300" i="1">
-                <a:solidFill>
-                  <a:srgbClr val="555555"/>
-                </a:solidFill>
-              </a:rPr>
-              <a:t>with  τ_eff = min(τ, τ_max=10),  mask out saturated cores</a:t>
-            </a:r>
-          </a:p>
-          <a:p/>
-          <a:p>
-            <a:r>
-              <a:rPr sz="1400" b="1">
-                <a:solidFill>
-                  <a:srgbClr val="102A43"/>
-                </a:solidFill>
-              </a:rPr>
-              <a:t>Three coupled rulings:</a:t>
-            </a:r>
-          </a:p>
-          <a:p>
-            <a:r>
-              <a:rPr sz="1200">
-                <a:solidFill>
-                  <a:srgbClr val="102A43"/>
-                </a:solidFill>
-              </a:rPr>
-              <a:t>(1)  Saturated-absorber mask  (heavy-tail outliers excluded)</a:t>
-            </a:r>
-          </a:p>
-          <a:p>
-            <a:r>
-              <a:rPr sz="1200">
-                <a:solidFill>
-                  <a:srgbClr val="102A43"/>
-                </a:solidFill>
-              </a:rPr>
-              <a:t>(2)  Forest cap τ_max = 10  — calibrated, not chosen</a:t>
-            </a:r>
-          </a:p>
-          <a:p>
-            <a:r>
-              <a:rPr sz="1100">
-                <a:solidFill>
-                  <a:srgbClr val="555555"/>
-                </a:solidFill>
-              </a:rPr>
-              <a:t>        sensitivity sweep:  ΔP_F/P_F  ≤  0.018%</a:t>
-            </a:r>
-          </a:p>
-          <a:p>
-            <a:r>
-              <a:rPr sz="1100">
-                <a:solidFill>
-                  <a:srgbClr val="555555"/>
-                </a:solidFill>
-              </a:rPr>
-              <a:t>        (~100× under the 2% pass criterion)</a:t>
-            </a:r>
-          </a:p>
-          <a:p>
-            <a:r>
-              <a:rPr sz="1200">
-                <a:solidFill>
-                  <a:srgbClr val="102A43"/>
-                </a:solidFill>
-              </a:rPr>
-              <a:t>(3)  log-space supervision  ↔  IGM opacity is log-normal</a:t>
-            </a:r>
-          </a:p>
-          <a:p>
-            <a:r>
-              <a:rPr sz="1100">
-                <a:solidFill>
-                  <a:srgbClr val="555555"/>
-                </a:solidFill>
-              </a:rPr>
-              <a:t>        Bi &amp; Davidsen 1997 / Hui &amp; Gnedin 1997 FGPA</a:t>
+              <a:t>What we kept from NeRF, what we replaced</a:t>
             </a:r>
           </a:p>
         </p:txBody>
       </p:sp>
       <p:pic>
         <p:nvPicPr>
-          <p:cNvPr id="5" name="Picture 4" descr="tau_max_sensitivity.png"/>
+          <p:cNvPr id="3" name="Picture 2" descr="nerf_vs_igmnerf_arch.png"/>
           <p:cNvPicPr>
             <a:picLocks noChangeAspect="1"/>
           </p:cNvPicPr>
@@ -5104,8 +5376,8 @@
         </p:blipFill>
         <p:spPr>
           <a:xfrm>
-            <a:off x="548640" y="3657600"/>
-            <a:ext cx="5943600" cy="4636762"/>
+            <a:off x="274320" y="914400"/>
+            <a:ext cx="11612880" cy="8766534"/>
           </a:xfrm>
           <a:prstGeom prst="rect">
             <a:avLst/>
@@ -5114,13 +5386,13 @@
       </p:pic>
       <p:sp>
         <p:nvSpPr>
-          <p:cNvPr id="6" name="TextBox 5"/>
+          <p:cNvPr id="4" name="TextBox 3"/>
           <p:cNvSpPr txBox="1"/>
           <p:nvPr/>
         </p:nvSpPr>
         <p:spPr>
           <a:xfrm>
-            <a:off x="457200" y="6400800"/>
+            <a:off x="457200" y="6492240"/>
             <a:ext cx="11247120" cy="274320"/>
           </a:xfrm>
           <a:prstGeom prst="rect">
@@ -5141,7 +5413,7 @@
                   <a:srgbClr val="555555"/>
                 </a:solidFill>
               </a:rPr>
-              <a:t>slide 4 / 6  ·  forward model + loss</a:t>
+              <a:t>slide 4 / 7  ·  side-by-side architecture</a:t>
             </a:r>
           </a:p>
         </p:txBody>
@@ -5172,8 +5444,8 @@
         </p:nvSpPr>
         <p:spPr>
           <a:xfrm>
-            <a:off x="457200" y="228600"/>
-            <a:ext cx="11247120" cy="731520"/>
+            <a:off x="457200" y="182880"/>
+            <a:ext cx="11247120" cy="640080"/>
           </a:xfrm>
           <a:prstGeom prst="rect">
             <a:avLst/>
@@ -5188,7 +5460,414 @@
           <a:p>
             <a:pPr algn="l"/>
             <a:r>
-              <a:rPr sz="3200" b="1">
+              <a:rPr sz="2800" b="1">
+                <a:solidFill>
+                  <a:srgbClr val="102A43"/>
+                </a:solidFill>
+              </a:rPr>
+              <a:t>Differentiable physics rendering + loss design</a:t>
+            </a:r>
+          </a:p>
+        </p:txBody>
+      </p:sp>
+      <p:sp>
+        <p:nvSpPr>
+          <p:cNvPr id="3" name="TextBox 2"/>
+          <p:cNvSpPr txBox="1"/>
+          <p:nvPr/>
+        </p:nvSpPr>
+        <p:spPr>
+          <a:xfrm>
+            <a:off x="457200" y="1005840"/>
+            <a:ext cx="5943600" cy="2011680"/>
+          </a:xfrm>
+          <a:prstGeom prst="rect">
+            <a:avLst/>
+          </a:prstGeom>
+          <a:noFill/>
+        </p:spPr>
+        <p:txBody>
+          <a:bodyPr wrap="square">
+            <a:spAutoFit/>
+          </a:bodyPr>
+          <a:lstStyle/>
+          <a:p>
+            <a:r>
+              <a:rPr sz="1800" b="1">
+                <a:solidFill>
+                  <a:srgbClr val="C0392B"/>
+                </a:solidFill>
+              </a:rPr>
+              <a:t>Optical-depth rendering</a:t>
+            </a:r>
+          </a:p>
+          <a:p>
+            <a:r>
+              <a:rPr sz="2000" b="1">
+                <a:solidFill>
+                  <a:srgbClr val="102A43"/>
+                </a:solidFill>
+              </a:rPr>
+              <a:t>τ(v_obs)  =  𝒜 · Σ_src  n_HI · H(a, x) / (b√π)</a:t>
+            </a:r>
+          </a:p>
+          <a:p/>
+          <a:p>
+            <a:r>
+              <a:rPr sz="1300" i="1">
+                <a:solidFill>
+                  <a:srgbClr val="555555"/>
+                </a:solidFill>
+              </a:rPr>
+              <a:t>CV mapping:</a:t>
+            </a:r>
+          </a:p>
+          <a:p>
+            <a:r>
+              <a:rPr sz="1200">
+                <a:solidFill>
+                  <a:srgbClr val="102A43"/>
+                </a:solidFill>
+              </a:rPr>
+              <a:t>•  n_HI  ↔  σ in NeRF  (positive opacity)</a:t>
+            </a:r>
+          </a:p>
+          <a:p>
+            <a:r>
+              <a:rPr sz="1200">
+                <a:solidFill>
+                  <a:srgbClr val="102A43"/>
+                </a:solidFill>
+              </a:rPr>
+              <a:t>•  H(a, x)  ↔  c (radiance) — closed-form kernel</a:t>
+            </a:r>
+          </a:p>
+          <a:p>
+            <a:r>
+              <a:rPr sz="1200">
+                <a:solidFill>
+                  <a:srgbClr val="102A43"/>
+                </a:solidFill>
+              </a:rPr>
+              <a:t>•  v_obs  ↔  pixel coordinate (1D here)</a:t>
+            </a:r>
+          </a:p>
+          <a:p>
+            <a:r>
+              <a:rPr sz="1200">
+                <a:solidFill>
+                  <a:srgbClr val="102A43"/>
+                </a:solidFill>
+              </a:rPr>
+              <a:t>•  𝒜  ↔  global brightness scalar (one learnable)</a:t>
+            </a:r>
+          </a:p>
+          <a:p>
+            <a:r>
+              <a:rPr sz="1200">
+                <a:solidFill>
+                  <a:srgbClr val="102A43"/>
+                </a:solidFill>
+              </a:rPr>
+              <a:t>•  b(T)  =  thermal Doppler width  =  kernel bandwidth, T-dependent</a:t>
+            </a:r>
+          </a:p>
+          <a:p>
+            <a:r>
+              <a:rPr sz="1200">
+                <a:solidFill>
+                  <a:srgbClr val="102A43"/>
+                </a:solidFill>
+              </a:rPr>
+              <a:t>•  x  =  (v_obs − v_src − v_pec) / b   →  RSD enters via v_pec</a:t>
+            </a:r>
+          </a:p>
+        </p:txBody>
+      </p:sp>
+      <p:sp>
+        <p:nvSpPr>
+          <p:cNvPr id="4" name="TextBox 3"/>
+          <p:cNvSpPr txBox="1"/>
+          <p:nvPr/>
+        </p:nvSpPr>
+        <p:spPr>
+          <a:xfrm>
+            <a:off x="6492240" y="1005840"/>
+            <a:ext cx="5303520" cy="2286000"/>
+          </a:xfrm>
+          <a:prstGeom prst="rect">
+            <a:avLst/>
+          </a:prstGeom>
+          <a:noFill/>
+        </p:spPr>
+        <p:txBody>
+          <a:bodyPr wrap="square">
+            <a:spAutoFit/>
+          </a:bodyPr>
+          <a:lstStyle/>
+          <a:p>
+            <a:r>
+              <a:rPr sz="1800" b="1">
+                <a:solidFill>
+                  <a:srgbClr val="C0392B"/>
+                </a:solidFill>
+              </a:rPr>
+              <a:t>Loss design (the methods contribution)</a:t>
+            </a:r>
+          </a:p>
+          <a:p/>
+          <a:p>
+            <a:r>
+              <a:rPr sz="1500" b="1">
+                <a:solidFill>
+                  <a:srgbClr val="102A43"/>
+                </a:solidFill>
+              </a:rPr>
+              <a:t>ℒ = ⟨ ( log(1+τ̂_eff) − log(1+τ_eff) )² ⟩_non-DLA</a:t>
+            </a:r>
+          </a:p>
+          <a:p>
+            <a:r>
+              <a:rPr sz="1200" i="1">
+                <a:solidFill>
+                  <a:srgbClr val="555555"/>
+                </a:solidFill>
+              </a:rPr>
+              <a:t>with  τ_eff = min(τ, τ_max=10)   +   saturated-absorber mask</a:t>
+            </a:r>
+          </a:p>
+          <a:p/>
+          <a:p>
+            <a:r>
+              <a:rPr sz="1300" b="1">
+                <a:solidFill>
+                  <a:srgbClr val="102A43"/>
+                </a:solidFill>
+              </a:rPr>
+              <a:t>Three coupled rulings:</a:t>
+            </a:r>
+          </a:p>
+          <a:p>
+            <a:r>
+              <a:rPr sz="1100">
+                <a:solidFill>
+                  <a:srgbClr val="102A43"/>
+                </a:solidFill>
+              </a:rPr>
+              <a:t>(1)  Mask saturated cores (τ ≈ 10⁷ outliers)</a:t>
+            </a:r>
+          </a:p>
+          <a:p>
+            <a:r>
+              <a:rPr sz="1100">
+                <a:solidFill>
+                  <a:srgbClr val="102A43"/>
+                </a:solidFill>
+              </a:rPr>
+              <a:t>(2)  Cap forest at τ_max = 10 — calibrated, not chosen</a:t>
+            </a:r>
+          </a:p>
+          <a:p>
+            <a:r>
+              <a:rPr sz="1100">
+                <a:solidFill>
+                  <a:srgbClr val="555555"/>
+                </a:solidFill>
+              </a:rPr>
+              <a:t>      sensitivity:  max |ΔP_F/P_F|  ≤  0.018 %</a:t>
+            </a:r>
+          </a:p>
+          <a:p>
+            <a:r>
+              <a:rPr sz="1100">
+                <a:solidFill>
+                  <a:srgbClr val="555555"/>
+                </a:solidFill>
+              </a:rPr>
+              <a:t>      (~100× under the 2 % pass criterion)</a:t>
+            </a:r>
+          </a:p>
+          <a:p>
+            <a:r>
+              <a:rPr sz="1100">
+                <a:solidFill>
+                  <a:srgbClr val="102A43"/>
+                </a:solidFill>
+              </a:rPr>
+              <a:t>(3)  log-space supervision  ↔  IGM opacity is log-normal</a:t>
+            </a:r>
+          </a:p>
+        </p:txBody>
+      </p:sp>
+      <p:pic>
+        <p:nvPicPr>
+          <p:cNvPr id="5" name="Picture 4" descr="tau_max_sensitivity.png"/>
+          <p:cNvPicPr>
+            <a:picLocks noChangeAspect="1"/>
+          </p:cNvPicPr>
+          <p:nvPr/>
+        </p:nvPicPr>
+        <p:blipFill>
+          <a:blip r:embed="rId2"/>
+          <a:stretch>
+            <a:fillRect/>
+          </a:stretch>
+        </p:blipFill>
+        <p:spPr>
+          <a:xfrm>
+            <a:off x="457200" y="3383280"/>
+            <a:ext cx="5943600" cy="4636762"/>
+          </a:xfrm>
+          <a:prstGeom prst="rect">
+            <a:avLst/>
+          </a:prstGeom>
+        </p:spPr>
+      </p:pic>
+      <p:sp>
+        <p:nvSpPr>
+          <p:cNvPr id="6" name="TextBox 5"/>
+          <p:cNvSpPr txBox="1"/>
+          <p:nvPr/>
+        </p:nvSpPr>
+        <p:spPr>
+          <a:xfrm>
+            <a:off x="6492240" y="3383280"/>
+            <a:ext cx="5303520" cy="1828800"/>
+          </a:xfrm>
+          <a:prstGeom prst="rect">
+            <a:avLst/>
+          </a:prstGeom>
+          <a:noFill/>
+        </p:spPr>
+        <p:txBody>
+          <a:bodyPr wrap="square">
+            <a:spAutoFit/>
+          </a:bodyPr>
+          <a:lstStyle/>
+          <a:p>
+            <a:pPr algn="l"/>
+            <a:r>
+              <a:rPr sz="1100" b="0" i="1">
+                <a:solidFill>
+                  <a:srgbClr val="102A43"/>
+                </a:solidFill>
+              </a:rPr>
+              <a:t>Why log1p?  The IGM opacity distribution is approximately log-normal (Fluctuating Gunn-Peterson Approximation; Bi &amp; Davidsen 1997). Log-space supervision matches the natural noise model — analogous to log-depth supervision in CV.</a:t>
+            </a:r>
+          </a:p>
+        </p:txBody>
+      </p:sp>
+      <p:sp>
+        <p:nvSpPr>
+          <p:cNvPr id="7" name="TextBox 6"/>
+          <p:cNvSpPr txBox="1"/>
+          <p:nvPr/>
+        </p:nvSpPr>
+        <p:spPr>
+          <a:xfrm>
+            <a:off x="457200" y="5989320"/>
+            <a:ext cx="5943600" cy="365760"/>
+          </a:xfrm>
+          <a:prstGeom prst="rect">
+            <a:avLst/>
+          </a:prstGeom>
+          <a:noFill/>
+        </p:spPr>
+        <p:txBody>
+          <a:bodyPr wrap="square">
+            <a:spAutoFit/>
+          </a:bodyPr>
+          <a:lstStyle/>
+          <a:p>
+            <a:pPr algn="ctr"/>
+            <a:r>
+              <a:rPr sz="1000" b="0" i="1">
+                <a:solidFill>
+                  <a:srgbClr val="555555"/>
+                </a:solidFill>
+              </a:rPr>
+              <a:t>τ_max sensitivity gate — change in 1D flux power across τ_max ∈ {5,10,20}</a:t>
+            </a:r>
+          </a:p>
+        </p:txBody>
+      </p:sp>
+      <p:sp>
+        <p:nvSpPr>
+          <p:cNvPr id="8" name="TextBox 7"/>
+          <p:cNvSpPr txBox="1"/>
+          <p:nvPr/>
+        </p:nvSpPr>
+        <p:spPr>
+          <a:xfrm>
+            <a:off x="457200" y="6492240"/>
+            <a:ext cx="11247120" cy="274320"/>
+          </a:xfrm>
+          <a:prstGeom prst="rect">
+            <a:avLst/>
+          </a:prstGeom>
+          <a:noFill/>
+        </p:spPr>
+        <p:txBody>
+          <a:bodyPr wrap="none">
+            <a:spAutoFit/>
+          </a:bodyPr>
+          <a:lstStyle/>
+          <a:p>
+            <a:pPr algn="r"/>
+            <a:r>
+              <a:rPr sz="1000" i="1">
+                <a:solidFill>
+                  <a:srgbClr val="555555"/>
+                </a:solidFill>
+              </a:rPr>
+              <a:t>slide 5 / 7  ·  forward model + loss</a:t>
+            </a:r>
+          </a:p>
+        </p:txBody>
+      </p:sp>
+    </p:spTree>
+  </p:cSld>
+  <p:clrMapOvr>
+    <a:masterClrMapping/>
+  </p:clrMapOvr>
+</p:sld>
+</file>
+
+<file path=ppt/slides/slide6.xml><?xml version="1.0" encoding="utf-8"?>
+<p:sld xmlns:a="http://schemas.openxmlformats.org/drawingml/2006/main" xmlns:p="http://schemas.openxmlformats.org/presentationml/2006/main" xmlns:r="http://schemas.openxmlformats.org/officeDocument/2006/relationships">
+  <p:cSld>
+    <p:spTree>
+      <p:nvGrpSpPr>
+        <p:cNvPr id="1" name=""/>
+        <p:cNvGrpSpPr/>
+        <p:nvPr/>
+      </p:nvGrpSpPr>
+      <p:grpSpPr/>
+      <p:sp>
+        <p:nvSpPr>
+          <p:cNvPr id="2" name="TextBox 1"/>
+          <p:cNvSpPr txBox="1"/>
+          <p:nvPr/>
+        </p:nvSpPr>
+        <p:spPr>
+          <a:xfrm>
+            <a:off x="457200" y="182880"/>
+            <a:ext cx="11247120" cy="640080"/>
+          </a:xfrm>
+          <a:prstGeom prst="rect">
+            <a:avLst/>
+          </a:prstGeom>
+          <a:noFill/>
+        </p:spPr>
+        <p:txBody>
+          <a:bodyPr wrap="square">
+            <a:spAutoFit/>
+          </a:bodyPr>
+          <a:lstStyle/>
+          <a:p>
+            <a:pPr algn="l"/>
+            <a:r>
+              <a:rPr sz="2800" b="1">
                 <a:solidFill>
                   <a:srgbClr val="102A43"/>
                 </a:solidFill>
@@ -5207,8 +5886,8 @@
           <p:nvPr/>
         </p:nvGraphicFramePr>
         <p:xfrm>
-          <a:off x="548640" y="1280160"/>
-          <a:ext cx="7315200" cy="2560320"/>
+          <a:off x="457200" y="1097280"/>
+          <a:ext cx="7315200" cy="2377440"/>
         </p:xfrm>
         <a:graphic>
           <a:graphicData uri="http://schemas.openxmlformats.org/drawingml/2006/table">
@@ -5223,7 +5902,7 @@
                 <a:gridCol w="1463040"/>
                 <a:gridCol w="1463040"/>
               </a:tblGrid>
-              <a:tr h="512064">
+              <a:tr h="475488">
                 <a:tc>
                   <a:txBody>
                     <a:bodyPr/>
@@ -5310,7 +5989,7 @@
                   <a:tcPr/>
                 </a:tc>
               </a:tr>
-              <a:tr h="512064">
+              <a:tr h="475488">
                 <a:tc>
                   <a:txBody>
                     <a:bodyPr/>
@@ -5397,7 +6076,7 @@
                   <a:tcPr/>
                 </a:tc>
               </a:tr>
-              <a:tr h="512064">
+              <a:tr h="475488">
                 <a:tc>
                   <a:txBody>
                     <a:bodyPr/>
@@ -5484,7 +6163,7 @@
                   <a:tcPr/>
                 </a:tc>
               </a:tr>
-              <a:tr h="512064">
+              <a:tr h="475488">
                 <a:tc>
                   <a:txBody>
                     <a:bodyPr/>
@@ -5571,7 +6250,7 @@
                   <a:tcPr/>
                 </a:tc>
               </a:tr>
-              <a:tr h="512064">
+              <a:tr h="475488">
                 <a:tc>
                   <a:txBody>
                     <a:bodyPr/>
@@ -5670,8 +6349,8 @@
         </p:nvSpPr>
         <p:spPr>
           <a:xfrm>
-            <a:off x="548640" y="4023360"/>
-            <a:ext cx="7315200" cy="2286000"/>
+            <a:off x="457200" y="3657600"/>
+            <a:ext cx="7315200" cy="365760"/>
           </a:xfrm>
           <a:prstGeom prst="rect">
             <a:avLst/>
@@ -5684,44 +6363,14 @@
           </a:bodyPr>
           <a:lstStyle/>
           <a:p>
-            <a:r>
-              <a:rPr sz="1300" i="1">
+            <a:pPr algn="l"/>
+            <a:r>
+              <a:rPr sz="1200" b="0" i="1">
                 <a:solidFill>
                   <a:srgbClr val="555555"/>
                 </a:solidFill>
               </a:rPr>
-              <a:t>Cell:  ⟨F⟩_pred / 𝒜  at the production schedule  (50,000 steps each)</a:t>
-            </a:r>
-          </a:p>
-          <a:p/>
-          <a:p>
-            <a:r>
-              <a:rPr sz="1500" b="1">
-                <a:solidFill>
-                  <a:srgbClr val="102A43"/>
-                </a:solidFill>
-              </a:rPr>
-              <a:t>Mean-flux spread across four physics:  0.9247 → 0.9308   (0.66 %)</a:t>
-            </a:r>
-          </a:p>
-          <a:p>
-            <a:r>
-              <a:rPr sz="1300">
-                <a:solidFill>
-                  <a:srgbClr val="555555"/>
-                </a:solidFill>
-              </a:rPr>
-              <a:t>Well within the 5 % calibration tolerance vs the observational anchor</a:t>
-            </a:r>
-          </a:p>
-          <a:p>
-            <a:r>
-              <a:rPr sz="1300" i="1">
-                <a:solidFill>
-                  <a:srgbClr val="555555"/>
-                </a:solidFill>
-              </a:rPr>
-              <a:t>(Danforth+ 2016,  ⟨F⟩_obs  =  0.877  ±  15 %  at  z = 0.3)</a:t>
+              <a:t>Cell:  ⟨F⟩_pred / 𝒜  at the production schedule  (50,000 steps each).</a:t>
             </a:r>
           </a:p>
         </p:txBody>
@@ -5734,8 +6383,8 @@
         </p:nvSpPr>
         <p:spPr>
           <a:xfrm>
-            <a:off x="8138160" y="1280160"/>
-            <a:ext cx="3657600" cy="5029200"/>
+            <a:off x="457200" y="4114800"/>
+            <a:ext cx="7315200" cy="457200"/>
           </a:xfrm>
           <a:prstGeom prst="rect">
             <a:avLst/>
@@ -5748,85 +6397,14 @@
           </a:bodyPr>
           <a:lstStyle/>
           <a:p>
-            <a:r>
-              <a:rPr sz="1800" b="1">
-                <a:solidFill>
-                  <a:srgbClr val="C0392B"/>
+            <a:pPr algn="l"/>
+            <a:r>
+              <a:rPr sz="1500" b="1" i="0">
+                <a:solidFill>
+                  <a:srgbClr val="102A43"/>
                 </a:solidFill>
               </a:rPr>
-              <a:t>What this shows</a:t>
-            </a:r>
-          </a:p>
-          <a:p>
-            <a:r>
-              <a:rPr sz="1300">
-                <a:solidFill>
-                  <a:srgbClr val="102A43"/>
-                </a:solidFill>
-              </a:rPr>
-              <a:t>Same architecture</a:t>
-            </a:r>
-          </a:p>
-          <a:p>
-            <a:r>
-              <a:rPr sz="1300">
-                <a:solidFill>
-                  <a:srgbClr val="102A43"/>
-                </a:solidFill>
-              </a:rPr>
-              <a:t>Same loss</a:t>
-            </a:r>
-          </a:p>
-          <a:p>
-            <a:r>
-              <a:rPr sz="1300">
-                <a:solidFill>
-                  <a:srgbClr val="102A43"/>
-                </a:solidFill>
-              </a:rPr>
-              <a:t>Same hyperparameters</a:t>
-            </a:r>
-          </a:p>
-          <a:p/>
-          <a:p>
-            <a:r>
-              <a:rPr sz="1300">
-                <a:solidFill>
-                  <a:srgbClr val="102A43"/>
-                </a:solidFill>
-              </a:rPr>
-              <a:t>Four different physics priors</a:t>
-            </a:r>
-          </a:p>
-          <a:p>
-            <a:r>
-              <a:rPr sz="1300">
-                <a:solidFill>
-                  <a:srgbClr val="102A43"/>
-                </a:solidFill>
-              </a:rPr>
-              <a:t>Four consistent reconstructions</a:t>
-            </a:r>
-          </a:p>
-          <a:p>
-            <a:r>
-              <a:rPr sz="1300" b="1">
-                <a:solidFill>
-                  <a:srgbClr val="102A43"/>
-                </a:solidFill>
-              </a:rPr>
-              <a:t>Calibration constraint holds across all four</a:t>
-            </a:r>
-          </a:p>
-          <a:p/>
-          <a:p>
-            <a:r>
-              <a:rPr sz="1300">
-                <a:solidFill>
-                  <a:srgbClr val="102A43"/>
-                </a:solidFill>
-              </a:rPr>
-              <a:t>T2 / T3 / T4: identical methodology, paused on compute quota</a:t>
+              <a:t>Mean-flux spread across four physics:  0.9247 → 0.9308   (0.66 %)</a:t>
             </a:r>
           </a:p>
         </p:txBody>
@@ -5839,7 +6417,146 @@
         </p:nvSpPr>
         <p:spPr>
           <a:xfrm>
-            <a:off x="457200" y="6400800"/>
+            <a:off x="457200" y="4617720"/>
+            <a:ext cx="7315200" cy="640080"/>
+          </a:xfrm>
+          <a:prstGeom prst="rect">
+            <a:avLst/>
+          </a:prstGeom>
+          <a:noFill/>
+        </p:spPr>
+        <p:txBody>
+          <a:bodyPr wrap="square">
+            <a:spAutoFit/>
+          </a:bodyPr>
+          <a:lstStyle/>
+          <a:p>
+            <a:pPr algn="l"/>
+            <a:r>
+              <a:rPr sz="1200" b="0" i="0">
+                <a:solidFill>
+                  <a:srgbClr val="555555"/>
+                </a:solidFill>
+              </a:rPr>
+              <a:t>Well within the 5 % calibration tolerance vs the observational anchor (Danforth+ 2016, ⟨F⟩_obs = 0.877 ± 15 % at z = 0.3).</a:t>
+            </a:r>
+          </a:p>
+        </p:txBody>
+      </p:sp>
+      <p:sp>
+        <p:nvSpPr>
+          <p:cNvPr id="7" name="TextBox 6"/>
+          <p:cNvSpPr txBox="1"/>
+          <p:nvPr/>
+        </p:nvSpPr>
+        <p:spPr>
+          <a:xfrm>
+            <a:off x="8046720" y="1097280"/>
+            <a:ext cx="3840480" cy="5029200"/>
+          </a:xfrm>
+          <a:prstGeom prst="rect">
+            <a:avLst/>
+          </a:prstGeom>
+          <a:noFill/>
+        </p:spPr>
+        <p:txBody>
+          <a:bodyPr wrap="square">
+            <a:spAutoFit/>
+          </a:bodyPr>
+          <a:lstStyle/>
+          <a:p>
+            <a:r>
+              <a:rPr sz="1800" b="1">
+                <a:solidFill>
+                  <a:srgbClr val="C0392B"/>
+                </a:solidFill>
+              </a:rPr>
+              <a:t>What this shows</a:t>
+            </a:r>
+          </a:p>
+          <a:p>
+            <a:r>
+              <a:rPr sz="1300">
+                <a:solidFill>
+                  <a:srgbClr val="102A43"/>
+                </a:solidFill>
+              </a:rPr>
+              <a:t>Same architecture</a:t>
+            </a:r>
+          </a:p>
+          <a:p>
+            <a:r>
+              <a:rPr sz="1300">
+                <a:solidFill>
+                  <a:srgbClr val="102A43"/>
+                </a:solidFill>
+              </a:rPr>
+              <a:t>Same loss</a:t>
+            </a:r>
+          </a:p>
+          <a:p>
+            <a:r>
+              <a:rPr sz="1300">
+                <a:solidFill>
+                  <a:srgbClr val="102A43"/>
+                </a:solidFill>
+              </a:rPr>
+              <a:t>Same hyperparameters</a:t>
+            </a:r>
+          </a:p>
+          <a:p/>
+          <a:p>
+            <a:r>
+              <a:rPr sz="1300">
+                <a:solidFill>
+                  <a:srgbClr val="102A43"/>
+                </a:solidFill>
+              </a:rPr>
+              <a:t>Four different physics priors</a:t>
+            </a:r>
+          </a:p>
+          <a:p>
+            <a:r>
+              <a:rPr sz="1300">
+                <a:solidFill>
+                  <a:srgbClr val="102A43"/>
+                </a:solidFill>
+              </a:rPr>
+              <a:t>Four consistent reconstructions</a:t>
+            </a:r>
+          </a:p>
+          <a:p>
+            <a:r>
+              <a:rPr sz="1300" b="1">
+                <a:solidFill>
+                  <a:srgbClr val="102A43"/>
+                </a:solidFill>
+              </a:rPr>
+              <a:t>Calibration constraint holds across all four</a:t>
+            </a:r>
+          </a:p>
+          <a:p/>
+          <a:p>
+            <a:r>
+              <a:rPr sz="1300">
+                <a:solidFill>
+                  <a:srgbClr val="102A43"/>
+                </a:solidFill>
+              </a:rPr>
+              <a:t>T2 / T3 / T4: identical methodology, paused on compute quota</a:t>
+            </a:r>
+          </a:p>
+        </p:txBody>
+      </p:sp>
+      <p:sp>
+        <p:nvSpPr>
+          <p:cNvPr id="8" name="TextBox 7"/>
+          <p:cNvSpPr txBox="1"/>
+          <p:nvPr/>
+        </p:nvSpPr>
+        <p:spPr>
+          <a:xfrm>
+            <a:off x="457200" y="6492240"/>
             <a:ext cx="11247120" cy="274320"/>
           </a:xfrm>
           <a:prstGeom prst="rect">
@@ -5860,7 +6577,7 @@
                   <a:srgbClr val="555555"/>
                 </a:solidFill>
               </a:rPr>
-              <a:t>slide 5 / 6  ·  Tier-1 ablation matrix  (n_rays = 64)</a:t>
+              <a:t>slide 6 / 7  ·  Tier-1 ablation matrix  (n_rays = 64)</a:t>
             </a:r>
           </a:p>
         </p:txBody>
@@ -5873,7 +6590,7 @@
 </p:sld>
 </file>
 
-<file path=ppt/slides/slide6.xml><?xml version="1.0" encoding="utf-8"?>
+<file path=ppt/slides/slide7.xml><?xml version="1.0" encoding="utf-8"?>
 <p:sld xmlns:a="http://schemas.openxmlformats.org/drawingml/2006/main" xmlns:p="http://schemas.openxmlformats.org/presentationml/2006/main" xmlns:r="http://schemas.openxmlformats.org/officeDocument/2006/relationships">
   <p:cSld>
     <p:spTree>
@@ -5891,8 +6608,8 @@
         </p:nvSpPr>
         <p:spPr>
           <a:xfrm>
-            <a:off x="457200" y="228600"/>
-            <a:ext cx="11247120" cy="731520"/>
+            <a:off x="457200" y="182880"/>
+            <a:ext cx="11247120" cy="640080"/>
           </a:xfrm>
           <a:prstGeom prst="rect">
             <a:avLst/>
@@ -5907,7 +6624,7 @@
           <a:p>
             <a:pPr algn="l"/>
             <a:r>
-              <a:rPr sz="3200" b="1">
+              <a:rPr sz="2800" b="1">
                 <a:solidFill>
                   <a:srgbClr val="102A43"/>
                 </a:solidFill>
@@ -5925,8 +6642,8 @@
         </p:nvSpPr>
         <p:spPr>
           <a:xfrm>
-            <a:off x="548640" y="1188720"/>
-            <a:ext cx="5486400" cy="5029200"/>
+            <a:off x="457200" y="1097280"/>
+            <a:ext cx="5486400" cy="4572000"/>
           </a:xfrm>
           <a:prstGeom prst="rect">
             <a:avLst/>
@@ -5955,7 +6672,7 @@
                   <a:srgbClr val="102A43"/>
                 </a:solidFill>
               </a:rPr>
-              <a:t>•  12 cells remain  (Tiers 2–4 × 4 physics)</a:t>
+              <a:t>•  12 cells remain  (Tiers 2-4 × 4 physics)</a:t>
             </a:r>
           </a:p>
           <a:p>
@@ -5975,7 +6692,7 @@
                   <a:srgbClr val="102A43"/>
                 </a:solidFill>
               </a:rPr>
-              <a:t>•  ~792 GPU-hr in Tier 4 alone  (96.5%)</a:t>
+              <a:t>•  ~792 GPU-hr in Tier 4 alone  (96.5 %)</a:t>
             </a:r>
           </a:p>
           <a:p>
@@ -5995,7 +6712,7 @@
                   <a:srgbClr val="102A43"/>
                 </a:solidFill>
               </a:rPr>
-              <a:t>•  ≥12 GB VRAM, Ampere or newer</a:t>
+              <a:t>•  ≥ 12 GB VRAM, Ampere or newer</a:t>
             </a:r>
           </a:p>
           <a:p>
@@ -6018,8 +6735,8 @@
         </p:nvSpPr>
         <p:spPr>
           <a:xfrm>
-            <a:off x="6309360" y="1188720"/>
-            <a:ext cx="5486400" cy="5029200"/>
+            <a:off x="6217920" y="1097280"/>
+            <a:ext cx="5577840" cy="4572000"/>
           </a:xfrm>
           <a:prstGeom prst="rect">
             <a:avLst/>
@@ -6102,8 +6819,8 @@
         </p:nvSpPr>
         <p:spPr>
           <a:xfrm>
-            <a:off x="548640" y="5486400"/>
-            <a:ext cx="11064240" cy="1097280"/>
+            <a:off x="457200" y="5486400"/>
+            <a:ext cx="11247120" cy="914400"/>
           </a:xfrm>
           <a:prstGeom prst="rect">
             <a:avLst/>
@@ -6136,7 +6853,7 @@
         </p:nvSpPr>
         <p:spPr>
           <a:xfrm>
-            <a:off x="457200" y="6400800"/>
+            <a:off x="457200" y="6492240"/>
             <a:ext cx="11247120" cy="274320"/>
           </a:xfrm>
           <a:prstGeom prst="rect">
@@ -6157,7 +6874,7 @@
                   <a:srgbClr val="555555"/>
                 </a:solidFill>
               </a:rPr>
-              <a:t>slide 6 / 6  ·  thank you</a:t>
+              <a:t>slide 7 / 7  ·  thank you</a:t>
             </a:r>
           </a:p>
         </p:txBody>

--- a/experiments/nerf/talk/defense_talk_5min.pptx
+++ b/experiments/nerf/talk/defense_talk_5min.pptx
@@ -709,17 +709,17 @@
           <a:p/>
           <a:p>
             <a:r>
-              <a:t>Surveys like DESI will give us millions of these spectra. Each one is a 1D</a:t>
-            </a:r>
-          </a:p>
-          <a:p>
-            <a:r>
-              <a:t>pencil through 3D structure. The reconstruction question is: how do we</a:t>
-            </a:r>
-          </a:p>
-          <a:p>
-            <a:r>
-              <a:t>recover the 3D fields from these pencils?</a:t>
+              <a:t>Surveys like DESI will give us millions of these spectra — one ray, one</a:t>
+            </a:r>
+          </a:p>
+          <a:p>
+            <a:r>
+              <a:t>spectrum. The reconstruction question is: how do we recover the 3D fields</a:t>
+            </a:r>
+          </a:p>
+          <a:p>
+            <a:r>
+              <a:t>from a few hundred to a few thousand of these rays?</a:t>
             </a:r>
           </a:p>
         </p:txBody>
@@ -4785,7 +4785,7 @@
                   <a:srgbClr val="102A43"/>
                 </a:solidFill>
               </a:rPr>
-              <a:t>Each spectrum is a 1D pencil through a 3D scene  —  thousands of pencils is what we have to reconstruct the volume.</a:t>
+              <a:t>Each sightline gives us one absorption spectrum  —  thousands of rays is what we have to reconstruct the volume.</a:t>
             </a:r>
           </a:p>
         </p:txBody>

--- a/experiments/nerf/talk/defense_talk_5min.pptx
+++ b/experiments/nerf/talk/defense_talk_5min.pptx
@@ -4,16 +4,19 @@
   <p:sldMasterIdLst>
     <p:sldMasterId id="2147483648" r:id="rId1"/>
   </p:sldMasterIdLst>
+  <p:notesMasterIdLst>
+    <p:notesMasterId r:id="rId9"/>
+  </p:notesMasterIdLst>
   <p:sldIdLst>
-    <p:sldId id="256" r:id="rId7"/>
-    <p:sldId id="257" r:id="rId9"/>
-    <p:sldId id="258" r:id="rId10"/>
-    <p:sldId id="259" r:id="rId11"/>
-    <p:sldId id="260" r:id="rId12"/>
-    <p:sldId id="261" r:id="rId13"/>
-    <p:sldId id="262" r:id="rId14"/>
+    <p:sldId id="256" r:id="rId2"/>
+    <p:sldId id="257" r:id="rId3"/>
+    <p:sldId id="258" r:id="rId4"/>
+    <p:sldId id="259" r:id="rId5"/>
+    <p:sldId id="260" r:id="rId6"/>
+    <p:sldId id="261" r:id="rId7"/>
+    <p:sldId id="262" r:id="rId8"/>
   </p:sldIdLst>
-  <p:sldSz cx="12191695" cy="6858000" type="screen4x3"/>
+  <p:sldSz cx="12192000" cy="6858000"/>
   <p:notesSz cx="6858000" cy="9144000"/>
   <p:defaultTextStyle>
     <a:defPPr>
@@ -110,11 +113,27 @@
       </a:defRPr>
     </a:lvl9pPr>
   </p:defaultTextStyle>
+  <p:extLst>
+    <p:ext uri="{EFAFB233-063F-42B5-8137-9DF3F51BA10A}">
+      <p15:sldGuideLst xmlns:p15="http://schemas.microsoft.com/office/powerpoint/2012/main">
+        <p15:guide id="1" orient="horz" pos="2160">
+          <p15:clr>
+            <a:srgbClr val="A4A3A4"/>
+          </p15:clr>
+        </p15:guide>
+        <p15:guide id="2" pos="2880">
+          <p15:clr>
+            <a:srgbClr val="A4A3A4"/>
+          </p15:clr>
+        </p15:guide>
+      </p15:sldGuideLst>
+    </p:ext>
+  </p:extLst>
 </p:presentation>
 </file>
 
 <file path=ppt/notesMasters/notesMaster1.xml><?xml version="1.0" encoding="utf-8"?>
-<p:notesMaster xmlns:a="http://schemas.openxmlformats.org/drawingml/2006/main" xmlns:p="http://schemas.openxmlformats.org/presentationml/2006/main" xmlns:r="http://schemas.openxmlformats.org/officeDocument/2006/relationships">
+<p:notesMaster xmlns:a="http://schemas.openxmlformats.org/drawingml/2006/main" xmlns:r="http://schemas.openxmlformats.org/officeDocument/2006/relationships" xmlns:p="http://schemas.openxmlformats.org/presentationml/2006/main">
   <p:cSld>
     <p:bg>
       <p:bgRef idx="1001">
@@ -135,241 +154,16 @@
           <a:chExt cx="0" cy="0"/>
         </a:xfrm>
       </p:grpSpPr>
-      <p:sp>
-        <p:nvSpPr>
-          <p:cNvPr id="2" name="Header Placeholder 1"/>
-          <p:cNvSpPr>
-            <a:spLocks noGrp="1"/>
-          </p:cNvSpPr>
-          <p:nvPr>
-            <p:ph type="hdr" sz="quarter"/>
-          </p:nvPr>
-        </p:nvSpPr>
-        <p:spPr>
-          <a:xfrm>
-            <a:off x="0" y="0"/>
-            <a:ext cx="2971800" cy="457200"/>
-          </a:xfrm>
-          <a:prstGeom prst="rect">
-            <a:avLst/>
-          </a:prstGeom>
-        </p:spPr>
-        <p:txBody>
-          <a:bodyPr vert="horz" lIns="91440" tIns="45720" rIns="91440" bIns="45720" rtlCol="0"/>
-          <a:lstStyle>
-            <a:lvl1pPr algn="l">
-              <a:defRPr sz="1200"/>
-            </a:lvl1pPr>
-          </a:lstStyle>
-          <a:p>
-            <a:endParaRPr lang="en-US"/>
-          </a:p>
-        </p:txBody>
-      </p:sp>
-      <p:sp>
-        <p:nvSpPr>
-          <p:cNvPr id="3" name="Date Placeholder 2"/>
-          <p:cNvSpPr>
-            <a:spLocks noGrp="1"/>
-          </p:cNvSpPr>
-          <p:nvPr>
-            <p:ph type="dt" idx="1"/>
-          </p:nvPr>
-        </p:nvSpPr>
-        <p:spPr>
-          <a:xfrm>
-            <a:off x="3884613" y="0"/>
-            <a:ext cx="2971800" cy="457200"/>
-          </a:xfrm>
-          <a:prstGeom prst="rect">
-            <a:avLst/>
-          </a:prstGeom>
-        </p:spPr>
-        <p:txBody>
-          <a:bodyPr vert="horz" lIns="91440" tIns="45720" rIns="91440" bIns="45720" rtlCol="0"/>
-          <a:lstStyle>
-            <a:lvl1pPr algn="r">
-              <a:defRPr sz="1200"/>
-            </a:lvl1pPr>
-          </a:lstStyle>
-          <a:p>
-            <a:fld id="{0F89C1C7-3DCD-1040-A9CF-14679D8B5DDD}" type="datetimeFigureOut">
-              <a:rPr lang="en-US" smtClean="0"/>
-              <a:t>10/17/16</a:t>
-            </a:fld>
-            <a:endParaRPr lang="en-US"/>
-          </a:p>
-        </p:txBody>
-      </p:sp>
-      <p:sp>
-        <p:nvSpPr>
-          <p:cNvPr id="4" name="Slide Image Placeholder 3"/>
-          <p:cNvSpPr>
-            <a:spLocks noGrp="1" noRot="1" noChangeAspect="1"/>
-          </p:cNvSpPr>
-          <p:nvPr>
-            <p:ph type="sldImg" idx="2"/>
-          </p:nvPr>
-        </p:nvSpPr>
-        <p:spPr>
-          <a:xfrm>
-            <a:off x="1143000" y="685800"/>
-            <a:ext cx="4572000" cy="3429000"/>
-          </a:xfrm>
-          <a:prstGeom prst="rect">
-            <a:avLst/>
-          </a:prstGeom>
-          <a:noFill/>
-          <a:ln w="12700">
-            <a:solidFill>
-              <a:prstClr val="black"/>
-            </a:solidFill>
-          </a:ln>
-        </p:spPr>
-        <p:txBody>
-          <a:bodyPr vert="horz" lIns="91440" tIns="45720" rIns="91440" bIns="45720" rtlCol="0" anchor="ctr"/>
-          <a:lstStyle/>
-          <a:p>
-            <a:endParaRPr lang="en-US"/>
-          </a:p>
-        </p:txBody>
-      </p:sp>
-      <p:sp>
-        <p:nvSpPr>
-          <p:cNvPr id="5" name="Notes Placeholder 4"/>
-          <p:cNvSpPr>
-            <a:spLocks noGrp="1"/>
-          </p:cNvSpPr>
-          <p:nvPr>
-            <p:ph type="body" sz="quarter" idx="3"/>
-          </p:nvPr>
-        </p:nvSpPr>
-        <p:spPr>
-          <a:xfrm>
-            <a:off x="685800" y="4343400"/>
-            <a:ext cx="5486400" cy="4114800"/>
-          </a:xfrm>
-          <a:prstGeom prst="rect">
-            <a:avLst/>
-          </a:prstGeom>
-        </p:spPr>
-        <p:txBody>
-          <a:bodyPr vert="horz" lIns="91440" tIns="45720" rIns="91440" bIns="45720" rtlCol="0"/>
-          <a:lstStyle/>
-          <a:p>
-            <a:pPr lvl="0"/>
-            <a:r>
-              <a:rPr lang="en-US" smtClean="0"/>
-              <a:t>Click to edit Master text styles</a:t>
-            </a:r>
-          </a:p>
-          <a:p>
-            <a:pPr lvl="1"/>
-            <a:r>
-              <a:rPr lang="en-US" smtClean="0"/>
-              <a:t>Second level</a:t>
-            </a:r>
-          </a:p>
-          <a:p>
-            <a:pPr lvl="2"/>
-            <a:r>
-              <a:rPr lang="en-US" smtClean="0"/>
-              <a:t>Third level</a:t>
-            </a:r>
-          </a:p>
-          <a:p>
-            <a:pPr lvl="3"/>
-            <a:r>
-              <a:rPr lang="en-US" smtClean="0"/>
-              <a:t>Fourth level</a:t>
-            </a:r>
-          </a:p>
-          <a:p>
-            <a:pPr lvl="4"/>
-            <a:r>
-              <a:rPr lang="en-US" smtClean="0"/>
-              <a:t>Fifth level</a:t>
-            </a:r>
-            <a:endParaRPr lang="en-US"/>
-          </a:p>
-        </p:txBody>
-      </p:sp>
-      <p:sp>
-        <p:nvSpPr>
-          <p:cNvPr id="6" name="Footer Placeholder 5"/>
-          <p:cNvSpPr>
-            <a:spLocks noGrp="1"/>
-          </p:cNvSpPr>
-          <p:nvPr>
-            <p:ph type="ftr" sz="quarter" idx="4"/>
-          </p:nvPr>
-        </p:nvSpPr>
-        <p:spPr>
-          <a:xfrm>
-            <a:off x="0" y="8685213"/>
-            <a:ext cx="2971800" cy="457200"/>
-          </a:xfrm>
-          <a:prstGeom prst="rect">
-            <a:avLst/>
-          </a:prstGeom>
-        </p:spPr>
-        <p:txBody>
-          <a:bodyPr vert="horz" lIns="91440" tIns="45720" rIns="91440" bIns="45720" rtlCol="0" anchor="b"/>
-          <a:lstStyle>
-            <a:lvl1pPr algn="l">
-              <a:defRPr sz="1200"/>
-            </a:lvl1pPr>
-          </a:lstStyle>
-          <a:p>
-            <a:endParaRPr lang="en-US"/>
-          </a:p>
-        </p:txBody>
-      </p:sp>
-      <p:sp>
-        <p:nvSpPr>
-          <p:cNvPr id="7" name="Slide Number Placeholder 6"/>
-          <p:cNvSpPr>
-            <a:spLocks noGrp="1"/>
-          </p:cNvSpPr>
-          <p:nvPr>
-            <p:ph type="sldNum" sz="quarter" idx="5"/>
-          </p:nvPr>
-        </p:nvSpPr>
-        <p:spPr>
-          <a:xfrm>
-            <a:off x="3884613" y="8685213"/>
-            <a:ext cx="2971800" cy="457200"/>
-          </a:xfrm>
-          <a:prstGeom prst="rect">
-            <a:avLst/>
-          </a:prstGeom>
-        </p:spPr>
-        <p:txBody>
-          <a:bodyPr vert="horz" lIns="91440" tIns="45720" rIns="91440" bIns="45720" rtlCol="0" anchor="b"/>
-          <a:lstStyle>
-            <a:lvl1pPr algn="r">
-              <a:defRPr sz="1200"/>
-            </a:lvl1pPr>
-          </a:lstStyle>
-          <a:p>
-            <a:fld id="{BB5E49A5-4136-284D-997B-48E1D791AD67}" type="slidenum">
-              <a:rPr lang="en-US" smtClean="0"/>
-              <a:t>‹#›</a:t>
-            </a:fld>
-            <a:endParaRPr lang="en-US"/>
-          </a:p>
-        </p:txBody>
-      </p:sp>
     </p:spTree>
     <p:extLst>
       <p:ext uri="{BB962C8B-B14F-4D97-AF65-F5344CB8AC3E}">
-        <p14:creationId xmlns:p14="http://schemas.microsoft.com/office/powerpoint/2010/main" val="2623252185"/>
+        <p14:creationId xmlns:p14="http://schemas.microsoft.com/office/powerpoint/2010/main" val="2859809488"/>
       </p:ext>
     </p:extLst>
   </p:cSld>
   <p:clrMap bg1="lt1" tx1="dk1" bg2="lt2" tx2="dk2" accent1="accent1" accent2="accent2" accent3="accent3" accent4="accent4" accent5="accent5" accent6="accent6" hlink="hlink" folHlink="folHlink"/>
   <p:notesStyle>
-    <a:lvl1pPr marL="0" algn="l" defTabSz="457200" rtl="0" eaLnBrk="1" latinLnBrk="0" hangingPunct="1">
+    <a:lvl1pPr marL="0" algn="l" defTabSz="914400" rtl="0" eaLnBrk="1" latinLnBrk="1" hangingPunct="1">
       <a:defRPr sz="1200" kern="1200">
         <a:solidFill>
           <a:schemeClr val="tx1"/>
@@ -379,7 +173,7 @@
         <a:cs typeface="+mn-cs"/>
       </a:defRPr>
     </a:lvl1pPr>
-    <a:lvl2pPr marL="457200" algn="l" defTabSz="457200" rtl="0" eaLnBrk="1" latinLnBrk="0" hangingPunct="1">
+    <a:lvl2pPr marL="457200" algn="l" defTabSz="914400" rtl="0" eaLnBrk="1" latinLnBrk="1" hangingPunct="1">
       <a:defRPr sz="1200" kern="1200">
         <a:solidFill>
           <a:schemeClr val="tx1"/>
@@ -389,7 +183,7 @@
         <a:cs typeface="+mn-cs"/>
       </a:defRPr>
     </a:lvl2pPr>
-    <a:lvl3pPr marL="914400" algn="l" defTabSz="457200" rtl="0" eaLnBrk="1" latinLnBrk="0" hangingPunct="1">
+    <a:lvl3pPr marL="914400" algn="l" defTabSz="914400" rtl="0" eaLnBrk="1" latinLnBrk="1" hangingPunct="1">
       <a:defRPr sz="1200" kern="1200">
         <a:solidFill>
           <a:schemeClr val="tx1"/>
@@ -399,7 +193,7 @@
         <a:cs typeface="+mn-cs"/>
       </a:defRPr>
     </a:lvl3pPr>
-    <a:lvl4pPr marL="1371600" algn="l" defTabSz="457200" rtl="0" eaLnBrk="1" latinLnBrk="0" hangingPunct="1">
+    <a:lvl4pPr marL="1371600" algn="l" defTabSz="914400" rtl="0" eaLnBrk="1" latinLnBrk="1" hangingPunct="1">
       <a:defRPr sz="1200" kern="1200">
         <a:solidFill>
           <a:schemeClr val="tx1"/>
@@ -409,7 +203,7 @@
         <a:cs typeface="+mn-cs"/>
       </a:defRPr>
     </a:lvl4pPr>
-    <a:lvl5pPr marL="1828800" algn="l" defTabSz="457200" rtl="0" eaLnBrk="1" latinLnBrk="0" hangingPunct="1">
+    <a:lvl5pPr marL="1828800" algn="l" defTabSz="914400" rtl="0" eaLnBrk="1" latinLnBrk="1" hangingPunct="1">
       <a:defRPr sz="1200" kern="1200">
         <a:solidFill>
           <a:schemeClr val="tx1"/>
@@ -419,7 +213,7 @@
         <a:cs typeface="+mn-cs"/>
       </a:defRPr>
     </a:lvl5pPr>
-    <a:lvl6pPr marL="2286000" algn="l" defTabSz="457200" rtl="0" eaLnBrk="1" latinLnBrk="0" hangingPunct="1">
+    <a:lvl6pPr marL="2286000" algn="l" defTabSz="914400" rtl="0" eaLnBrk="1" latinLnBrk="1" hangingPunct="1">
       <a:defRPr sz="1200" kern="1200">
         <a:solidFill>
           <a:schemeClr val="tx1"/>
@@ -429,7 +223,7 @@
         <a:cs typeface="+mn-cs"/>
       </a:defRPr>
     </a:lvl6pPr>
-    <a:lvl7pPr marL="2743200" algn="l" defTabSz="457200" rtl="0" eaLnBrk="1" latinLnBrk="0" hangingPunct="1">
+    <a:lvl7pPr marL="2743200" algn="l" defTabSz="914400" rtl="0" eaLnBrk="1" latinLnBrk="1" hangingPunct="1">
       <a:defRPr sz="1200" kern="1200">
         <a:solidFill>
           <a:schemeClr val="tx1"/>
@@ -439,7 +233,7 @@
         <a:cs typeface="+mn-cs"/>
       </a:defRPr>
     </a:lvl7pPr>
-    <a:lvl8pPr marL="3200400" algn="l" defTabSz="457200" rtl="0" eaLnBrk="1" latinLnBrk="0" hangingPunct="1">
+    <a:lvl8pPr marL="3200400" algn="l" defTabSz="914400" rtl="0" eaLnBrk="1" latinLnBrk="1" hangingPunct="1">
       <a:defRPr sz="1200" kern="1200">
         <a:solidFill>
           <a:schemeClr val="tx1"/>
@@ -449,7 +243,7 @@
         <a:cs typeface="+mn-cs"/>
       </a:defRPr>
     </a:lvl8pPr>
-    <a:lvl9pPr marL="3657600" algn="l" defTabSz="457200" rtl="0" eaLnBrk="1" latinLnBrk="0" hangingPunct="1">
+    <a:lvl9pPr marL="3657600" algn="l" defTabSz="914400" rtl="0" eaLnBrk="1" latinLnBrk="1" hangingPunct="1">
       <a:defRPr sz="1200" kern="1200">
         <a:solidFill>
           <a:schemeClr val="tx1"/>
@@ -464,7 +258,7 @@
 </file>
 
 <file path=ppt/notesSlides/notesSlide1.xml><?xml version="1.0" encoding="utf-8"?>
-<p:notes xmlns:a="http://schemas.openxmlformats.org/drawingml/2006/main" xmlns:p="http://schemas.openxmlformats.org/presentationml/2006/main" xmlns:r="http://schemas.openxmlformats.org/officeDocument/2006/relationships">
+<p:notes xmlns:a="http://schemas.openxmlformats.org/drawingml/2006/main" xmlns:r="http://schemas.openxmlformats.org/officeDocument/2006/relationships" xmlns:p="http://schemas.openxmlformats.org/presentationml/2006/main">
   <p:cSld>
     <p:spTree>
       <p:nvGrpSpPr>
@@ -484,7 +278,7 @@
         <p:nvSpPr>
           <p:cNvPr id="2" name="Slide Image Placeholder 1"/>
           <p:cNvSpPr>
-            <a:spLocks noGrp="1"/>
+            <a:spLocks noGrp="1" noRot="1" noChangeAspect="1"/>
           </p:cNvSpPr>
           <p:nvPr>
             <p:ph type="sldImg" idx="2"/>
@@ -499,7 +293,7 @@
             <a:spLocks noGrp="1"/>
           </p:cNvSpPr>
           <p:nvPr>
-            <p:ph type="body" idx="3" sz="quarter"/>
+            <p:ph type="body" sz="quarter" idx="3"/>
           </p:nvPr>
         </p:nvSpPr>
         <p:spPr/>
@@ -507,41 +301,9 @@
           <a:bodyPr/>
           <a:lstStyle/>
           <a:p>
-            <a:r>
-              <a:t>[0:00 – 0:20]</a:t>
-            </a:r>
-          </a:p>
-          <a:p/>
-          <a:p>
-            <a:r>
-              <a:t>I'll show you a NeRF variant for an unusual reconstruction problem: recovering</a:t>
-            </a:r>
-          </a:p>
-          <a:p>
-            <a:r>
-              <a:t>a 3D field of intergalactic gas from sparse 1D absorption spectra. The</a:t>
-            </a:r>
-          </a:p>
-          <a:p>
-            <a:r>
-              <a:t>architecture is NeRF; the rendering operator is physics. The contribution is</a:t>
-            </a:r>
-          </a:p>
-          <a:p>
-            <a:r>
-              <a:t>how those two things glue together.</a:t>
-            </a:r>
-          </a:p>
-          <a:p/>
-          <a:p>
-            <a:r>
-              <a:t>I'll spend the first minute on the astrophysical setup so the analogy makes</a:t>
-            </a:r>
-          </a:p>
-          <a:p>
-            <a:r>
-              <a:t>sense, then four minutes on the method, results, and what's next.</a:t>
-            </a:r>
+            <a:endParaRPr lang="en-US" altLang="ko-KR" strike="sngStrike" dirty="0">
+              <a:effectLst/>
+            </a:endParaRPr>
           </a:p>
         </p:txBody>
       </p:sp>
@@ -552,7 +314,7 @@
             <a:spLocks noGrp="1"/>
           </p:cNvSpPr>
           <p:nvPr>
-            <p:ph type="sldNum" idx="5" sz="quarter"/>
+            <p:ph type="sldNum" sz="quarter" idx="5"/>
           </p:nvPr>
         </p:nvSpPr>
         <p:spPr/>
@@ -566,7 +328,7 @@
 </file>
 
 <file path=ppt/notesSlides/notesSlide2.xml><?xml version="1.0" encoding="utf-8"?>
-<p:notes xmlns:a="http://schemas.openxmlformats.org/drawingml/2006/main" xmlns:p="http://schemas.openxmlformats.org/presentationml/2006/main" xmlns:r="http://schemas.openxmlformats.org/officeDocument/2006/relationships">
+<p:notes xmlns:a="http://schemas.openxmlformats.org/drawingml/2006/main" xmlns:r="http://schemas.openxmlformats.org/officeDocument/2006/relationships" xmlns:p="http://schemas.openxmlformats.org/presentationml/2006/main">
   <p:cSld>
     <p:spTree>
       <p:nvGrpSpPr>
@@ -586,7 +348,7 @@
         <p:nvSpPr>
           <p:cNvPr id="2" name="Slide Image Placeholder 1"/>
           <p:cNvSpPr>
-            <a:spLocks noGrp="1"/>
+            <a:spLocks noGrp="1" noRot="1" noChangeAspect="1"/>
           </p:cNvSpPr>
           <p:nvPr>
             <p:ph type="sldImg" idx="2"/>
@@ -601,7 +363,7 @@
             <a:spLocks noGrp="1"/>
           </p:cNvSpPr>
           <p:nvPr>
-            <p:ph type="body" idx="3" sz="quarter"/>
+            <p:ph type="body" sz="quarter" idx="3"/>
           </p:nvPr>
         </p:nvSpPr>
         <p:spPr/>
@@ -610,116 +372,100 @@
           <a:lstStyle/>
           <a:p>
             <a:r>
-              <a:t>[0:20 – 1:20]</a:t>
-            </a:r>
-          </a:p>
-          <a:p/>
-          <a:p>
-            <a:r>
-              <a:t>Quick orientation. The volume on top is a 60 Mpc-per-h cube — the size of a</a:t>
-            </a:r>
-          </a:p>
-          <a:p>
-            <a:r>
-              <a:t>piece of the universe at redshift 0.3. It comes from the Sherwood</a:t>
-            </a:r>
-          </a:p>
-          <a:p>
-            <a:r>
-              <a:t>hydrodynamic simulation, which evolves dark matter and gas under gravity</a:t>
-            </a:r>
-          </a:p>
-          <a:p>
-            <a:r>
-              <a:t>plus four different feedback recipes. The gas inside the box is described</a:t>
-            </a:r>
-          </a:p>
-          <a:p>
-            <a:r>
-              <a:t>by four scalar fields at every point: density rho, temperature T, neutral</a:t>
-            </a:r>
-          </a:p>
-          <a:p>
-            <a:r>
-              <a:t>hydrogen fraction X_HI, and peculiar velocity v_pec — that last one is gas</a:t>
-            </a:r>
-          </a:p>
-          <a:p>
-            <a:r>
-              <a:t>motion relative to the Hubble flow.</a:t>
-            </a:r>
-          </a:p>
-          <a:p/>
-          <a:p>
-            <a:r>
-              <a:t>The yellow line is a sightline. A bright background quasar emits across the</a:t>
-            </a:r>
-          </a:p>
-          <a:p>
-            <a:r>
-              <a:t>electromagnetic spectrum; gas in the foreground absorbs at the Lyman-alpha</a:t>
-            </a:r>
-          </a:p>
-          <a:p>
-            <a:r>
-              <a:t>line of neutral hydrogen — at 1216 angstroms in the rest frame, redshifted</a:t>
-            </a:r>
-          </a:p>
-          <a:p>
-            <a:r>
-              <a:t>into the visible. The amount of absorption at each velocity along that line</a:t>
-            </a:r>
-          </a:p>
-          <a:p>
-            <a:r>
-              <a:t>is set by how much neutral hydrogen the photon encountered, weighted by a</a:t>
-            </a:r>
-          </a:p>
-          <a:p>
-            <a:r>
-              <a:t>Voigt profile that depends on local temperature and gas motion.</a:t>
-            </a:r>
-          </a:p>
-          <a:p/>
-          <a:p>
-            <a:r>
-              <a:t>The result is the bottom plot — what an observer's spectrograph sees: a 1D</a:t>
-            </a:r>
-          </a:p>
-          <a:p>
-            <a:r>
-              <a:t>optical-depth profile as a function of observed velocity. Most of it is the</a:t>
-            </a:r>
-          </a:p>
-          <a:p>
-            <a:r>
-              <a:t>'Lyman-alpha forest' — many narrow absorbers from underdense gas. A tiny</a:t>
-            </a:r>
-          </a:p>
-          <a:p>
-            <a:r>
-              <a:t>fraction of sightlines hit dense neutral systems and saturate completely;</a:t>
-            </a:r>
-          </a:p>
-          <a:p>
-            <a:r>
-              <a:t>those are the heavy-tailed outliers.</a:t>
-            </a:r>
-          </a:p>
-          <a:p/>
-          <a:p>
-            <a:r>
-              <a:t>Surveys like DESI will give us millions of these spectra — one ray, one</a:t>
-            </a:r>
-          </a:p>
-          <a:p>
-            <a:r>
-              <a:t>spectrum. The reconstruction question is: how do we recover the 3D fields</a:t>
-            </a:r>
-          </a:p>
-          <a:p>
-            <a:r>
-              <a:t>from a few hundred to a few thousand of these rays?</a:t>
+              <a:rPr lang="en-US" altLang="ko-KR" dirty="0">
+                <a:effectLst/>
+              </a:rPr>
+              <a:t>"The data comes from the quasar absorption spectra: light from distant quasars passes through intergalactic cosmic  gas and gets partially absorbed. Each quasar gives us one long 1D spectrum — a single ray through the 3D volume.</a:t>
+            </a:r>
+          </a:p>
+          <a:p>
+            <a:endParaRPr lang="en-US" altLang="ko-KR" dirty="0">
+              <a:effectLst/>
+            </a:endParaRPr>
+          </a:p>
+          <a:p>
+            <a:r>
+              <a:rPr lang="en-US" altLang="ko-KR" dirty="0">
+                <a:effectLst/>
+              </a:rPr>
+              <a:t>This is a classic </a:t>
+            </a:r>
+            <a:r>
+              <a:rPr lang="en-US" altLang="ko-KR" b="1" dirty="0">
+                <a:effectLst/>
+              </a:rPr>
+              <a:t>sparse-view 3D reconstruction</a:t>
+            </a:r>
+            <a:r>
+              <a:rPr lang="en-US" altLang="ko-KR" dirty="0">
+                <a:effectLst/>
+              </a:rPr>
+              <a:t> problem, but with three unusual challenges:</a:t>
+            </a:r>
+          </a:p>
+          <a:p>
+            <a:endParaRPr lang="en-US" altLang="ko-KR" dirty="0">
+              <a:effectLst/>
+            </a:endParaRPr>
+          </a:p>
+          <a:p>
+            <a:pPr marL="228600" indent="-228600">
+              <a:buAutoNum type="arabicPeriod"/>
+            </a:pPr>
+            <a:r>
+              <a:rPr lang="en-US" altLang="ko-KR" dirty="0"/>
+              <a:t>Observations are </a:t>
+            </a:r>
+            <a:r>
+              <a:rPr lang="en-US" altLang="ko-KR" b="1" dirty="0"/>
+              <a:t>1D spectra</a:t>
+            </a:r>
+            <a:r>
+              <a:rPr lang="en-US" altLang="ko-KR" dirty="0"/>
+              <a:t>, not 2D images.</a:t>
+            </a:r>
+          </a:p>
+          <a:p>
+            <a:pPr marL="228600" indent="-228600">
+              <a:buAutoNum type="arabicPeriod"/>
+            </a:pPr>
+            <a:endParaRPr lang="en-US" altLang="ko-KR" dirty="0"/>
+          </a:p>
+          <a:p>
+            <a:r>
+              <a:rPr lang="en-US" altLang="ko-KR" dirty="0"/>
+              <a:t>2. The forward model is a </a:t>
+            </a:r>
+            <a:r>
+              <a:rPr lang="en-US" altLang="ko-KR" b="1" dirty="0"/>
+              <a:t>known nonlinear physics operator</a:t>
+            </a:r>
+            <a:r>
+              <a:rPr lang="en-US" altLang="ko-KR" dirty="0"/>
+              <a:t> (optical depth integral), not learned rendering.</a:t>
+            </a:r>
+          </a:p>
+          <a:p>
+            <a:endParaRPr lang="en-US" altLang="ko-KR" dirty="0"/>
+          </a:p>
+          <a:p>
+            <a:r>
+              <a:rPr lang="en-US" altLang="ko-KR" dirty="0"/>
+              <a:t>3. The signal is </a:t>
+            </a:r>
+            <a:r>
+              <a:rPr lang="en-US" altLang="ko-KR" b="1" dirty="0"/>
+              <a:t>heavily heavy-tailed</a:t>
+            </a:r>
+            <a:r>
+              <a:rPr lang="en-US" altLang="ko-KR" dirty="0"/>
+              <a:t> — most values are small, but rare dense clouds create extremely deep absorption spikes (τ up to 10⁷), </a:t>
+            </a:r>
+          </a:p>
+          <a:p>
+            <a:r>
+              <a:rPr lang="en-US" altLang="ko-KR" dirty="0"/>
+              <a:t>where normal per-pixel Mean Square Error would fail on this."</a:t>
             </a:r>
           </a:p>
         </p:txBody>
@@ -731,7 +477,7 @@
             <a:spLocks noGrp="1"/>
           </p:cNvSpPr>
           <p:nvPr>
-            <p:ph type="sldNum" idx="5" sz="quarter"/>
+            <p:ph type="sldNum" sz="quarter" idx="5"/>
           </p:nvPr>
         </p:nvSpPr>
         <p:spPr/>
@@ -745,7 +491,7 @@
 </file>
 
 <file path=ppt/notesSlides/notesSlide3.xml><?xml version="1.0" encoding="utf-8"?>
-<p:notes xmlns:a="http://schemas.openxmlformats.org/drawingml/2006/main" xmlns:p="http://schemas.openxmlformats.org/presentationml/2006/main" xmlns:r="http://schemas.openxmlformats.org/officeDocument/2006/relationships">
+<p:notes xmlns:a="http://schemas.openxmlformats.org/drawingml/2006/main" xmlns:r="http://schemas.openxmlformats.org/officeDocument/2006/relationships" xmlns:p="http://schemas.openxmlformats.org/presentationml/2006/main">
   <p:cSld>
     <p:spTree>
       <p:nvGrpSpPr>
@@ -765,7 +511,7 @@
         <p:nvSpPr>
           <p:cNvPr id="2" name="Slide Image Placeholder 1"/>
           <p:cNvSpPr>
-            <a:spLocks noGrp="1"/>
+            <a:spLocks noGrp="1" noRot="1" noChangeAspect="1"/>
           </p:cNvSpPr>
           <p:nvPr>
             <p:ph type="sldImg" idx="2"/>
@@ -780,7 +526,7 @@
             <a:spLocks noGrp="1"/>
           </p:cNvSpPr>
           <p:nvPr>
-            <p:ph type="body" idx="3" sz="quarter"/>
+            <p:ph type="body" sz="quarter" idx="3"/>
           </p:nvPr>
         </p:nvSpPr>
         <p:spPr/>
@@ -789,116 +535,188 @@
           <a:lstStyle/>
           <a:p>
             <a:r>
-              <a:t>[1:20 – 2:00]</a:t>
-            </a:r>
-          </a:p>
-          <a:p/>
-          <a:p>
-            <a:r>
-              <a:t>Why NeRF? Look at the analogy column-by-column.</a:t>
-            </a:r>
-          </a:p>
-          <a:p/>
-          <a:p>
-            <a:r>
-              <a:t>3D position: the same — both are 3D scene coordinates.</a:t>
-            </a:r>
-          </a:p>
-          <a:p/>
-          <a:p>
-            <a:r>
-              <a:t>Positional encoding: identical. Cosmic structure is filaments + voids —</a:t>
-            </a:r>
-          </a:p>
-          <a:p>
-            <a:r>
-              <a:t>high-frequency, multi-scale. Same Fourier basis at L=10.</a:t>
-            </a:r>
-          </a:p>
-          <a:p/>
-          <a:p>
-            <a:r>
-              <a:t>Density: in NeRF, sigma is opacity per unit length along the ray. In our</a:t>
-            </a:r>
-          </a:p>
-          <a:p>
-            <a:r>
-              <a:t>case, the analogue is the neutral hydrogen density — gas density times</a:t>
-            </a:r>
-          </a:p>
-          <a:p>
-            <a:r>
-              <a:t>ionization fraction — and it determines how much absorption happens per</a:t>
-            </a:r>
-          </a:p>
-          <a:p>
-            <a:r>
-              <a:t>unit length.</a:t>
-            </a:r>
-          </a:p>
-          <a:p/>
-          <a:p>
-            <a:r>
-              <a:t>Color: in NeRF, color at a sample depends on direction. Our analogue is the</a:t>
-            </a:r>
-          </a:p>
-          <a:p>
-            <a:r>
-              <a:t>Voigt absorption kernel — which photons get absorbed at this sample as a</a:t>
-            </a:r>
-          </a:p>
-          <a:p>
-            <a:r>
-              <a:t>function of velocity offset. Crucially, ours is a *known closed-form* with</a:t>
-            </a:r>
-          </a:p>
-          <a:p>
-            <a:r>
-              <a:t>a *known dependence* on local temperature, not a learned head.</a:t>
-            </a:r>
-          </a:p>
-          <a:p/>
-          <a:p>
-            <a:r>
-              <a:t>View direction: NeRF needs it because reflected light is angle-dependent.</a:t>
-            </a:r>
-          </a:p>
-          <a:p>
-            <a:r>
-              <a:t>We don't — gas density doesn't change with viewing angle. There's a</a:t>
-            </a:r>
-          </a:p>
-          <a:p>
-            <a:r>
-              <a:t>peculiar-velocity Doppler effect that *would* depend on viewing direction</a:t>
-            </a:r>
-          </a:p>
-          <a:p>
-            <a:r>
-              <a:t>in principle, but Sherwood sightlines are pre-aligned along the simulation</a:t>
-            </a:r>
-          </a:p>
-          <a:p>
-            <a:r>
-              <a:t>z-axis, so we predict only the LOS-projected velocity.</a:t>
-            </a:r>
-          </a:p>
-          <a:p/>
-          <a:p>
-            <a:r>
-              <a:t>Volume rendering integral: line integral along the ray. Same structure.</a:t>
-            </a:r>
-          </a:p>
-          <a:p>
-            <a:r>
-              <a:t>Different operator.</a:t>
-            </a:r>
-          </a:p>
-          <a:p/>
-          <a:p>
-            <a:r>
-              <a:t>The MLP doesn't care which integral it's feeding — autograd handles either.</a:t>
-            </a:r>
+              <a:rPr lang="en-US" altLang="ko-KR" dirty="0">
+                <a:effectLst/>
+              </a:rPr>
+              <a:t>Here is  how I mapped the original </a:t>
+            </a:r>
+            <a:r>
+              <a:rPr lang="en-US" altLang="ko-KR" dirty="0" err="1">
+                <a:effectLst/>
+              </a:rPr>
+              <a:t>NeRF</a:t>
+            </a:r>
+            <a:r>
+              <a:rPr lang="en-US" altLang="ko-KR" dirty="0">
+                <a:effectLst/>
+              </a:rPr>
+              <a:t> to our problem.</a:t>
+            </a:r>
+          </a:p>
+          <a:p>
+            <a:r>
+              <a:rPr lang="en-US" altLang="ko-KR" dirty="0">
+                <a:effectLst/>
+              </a:rPr>
+              <a:t>As you can see in this table, I kept the </a:t>
+            </a:r>
+            <a:r>
+              <a:rPr lang="en-US" altLang="ko-KR" b="1" dirty="0">
+                <a:effectLst/>
+              </a:rPr>
+              <a:t>core ideas</a:t>
+            </a:r>
+            <a:r>
+              <a:rPr lang="en-US" altLang="ko-KR" dirty="0">
+                <a:effectLst/>
+              </a:rPr>
+              <a:t> from the original </a:t>
+            </a:r>
+            <a:r>
+              <a:rPr lang="en-US" altLang="ko-KR" dirty="0" err="1">
+                <a:effectLst/>
+              </a:rPr>
+              <a:t>NeRF</a:t>
+            </a:r>
+            <a:r>
+              <a:rPr lang="en-US" altLang="ko-KR" dirty="0">
+                <a:effectLst/>
+              </a:rPr>
+              <a:t> paper and only changed what needed to be changed for our physics-based setting.</a:t>
+            </a:r>
+          </a:p>
+          <a:p>
+            <a:endParaRPr lang="en-US" altLang="ko-KR" dirty="0">
+              <a:effectLst/>
+            </a:endParaRPr>
+          </a:p>
+          <a:p>
+            <a:r>
+              <a:rPr lang="en-US" altLang="ko-KR" dirty="0"/>
+              <a:t>First We still use </a:t>
+            </a:r>
+            <a:r>
+              <a:rPr lang="en-US" altLang="ko-KR" b="1" dirty="0"/>
+              <a:t>3D position</a:t>
+            </a:r>
+            <a:r>
+              <a:rPr lang="en-US" altLang="ko-KR" dirty="0"/>
+              <a:t> as input, just like </a:t>
+            </a:r>
+            <a:r>
+              <a:rPr lang="en-US" altLang="ko-KR" dirty="0" err="1"/>
+              <a:t>NeRF</a:t>
+            </a:r>
+            <a:r>
+              <a:rPr lang="en-US" altLang="ko-KR" dirty="0"/>
+              <a:t> — but we don’t need view direction because gas properties are view-independent.</a:t>
+            </a:r>
+          </a:p>
+          <a:p>
+            <a:endParaRPr lang="en-US" altLang="ko-KR" dirty="0"/>
+          </a:p>
+          <a:p>
+            <a:r>
+              <a:rPr lang="en-US" altLang="ko-KR" dirty="0"/>
+              <a:t>Next The </a:t>
+            </a:r>
+            <a:r>
+              <a:rPr lang="en-US" altLang="ko-KR" b="1" dirty="0"/>
+              <a:t>Fourier positional encoding</a:t>
+            </a:r>
+            <a:r>
+              <a:rPr lang="en-US" altLang="ko-KR" dirty="0"/>
+              <a:t> is identical (L=10). This is helpful because the cosmic gas structure has structures across many scales — from large voids to thin filaments.</a:t>
+            </a:r>
+          </a:p>
+          <a:p>
+            <a:endParaRPr lang="en-US" altLang="ko-KR" dirty="0"/>
+          </a:p>
+          <a:p>
+            <a:r>
+              <a:rPr lang="en-US" altLang="ko-KR" dirty="0"/>
+              <a:t>The MLP backbone is </a:t>
+            </a:r>
+            <a:r>
+              <a:rPr lang="en-US" altLang="ko-KR" b="1" dirty="0"/>
+              <a:t>identical</a:t>
+            </a:r>
+            <a:r>
+              <a:rPr lang="en-US" altLang="ko-KR" dirty="0"/>
+              <a:t> to the original </a:t>
+            </a:r>
+            <a:r>
+              <a:rPr lang="en-US" altLang="ko-KR" dirty="0" err="1"/>
+              <a:t>NeRF</a:t>
+            </a:r>
+            <a:r>
+              <a:rPr lang="en-US" altLang="ko-KR" dirty="0"/>
+              <a:t> architecture: 8 layers, 256 units, with the same skip connection.</a:t>
+            </a:r>
+          </a:p>
+          <a:p>
+            <a:endParaRPr lang="en-US" altLang="ko-KR" strike="sngStrike" dirty="0"/>
+          </a:p>
+          <a:p>
+            <a:pPr lvl="1"/>
+            <a:endParaRPr lang="en-US" altLang="ko-KR" dirty="0"/>
+          </a:p>
+          <a:p>
+            <a:pPr lvl="1"/>
+            <a:endParaRPr lang="en-US" altLang="ko-KR" dirty="0"/>
+          </a:p>
+          <a:p>
+            <a:r>
+              <a:rPr lang="en-US" altLang="ko-KR" strike="sngStrike" dirty="0">
+                <a:effectLst/>
+              </a:rPr>
+              <a:t>In short: we kept </a:t>
+            </a:r>
+            <a:r>
+              <a:rPr lang="en-US" altLang="ko-KR" strike="sngStrike" dirty="0" err="1">
+                <a:effectLst/>
+              </a:rPr>
+              <a:t>NeRF’s</a:t>
+            </a:r>
+            <a:r>
+              <a:rPr lang="en-US" altLang="ko-KR" strike="sngStrike" dirty="0">
+                <a:effectLst/>
+              </a:rPr>
+              <a:t> powerful continuous representation and implicit neural field approach, but replaced the rendering engine with real astrophysical physics.</a:t>
+            </a:r>
+          </a:p>
+          <a:p>
+            <a:r>
+              <a:rPr lang="en-US" altLang="ko-KR" strike="sngStrike" dirty="0">
+                <a:effectLst/>
+              </a:rPr>
+              <a:t>This is what allows us to do sparse-view 3D reconstruction from 1D absorption spectra.”</a:t>
+            </a:r>
+          </a:p>
+          <a:p>
+            <a:pPr marL="0" marR="0" lvl="0" indent="0" algn="l" defTabSz="914400" rtl="0" eaLnBrk="1" fontAlgn="auto" latinLnBrk="1" hangingPunct="1">
+              <a:lnSpc>
+                <a:spcPct val="100000"/>
+              </a:lnSpc>
+              <a:spcBef>
+                <a:spcPts val="0"/>
+              </a:spcBef>
+              <a:spcAft>
+                <a:spcPts val="0"/>
+              </a:spcAft>
+              <a:buClrTx/>
+              <a:buSzTx/>
+              <a:buFontTx/>
+              <a:buNone/>
+              <a:tabLst/>
+              <a:defRPr/>
+            </a:pPr>
+            <a:endParaRPr lang="en-US" altLang="ko-KR" dirty="0">
+              <a:effectLst/>
+            </a:endParaRPr>
+          </a:p>
+          <a:p>
+            <a:endParaRPr dirty="0"/>
           </a:p>
         </p:txBody>
       </p:sp>
@@ -909,7 +727,7 @@
             <a:spLocks noGrp="1"/>
           </p:cNvSpPr>
           <p:nvPr>
-            <p:ph type="sldNum" idx="5" sz="quarter"/>
+            <p:ph type="sldNum" sz="quarter" idx="5"/>
           </p:nvPr>
         </p:nvSpPr>
         <p:spPr/>
@@ -923,7 +741,7 @@
 </file>
 
 <file path=ppt/notesSlides/notesSlide4.xml><?xml version="1.0" encoding="utf-8"?>
-<p:notes xmlns:a="http://schemas.openxmlformats.org/drawingml/2006/main" xmlns:p="http://schemas.openxmlformats.org/presentationml/2006/main" xmlns:r="http://schemas.openxmlformats.org/officeDocument/2006/relationships">
+<p:notes xmlns:a="http://schemas.openxmlformats.org/drawingml/2006/main" xmlns:r="http://schemas.openxmlformats.org/officeDocument/2006/relationships" xmlns:p="http://schemas.openxmlformats.org/presentationml/2006/main">
   <p:cSld>
     <p:spTree>
       <p:nvGrpSpPr>
@@ -943,7 +761,7 @@
         <p:nvSpPr>
           <p:cNvPr id="2" name="Slide Image Placeholder 1"/>
           <p:cNvSpPr>
-            <a:spLocks noGrp="1"/>
+            <a:spLocks noGrp="1" noRot="1" noChangeAspect="1"/>
           </p:cNvSpPr>
           <p:nvPr>
             <p:ph type="sldImg" idx="2"/>
@@ -958,7 +776,7 @@
             <a:spLocks noGrp="1"/>
           </p:cNvSpPr>
           <p:nvPr>
-            <p:ph type="body" idx="3" sz="quarter"/>
+            <p:ph type="body" sz="quarter" idx="3"/>
           </p:nvPr>
         </p:nvSpPr>
         <p:spPr/>
@@ -966,70 +784,190 @@
           <a:bodyPr/>
           <a:lstStyle/>
           <a:p>
-            <a:r>
-              <a:t>[2:00 – 2:50]</a:t>
-            </a:r>
-          </a:p>
-          <a:p/>
-          <a:p>
-            <a:r>
-              <a:t>Concretely: same MLP, same Fourier encoding at L=10, same skip connection</a:t>
-            </a:r>
-          </a:p>
-          <a:p>
-            <a:r>
-              <a:t>at layer 4. The first half of the network is byte-identical to Mildenhall.</a:t>
-            </a:r>
-          </a:p>
-          <a:p/>
-          <a:p>
-            <a:r>
-              <a:t>Salmon boxes are where we diverge:</a:t>
-            </a:r>
-          </a:p>
-          <a:p/>
-          <a:p>
-            <a:r>
-              <a:t>The input: 3D, no view direction.</a:t>
-            </a:r>
-          </a:p>
-          <a:p/>
-          <a:p>
-            <a:r>
-              <a:t>The output head: four physical fields with bounded activations to enforce</a:t>
-            </a:r>
-          </a:p>
-          <a:p>
-            <a:r>
-              <a:t>positivity and realistic ranges. Density and temperature are softplus-ed,</a:t>
-            </a:r>
-          </a:p>
-          <a:p>
-            <a:r>
-              <a:t>ionization fraction is sigmoid, peculiar velocity is tanh-rescaled to a</a:t>
-            </a:r>
-          </a:p>
-          <a:p>
-            <a:r>
-              <a:t>physical band of plus or minus 500 km per second.</a:t>
-            </a:r>
-          </a:p>
-          <a:p/>
-          <a:p>
-            <a:r>
-              <a:t>The rendering operator: the Voigt-Hjerting kernel convolved with redshift-</a:t>
-            </a:r>
-          </a:p>
-          <a:p>
-            <a:r>
-              <a:t>space distortion, instead of the radiance integral.</a:t>
-            </a:r>
-          </a:p>
-          <a:p/>
-          <a:p>
-            <a:r>
-              <a:t>Bottom line: NeRF's representation, physics rendering.</a:t>
-            </a:r>
+            <a:pPr marL="0" marR="0" lvl="0" indent="0" algn="l" defTabSz="914400" rtl="0" eaLnBrk="1" fontAlgn="auto" latinLnBrk="1" hangingPunct="1">
+              <a:lnSpc>
+                <a:spcPct val="100000"/>
+              </a:lnSpc>
+              <a:spcBef>
+                <a:spcPts val="0"/>
+              </a:spcBef>
+              <a:spcAft>
+                <a:spcPts val="0"/>
+              </a:spcAft>
+              <a:buClrTx/>
+              <a:buSzTx/>
+              <a:buFontTx/>
+              <a:buNone/>
+              <a:tabLst/>
+              <a:defRPr/>
+            </a:pPr>
+            <a:r>
+              <a:rPr lang="en-US" altLang="ko-KR" dirty="0">
+                <a:effectLst/>
+              </a:rPr>
+              <a:t>"Here’s how we </a:t>
+            </a:r>
+            <a:r>
+              <a:rPr lang="en-US" altLang="ko-KR" b="1" dirty="0">
+                <a:effectLst/>
+              </a:rPr>
+              <a:t>mapped</a:t>
+            </a:r>
+            <a:r>
+              <a:rPr lang="en-US" altLang="ko-KR" dirty="0">
+                <a:effectLst/>
+              </a:rPr>
+              <a:t> </a:t>
+            </a:r>
+            <a:r>
+              <a:rPr lang="en-US" altLang="ko-KR" dirty="0" err="1">
+                <a:effectLst/>
+              </a:rPr>
+              <a:t>NeRF</a:t>
+            </a:r>
+            <a:r>
+              <a:rPr lang="en-US" altLang="ko-KR" dirty="0">
+                <a:effectLst/>
+              </a:rPr>
+              <a:t> to this problem:</a:t>
+            </a:r>
+          </a:p>
+          <a:p>
+            <a:pPr marL="0" marR="0" lvl="0" indent="0" algn="l" defTabSz="914400" rtl="0" eaLnBrk="1" fontAlgn="auto" latinLnBrk="1" hangingPunct="1">
+              <a:lnSpc>
+                <a:spcPct val="100000"/>
+              </a:lnSpc>
+              <a:spcBef>
+                <a:spcPts val="0"/>
+              </a:spcBef>
+              <a:spcAft>
+                <a:spcPts val="0"/>
+              </a:spcAft>
+              <a:buClrTx/>
+              <a:buSzTx/>
+              <a:buFontTx/>
+              <a:buNone/>
+              <a:tabLst/>
+              <a:defRPr/>
+            </a:pPr>
+            <a:endParaRPr lang="en-US" altLang="ko-KR" dirty="0">
+              <a:effectLst/>
+            </a:endParaRPr>
+          </a:p>
+          <a:p>
+            <a:r>
+              <a:rPr lang="en-US" altLang="ko-KR" dirty="0">
+                <a:effectLst/>
+              </a:rPr>
+              <a:t>Using the </a:t>
+            </a:r>
+            <a:r>
+              <a:rPr lang="en-US" altLang="ko-KR" b="1" dirty="0">
+                <a:effectLst/>
+              </a:rPr>
+              <a:t>exact same </a:t>
+            </a:r>
+            <a:r>
+              <a:rPr lang="en-US" altLang="ko-KR" dirty="0">
+                <a:effectLst/>
+              </a:rPr>
+              <a:t>MLP backbone as original </a:t>
+            </a:r>
+            <a:r>
+              <a:rPr lang="en-US" altLang="ko-KR" dirty="0" err="1">
+                <a:effectLst/>
+              </a:rPr>
+              <a:t>NeRF</a:t>
+            </a:r>
+            <a:r>
+              <a:rPr lang="en-US" altLang="ko-KR" dirty="0">
+                <a:effectLst/>
+              </a:rPr>
+              <a:t> (8 layers × 256 units, skip connection at layer 4), </a:t>
+            </a:r>
+          </a:p>
+          <a:p>
+            <a:endParaRPr lang="en-US" altLang="ko-KR" dirty="0">
+              <a:effectLst/>
+            </a:endParaRPr>
+          </a:p>
+          <a:p>
+            <a:r>
+              <a:rPr lang="en-US" altLang="ko-KR" dirty="0">
+                <a:effectLst/>
+              </a:rPr>
+              <a:t>The main changes are </a:t>
+            </a:r>
+            <a:r>
+              <a:rPr lang="en-US" altLang="ko-KR" b="1" dirty="0">
+                <a:effectLst/>
+              </a:rPr>
+              <a:t>physics-aware output activations </a:t>
+            </a:r>
+            <a:r>
+              <a:rPr lang="en-US" altLang="ko-KR" dirty="0">
+                <a:effectLst/>
+              </a:rPr>
+              <a:t>and the </a:t>
+            </a:r>
+            <a:r>
+              <a:rPr lang="en-US" altLang="ko-KR" b="1" dirty="0">
+                <a:effectLst/>
+              </a:rPr>
+              <a:t>custom differentiable renderer.</a:t>
+            </a:r>
+            <a:r>
+              <a:rPr lang="en-US" altLang="ko-KR" dirty="0">
+                <a:effectLst/>
+              </a:rPr>
+              <a:t>“</a:t>
+            </a:r>
+          </a:p>
+          <a:p>
+            <a:endParaRPr lang="en-US" altLang="ko-KR" dirty="0">
+              <a:effectLst/>
+            </a:endParaRPr>
+          </a:p>
+          <a:p>
+            <a:pPr lvl="1"/>
+            <a:r>
+              <a:rPr lang="en-US" altLang="ko-KR" strike="sngStrike" dirty="0"/>
+              <a:t>Instead of predicting color and density, we predict </a:t>
+            </a:r>
+            <a:r>
+              <a:rPr lang="en-US" altLang="ko-KR" b="1" strike="sngStrike" dirty="0"/>
+              <a:t>physical fields</a:t>
+            </a:r>
+            <a:r>
+              <a:rPr lang="en-US" altLang="ko-KR" strike="sngStrike" dirty="0"/>
+              <a:t>: gas density, temperature, neutral hydrogen fraction, and peculiar velocity.</a:t>
+            </a:r>
+          </a:p>
+          <a:p>
+            <a:pPr lvl="1"/>
+            <a:r>
+              <a:rPr lang="en-US" altLang="ko-KR" strike="sngStrike" dirty="0"/>
+              <a:t>Most importantly, we replaced </a:t>
+            </a:r>
+            <a:r>
+              <a:rPr lang="en-US" altLang="ko-KR" strike="sngStrike" dirty="0" err="1"/>
+              <a:t>NeRF’s</a:t>
+            </a:r>
+            <a:r>
+              <a:rPr lang="en-US" altLang="ko-KR" strike="sngStrike" dirty="0"/>
+              <a:t> volume rendering integral with a </a:t>
+            </a:r>
+            <a:r>
+              <a:rPr lang="en-US" altLang="ko-KR" b="1" strike="sngStrike" dirty="0"/>
+              <a:t>differentiable optical depth integral</a:t>
+            </a:r>
+            <a:r>
+              <a:rPr lang="en-US" altLang="ko-KR" strike="sngStrike" dirty="0"/>
+              <a:t> that uses the Voigt absorption kernel.</a:t>
+            </a:r>
+          </a:p>
+          <a:p>
+            <a:endParaRPr dirty="0"/>
           </a:p>
         </p:txBody>
       </p:sp>
@@ -1040,7 +978,7 @@
             <a:spLocks noGrp="1"/>
           </p:cNvSpPr>
           <p:nvPr>
-            <p:ph type="sldNum" idx="5" sz="quarter"/>
+            <p:ph type="sldNum" sz="quarter" idx="5"/>
           </p:nvPr>
         </p:nvSpPr>
         <p:spPr/>
@@ -1054,7 +992,7 @@
 </file>
 
 <file path=ppt/notesSlides/notesSlide5.xml><?xml version="1.0" encoding="utf-8"?>
-<p:notes xmlns:a="http://schemas.openxmlformats.org/drawingml/2006/main" xmlns:p="http://schemas.openxmlformats.org/presentationml/2006/main" xmlns:r="http://schemas.openxmlformats.org/officeDocument/2006/relationships">
+<p:notes xmlns:a="http://schemas.openxmlformats.org/drawingml/2006/main" xmlns:r="http://schemas.openxmlformats.org/officeDocument/2006/relationships" xmlns:p="http://schemas.openxmlformats.org/presentationml/2006/main">
   <p:cSld>
     <p:spTree>
       <p:nvGrpSpPr>
@@ -1074,7 +1012,7 @@
         <p:nvSpPr>
           <p:cNvPr id="2" name="Slide Image Placeholder 1"/>
           <p:cNvSpPr>
-            <a:spLocks noGrp="1"/>
+            <a:spLocks noGrp="1" noRot="1" noChangeAspect="1"/>
           </p:cNvSpPr>
           <p:nvPr>
             <p:ph type="sldImg" idx="2"/>
@@ -1089,7 +1027,7 @@
             <a:spLocks noGrp="1"/>
           </p:cNvSpPr>
           <p:nvPr>
-            <p:ph type="body" idx="3" sz="quarter"/>
+            <p:ph type="body" sz="quarter" idx="3"/>
           </p:nvPr>
         </p:nvSpPr>
         <p:spPr/>
@@ -1098,150 +1036,220 @@
           <a:lstStyle/>
           <a:p>
             <a:r>
-              <a:t>[2:50 – 3:50]</a:t>
-            </a:r>
-          </a:p>
-          <a:p/>
-          <a:p>
-            <a:r>
-              <a:t>The forward model. One equation. Optical depth at observation velocity v_obs</a:t>
-            </a:r>
-          </a:p>
-          <a:p>
-            <a:r>
-              <a:t>is a sum over source bins of gas density times the Voigt absorption kernel.</a:t>
-            </a:r>
-          </a:p>
-          <a:p/>
-          <a:p>
-            <a:r>
-              <a:t>CV translation: n_HI plays the role of σ — local opacity. H(a,x) is the</a:t>
-            </a:r>
-          </a:p>
-          <a:p>
-            <a:r>
-              <a:t>radiance equivalent — but it's a known closed-form kernel, not a learned</a:t>
-            </a:r>
-          </a:p>
-          <a:p>
-            <a:r>
-              <a:t>function. b is the thermal Doppler width — kernel bandwidth, varying across</a:t>
-            </a:r>
-          </a:p>
-          <a:p>
-            <a:r>
-              <a:t>the volume because temperature does. 𝒜 is a single learnable amplitude</a:t>
-            </a:r>
-          </a:p>
-          <a:p>
-            <a:r>
-              <a:t>absorbing all global constants.</a:t>
-            </a:r>
-          </a:p>
-          <a:p/>
-          <a:p>
-            <a:r>
-              <a:t>Crucially, the kernel argument x depends on peculiar velocity — gas motion</a:t>
-            </a:r>
-          </a:p>
-          <a:p>
-            <a:r>
-              <a:t>shifts the absorption frequency along v_obs. This is redshift-space</a:t>
-            </a:r>
-          </a:p>
-          <a:p>
-            <a:r>
-              <a:t>distortion. It enters the convolution kernel itself.</a:t>
-            </a:r>
-          </a:p>
-          <a:p/>
-          <a:p>
-            <a:r>
-              <a:t>This entire forward pass is autograd-compatible. We added a numerical Taylor</a:t>
-            </a:r>
-          </a:p>
-          <a:p>
-            <a:r>
-              <a:t>branch for the kernel near zero — small detail, but it disarms an attack</a:t>
-            </a:r>
-          </a:p>
-          <a:p>
-            <a:r>
-              <a:t>vector at the line center where the analytic limit has a removable</a:t>
-            </a:r>
-          </a:p>
-          <a:p>
-            <a:r>
-              <a:t>singularity.</a:t>
-            </a:r>
-          </a:p>
-          <a:p/>
-          <a:p>
-            <a:r>
-              <a:t>Loss. The targets are optical depths. Most of the volume is τ in zero to</a:t>
-            </a:r>
-          </a:p>
-          <a:p>
-            <a:r>
-              <a:t>five. A tiny fraction — damped Lyman-alpha systems — has τ at ten million.</a:t>
-            </a:r>
-          </a:p>
-          <a:p>
-            <a:r>
-              <a:t>Per-pixel MSE collapses onto these.</a:t>
-            </a:r>
-          </a:p>
-          <a:p/>
-          <a:p>
-            <a:r>
-              <a:t>Three coupled fixes:</a:t>
-            </a:r>
-          </a:p>
-          <a:p>
-            <a:r>
-              <a:t>1. Mask out the saturated cores entirely.</a:t>
-            </a:r>
-          </a:p>
-          <a:p>
-            <a:r>
-              <a:t>2. Cap the surviving forest at τ_max equals ten. We did NOT pick this</a:t>
-            </a:r>
-          </a:p>
-          <a:p>
-            <a:r>
-              <a:t>   number. We ran a sensitivity sweep at τ_max in 5, 10, 20 and the</a:t>
-            </a:r>
-          </a:p>
-          <a:p>
-            <a:r>
-              <a:t>   change in downstream flux power was 0.018 percent — two orders of</a:t>
-            </a:r>
-          </a:p>
-          <a:p>
-            <a:r>
-              <a:t>   magnitude under the pass criterion. The figure shows that gate.</a:t>
-            </a:r>
-          </a:p>
-          <a:p>
-            <a:r>
-              <a:t>3. Log1p-transform before MSE. The IGM opacity distribution is</a:t>
-            </a:r>
-          </a:p>
-          <a:p>
-            <a:r>
-              <a:t>   approximately log-normal. Log-space supervision matches the natural</a:t>
-            </a:r>
-          </a:p>
-          <a:p>
-            <a:r>
-              <a:t>   noise model — analogous to log-depth supervision in CV.</a:t>
-            </a:r>
-          </a:p>
-          <a:p/>
-          <a:p>
-            <a:r>
-              <a:t>Each part is physically motivated, not tuned.</a:t>
-            </a:r>
+              <a:rPr lang="en-US" altLang="ko-KR" dirty="0">
+                <a:effectLst/>
+              </a:rPr>
+              <a:t>"The key technical piece is the </a:t>
+            </a:r>
+            <a:r>
+              <a:rPr lang="en-US" altLang="ko-KR" b="1" dirty="0">
+                <a:effectLst/>
+              </a:rPr>
+              <a:t>differentiable physics rendering</a:t>
+            </a:r>
+            <a:r>
+              <a:rPr lang="en-US" altLang="ko-KR" dirty="0">
+                <a:effectLst/>
+              </a:rPr>
+              <a:t>:</a:t>
+            </a:r>
+          </a:p>
+          <a:p>
+            <a:endParaRPr lang="en-US" altLang="ko-KR" dirty="0">
+              <a:effectLst/>
+            </a:endParaRPr>
+          </a:p>
+          <a:p>
+            <a:r>
+              <a:rPr lang="en-US" altLang="ko-KR" dirty="0">
+                <a:effectLst/>
+              </a:rPr>
+              <a:t>So the </a:t>
+            </a:r>
+            <a:r>
+              <a:rPr lang="en-US" altLang="ko-KR" b="1" dirty="0">
+                <a:effectLst/>
+              </a:rPr>
+              <a:t>intuition</a:t>
+            </a:r>
+            <a:r>
+              <a:rPr lang="en-US" altLang="ko-KR" dirty="0">
+                <a:effectLst/>
+              </a:rPr>
+              <a:t> behind the </a:t>
+            </a:r>
+            <a:r>
+              <a:rPr lang="en-US" altLang="ko-KR" b="1" dirty="0">
+                <a:effectLst/>
+              </a:rPr>
+              <a:t>rendering equation </a:t>
+            </a:r>
+            <a:r>
+              <a:rPr lang="en-US" altLang="ko-KR" dirty="0">
+                <a:effectLst/>
+              </a:rPr>
+              <a:t>is:</a:t>
+            </a:r>
+          </a:p>
+          <a:p>
+            <a:r>
+              <a:rPr lang="en-US" altLang="ko-KR" dirty="0">
+                <a:effectLst/>
+              </a:rPr>
+              <a:t>Each </a:t>
+            </a:r>
+            <a:r>
+              <a:rPr lang="en-US" altLang="ko-KR" b="1" dirty="0">
+                <a:effectLst/>
+              </a:rPr>
+              <a:t>gas cell </a:t>
+            </a:r>
+            <a:r>
+              <a:rPr lang="en-US" altLang="ko-KR" dirty="0">
+                <a:effectLst/>
+              </a:rPr>
+              <a:t>contributes a </a:t>
+            </a:r>
+            <a:r>
+              <a:rPr lang="en-US" altLang="ko-KR" b="1" dirty="0">
+                <a:effectLst/>
+              </a:rPr>
+              <a:t>small absorption bump </a:t>
+            </a:r>
+            <a:r>
+              <a:rPr lang="en-US" altLang="ko-KR" dirty="0">
+                <a:effectLst/>
+              </a:rPr>
+              <a:t>whose </a:t>
+            </a:r>
+            <a:r>
+              <a:rPr lang="en-US" altLang="ko-KR" b="1" dirty="0">
+                <a:effectLst/>
+              </a:rPr>
+              <a:t>shape</a:t>
+            </a:r>
+            <a:r>
+              <a:rPr lang="en-US" altLang="ko-KR" dirty="0">
+                <a:effectLst/>
+              </a:rPr>
+              <a:t> is given by the </a:t>
+            </a:r>
+            <a:r>
+              <a:rPr lang="en-US" altLang="ko-KR" b="1" dirty="0">
+                <a:effectLst/>
+              </a:rPr>
+              <a:t>Voigt kernel </a:t>
+            </a:r>
+            <a:r>
+              <a:rPr lang="en-US" altLang="ko-KR" b="0" dirty="0">
+                <a:effectLst/>
+              </a:rPr>
+              <a:t>we saw 2 slides ago</a:t>
+            </a:r>
+          </a:p>
+          <a:p>
+            <a:r>
+              <a:rPr lang="en-US" altLang="ko-KR" dirty="0">
+                <a:effectLst/>
+              </a:rPr>
+              <a:t>(temperature-dependent width + peculiar velocity shift). </a:t>
+            </a:r>
+          </a:p>
+          <a:p>
+            <a:endParaRPr lang="en-US" altLang="ko-KR" dirty="0">
+              <a:effectLst/>
+            </a:endParaRPr>
+          </a:p>
+          <a:p>
+            <a:r>
+              <a:rPr lang="en-US" altLang="ko-KR" dirty="0">
+                <a:effectLst/>
+              </a:rPr>
+              <a:t>We </a:t>
+            </a:r>
+            <a:r>
+              <a:rPr lang="en-US" altLang="ko-KR" b="1" dirty="0">
+                <a:effectLst/>
+              </a:rPr>
+              <a:t>sum</a:t>
+            </a:r>
+            <a:r>
+              <a:rPr lang="en-US" altLang="ko-KR" dirty="0">
+                <a:effectLst/>
+              </a:rPr>
+              <a:t> all these bumps</a:t>
+            </a:r>
+            <a:r>
+              <a:rPr lang="en-US" altLang="ko-KR" b="1" dirty="0">
+                <a:effectLst/>
+              </a:rPr>
+              <a:t> along the ray</a:t>
+            </a:r>
+            <a:r>
+              <a:rPr lang="en-US" altLang="ko-KR" dirty="0">
+                <a:effectLst/>
+              </a:rPr>
+              <a:t> to get the </a:t>
+            </a:r>
+            <a:r>
+              <a:rPr lang="en-US" altLang="ko-KR" b="1" dirty="0">
+                <a:effectLst/>
+              </a:rPr>
+              <a:t>predicted</a:t>
+            </a:r>
+            <a:r>
+              <a:rPr lang="en-US" altLang="ko-KR" dirty="0">
+                <a:effectLst/>
+              </a:rPr>
+              <a:t> 1D spectrum.</a:t>
+            </a:r>
+          </a:p>
+          <a:p>
+            <a:endParaRPr lang="en-US" altLang="ko-KR" dirty="0">
+              <a:effectLst/>
+            </a:endParaRPr>
+          </a:p>
+          <a:p>
+            <a:r>
+              <a:rPr lang="en-US" altLang="ko-KR" dirty="0">
+                <a:effectLst/>
+              </a:rPr>
+              <a:t>For the loss, </a:t>
+            </a:r>
+          </a:p>
+          <a:p>
+            <a:r>
+              <a:rPr lang="en-US" altLang="ko-KR" dirty="0"/>
+              <a:t>1. Mask out completely saturated cores (they carry no useful information)</a:t>
+            </a:r>
+          </a:p>
+          <a:p>
+            <a:r>
+              <a:rPr lang="en-US" altLang="ko-KR" dirty="0"/>
+              <a:t>2. Cap remaining values at τ=10</a:t>
+            </a:r>
+          </a:p>
+          <a:p>
+            <a:r>
+              <a:rPr lang="en-US" altLang="ko-KR" dirty="0"/>
+              <a:t>3. Supervise in </a:t>
+            </a:r>
+            <a:r>
+              <a:rPr lang="en-US" altLang="ko-KR" b="1" dirty="0"/>
+              <a:t>log(1 + τ)</a:t>
+            </a:r>
+            <a:r>
+              <a:rPr lang="en-US" altLang="ko-KR" dirty="0"/>
+              <a:t> space (matches the natural log-normal distribution of IGM opacity)</a:t>
+            </a:r>
+          </a:p>
+          <a:p>
+            <a:endParaRPr lang="en-US" altLang="ko-KR" dirty="0"/>
+          </a:p>
+          <a:p>
+            <a:endParaRPr lang="en-US" altLang="ko-KR" dirty="0">
+              <a:effectLst/>
+            </a:endParaRPr>
           </a:p>
         </p:txBody>
       </p:sp>
@@ -1252,7 +1260,7 @@
             <a:spLocks noGrp="1"/>
           </p:cNvSpPr>
           <p:nvPr>
-            <p:ph type="sldNum" idx="5" sz="quarter"/>
+            <p:ph type="sldNum" sz="quarter" idx="5"/>
           </p:nvPr>
         </p:nvSpPr>
         <p:spPr/>
@@ -1266,7 +1274,7 @@
 </file>
 
 <file path=ppt/notesSlides/notesSlide6.xml><?xml version="1.0" encoding="utf-8"?>
-<p:notes xmlns:a="http://schemas.openxmlformats.org/drawingml/2006/main" xmlns:p="http://schemas.openxmlformats.org/presentationml/2006/main" xmlns:r="http://schemas.openxmlformats.org/officeDocument/2006/relationships">
+<p:notes xmlns:a="http://schemas.openxmlformats.org/drawingml/2006/main" xmlns:r="http://schemas.openxmlformats.org/officeDocument/2006/relationships" xmlns:p="http://schemas.openxmlformats.org/presentationml/2006/main">
   <p:cSld>
     <p:spTree>
       <p:nvGrpSpPr>
@@ -1286,7 +1294,7 @@
         <p:nvSpPr>
           <p:cNvPr id="2" name="Slide Image Placeholder 1"/>
           <p:cNvSpPr>
-            <a:spLocks noGrp="1"/>
+            <a:spLocks noGrp="1" noRot="1" noChangeAspect="1"/>
           </p:cNvSpPr>
           <p:nvPr>
             <p:ph type="sldImg" idx="2"/>
@@ -1301,7 +1309,7 @@
             <a:spLocks noGrp="1"/>
           </p:cNvSpPr>
           <p:nvPr>
-            <p:ph type="body" idx="3" sz="quarter"/>
+            <p:ph type="body" sz="quarter" idx="3"/>
           </p:nvPr>
         </p:nvSpPr>
         <p:spPr/>
@@ -1310,77 +1318,79 @@
           <a:lstStyle/>
           <a:p>
             <a:r>
-              <a:t>[3:50 – 4:30]</a:t>
-            </a:r>
-          </a:p>
-          <a:p/>
-          <a:p>
-            <a:r>
-              <a:t>Here's what's done. Four physics variants — same dark matter, different</a:t>
-            </a:r>
-          </a:p>
-          <a:p>
-            <a:r>
-              <a:t>feedback recipes (no feedback, stellar wind only, stellar wind plus AGN,</a:t>
-            </a:r>
-          </a:p>
-          <a:p>
-            <a:r>
-              <a:t>strong AGN). Each gets its own MLP fit.</a:t>
-            </a:r>
-          </a:p>
-          <a:p/>
-          <a:p>
-            <a:r>
-              <a:t>At Tier-1 sparsity — 64 sightlines through the 60 Mpc box — every variant</a:t>
-            </a:r>
-          </a:p>
-          <a:p>
-            <a:r>
-              <a:t>recovers the mean transmitted flux to within 0.66 percent across the four</a:t>
-            </a:r>
-          </a:p>
-          <a:p>
-            <a:r>
-              <a:t>physics: 0.9247 to 0.9308, against the observational anchor 0.877.</a:t>
-            </a:r>
-          </a:p>
-          <a:p/>
-          <a:p>
-            <a:r>
-              <a:t>Cell entries are mean-flux divided by the learned amplitude 𝒜.</a:t>
-            </a:r>
-          </a:p>
-          <a:p/>
-          <a:p>
-            <a:r>
-              <a:t>The empty cells are the rest of the 4×4 ablation matrix — sightline</a:t>
-            </a:r>
-          </a:p>
-          <a:p>
-            <a:r>
-              <a:t>densities of 256, 1024, and 16,384. The architecture is identical; the</a:t>
-            </a:r>
-          </a:p>
-          <a:p>
-            <a:r>
-              <a:t>compute is the gate. Tier 4 alone is 792 GPU-hours.</a:t>
-            </a:r>
-          </a:p>
-          <a:p/>
-          <a:p>
-            <a:r>
-              <a:t>Across the matrix, the headline claim is the *degradation curve* — how</a:t>
-            </a:r>
-          </a:p>
-          <a:p>
-            <a:r>
-              <a:t>reconstruction quality drops as sightlines get sparser. That's the CVPR</a:t>
-            </a:r>
-          </a:p>
-          <a:p>
-            <a:r>
-              <a:t>contribution.</a:t>
+              <a:rPr lang="en-US" altLang="ko-KR" dirty="0">
+                <a:effectLst/>
+              </a:rPr>
+              <a:t>“On a sample run with only </a:t>
+            </a:r>
+            <a:r>
+              <a:rPr lang="en-US" altLang="ko-KR" b="1" dirty="0">
+                <a:effectLst/>
+              </a:rPr>
+              <a:t>64 rays</a:t>
+            </a:r>
+            <a:r>
+              <a:rPr lang="en-US" altLang="ko-KR" dirty="0">
+                <a:effectLst/>
+              </a:rPr>
+              <a:t> through the entire simulation 60 Mpc box and the model recovers nearly identical mean transmitted flux.</a:t>
+            </a:r>
+          </a:p>
+          <a:p>
+            <a:r>
+              <a:rPr lang="en-US" altLang="ko-KR" strike="sngStrike" dirty="0">
+                <a:effectLst/>
+              </a:rPr>
+              <a:t>across </a:t>
+            </a:r>
+            <a:r>
+              <a:rPr lang="en-US" altLang="ko-KR" b="1" strike="sngStrike" dirty="0">
+                <a:effectLst/>
+              </a:rPr>
+              <a:t>four very different</a:t>
+            </a:r>
+            <a:r>
+              <a:rPr lang="en-US" altLang="ko-KR" strike="sngStrike" dirty="0">
+                <a:effectLst/>
+              </a:rPr>
+              <a:t> baryonic physics implementations (0.9247 to 0.9308).</a:t>
+            </a:r>
+          </a:p>
+          <a:p>
+            <a:endParaRPr lang="en-US" altLang="ko-KR" dirty="0">
+              <a:effectLst/>
+            </a:endParaRPr>
+          </a:p>
+          <a:p>
+            <a:r>
+              <a:rPr lang="en-US" altLang="ko-KR" dirty="0">
+                <a:effectLst/>
+              </a:rPr>
+              <a:t>That’s a spread of </a:t>
+            </a:r>
+            <a:r>
+              <a:rPr lang="en-US" altLang="ko-KR" b="1" dirty="0">
+                <a:effectLst/>
+              </a:rPr>
+              <a:t>0.66%</a:t>
+            </a:r>
+            <a:r>
+              <a:rPr lang="en-US" altLang="ko-KR" dirty="0">
+                <a:effectLst/>
+              </a:rPr>
+              <a:t>, which is within observational </a:t>
+            </a:r>
+            <a:r>
+              <a:rPr lang="en-US" altLang="ko-KR" strike="sngStrike" dirty="0">
+                <a:effectLst/>
+              </a:rPr>
+              <a:t>calibration</a:t>
+            </a:r>
+            <a:r>
+              <a:rPr lang="en-US" altLang="ko-KR" dirty="0">
+                <a:effectLst/>
+              </a:rPr>
+              <a:t> tolerance.</a:t>
             </a:r>
           </a:p>
         </p:txBody>
@@ -1392,7 +1402,7 @@
             <a:spLocks noGrp="1"/>
           </p:cNvSpPr>
           <p:nvPr>
-            <p:ph type="sldNum" idx="5" sz="quarter"/>
+            <p:ph type="sldNum" sz="quarter" idx="5"/>
           </p:nvPr>
         </p:nvSpPr>
         <p:spPr/>
@@ -1406,7 +1416,7 @@
 </file>
 
 <file path=ppt/notesSlides/notesSlide7.xml><?xml version="1.0" encoding="utf-8"?>
-<p:notes xmlns:a="http://schemas.openxmlformats.org/drawingml/2006/main" xmlns:p="http://schemas.openxmlformats.org/presentationml/2006/main" xmlns:r="http://schemas.openxmlformats.org/officeDocument/2006/relationships">
+<p:notes xmlns:a="http://schemas.openxmlformats.org/drawingml/2006/main" xmlns:r="http://schemas.openxmlformats.org/officeDocument/2006/relationships" xmlns:p="http://schemas.openxmlformats.org/presentationml/2006/main">
   <p:cSld>
     <p:spTree>
       <p:nvGrpSpPr>
@@ -1426,7 +1436,7 @@
         <p:nvSpPr>
           <p:cNvPr id="2" name="Slide Image Placeholder 1"/>
           <p:cNvSpPr>
-            <a:spLocks noGrp="1"/>
+            <a:spLocks noGrp="1" noRot="1" noChangeAspect="1"/>
           </p:cNvSpPr>
           <p:nvPr>
             <p:ph type="sldImg" idx="2"/>
@@ -1441,7 +1451,7 @@
             <a:spLocks noGrp="1"/>
           </p:cNvSpPr>
           <p:nvPr>
-            <p:ph type="body" idx="3" sz="quarter"/>
+            <p:ph type="body" sz="quarter" idx="3"/>
           </p:nvPr>
         </p:nvSpPr>
         <p:spPr/>
@@ -1450,78 +1460,86 @@
           <a:lstStyle/>
           <a:p>
             <a:r>
-              <a:t>[4:30 – 5:00]</a:t>
-            </a:r>
-          </a:p>
-          <a:p/>
-          <a:p>
-            <a:r>
-              <a:t>What's next. Production sweep across the remaining 12 cells of the ablation</a:t>
-            </a:r>
-          </a:p>
-          <a:p>
-            <a:r>
-              <a:t>matrix. Three downstream evaluators are implemented and waiting: 1D flux</a:t>
-            </a:r>
-          </a:p>
-          <a:p>
-            <a:r>
-              <a:t>power spectrum, Pearson cross-correlation between predicted and ground-truth</a:t>
-            </a:r>
-          </a:p>
-          <a:p>
-            <a:r>
-              <a:t>density, and Kolmogorov-Smirnov distance on the flux PDF.</a:t>
-            </a:r>
-          </a:p>
-          <a:p/>
-          <a:p>
-            <a:r>
-              <a:t>Resource ask: ~820 GPU-hours, four GPUs in parallel, nine calendar days,</a:t>
-            </a:r>
-          </a:p>
-          <a:p>
-            <a:r>
-              <a:t>≥12 GB VRAM, single-GPU per job. Compatible with any modern data-center</a:t>
-            </a:r>
-          </a:p>
-          <a:p>
-            <a:r>
-              <a:t>or HPC cluster.</a:t>
-            </a:r>
-          </a:p>
-          <a:p/>
-          <a:p>
-            <a:r>
-              <a:t>Final framing — and this is the line to land:</a:t>
-            </a:r>
-          </a:p>
-          <a:p/>
-          <a:p>
-            <a:r>
-              <a:t>The architecture is the easy part. The contribution is the differentiable</a:t>
-            </a:r>
-          </a:p>
-          <a:p>
-            <a:r>
-              <a:t>forward model and the loss design that makes per-pixel supervision behave</a:t>
-            </a:r>
-          </a:p>
-          <a:p>
-            <a:r>
-              <a:t>under heavy-tailed targets. NeRF turned out to be the right representation</a:t>
-            </a:r>
-          </a:p>
-          <a:p>
-            <a:r>
-              <a:t>for this problem — continuous, sparse-input-friendly, autograd-clean.</a:t>
-            </a:r>
-          </a:p>
-          <a:p/>
-          <a:p>
-            <a:r>
+              <a:rPr lang="en-US" altLang="ko-KR" strike="sngStrike" dirty="0">
+                <a:effectLst/>
+              </a:rPr>
+              <a:t>“We still need to finish the training on the full data (Tiers 2–4) and run the final cosmological metrics (flux power spectrum, density correlation, flux PDF).</a:t>
+            </a:r>
+          </a:p>
+          <a:p>
+            <a:endParaRPr lang="en-US" altLang="ko-KR" strike="sngStrike" dirty="0">
+              <a:effectLst/>
+            </a:endParaRPr>
+          </a:p>
+          <a:p>
+            <a:r>
+              <a:rPr lang="en-US" altLang="ko-KR" b="1" strike="sngStrike" dirty="0">
+                <a:effectLst/>
+              </a:rPr>
+              <a:t>Final message</a:t>
+            </a:r>
+            <a:r>
+              <a:rPr lang="en-US" altLang="ko-KR" strike="sngStrike" dirty="0">
+                <a:effectLst/>
+              </a:rPr>
+              <a:t>: The </a:t>
+            </a:r>
+            <a:r>
+              <a:rPr lang="en-US" altLang="ko-KR" strike="sngStrike" dirty="0" err="1">
+                <a:effectLst/>
+              </a:rPr>
+              <a:t>NeRF</a:t>
+            </a:r>
+            <a:r>
+              <a:rPr lang="en-US" altLang="ko-KR" strike="sngStrike" dirty="0">
+                <a:effectLst/>
+              </a:rPr>
+              <a:t> architecture was the easy part. </a:t>
+            </a:r>
+          </a:p>
+          <a:p>
+            <a:r>
+              <a:rPr lang="en-US" altLang="ko-KR" strike="sngStrike" dirty="0">
+                <a:effectLst/>
+              </a:rPr>
+              <a:t>The real contribution is showing how to build a </a:t>
+            </a:r>
+            <a:r>
+              <a:rPr lang="en-US" altLang="ko-KR" b="1" strike="sngStrike" dirty="0">
+                <a:effectLst/>
+              </a:rPr>
+              <a:t>differentiable physics-based renderer</a:t>
+            </a:r>
+            <a:r>
+              <a:rPr lang="en-US" altLang="ko-KR" strike="sngStrike" dirty="0">
+                <a:effectLst/>
+              </a:rPr>
+              <a:t> and design a loss that makes per-sample supervision work reliably on heavy-tailed scientific data.</a:t>
+            </a:r>
+          </a:p>
+          <a:p>
+            <a:endParaRPr lang="en-US" altLang="ko-KR" strike="sngStrike" dirty="0">
+              <a:effectLst/>
+            </a:endParaRPr>
+          </a:p>
+          <a:p>
+            <a:r>
+              <a:rPr lang="en-US" altLang="ko-KR" strike="sngStrike" dirty="0">
+                <a:effectLst/>
+              </a:rPr>
+              <a:t>This suggests implicit neural fields can be a powerful general tool for inverse problems well beyond traditional rendering."</a:t>
+            </a:r>
+          </a:p>
+          <a:p>
+            <a:r>
+              <a:rPr lang="en-US" altLang="ko-KR" b="1" strike="sngStrike" dirty="0">
+                <a:effectLst/>
+              </a:rPr>
               <a:t>Thank you.</a:t>
             </a:r>
+            <a:endParaRPr lang="en-US" altLang="ko-KR" strike="sngStrike" dirty="0">
+              <a:effectLst/>
+            </a:endParaRPr>
           </a:p>
         </p:txBody>
       </p:sp>
@@ -1532,7 +1550,7 @@
             <a:spLocks noGrp="1"/>
           </p:cNvSpPr>
           <p:nvPr>
-            <p:ph type="sldNum" idx="5" sz="quarter"/>
+            <p:ph type="sldNum" sz="quarter" idx="5"/>
           </p:nvPr>
         </p:nvSpPr>
         <p:spPr/>
@@ -1583,10 +1601,9 @@
           <a:lstStyle/>
           <a:p>
             <a:r>
-              <a:rPr lang="en-US" smtClean="0"/>
+              <a:rPr lang="en-US"/>
               <a:t>Click to edit Master title style</a:t>
             </a:r>
-            <a:endParaRPr lang="en-US"/>
           </a:p>
         </p:txBody>
       </p:sp>
@@ -1702,10 +1719,9 @@
           </a:lstStyle>
           <a:p>
             <a:r>
-              <a:rPr lang="en-US" smtClean="0"/>
+              <a:rPr lang="en-US"/>
               <a:t>Click to edit Master subtitle style</a:t>
             </a:r>
-            <a:endParaRPr lang="en-US"/>
           </a:p>
         </p:txBody>
       </p:sp>
@@ -1726,7 +1742,7 @@
           <a:p>
             <a:fld id="{5BCAD085-E8A6-8845-BD4E-CB4CCA059FC4}" type="datetimeFigureOut">
               <a:rPr lang="en-US" smtClean="0"/>
-              <a:t>1/27/13</a:t>
+              <a:t>5/12/2026</a:t>
             </a:fld>
             <a:endParaRPr lang="en-US"/>
           </a:p>
@@ -1820,10 +1836,9 @@
           <a:lstStyle/>
           <a:p>
             <a:r>
-              <a:rPr lang="en-US" smtClean="0"/>
+              <a:rPr lang="en-US"/>
               <a:t>Click to edit Master title style</a:t>
             </a:r>
-            <a:endParaRPr lang="en-US"/>
           </a:p>
         </p:txBody>
       </p:sp>
@@ -1844,38 +1859,37 @@
           <a:p>
             <a:pPr lvl="0"/>
             <a:r>
-              <a:rPr lang="en-US" smtClean="0"/>
+              <a:rPr lang="en-US"/>
               <a:t>Click to edit Master text styles</a:t>
             </a:r>
           </a:p>
           <a:p>
             <a:pPr lvl="1"/>
             <a:r>
-              <a:rPr lang="en-US" smtClean="0"/>
+              <a:rPr lang="en-US"/>
               <a:t>Second level</a:t>
             </a:r>
           </a:p>
           <a:p>
             <a:pPr lvl="2"/>
             <a:r>
-              <a:rPr lang="en-US" smtClean="0"/>
+              <a:rPr lang="en-US"/>
               <a:t>Third level</a:t>
             </a:r>
           </a:p>
           <a:p>
             <a:pPr lvl="3"/>
             <a:r>
-              <a:rPr lang="en-US" smtClean="0"/>
+              <a:rPr lang="en-US"/>
               <a:t>Fourth level</a:t>
             </a:r>
           </a:p>
           <a:p>
             <a:pPr lvl="4"/>
             <a:r>
-              <a:rPr lang="en-US" smtClean="0"/>
+              <a:rPr lang="en-US"/>
               <a:t>Fifth level</a:t>
             </a:r>
-            <a:endParaRPr lang="en-US"/>
           </a:p>
         </p:txBody>
       </p:sp>
@@ -1896,7 +1910,7 @@
           <a:p>
             <a:fld id="{5BCAD085-E8A6-8845-BD4E-CB4CCA059FC4}" type="datetimeFigureOut">
               <a:rPr lang="en-US" smtClean="0"/>
-              <a:t>1/27/13</a:t>
+              <a:t>5/12/2026</a:t>
             </a:fld>
             <a:endParaRPr lang="en-US"/>
           </a:p>
@@ -1995,10 +2009,9 @@
           <a:lstStyle/>
           <a:p>
             <a:r>
-              <a:rPr lang="en-US" smtClean="0"/>
+              <a:rPr lang="en-US"/>
               <a:t>Click to edit Master title style</a:t>
             </a:r>
-            <a:endParaRPr lang="en-US"/>
           </a:p>
         </p:txBody>
       </p:sp>
@@ -2024,38 +2037,37 @@
           <a:p>
             <a:pPr lvl="0"/>
             <a:r>
-              <a:rPr lang="en-US" smtClean="0"/>
+              <a:rPr lang="en-US"/>
               <a:t>Click to edit Master text styles</a:t>
             </a:r>
           </a:p>
           <a:p>
             <a:pPr lvl="1"/>
             <a:r>
-              <a:rPr lang="en-US" smtClean="0"/>
+              <a:rPr lang="en-US"/>
               <a:t>Second level</a:t>
             </a:r>
           </a:p>
           <a:p>
             <a:pPr lvl="2"/>
             <a:r>
-              <a:rPr lang="en-US" smtClean="0"/>
+              <a:rPr lang="en-US"/>
               <a:t>Third level</a:t>
             </a:r>
           </a:p>
           <a:p>
             <a:pPr lvl="3"/>
             <a:r>
-              <a:rPr lang="en-US" smtClean="0"/>
+              <a:rPr lang="en-US"/>
               <a:t>Fourth level</a:t>
             </a:r>
           </a:p>
           <a:p>
             <a:pPr lvl="4"/>
             <a:r>
-              <a:rPr lang="en-US" smtClean="0"/>
+              <a:rPr lang="en-US"/>
               <a:t>Fifth level</a:t>
             </a:r>
-            <a:endParaRPr lang="en-US"/>
           </a:p>
         </p:txBody>
       </p:sp>
@@ -2076,7 +2088,7 @@
           <a:p>
             <a:fld id="{5BCAD085-E8A6-8845-BD4E-CB4CCA059FC4}" type="datetimeFigureOut">
               <a:rPr lang="en-US" smtClean="0"/>
-              <a:t>1/27/13</a:t>
+              <a:t>5/12/2026</a:t>
             </a:fld>
             <a:endParaRPr lang="en-US"/>
           </a:p>
@@ -2170,10 +2182,9 @@
           <a:lstStyle/>
           <a:p>
             <a:r>
-              <a:rPr lang="en-US" smtClean="0"/>
+              <a:rPr lang="en-US"/>
               <a:t>Click to edit Master title style</a:t>
             </a:r>
-            <a:endParaRPr lang="en-US"/>
           </a:p>
         </p:txBody>
       </p:sp>
@@ -2194,38 +2205,37 @@
           <a:p>
             <a:pPr lvl="0"/>
             <a:r>
-              <a:rPr lang="en-US" smtClean="0"/>
+              <a:rPr lang="en-US"/>
               <a:t>Click to edit Master text styles</a:t>
             </a:r>
           </a:p>
           <a:p>
             <a:pPr lvl="1"/>
             <a:r>
-              <a:rPr lang="en-US" smtClean="0"/>
+              <a:rPr lang="en-US"/>
               <a:t>Second level</a:t>
             </a:r>
           </a:p>
           <a:p>
             <a:pPr lvl="2"/>
             <a:r>
-              <a:rPr lang="en-US" smtClean="0"/>
+              <a:rPr lang="en-US"/>
               <a:t>Third level</a:t>
             </a:r>
           </a:p>
           <a:p>
             <a:pPr lvl="3"/>
             <a:r>
-              <a:rPr lang="en-US" smtClean="0"/>
+              <a:rPr lang="en-US"/>
               <a:t>Fourth level</a:t>
             </a:r>
           </a:p>
           <a:p>
             <a:pPr lvl="4"/>
             <a:r>
-              <a:rPr lang="en-US" smtClean="0"/>
+              <a:rPr lang="en-US"/>
               <a:t>Fifth level</a:t>
             </a:r>
-            <a:endParaRPr lang="en-US"/>
           </a:p>
         </p:txBody>
       </p:sp>
@@ -2246,7 +2256,7 @@
           <a:p>
             <a:fld id="{5BCAD085-E8A6-8845-BD4E-CB4CCA059FC4}" type="datetimeFigureOut">
               <a:rPr lang="en-US" smtClean="0"/>
-              <a:t>1/27/13</a:t>
+              <a:t>5/12/2026</a:t>
             </a:fld>
             <a:endParaRPr lang="en-US"/>
           </a:p>
@@ -2349,10 +2359,9 @@
           </a:lstStyle>
           <a:p>
             <a:r>
-              <a:rPr lang="en-US" smtClean="0"/>
+              <a:rPr lang="en-US"/>
               <a:t>Click to edit Master title style</a:t>
             </a:r>
-            <a:endParaRPr lang="en-US"/>
           </a:p>
         </p:txBody>
       </p:sp>
@@ -2469,7 +2478,7 @@
           <a:p>
             <a:pPr lvl="0"/>
             <a:r>
-              <a:rPr lang="en-US" smtClean="0"/>
+              <a:rPr lang="en-US"/>
               <a:t>Click to edit Master text styles</a:t>
             </a:r>
           </a:p>
@@ -2492,7 +2501,7 @@
           <a:p>
             <a:fld id="{5BCAD085-E8A6-8845-BD4E-CB4CCA059FC4}" type="datetimeFigureOut">
               <a:rPr lang="en-US" smtClean="0"/>
-              <a:t>1/27/13</a:t>
+              <a:t>5/12/2026</a:t>
             </a:fld>
             <a:endParaRPr lang="en-US"/>
           </a:p>
@@ -2586,10 +2595,9 @@
           <a:lstStyle/>
           <a:p>
             <a:r>
-              <a:rPr lang="en-US" smtClean="0"/>
+              <a:rPr lang="en-US"/>
               <a:t>Click to edit Master title style</a:t>
             </a:r>
-            <a:endParaRPr lang="en-US"/>
           </a:p>
         </p:txBody>
       </p:sp>
@@ -2643,38 +2651,37 @@
           <a:p>
             <a:pPr lvl="0"/>
             <a:r>
-              <a:rPr lang="en-US" smtClean="0"/>
+              <a:rPr lang="en-US"/>
               <a:t>Click to edit Master text styles</a:t>
             </a:r>
           </a:p>
           <a:p>
             <a:pPr lvl="1"/>
             <a:r>
-              <a:rPr lang="en-US" smtClean="0"/>
+              <a:rPr lang="en-US"/>
               <a:t>Second level</a:t>
             </a:r>
           </a:p>
           <a:p>
             <a:pPr lvl="2"/>
             <a:r>
-              <a:rPr lang="en-US" smtClean="0"/>
+              <a:rPr lang="en-US"/>
               <a:t>Third level</a:t>
             </a:r>
           </a:p>
           <a:p>
             <a:pPr lvl="3"/>
             <a:r>
-              <a:rPr lang="en-US" smtClean="0"/>
+              <a:rPr lang="en-US"/>
               <a:t>Fourth level</a:t>
             </a:r>
           </a:p>
           <a:p>
             <a:pPr lvl="4"/>
             <a:r>
-              <a:rPr lang="en-US" smtClean="0"/>
+              <a:rPr lang="en-US"/>
               <a:t>Fifth level</a:t>
             </a:r>
-            <a:endParaRPr lang="en-US"/>
           </a:p>
         </p:txBody>
       </p:sp>
@@ -2728,38 +2735,37 @@
           <a:p>
             <a:pPr lvl="0"/>
             <a:r>
-              <a:rPr lang="en-US" smtClean="0"/>
+              <a:rPr lang="en-US"/>
               <a:t>Click to edit Master text styles</a:t>
             </a:r>
           </a:p>
           <a:p>
             <a:pPr lvl="1"/>
             <a:r>
-              <a:rPr lang="en-US" smtClean="0"/>
+              <a:rPr lang="en-US"/>
               <a:t>Second level</a:t>
             </a:r>
           </a:p>
           <a:p>
             <a:pPr lvl="2"/>
             <a:r>
-              <a:rPr lang="en-US" smtClean="0"/>
+              <a:rPr lang="en-US"/>
               <a:t>Third level</a:t>
             </a:r>
           </a:p>
           <a:p>
             <a:pPr lvl="3"/>
             <a:r>
-              <a:rPr lang="en-US" smtClean="0"/>
+              <a:rPr lang="en-US"/>
               <a:t>Fourth level</a:t>
             </a:r>
           </a:p>
           <a:p>
             <a:pPr lvl="4"/>
             <a:r>
-              <a:rPr lang="en-US" smtClean="0"/>
+              <a:rPr lang="en-US"/>
               <a:t>Fifth level</a:t>
             </a:r>
-            <a:endParaRPr lang="en-US"/>
           </a:p>
         </p:txBody>
       </p:sp>
@@ -2780,7 +2786,7 @@
           <a:p>
             <a:fld id="{5BCAD085-E8A6-8845-BD4E-CB4CCA059FC4}" type="datetimeFigureOut">
               <a:rPr lang="en-US" smtClean="0"/>
-              <a:t>1/27/13</a:t>
+              <a:t>5/12/2026</a:t>
             </a:fld>
             <a:endParaRPr lang="en-US"/>
           </a:p>
@@ -2878,10 +2884,9 @@
           </a:lstStyle>
           <a:p>
             <a:r>
-              <a:rPr lang="en-US" smtClean="0"/>
+              <a:rPr lang="en-US"/>
               <a:t>Click to edit Master title style</a:t>
             </a:r>
-            <a:endParaRPr lang="en-US"/>
           </a:p>
         </p:txBody>
       </p:sp>
@@ -2944,7 +2949,7 @@
           <a:p>
             <a:pPr lvl="0"/>
             <a:r>
-              <a:rPr lang="en-US" smtClean="0"/>
+              <a:rPr lang="en-US"/>
               <a:t>Click to edit Master text styles</a:t>
             </a:r>
           </a:p>
@@ -3000,38 +3005,37 @@
           <a:p>
             <a:pPr lvl="0"/>
             <a:r>
-              <a:rPr lang="en-US" smtClean="0"/>
+              <a:rPr lang="en-US"/>
               <a:t>Click to edit Master text styles</a:t>
             </a:r>
           </a:p>
           <a:p>
             <a:pPr lvl="1"/>
             <a:r>
-              <a:rPr lang="en-US" smtClean="0"/>
+              <a:rPr lang="en-US"/>
               <a:t>Second level</a:t>
             </a:r>
           </a:p>
           <a:p>
             <a:pPr lvl="2"/>
             <a:r>
-              <a:rPr lang="en-US" smtClean="0"/>
+              <a:rPr lang="en-US"/>
               <a:t>Third level</a:t>
             </a:r>
           </a:p>
           <a:p>
             <a:pPr lvl="3"/>
             <a:r>
-              <a:rPr lang="en-US" smtClean="0"/>
+              <a:rPr lang="en-US"/>
               <a:t>Fourth level</a:t>
             </a:r>
           </a:p>
           <a:p>
             <a:pPr lvl="4"/>
             <a:r>
-              <a:rPr lang="en-US" smtClean="0"/>
+              <a:rPr lang="en-US"/>
               <a:t>Fifth level</a:t>
             </a:r>
-            <a:endParaRPr lang="en-US"/>
           </a:p>
         </p:txBody>
       </p:sp>
@@ -3094,7 +3098,7 @@
           <a:p>
             <a:pPr lvl="0"/>
             <a:r>
-              <a:rPr lang="en-US" smtClean="0"/>
+              <a:rPr lang="en-US"/>
               <a:t>Click to edit Master text styles</a:t>
             </a:r>
           </a:p>
@@ -3150,38 +3154,37 @@
           <a:p>
             <a:pPr lvl="0"/>
             <a:r>
-              <a:rPr lang="en-US" smtClean="0"/>
+              <a:rPr lang="en-US"/>
               <a:t>Click to edit Master text styles</a:t>
             </a:r>
           </a:p>
           <a:p>
             <a:pPr lvl="1"/>
             <a:r>
-              <a:rPr lang="en-US" smtClean="0"/>
+              <a:rPr lang="en-US"/>
               <a:t>Second level</a:t>
             </a:r>
           </a:p>
           <a:p>
             <a:pPr lvl="2"/>
             <a:r>
-              <a:rPr lang="en-US" smtClean="0"/>
+              <a:rPr lang="en-US"/>
               <a:t>Third level</a:t>
             </a:r>
           </a:p>
           <a:p>
             <a:pPr lvl="3"/>
             <a:r>
-              <a:rPr lang="en-US" smtClean="0"/>
+              <a:rPr lang="en-US"/>
               <a:t>Fourth level</a:t>
             </a:r>
           </a:p>
           <a:p>
             <a:pPr lvl="4"/>
             <a:r>
-              <a:rPr lang="en-US" smtClean="0"/>
+              <a:rPr lang="en-US"/>
               <a:t>Fifth level</a:t>
             </a:r>
-            <a:endParaRPr lang="en-US"/>
           </a:p>
         </p:txBody>
       </p:sp>
@@ -3202,7 +3205,7 @@
           <a:p>
             <a:fld id="{5BCAD085-E8A6-8845-BD4E-CB4CCA059FC4}" type="datetimeFigureOut">
               <a:rPr lang="en-US" smtClean="0"/>
-              <a:t>1/27/13</a:t>
+              <a:t>5/12/2026</a:t>
             </a:fld>
             <a:endParaRPr lang="en-US"/>
           </a:p>
@@ -3296,10 +3299,9 @@
           <a:lstStyle/>
           <a:p>
             <a:r>
-              <a:rPr lang="en-US" smtClean="0"/>
+              <a:rPr lang="en-US"/>
               <a:t>Click to edit Master title style</a:t>
             </a:r>
-            <a:endParaRPr lang="en-US"/>
           </a:p>
         </p:txBody>
       </p:sp>
@@ -3320,7 +3322,7 @@
           <a:p>
             <a:fld id="{5BCAD085-E8A6-8845-BD4E-CB4CCA059FC4}" type="datetimeFigureOut">
               <a:rPr lang="en-US" smtClean="0"/>
-              <a:t>1/27/13</a:t>
+              <a:t>5/12/2026</a:t>
             </a:fld>
             <a:endParaRPr lang="en-US"/>
           </a:p>
@@ -3415,7 +3417,7 @@
           <a:p>
             <a:fld id="{5BCAD085-E8A6-8845-BD4E-CB4CCA059FC4}" type="datetimeFigureOut">
               <a:rPr lang="en-US" smtClean="0"/>
-              <a:t>1/27/13</a:t>
+              <a:t>5/12/2026</a:t>
             </a:fld>
             <a:endParaRPr lang="en-US"/>
           </a:p>
@@ -3518,10 +3520,9 @@
           </a:lstStyle>
           <a:p>
             <a:r>
-              <a:rPr lang="en-US" smtClean="0"/>
+              <a:rPr lang="en-US"/>
               <a:t>Click to edit Master title style</a:t>
             </a:r>
-            <a:endParaRPr lang="en-US"/>
           </a:p>
         </p:txBody>
       </p:sp>
@@ -3575,38 +3576,37 @@
           <a:p>
             <a:pPr lvl="0"/>
             <a:r>
-              <a:rPr lang="en-US" smtClean="0"/>
+              <a:rPr lang="en-US"/>
               <a:t>Click to edit Master text styles</a:t>
             </a:r>
           </a:p>
           <a:p>
             <a:pPr lvl="1"/>
             <a:r>
-              <a:rPr lang="en-US" smtClean="0"/>
+              <a:rPr lang="en-US"/>
               <a:t>Second level</a:t>
             </a:r>
           </a:p>
           <a:p>
             <a:pPr lvl="2"/>
             <a:r>
-              <a:rPr lang="en-US" smtClean="0"/>
+              <a:rPr lang="en-US"/>
               <a:t>Third level</a:t>
             </a:r>
           </a:p>
           <a:p>
             <a:pPr lvl="3"/>
             <a:r>
-              <a:rPr lang="en-US" smtClean="0"/>
+              <a:rPr lang="en-US"/>
               <a:t>Fourth level</a:t>
             </a:r>
           </a:p>
           <a:p>
             <a:pPr lvl="4"/>
             <a:r>
-              <a:rPr lang="en-US" smtClean="0"/>
+              <a:rPr lang="en-US"/>
               <a:t>Fifth level</a:t>
             </a:r>
-            <a:endParaRPr lang="en-US"/>
           </a:p>
         </p:txBody>
       </p:sp>
@@ -3669,7 +3669,7 @@
           <a:p>
             <a:pPr lvl="0"/>
             <a:r>
-              <a:rPr lang="en-US" smtClean="0"/>
+              <a:rPr lang="en-US"/>
               <a:t>Click to edit Master text styles</a:t>
             </a:r>
           </a:p>
@@ -3692,7 +3692,7 @@
           <a:p>
             <a:fld id="{5BCAD085-E8A6-8845-BD4E-CB4CCA059FC4}" type="datetimeFigureOut">
               <a:rPr lang="en-US" smtClean="0"/>
-              <a:t>1/27/13</a:t>
+              <a:t>5/12/2026</a:t>
             </a:fld>
             <a:endParaRPr lang="en-US"/>
           </a:p>
@@ -3795,10 +3795,9 @@
           </a:lstStyle>
           <a:p>
             <a:r>
-              <a:rPr lang="en-US" smtClean="0"/>
+              <a:rPr lang="en-US"/>
               <a:t>Click to edit Master title style</a:t>
             </a:r>
-            <a:endParaRPr lang="en-US"/>
           </a:p>
         </p:txBody>
       </p:sp>
@@ -3922,7 +3921,7 @@
           <a:p>
             <a:pPr lvl="0"/>
             <a:r>
-              <a:rPr lang="en-US" smtClean="0"/>
+              <a:rPr lang="en-US"/>
               <a:t>Click to edit Master text styles</a:t>
             </a:r>
           </a:p>
@@ -3945,7 +3944,7 @@
           <a:p>
             <a:fld id="{5BCAD085-E8A6-8845-BD4E-CB4CCA059FC4}" type="datetimeFigureOut">
               <a:rPr lang="en-US" smtClean="0"/>
-              <a:t>1/27/13</a:t>
+              <a:t>5/12/2026</a:t>
             </a:fld>
             <a:endParaRPr lang="en-US"/>
           </a:p>
@@ -4054,10 +4053,9 @@
           <a:lstStyle/>
           <a:p>
             <a:r>
-              <a:rPr lang="en-US" smtClean="0"/>
+              <a:rPr lang="en-US"/>
               <a:t>Click to edit Master title style</a:t>
             </a:r>
-            <a:endParaRPr lang="en-US"/>
           </a:p>
         </p:txBody>
       </p:sp>
@@ -4088,38 +4086,37 @@
           <a:p>
             <a:pPr lvl="0"/>
             <a:r>
-              <a:rPr lang="en-US" smtClean="0"/>
+              <a:rPr lang="en-US"/>
               <a:t>Click to edit Master text styles</a:t>
             </a:r>
           </a:p>
           <a:p>
             <a:pPr lvl="1"/>
             <a:r>
-              <a:rPr lang="en-US" smtClean="0"/>
+              <a:rPr lang="en-US"/>
               <a:t>Second level</a:t>
             </a:r>
           </a:p>
           <a:p>
             <a:pPr lvl="2"/>
             <a:r>
-              <a:rPr lang="en-US" smtClean="0"/>
+              <a:rPr lang="en-US"/>
               <a:t>Third level</a:t>
             </a:r>
           </a:p>
           <a:p>
             <a:pPr lvl="3"/>
             <a:r>
-              <a:rPr lang="en-US" smtClean="0"/>
+              <a:rPr lang="en-US"/>
               <a:t>Fourth level</a:t>
             </a:r>
           </a:p>
           <a:p>
             <a:pPr lvl="4"/>
             <a:r>
-              <a:rPr lang="en-US" smtClean="0"/>
+              <a:rPr lang="en-US"/>
               <a:t>Fifth level</a:t>
             </a:r>
-            <a:endParaRPr lang="en-US"/>
           </a:p>
         </p:txBody>
       </p:sp>
@@ -4158,7 +4155,7 @@
           <a:p>
             <a:fld id="{5BCAD085-E8A6-8845-BD4E-CB4CCA059FC4}" type="datetimeFigureOut">
               <a:rPr lang="en-US" smtClean="0"/>
-              <a:t>1/27/13</a:t>
+              <a:t>5/12/2026</a:t>
             </a:fld>
             <a:endParaRPr lang="en-US"/>
           </a:p>
@@ -4517,7 +4514,7 @@
 </file>
 
 <file path=ppt/slides/slide1.xml><?xml version="1.0" encoding="utf-8"?>
-<p:sld xmlns:a="http://schemas.openxmlformats.org/drawingml/2006/main" xmlns:p="http://schemas.openxmlformats.org/presentationml/2006/main" xmlns:r="http://schemas.openxmlformats.org/officeDocument/2006/relationships">
+<p:sld xmlns:a="http://schemas.openxmlformats.org/drawingml/2006/main" xmlns:r="http://schemas.openxmlformats.org/officeDocument/2006/relationships" xmlns:p="http://schemas.openxmlformats.org/presentationml/2006/main">
   <p:cSld>
     <p:spTree>
       <p:nvGrpSpPr>
@@ -4525,7 +4522,14 @@
         <p:cNvGrpSpPr/>
         <p:nvPr/>
       </p:nvGrpSpPr>
-      <p:grpSpPr/>
+      <p:grpSpPr>
+        <a:xfrm>
+          <a:off x="0" y="0"/>
+          <a:ext cx="0" cy="0"/>
+          <a:chOff x="0" y="0"/>
+          <a:chExt cx="0" cy="0"/>
+        </a:xfrm>
+      </p:grpSpPr>
       <p:sp>
         <p:nvSpPr>
           <p:cNvPr id="2" name="TextBox 1"/>
@@ -4535,7 +4539,7 @@
         <p:spPr>
           <a:xfrm>
             <a:off x="914400" y="2103120"/>
-            <a:ext cx="10332720" cy="1097280"/>
+            <a:ext cx="10332720" cy="1107996"/>
           </a:xfrm>
           <a:prstGeom prst="rect">
             <a:avLst/>
@@ -4550,13 +4554,18 @@
           <a:p>
             <a:pPr algn="ctr"/>
             <a:r>
-              <a:rPr sz="6000" b="1">
+              <a:rPr lang="en-US" sz="6600" b="1" dirty="0">
                 <a:solidFill>
                   <a:srgbClr val="102A43"/>
                 </a:solidFill>
               </a:rPr>
-              <a:t>IGM NeRF</a:t>
-            </a:r>
+              <a:t>Cosmo Gas Vision</a:t>
+            </a:r>
+            <a:endParaRPr sz="6600" b="1" dirty="0">
+              <a:solidFill>
+                <a:srgbClr val="102A43"/>
+              </a:solidFill>
+            </a:endParaRPr>
           </a:p>
         </p:txBody>
       </p:sp>
@@ -4568,8 +4577,8 @@
         </p:nvSpPr>
         <p:spPr>
           <a:xfrm>
-            <a:off x="914400" y="3108960"/>
-            <a:ext cx="10332720" cy="640080"/>
+            <a:off x="706117" y="3108960"/>
+            <a:ext cx="10749289" cy="1077218"/>
           </a:xfrm>
           <a:prstGeom prst="rect">
             <a:avLst/>
@@ -4584,7 +4593,34 @@
           <a:p>
             <a:pPr algn="ctr"/>
             <a:r>
-              <a:rPr sz="2400">
+              <a:rPr lang="en-US" sz="3600" dirty="0">
+                <a:solidFill>
+                  <a:srgbClr val="555555"/>
+                </a:solidFill>
+              </a:rPr>
+              <a:t>IGM </a:t>
+            </a:r>
+            <a:r>
+              <a:rPr lang="en-US" sz="3600" dirty="0" err="1">
+                <a:solidFill>
+                  <a:srgbClr val="555555"/>
+                </a:solidFill>
+              </a:rPr>
+              <a:t>NeRF</a:t>
+            </a:r>
+            <a:r>
+              <a:rPr lang="en-US" sz="2800" dirty="0">
+                <a:solidFill>
+                  <a:srgbClr val="555555"/>
+                </a:solidFill>
+              </a:rPr>
+              <a:t>: </a:t>
+            </a:r>
+          </a:p>
+          <a:p>
+            <a:pPr algn="ctr"/>
+            <a:r>
+              <a:rPr sz="2800" dirty="0">
                 <a:solidFill>
                   <a:srgbClr val="555555"/>
                 </a:solidFill>
@@ -4602,8 +4638,8 @@
         </p:nvSpPr>
         <p:spPr>
           <a:xfrm>
-            <a:off x="1371600" y="4206240"/>
-            <a:ext cx="9418320" cy="1280160"/>
+            <a:off x="914400" y="4484132"/>
+            <a:ext cx="10202779" cy="707886"/>
           </a:xfrm>
           <a:prstGeom prst="rect">
             <a:avLst/>
@@ -4618,44 +4654,75 @@
           <a:p>
             <a:pPr algn="ctr"/>
             <a:r>
-              <a:rPr sz="1800" i="1">
+              <a:rPr lang="en-US" altLang="ko-KR" sz="2000" i="1" dirty="0">
                 <a:solidFill>
                   <a:srgbClr val="102A43"/>
                 </a:solidFill>
               </a:rPr>
-              <a:t>We took NeRF's continuous-field representation and replaced its rendering</a:t>
-            </a:r>
-            <a:br/>
-            <a:r>
-              <a:rPr sz="1800" i="1">
+              <a:t>Reconstructing cosmological gas density from sparse 1D absorption signals from ray marching.</a:t>
+            </a:r>
+          </a:p>
+          <a:p>
+            <a:pPr algn="ctr"/>
+            <a:r>
+              <a:rPr lang="en-US" altLang="ko-KR" sz="2000" i="1" dirty="0">
                 <a:solidFill>
                   <a:srgbClr val="102A43"/>
                 </a:solidFill>
               </a:rPr>
-              <a:t>operator with physics. The same MLP backbone now reconstructs cosmological</a:t>
-            </a:r>
-            <a:br/>
-            <a:r>
-              <a:rPr sz="1800" i="1">
+              <a:t>Physics-informed </a:t>
+            </a:r>
+            <a:r>
+              <a:rPr sz="2000" i="1" dirty="0" err="1">
                 <a:solidFill>
                   <a:srgbClr val="102A43"/>
                 </a:solidFill>
               </a:rPr>
-              <a:t>gas density from sparse 1D absorption signals.</a:t>
+              <a:t>NeRF's</a:t>
+            </a:r>
+            <a:r>
+              <a:rPr sz="2000" i="1" dirty="0">
+                <a:solidFill>
+                  <a:srgbClr val="102A43"/>
+                </a:solidFill>
+              </a:rPr>
+              <a:t> continuous-field representation and its rendering</a:t>
+            </a:r>
+            <a:r>
+              <a:rPr lang="en-US" sz="2000" i="1" dirty="0">
+                <a:solidFill>
+                  <a:srgbClr val="102A43"/>
+                </a:solidFill>
+              </a:rPr>
+              <a:t> </a:t>
+            </a:r>
+            <a:r>
+              <a:rPr sz="2000" i="1" dirty="0">
+                <a:solidFill>
+                  <a:srgbClr val="102A43"/>
+                </a:solidFill>
+              </a:rPr>
+              <a:t>operator. </a:t>
             </a:r>
           </a:p>
         </p:txBody>
       </p:sp>
       <p:sp>
         <p:nvSpPr>
-          <p:cNvPr id="5" name="TextBox 4"/>
+          <p:cNvPr id="5" name="TextBox 4">
+            <a:extLst>
+              <a:ext uri="{FF2B5EF4-FFF2-40B4-BE49-F238E27FC236}">
+                <a16:creationId xmlns:a16="http://schemas.microsoft.com/office/drawing/2014/main" id="{22A8AD78-B4A6-1C84-E902-C658D386C223}"/>
+              </a:ext>
+            </a:extLst>
+          </p:cNvPr>
           <p:cNvSpPr txBox="1"/>
           <p:nvPr/>
         </p:nvSpPr>
         <p:spPr>
           <a:xfrm>
-            <a:off x="457200" y="6492240"/>
-            <a:ext cx="11247120" cy="274320"/>
+            <a:off x="9956800" y="5896005"/>
+            <a:ext cx="2420620" cy="400110"/>
           </a:xfrm>
           <a:prstGeom prst="rect">
             <a:avLst/>
@@ -4663,20 +4730,16 @@
           <a:noFill/>
         </p:spPr>
         <p:txBody>
-          <a:bodyPr wrap="none">
+          <a:bodyPr wrap="square" rtlCol="0">
             <a:spAutoFit/>
           </a:bodyPr>
           <a:lstStyle/>
           <a:p>
-            <a:pPr algn="r"/>
-            <a:r>
-              <a:rPr sz="1000" i="1">
-                <a:solidFill>
-                  <a:srgbClr val="555555"/>
-                </a:solidFill>
-              </a:rPr>
-              <a:t>5-minute talk · slide 1 / 7</a:t>
-            </a:r>
+            <a:r>
+              <a:rPr lang="en-US" altLang="ko-KR" sz="2000" dirty="0"/>
+              <a:t>Sujin Hwang</a:t>
+            </a:r>
+            <a:endParaRPr lang="ko-KR" altLang="en-US" sz="2000" dirty="0"/>
           </a:p>
         </p:txBody>
       </p:sp>
@@ -4689,7 +4752,7 @@
 </file>
 
 <file path=ppt/slides/slide2.xml><?xml version="1.0" encoding="utf-8"?>
-<p:sld xmlns:a="http://schemas.openxmlformats.org/drawingml/2006/main" xmlns:p="http://schemas.openxmlformats.org/presentationml/2006/main" xmlns:r="http://schemas.openxmlformats.org/officeDocument/2006/relationships">
+<p:sld xmlns:a="http://schemas.openxmlformats.org/drawingml/2006/main" xmlns:r="http://schemas.openxmlformats.org/officeDocument/2006/relationships" xmlns:p="http://schemas.openxmlformats.org/presentationml/2006/main">
   <p:cSld>
     <p:spTree>
       <p:nvGrpSpPr>
@@ -4697,7 +4760,14 @@
         <p:cNvGrpSpPr/>
         <p:nvPr/>
       </p:nvGrpSpPr>
-      <p:grpSpPr/>
+      <p:grpSpPr>
+        <a:xfrm>
+          <a:off x="0" y="0"/>
+          <a:ext cx="0" cy="0"/>
+          <a:chOff x="0" y="0"/>
+          <a:chExt cx="0" cy="0"/>
+        </a:xfrm>
+      </p:grpSpPr>
       <p:sp>
         <p:nvSpPr>
           <p:cNvPr id="2" name="TextBox 1"/>
@@ -4741,89 +4811,51 @@
           <p:nvPr/>
         </p:nvPicPr>
         <p:blipFill>
-          <a:blip r:embed="rId2"/>
+          <a:blip r:embed="rId3"/>
           <a:stretch>
             <a:fillRect/>
           </a:stretch>
         </p:blipFill>
         <p:spPr>
           <a:xfrm>
-            <a:off x="365760" y="868680"/>
-            <a:ext cx="11430000" cy="6938432"/>
+            <a:off x="844440" y="704631"/>
+            <a:ext cx="9760145" cy="5924769"/>
           </a:xfrm>
           <a:prstGeom prst="rect">
             <a:avLst/>
           </a:prstGeom>
         </p:spPr>
       </p:pic>
-      <p:sp>
-        <p:nvSpPr>
-          <p:cNvPr id="4" name="TextBox 3"/>
-          <p:cNvSpPr txBox="1"/>
+      <p:pic>
+        <p:nvPicPr>
+          <p:cNvPr id="6" name="Picture 5">
+            <a:extLst>
+              <a:ext uri="{FF2B5EF4-FFF2-40B4-BE49-F238E27FC236}">
+                <a16:creationId xmlns:a16="http://schemas.microsoft.com/office/drawing/2014/main" id="{9644A9D6-5798-37EA-EFEB-95B5DDC63759}"/>
+              </a:ext>
+            </a:extLst>
+          </p:cNvPr>
+          <p:cNvPicPr>
+            <a:picLocks noChangeAspect="1"/>
+          </p:cNvPicPr>
           <p:nvPr/>
-        </p:nvSpPr>
+        </p:nvPicPr>
+        <p:blipFill>
+          <a:blip r:embed="rId4"/>
+          <a:stretch>
+            <a:fillRect/>
+          </a:stretch>
+        </p:blipFill>
         <p:spPr>
           <a:xfrm>
-            <a:off x="457200" y="6080760"/>
-            <a:ext cx="11247120" cy="411480"/>
+            <a:off x="1277928" y="4293876"/>
+            <a:ext cx="9513404" cy="1859493"/>
           </a:xfrm>
           <a:prstGeom prst="rect">
             <a:avLst/>
           </a:prstGeom>
-          <a:noFill/>
         </p:spPr>
-        <p:txBody>
-          <a:bodyPr wrap="square">
-            <a:spAutoFit/>
-          </a:bodyPr>
-          <a:lstStyle/>
-          <a:p>
-            <a:pPr algn="ctr"/>
-            <a:r>
-              <a:rPr sz="1400" b="0" i="1">
-                <a:solidFill>
-                  <a:srgbClr val="102A43"/>
-                </a:solidFill>
-              </a:rPr>
-              <a:t>Each sightline gives us one absorption spectrum  —  thousands of rays is what we have to reconstruct the volume.</a:t>
-            </a:r>
-          </a:p>
-        </p:txBody>
-      </p:sp>
-      <p:sp>
-        <p:nvSpPr>
-          <p:cNvPr id="5" name="TextBox 4"/>
-          <p:cNvSpPr txBox="1"/>
-          <p:nvPr/>
-        </p:nvSpPr>
-        <p:spPr>
-          <a:xfrm>
-            <a:off x="457200" y="6492240"/>
-            <a:ext cx="11247120" cy="274320"/>
-          </a:xfrm>
-          <a:prstGeom prst="rect">
-            <a:avLst/>
-          </a:prstGeom>
-          <a:noFill/>
-        </p:spPr>
-        <p:txBody>
-          <a:bodyPr wrap="none">
-            <a:spAutoFit/>
-          </a:bodyPr>
-          <a:lstStyle/>
-          <a:p>
-            <a:pPr algn="r"/>
-            <a:r>
-              <a:rPr sz="1000" i="1">
-                <a:solidFill>
-                  <a:srgbClr val="555555"/>
-                </a:solidFill>
-              </a:rPr>
-              <a:t>slide 2 / 7  ·  the astrophysical setup</a:t>
-            </a:r>
-          </a:p>
-        </p:txBody>
-      </p:sp>
+      </p:pic>
     </p:spTree>
   </p:cSld>
   <p:clrMapOvr>
@@ -4833,7 +4865,7 @@
 </file>
 
 <file path=ppt/slides/slide3.xml><?xml version="1.0" encoding="utf-8"?>
-<p:sld xmlns:a="http://schemas.openxmlformats.org/drawingml/2006/main" xmlns:p="http://schemas.openxmlformats.org/presentationml/2006/main" xmlns:r="http://schemas.openxmlformats.org/officeDocument/2006/relationships">
+<p:sld xmlns:a="http://schemas.openxmlformats.org/drawingml/2006/main" xmlns:r="http://schemas.openxmlformats.org/officeDocument/2006/relationships" xmlns:p="http://schemas.openxmlformats.org/presentationml/2006/main">
   <p:cSld>
     <p:spTree>
       <p:nvGrpSpPr>
@@ -4841,7 +4873,14 @@
         <p:cNvGrpSpPr/>
         <p:nvPr/>
       </p:nvGrpSpPr>
-      <p:grpSpPr/>
+      <p:grpSpPr>
+        <a:xfrm>
+          <a:off x="0" y="0"/>
+          <a:ext cx="0" cy="0"/>
+          <a:chOff x="0" y="0"/>
+          <a:chExt cx="0" cy="0"/>
+        </a:xfrm>
+      </p:grpSpPr>
       <p:sp>
         <p:nvSpPr>
           <p:cNvPr id="2" name="TextBox 1"/>
@@ -4876,46 +4915,1047 @@
           </a:p>
         </p:txBody>
       </p:sp>
+      <p:pic>
+        <p:nvPicPr>
+          <p:cNvPr id="10" name="Picture 9">
+            <a:extLst>
+              <a:ext uri="{FF2B5EF4-FFF2-40B4-BE49-F238E27FC236}">
+                <a16:creationId xmlns:a16="http://schemas.microsoft.com/office/drawing/2014/main" id="{9B7CF2E8-5725-C809-C712-7316C3961C8B}"/>
+              </a:ext>
+            </a:extLst>
+          </p:cNvPr>
+          <p:cNvPicPr>
+            <a:picLocks noChangeAspect="1"/>
+          </p:cNvPicPr>
+          <p:nvPr/>
+        </p:nvPicPr>
+        <p:blipFill>
+          <a:blip r:embed="rId3"/>
+          <a:stretch>
+            <a:fillRect/>
+          </a:stretch>
+        </p:blipFill>
+        <p:spPr>
+          <a:xfrm>
+            <a:off x="1791033" y="5288797"/>
+            <a:ext cx="7976937" cy="997117"/>
+          </a:xfrm>
+          <a:prstGeom prst="rect">
+            <a:avLst/>
+          </a:prstGeom>
+        </p:spPr>
+      </p:pic>
       <p:graphicFrame>
         <p:nvGraphicFramePr>
-          <p:cNvPr id="3" name="Table 2"/>
+          <p:cNvPr id="11" name="Table 10">
+            <a:extLst>
+              <a:ext uri="{FF2B5EF4-FFF2-40B4-BE49-F238E27FC236}">
+                <a16:creationId xmlns:a16="http://schemas.microsoft.com/office/drawing/2014/main" id="{8B49C12B-F611-287D-CB1A-604C89CDBBD3}"/>
+              </a:ext>
+            </a:extLst>
+          </p:cNvPr>
           <p:cNvGraphicFramePr>
             <a:graphicFrameLocks noGrp="1"/>
           </p:cNvGraphicFramePr>
-          <p:nvPr/>
+          <p:nvPr>
+            <p:extLst>
+              <p:ext uri="{D42A27DB-BD31-4B8C-83A1-F6EECF244321}">
+                <p14:modId xmlns:p14="http://schemas.microsoft.com/office/powerpoint/2010/main" val="3930099748"/>
+              </p:ext>
+            </p:extLst>
+          </p:nvPr>
         </p:nvGraphicFramePr>
         <p:xfrm>
-          <a:off x="457200" y="1005840"/>
-          <a:ext cx="11247120" cy="4846320"/>
+          <a:off x="583531" y="965953"/>
+          <a:ext cx="11247120" cy="3505200"/>
         </p:xfrm>
         <a:graphic>
           <a:graphicData uri="http://schemas.openxmlformats.org/drawingml/2006/table">
             <a:tbl>
-              <a:tblPr firstRow="1" bandRow="1">
-                <a:tableStyleId>{5C22544A-7EE6-4342-B048-85BDC9FD1C3A}</a:tableStyleId>
-              </a:tblPr>
+              <a:tblPr/>
               <a:tblGrid>
-                <a:gridCol w="3108960"/>
-                <a:gridCol w="3291840"/>
-                <a:gridCol w="4846320"/>
+                <a:gridCol w="3749040">
+                  <a:extLst>
+                    <a:ext uri="{9D8B030D-6E8A-4147-A177-3AD203B41FA5}">
+                      <a16:colId xmlns:a16="http://schemas.microsoft.com/office/drawing/2014/main" val="1044629443"/>
+                    </a:ext>
+                  </a:extLst>
+                </a:gridCol>
+                <a:gridCol w="4035911">
+                  <a:extLst>
+                    <a:ext uri="{9D8B030D-6E8A-4147-A177-3AD203B41FA5}">
+                      <a16:colId xmlns:a16="http://schemas.microsoft.com/office/drawing/2014/main" val="111932540"/>
+                    </a:ext>
+                  </a:extLst>
+                </a:gridCol>
+                <a:gridCol w="3462169">
+                  <a:extLst>
+                    <a:ext uri="{9D8B030D-6E8A-4147-A177-3AD203B41FA5}">
+                      <a16:colId xmlns:a16="http://schemas.microsoft.com/office/drawing/2014/main" val="572857224"/>
+                    </a:ext>
+                  </a:extLst>
+                </a:gridCol>
               </a:tblGrid>
-              <a:tr h="692331">
+              <a:tr h="0">
+                <a:tc>
+                  <a:txBody>
+                    <a:bodyPr/>
+                    <a:lstStyle/>
+                    <a:p>
+                      <a:pPr>
+                        <a:buNone/>
+                      </a:pPr>
+                      <a:r>
+                        <a:rPr lang="en-US" sz="1600" dirty="0" err="1"/>
+                        <a:t>NeRF</a:t>
+                      </a:r>
+                      <a:endParaRPr lang="en-US" sz="1600" dirty="0"/>
+                    </a:p>
+                  </a:txBody>
+                  <a:tcPr marL="45720" marR="45720" anchor="ctr">
+                    <a:lnL w="12700" cap="flat" cmpd="sng" algn="ctr">
+                      <a:solidFill>
+                        <a:schemeClr val="tx1"/>
+                      </a:solidFill>
+                      <a:prstDash val="solid"/>
+                      <a:round/>
+                      <a:headEnd type="none" w="med" len="med"/>
+                      <a:tailEnd type="none" w="med" len="med"/>
+                    </a:lnL>
+                    <a:lnR w="12700" cap="flat" cmpd="sng" algn="ctr">
+                      <a:solidFill>
+                        <a:schemeClr val="tx1"/>
+                      </a:solidFill>
+                      <a:prstDash val="solid"/>
+                      <a:round/>
+                      <a:headEnd type="none" w="med" len="med"/>
+                      <a:tailEnd type="none" w="med" len="med"/>
+                    </a:lnR>
+                    <a:lnT w="12700" cap="flat" cmpd="sng" algn="ctr">
+                      <a:solidFill>
+                        <a:schemeClr val="tx1"/>
+                      </a:solidFill>
+                      <a:prstDash val="solid"/>
+                      <a:round/>
+                      <a:headEnd type="none" w="med" len="med"/>
+                      <a:tailEnd type="none" w="med" len="med"/>
+                    </a:lnT>
+                    <a:lnB w="12700" cap="flat" cmpd="sng" algn="ctr">
+                      <a:solidFill>
+                        <a:schemeClr val="tx1"/>
+                      </a:solidFill>
+                      <a:prstDash val="solid"/>
+                      <a:round/>
+                      <a:headEnd type="none" w="med" len="med"/>
+                      <a:tailEnd type="none" w="med" len="med"/>
+                    </a:lnB>
+                    <a:solidFill>
+                      <a:schemeClr val="bg1">
+                        <a:lumMod val="95000"/>
+                      </a:schemeClr>
+                    </a:solidFill>
+                  </a:tcPr>
+                </a:tc>
+                <a:tc>
+                  <a:txBody>
+                    <a:bodyPr/>
+                    <a:lstStyle/>
+                    <a:p>
+                      <a:pPr>
+                        <a:buNone/>
+                      </a:pPr>
+                      <a:r>
+                        <a:rPr lang="en-US" sz="1600" dirty="0"/>
+                        <a:t>IGM-</a:t>
+                      </a:r>
+                      <a:r>
+                        <a:rPr lang="en-US" sz="1600" dirty="0" err="1"/>
+                        <a:t>NeRF</a:t>
+                      </a:r>
+                      <a:endParaRPr lang="en-US" sz="1600" dirty="0"/>
+                    </a:p>
+                  </a:txBody>
+                  <a:tcPr marL="45720" marR="45720" anchor="ctr">
+                    <a:lnL w="12700" cap="flat" cmpd="sng" algn="ctr">
+                      <a:solidFill>
+                        <a:schemeClr val="tx1"/>
+                      </a:solidFill>
+                      <a:prstDash val="solid"/>
+                      <a:round/>
+                      <a:headEnd type="none" w="med" len="med"/>
+                      <a:tailEnd type="none" w="med" len="med"/>
+                    </a:lnL>
+                    <a:lnR w="12700" cap="flat" cmpd="sng" algn="ctr">
+                      <a:solidFill>
+                        <a:schemeClr val="tx1"/>
+                      </a:solidFill>
+                      <a:prstDash val="solid"/>
+                      <a:round/>
+                      <a:headEnd type="none" w="med" len="med"/>
+                      <a:tailEnd type="none" w="med" len="med"/>
+                    </a:lnR>
+                    <a:lnT w="12700" cap="flat" cmpd="sng" algn="ctr">
+                      <a:solidFill>
+                        <a:schemeClr val="tx1"/>
+                      </a:solidFill>
+                      <a:prstDash val="solid"/>
+                      <a:round/>
+                      <a:headEnd type="none" w="med" len="med"/>
+                      <a:tailEnd type="none" w="med" len="med"/>
+                    </a:lnT>
+                    <a:lnB w="12700" cap="flat" cmpd="sng" algn="ctr">
+                      <a:solidFill>
+                        <a:schemeClr val="tx1"/>
+                      </a:solidFill>
+                      <a:prstDash val="solid"/>
+                      <a:round/>
+                      <a:headEnd type="none" w="med" len="med"/>
+                      <a:tailEnd type="none" w="med" len="med"/>
+                    </a:lnB>
+                    <a:solidFill>
+                      <a:schemeClr val="bg1">
+                        <a:lumMod val="95000"/>
+                      </a:schemeClr>
+                    </a:solidFill>
+                  </a:tcPr>
+                </a:tc>
+                <a:tc>
+                  <a:txBody>
+                    <a:bodyPr/>
+                    <a:lstStyle/>
+                    <a:p>
+                      <a:pPr>
+                        <a:buNone/>
+                      </a:pPr>
+                      <a:r>
+                        <a:rPr lang="en-US" sz="1600" dirty="0"/>
+                        <a:t>Notes</a:t>
+                      </a:r>
+                    </a:p>
+                  </a:txBody>
+                  <a:tcPr marL="45720" marR="45720" anchor="ctr">
+                    <a:lnL w="12700" cap="flat" cmpd="sng" algn="ctr">
+                      <a:solidFill>
+                        <a:schemeClr val="tx1"/>
+                      </a:solidFill>
+                      <a:prstDash val="solid"/>
+                      <a:round/>
+                      <a:headEnd type="none" w="med" len="med"/>
+                      <a:tailEnd type="none" w="med" len="med"/>
+                    </a:lnL>
+                    <a:lnR w="12700" cap="flat" cmpd="sng" algn="ctr">
+                      <a:solidFill>
+                        <a:schemeClr val="tx1"/>
+                      </a:solidFill>
+                      <a:prstDash val="solid"/>
+                      <a:round/>
+                      <a:headEnd type="none" w="med" len="med"/>
+                      <a:tailEnd type="none" w="med" len="med"/>
+                    </a:lnR>
+                    <a:lnT w="12700" cap="flat" cmpd="sng" algn="ctr">
+                      <a:solidFill>
+                        <a:schemeClr val="tx1"/>
+                      </a:solidFill>
+                      <a:prstDash val="solid"/>
+                      <a:round/>
+                      <a:headEnd type="none" w="med" len="med"/>
+                      <a:tailEnd type="none" w="med" len="med"/>
+                    </a:lnT>
+                    <a:lnB w="12700" cap="flat" cmpd="sng" algn="ctr">
+                      <a:solidFill>
+                        <a:schemeClr val="tx1"/>
+                      </a:solidFill>
+                      <a:prstDash val="solid"/>
+                      <a:round/>
+                      <a:headEnd type="none" w="med" len="med"/>
+                      <a:tailEnd type="none" w="med" len="med"/>
+                    </a:lnB>
+                    <a:solidFill>
+                      <a:schemeClr val="bg1">
+                        <a:lumMod val="95000"/>
+                      </a:schemeClr>
+                    </a:solidFill>
+                  </a:tcPr>
+                </a:tc>
+                <a:extLst>
+                  <a:ext uri="{0D108BD9-81ED-4DB2-BD59-A6C34878D82A}">
+                    <a16:rowId xmlns:a16="http://schemas.microsoft.com/office/drawing/2014/main" val="1176646485"/>
+                  </a:ext>
+                </a:extLst>
+              </a:tr>
+              <a:tr h="0">
+                <a:tc>
+                  <a:txBody>
+                    <a:bodyPr/>
+                    <a:lstStyle/>
+                    <a:p>
+                      <a:pPr marL="0" marR="0" lvl="0" indent="0" algn="l" defTabSz="457200" rtl="0" eaLnBrk="1" fontAlgn="auto" latinLnBrk="0" hangingPunct="1">
+                        <a:lnSpc>
+                          <a:spcPct val="100000"/>
+                        </a:lnSpc>
+                        <a:spcBef>
+                          <a:spcPts val="0"/>
+                        </a:spcBef>
+                        <a:spcAft>
+                          <a:spcPts val="0"/>
+                        </a:spcAft>
+                        <a:buClrTx/>
+                        <a:buSzTx/>
+                        <a:buFontTx/>
+                        <a:buNone/>
+                        <a:tabLst/>
+                        <a:defRPr/>
+                      </a:pPr>
+                      <a:r>
+                        <a:rPr lang="en-US" altLang="ko-KR" sz="1600" b="1" dirty="0">
+                          <a:effectLst/>
+                        </a:rPr>
+                        <a:t>Synthetic / real-world scene</a:t>
+                      </a:r>
+                      <a:r>
+                        <a:rPr lang="en-US" altLang="ko-KR" sz="1600" dirty="0">
+                          <a:effectLst/>
+                        </a:rPr>
+                        <a:t>, ~few m³</a:t>
+                      </a:r>
+                    </a:p>
+                  </a:txBody>
+                  <a:tcPr marL="45720" marR="45720" anchor="ctr">
+                    <a:lnL w="12700" cap="flat" cmpd="sng" algn="ctr">
+                      <a:solidFill>
+                        <a:schemeClr val="tx1"/>
+                      </a:solidFill>
+                      <a:prstDash val="solid"/>
+                      <a:round/>
+                      <a:headEnd type="none" w="med" len="med"/>
+                      <a:tailEnd type="none" w="med" len="med"/>
+                    </a:lnL>
+                    <a:lnR w="12700" cap="flat" cmpd="sng" algn="ctr">
+                      <a:solidFill>
+                        <a:schemeClr val="tx1"/>
+                      </a:solidFill>
+                      <a:prstDash val="solid"/>
+                      <a:round/>
+                      <a:headEnd type="none" w="med" len="med"/>
+                      <a:tailEnd type="none" w="med" len="med"/>
+                    </a:lnR>
+                    <a:lnT w="12700" cap="flat" cmpd="sng" algn="ctr">
+                      <a:solidFill>
+                        <a:schemeClr val="tx1"/>
+                      </a:solidFill>
+                      <a:prstDash val="solid"/>
+                      <a:round/>
+                      <a:headEnd type="none" w="med" len="med"/>
+                      <a:tailEnd type="none" w="med" len="med"/>
+                    </a:lnT>
+                    <a:lnB w="12700" cap="flat" cmpd="sng" algn="ctr">
+                      <a:solidFill>
+                        <a:schemeClr val="tx1"/>
+                      </a:solidFill>
+                      <a:prstDash val="solid"/>
+                      <a:round/>
+                      <a:headEnd type="none" w="med" len="med"/>
+                      <a:tailEnd type="none" w="med" len="med"/>
+                    </a:lnB>
+                    <a:solidFill>
+                      <a:schemeClr val="bg1"/>
+                    </a:solidFill>
+                  </a:tcPr>
+                </a:tc>
+                <a:tc>
+                  <a:txBody>
+                    <a:bodyPr/>
+                    <a:lstStyle/>
+                    <a:p>
+                      <a:pPr marL="0" marR="0" lvl="0" indent="0" algn="l" defTabSz="457200" rtl="0" eaLnBrk="1" fontAlgn="auto" latinLnBrk="0" hangingPunct="1">
+                        <a:lnSpc>
+                          <a:spcPct val="100000"/>
+                        </a:lnSpc>
+                        <a:spcBef>
+                          <a:spcPts val="0"/>
+                        </a:spcBef>
+                        <a:spcAft>
+                          <a:spcPts val="0"/>
+                        </a:spcAft>
+                        <a:buClrTx/>
+                        <a:buSzTx/>
+                        <a:buFontTx/>
+                        <a:buNone/>
+                        <a:tabLst/>
+                        <a:defRPr/>
+                      </a:pPr>
+                      <a:r>
+                        <a:rPr lang="pt-BR" altLang="ko-KR" sz="1600" dirty="0">
+                          <a:effectLst/>
+                        </a:rPr>
+                        <a:t>60 Mpc/h cosmological box</a:t>
+                      </a:r>
+                    </a:p>
+                  </a:txBody>
+                  <a:tcPr marL="45720" marR="45720" anchor="ctr">
+                    <a:lnL w="12700" cap="flat" cmpd="sng" algn="ctr">
+                      <a:solidFill>
+                        <a:schemeClr val="tx1"/>
+                      </a:solidFill>
+                      <a:prstDash val="solid"/>
+                      <a:round/>
+                      <a:headEnd type="none" w="med" len="med"/>
+                      <a:tailEnd type="none" w="med" len="med"/>
+                    </a:lnL>
+                    <a:lnR w="12700" cap="flat" cmpd="sng" algn="ctr">
+                      <a:solidFill>
+                        <a:schemeClr val="tx1"/>
+                      </a:solidFill>
+                      <a:prstDash val="solid"/>
+                      <a:round/>
+                      <a:headEnd type="none" w="med" len="med"/>
+                      <a:tailEnd type="none" w="med" len="med"/>
+                    </a:lnR>
+                    <a:lnT w="12700" cap="flat" cmpd="sng" algn="ctr">
+                      <a:solidFill>
+                        <a:schemeClr val="tx1"/>
+                      </a:solidFill>
+                      <a:prstDash val="solid"/>
+                      <a:round/>
+                      <a:headEnd type="none" w="med" len="med"/>
+                      <a:tailEnd type="none" w="med" len="med"/>
+                    </a:lnT>
+                    <a:lnB w="12700" cap="flat" cmpd="sng" algn="ctr">
+                      <a:solidFill>
+                        <a:schemeClr val="tx1"/>
+                      </a:solidFill>
+                      <a:prstDash val="solid"/>
+                      <a:round/>
+                      <a:headEnd type="none" w="med" len="med"/>
+                      <a:tailEnd type="none" w="med" len="med"/>
+                    </a:lnB>
+                    <a:solidFill>
+                      <a:schemeClr val="bg1"/>
+                    </a:solidFill>
+                  </a:tcPr>
+                </a:tc>
+                <a:tc>
+                  <a:txBody>
+                    <a:bodyPr/>
+                    <a:lstStyle/>
+                    <a:p>
+                      <a:pPr>
+                        <a:buNone/>
+                      </a:pPr>
+                      <a:endParaRPr lang="en-US" sz="1600" dirty="0"/>
+                    </a:p>
+                  </a:txBody>
+                  <a:tcPr marL="45720" marR="45720" anchor="ctr">
+                    <a:lnL w="12700" cap="flat" cmpd="sng" algn="ctr">
+                      <a:solidFill>
+                        <a:schemeClr val="tx1"/>
+                      </a:solidFill>
+                      <a:prstDash val="solid"/>
+                      <a:round/>
+                      <a:headEnd type="none" w="med" len="med"/>
+                      <a:tailEnd type="none" w="med" len="med"/>
+                    </a:lnL>
+                    <a:lnR w="12700" cap="flat" cmpd="sng" algn="ctr">
+                      <a:solidFill>
+                        <a:schemeClr val="tx1"/>
+                      </a:solidFill>
+                      <a:prstDash val="solid"/>
+                      <a:round/>
+                      <a:headEnd type="none" w="med" len="med"/>
+                      <a:tailEnd type="none" w="med" len="med"/>
+                    </a:lnR>
+                    <a:lnT w="12700" cap="flat" cmpd="sng" algn="ctr">
+                      <a:solidFill>
+                        <a:schemeClr val="tx1"/>
+                      </a:solidFill>
+                      <a:prstDash val="solid"/>
+                      <a:round/>
+                      <a:headEnd type="none" w="med" len="med"/>
+                      <a:tailEnd type="none" w="med" len="med"/>
+                    </a:lnT>
+                    <a:lnB w="12700" cap="flat" cmpd="sng" algn="ctr">
+                      <a:solidFill>
+                        <a:schemeClr val="tx1"/>
+                      </a:solidFill>
+                      <a:prstDash val="solid"/>
+                      <a:round/>
+                      <a:headEnd type="none" w="med" len="med"/>
+                      <a:tailEnd type="none" w="med" len="med"/>
+                    </a:lnB>
+                    <a:solidFill>
+                      <a:schemeClr val="bg1"/>
+                    </a:solidFill>
+                  </a:tcPr>
+                </a:tc>
+                <a:extLst>
+                  <a:ext uri="{0D108BD9-81ED-4DB2-BD59-A6C34878D82A}">
+                    <a16:rowId xmlns:a16="http://schemas.microsoft.com/office/drawing/2014/main" val="452984794"/>
+                  </a:ext>
+                </a:extLst>
+              </a:tr>
+              <a:tr h="0">
+                <a:tc>
+                  <a:txBody>
+                    <a:bodyPr/>
+                    <a:lstStyle/>
+                    <a:p>
+                      <a:pPr marL="0" marR="0" lvl="0" indent="0" algn="l" defTabSz="457200" rtl="0" eaLnBrk="1" fontAlgn="auto" latinLnBrk="0" hangingPunct="1">
+                        <a:lnSpc>
+                          <a:spcPct val="100000"/>
+                        </a:lnSpc>
+                        <a:spcBef>
+                          <a:spcPts val="0"/>
+                        </a:spcBef>
+                        <a:spcAft>
+                          <a:spcPts val="0"/>
+                        </a:spcAft>
+                        <a:buClrTx/>
+                        <a:buSzTx/>
+                        <a:buFontTx/>
+                        <a:buNone/>
+                        <a:tabLst/>
+                        <a:defRPr/>
+                      </a:pPr>
+                      <a:r>
+                        <a:rPr lang="en-US" altLang="ko-KR" sz="1600" dirty="0">
+                          <a:effectLst/>
+                        </a:rPr>
+                        <a:t>Camera ray through pixel</a:t>
+                      </a:r>
+                    </a:p>
+                  </a:txBody>
+                  <a:tcPr marL="45720" marR="45720" anchor="ctr">
+                    <a:lnL w="12700" cap="flat" cmpd="sng" algn="ctr">
+                      <a:solidFill>
+                        <a:schemeClr val="tx1"/>
+                      </a:solidFill>
+                      <a:prstDash val="solid"/>
+                      <a:round/>
+                      <a:headEnd type="none" w="med" len="med"/>
+                      <a:tailEnd type="none" w="med" len="med"/>
+                    </a:lnL>
+                    <a:lnR w="12700" cap="flat" cmpd="sng" algn="ctr">
+                      <a:solidFill>
+                        <a:schemeClr val="tx1"/>
+                      </a:solidFill>
+                      <a:prstDash val="solid"/>
+                      <a:round/>
+                      <a:headEnd type="none" w="med" len="med"/>
+                      <a:tailEnd type="none" w="med" len="med"/>
+                    </a:lnR>
+                    <a:lnT w="12700" cap="flat" cmpd="sng" algn="ctr">
+                      <a:solidFill>
+                        <a:schemeClr val="tx1"/>
+                      </a:solidFill>
+                      <a:prstDash val="solid"/>
+                      <a:round/>
+                      <a:headEnd type="none" w="med" len="med"/>
+                      <a:tailEnd type="none" w="med" len="med"/>
+                    </a:lnT>
+                    <a:lnB w="12700" cap="flat" cmpd="sng" algn="ctr">
+                      <a:solidFill>
+                        <a:schemeClr val="tx1"/>
+                      </a:solidFill>
+                      <a:prstDash val="solid"/>
+                      <a:round/>
+                      <a:headEnd type="none" w="med" len="med"/>
+                      <a:tailEnd type="none" w="med" len="med"/>
+                    </a:lnB>
+                    <a:solidFill>
+                      <a:schemeClr val="bg1"/>
+                    </a:solidFill>
+                  </a:tcPr>
+                </a:tc>
+                <a:tc>
+                  <a:txBody>
+                    <a:bodyPr/>
+                    <a:lstStyle/>
+                    <a:p>
+                      <a:pPr marL="0" marR="0" lvl="0" indent="0" algn="l" defTabSz="457200" rtl="0" eaLnBrk="1" fontAlgn="auto" latinLnBrk="0" hangingPunct="1">
+                        <a:lnSpc>
+                          <a:spcPct val="100000"/>
+                        </a:lnSpc>
+                        <a:spcBef>
+                          <a:spcPts val="0"/>
+                        </a:spcBef>
+                        <a:spcAft>
+                          <a:spcPts val="0"/>
+                        </a:spcAft>
+                        <a:buClrTx/>
+                        <a:buSzTx/>
+                        <a:buFontTx/>
+                        <a:buNone/>
+                        <a:tabLst/>
+                        <a:defRPr/>
+                      </a:pPr>
+                      <a:r>
+                        <a:rPr lang="en-US" altLang="ko-KR" sz="1600" dirty="0">
+                          <a:effectLst/>
+                        </a:rPr>
+                        <a:t>Spectrum through IGM box</a:t>
+                      </a:r>
+                    </a:p>
+                  </a:txBody>
+                  <a:tcPr marL="45720" marR="45720" anchor="ctr">
+                    <a:lnL w="12700" cap="flat" cmpd="sng" algn="ctr">
+                      <a:solidFill>
+                        <a:schemeClr val="tx1"/>
+                      </a:solidFill>
+                      <a:prstDash val="solid"/>
+                      <a:round/>
+                      <a:headEnd type="none" w="med" len="med"/>
+                      <a:tailEnd type="none" w="med" len="med"/>
+                    </a:lnL>
+                    <a:lnR w="12700" cap="flat" cmpd="sng" algn="ctr">
+                      <a:solidFill>
+                        <a:schemeClr val="tx1"/>
+                      </a:solidFill>
+                      <a:prstDash val="solid"/>
+                      <a:round/>
+                      <a:headEnd type="none" w="med" len="med"/>
+                      <a:tailEnd type="none" w="med" len="med"/>
+                    </a:lnR>
+                    <a:lnT w="12700" cap="flat" cmpd="sng" algn="ctr">
+                      <a:solidFill>
+                        <a:schemeClr val="tx1"/>
+                      </a:solidFill>
+                      <a:prstDash val="solid"/>
+                      <a:round/>
+                      <a:headEnd type="none" w="med" len="med"/>
+                      <a:tailEnd type="none" w="med" len="med"/>
+                    </a:lnT>
+                    <a:lnB w="12700" cap="flat" cmpd="sng" algn="ctr">
+                      <a:solidFill>
+                        <a:schemeClr val="tx1"/>
+                      </a:solidFill>
+                      <a:prstDash val="solid"/>
+                      <a:round/>
+                      <a:headEnd type="none" w="med" len="med"/>
+                      <a:tailEnd type="none" w="med" len="med"/>
+                    </a:lnB>
+                    <a:solidFill>
+                      <a:schemeClr val="bg1"/>
+                    </a:solidFill>
+                  </a:tcPr>
+                </a:tc>
+                <a:tc>
+                  <a:txBody>
+                    <a:bodyPr/>
+                    <a:lstStyle/>
+                    <a:p>
+                      <a:pPr>
+                        <a:buNone/>
+                      </a:pPr>
+                      <a:endParaRPr lang="en-US" sz="1600" dirty="0"/>
+                    </a:p>
+                  </a:txBody>
+                  <a:tcPr marL="45720" marR="45720" anchor="ctr">
+                    <a:lnL w="12700" cap="flat" cmpd="sng" algn="ctr">
+                      <a:solidFill>
+                        <a:schemeClr val="tx1"/>
+                      </a:solidFill>
+                      <a:prstDash val="solid"/>
+                      <a:round/>
+                      <a:headEnd type="none" w="med" len="med"/>
+                      <a:tailEnd type="none" w="med" len="med"/>
+                    </a:lnL>
+                    <a:lnR w="12700" cap="flat" cmpd="sng" algn="ctr">
+                      <a:solidFill>
+                        <a:schemeClr val="tx1"/>
+                      </a:solidFill>
+                      <a:prstDash val="solid"/>
+                      <a:round/>
+                      <a:headEnd type="none" w="med" len="med"/>
+                      <a:tailEnd type="none" w="med" len="med"/>
+                    </a:lnR>
+                    <a:lnT w="12700" cap="flat" cmpd="sng" algn="ctr">
+                      <a:solidFill>
+                        <a:schemeClr val="tx1"/>
+                      </a:solidFill>
+                      <a:prstDash val="solid"/>
+                      <a:round/>
+                      <a:headEnd type="none" w="med" len="med"/>
+                      <a:tailEnd type="none" w="med" len="med"/>
+                    </a:lnT>
+                    <a:lnB w="12700" cap="flat" cmpd="sng" algn="ctr">
+                      <a:solidFill>
+                        <a:schemeClr val="tx1"/>
+                      </a:solidFill>
+                      <a:prstDash val="solid"/>
+                      <a:round/>
+                      <a:headEnd type="none" w="med" len="med"/>
+                      <a:tailEnd type="none" w="med" len="med"/>
+                    </a:lnB>
+                    <a:solidFill>
+                      <a:schemeClr val="bg1"/>
+                    </a:solidFill>
+                  </a:tcPr>
+                </a:tc>
+                <a:extLst>
+                  <a:ext uri="{0D108BD9-81ED-4DB2-BD59-A6C34878D82A}">
+                    <a16:rowId xmlns:a16="http://schemas.microsoft.com/office/drawing/2014/main" val="1986042272"/>
+                  </a:ext>
+                </a:extLst>
+              </a:tr>
+              <a:tr h="0">
+                <a:tc>
+                  <a:txBody>
+                    <a:bodyPr/>
+                    <a:lstStyle/>
+                    <a:p>
+                      <a:pPr marL="0" marR="0" lvl="0" indent="0" algn="l" defTabSz="457200" rtl="0" eaLnBrk="1" fontAlgn="auto" latinLnBrk="0" hangingPunct="1">
+                        <a:lnSpc>
+                          <a:spcPct val="100000"/>
+                        </a:lnSpc>
+                        <a:spcBef>
+                          <a:spcPts val="0"/>
+                        </a:spcBef>
+                        <a:spcAft>
+                          <a:spcPts val="0"/>
+                        </a:spcAft>
+                        <a:buClrTx/>
+                        <a:buSzTx/>
+                        <a:buFontTx/>
+                        <a:buNone/>
+                        <a:tabLst/>
+                        <a:defRPr/>
+                      </a:pPr>
+                      <a:r>
+                        <a:rPr lang="en-US" altLang="ko-KR" sz="1600" dirty="0">
+                          <a:effectLst/>
+                        </a:rPr>
+                        <a:t>RGB at pixel (</a:t>
+                      </a:r>
+                      <a:r>
+                        <a:rPr lang="en-US" altLang="ko-KR" sz="1600" dirty="0" err="1">
+                          <a:effectLst/>
+                        </a:rPr>
+                        <a:t>u,v</a:t>
+                      </a:r>
+                      <a:r>
+                        <a:rPr lang="en-US" altLang="ko-KR" sz="1600" dirty="0">
+                          <a:effectLst/>
+                        </a:rPr>
+                        <a:t>)</a:t>
+                      </a:r>
+                    </a:p>
+                  </a:txBody>
+                  <a:tcPr marL="45720" marR="45720" anchor="ctr">
+                    <a:lnL w="12700" cap="flat" cmpd="sng" algn="ctr">
+                      <a:solidFill>
+                        <a:schemeClr val="tx1"/>
+                      </a:solidFill>
+                      <a:prstDash val="solid"/>
+                      <a:round/>
+                      <a:headEnd type="none" w="med" len="med"/>
+                      <a:tailEnd type="none" w="med" len="med"/>
+                    </a:lnL>
+                    <a:lnR w="12700" cap="flat" cmpd="sng" algn="ctr">
+                      <a:solidFill>
+                        <a:schemeClr val="tx1"/>
+                      </a:solidFill>
+                      <a:prstDash val="solid"/>
+                      <a:round/>
+                      <a:headEnd type="none" w="med" len="med"/>
+                      <a:tailEnd type="none" w="med" len="med"/>
+                    </a:lnR>
+                    <a:lnT w="12700" cap="flat" cmpd="sng" algn="ctr">
+                      <a:solidFill>
+                        <a:schemeClr val="tx1"/>
+                      </a:solidFill>
+                      <a:prstDash val="solid"/>
+                      <a:round/>
+                      <a:headEnd type="none" w="med" len="med"/>
+                      <a:tailEnd type="none" w="med" len="med"/>
+                    </a:lnT>
+                    <a:lnB w="12700" cap="flat" cmpd="sng" algn="ctr">
+                      <a:solidFill>
+                        <a:schemeClr val="tx1"/>
+                      </a:solidFill>
+                      <a:prstDash val="solid"/>
+                      <a:round/>
+                      <a:headEnd type="none" w="med" len="med"/>
+                      <a:tailEnd type="none" w="med" len="med"/>
+                    </a:lnB>
+                    <a:solidFill>
+                      <a:schemeClr val="bg1"/>
+                    </a:solidFill>
+                  </a:tcPr>
+                </a:tc>
+                <a:tc>
+                  <a:txBody>
+                    <a:bodyPr/>
+                    <a:lstStyle/>
+                    <a:p>
+                      <a:pPr marL="0" marR="0" lvl="0" indent="0" algn="l" defTabSz="457200" rtl="0" eaLnBrk="1" fontAlgn="auto" latinLnBrk="0" hangingPunct="1">
+                        <a:lnSpc>
+                          <a:spcPct val="100000"/>
+                        </a:lnSpc>
+                        <a:spcBef>
+                          <a:spcPts val="0"/>
+                        </a:spcBef>
+                        <a:spcAft>
+                          <a:spcPts val="0"/>
+                        </a:spcAft>
+                        <a:buClrTx/>
+                        <a:buSzTx/>
+                        <a:buFontTx/>
+                        <a:buNone/>
+                        <a:tabLst/>
+                        <a:defRPr/>
+                      </a:pPr>
+                      <a:r>
+                        <a:rPr lang="en-US" altLang="ko-KR" sz="1600" dirty="0">
+                          <a:effectLst/>
+                        </a:rPr>
+                        <a:t>Optical depth at observed-velocity bin (</a:t>
+                      </a:r>
+                      <a:r>
+                        <a:rPr lang="en-US" altLang="ko-KR" sz="1600" dirty="0" err="1">
+                          <a:effectLst/>
+                        </a:rPr>
+                        <a:t>v_obs</a:t>
+                      </a:r>
+                      <a:r>
+                        <a:rPr lang="en-US" altLang="ko-KR" sz="1600" dirty="0">
+                          <a:effectLst/>
+                        </a:rPr>
+                        <a:t>)</a:t>
+                      </a:r>
+                    </a:p>
+                  </a:txBody>
+                  <a:tcPr marL="45720" marR="45720" anchor="ctr">
+                    <a:lnL w="12700" cap="flat" cmpd="sng" algn="ctr">
+                      <a:solidFill>
+                        <a:schemeClr val="tx1"/>
+                      </a:solidFill>
+                      <a:prstDash val="solid"/>
+                      <a:round/>
+                      <a:headEnd type="none" w="med" len="med"/>
+                      <a:tailEnd type="none" w="med" len="med"/>
+                    </a:lnL>
+                    <a:lnR w="12700" cap="flat" cmpd="sng" algn="ctr">
+                      <a:solidFill>
+                        <a:schemeClr val="tx1"/>
+                      </a:solidFill>
+                      <a:prstDash val="solid"/>
+                      <a:round/>
+                      <a:headEnd type="none" w="med" len="med"/>
+                      <a:tailEnd type="none" w="med" len="med"/>
+                    </a:lnR>
+                    <a:lnT w="12700" cap="flat" cmpd="sng" algn="ctr">
+                      <a:solidFill>
+                        <a:schemeClr val="tx1"/>
+                      </a:solidFill>
+                      <a:prstDash val="solid"/>
+                      <a:round/>
+                      <a:headEnd type="none" w="med" len="med"/>
+                      <a:tailEnd type="none" w="med" len="med"/>
+                    </a:lnT>
+                    <a:lnB w="12700" cap="flat" cmpd="sng" algn="ctr">
+                      <a:solidFill>
+                        <a:schemeClr val="tx1"/>
+                      </a:solidFill>
+                      <a:prstDash val="solid"/>
+                      <a:round/>
+                      <a:headEnd type="none" w="med" len="med"/>
+                      <a:tailEnd type="none" w="med" len="med"/>
+                    </a:lnB>
+                    <a:solidFill>
+                      <a:schemeClr val="bg1"/>
+                    </a:solidFill>
+                  </a:tcPr>
+                </a:tc>
+                <a:tc>
+                  <a:txBody>
+                    <a:bodyPr/>
+                    <a:lstStyle/>
+                    <a:p>
+                      <a:pPr>
+                        <a:buNone/>
+                      </a:pPr>
+                      <a:endParaRPr lang="en-US" sz="1600" dirty="0"/>
+                    </a:p>
+                  </a:txBody>
+                  <a:tcPr marL="45720" marR="45720" anchor="ctr">
+                    <a:lnL w="12700" cap="flat" cmpd="sng" algn="ctr">
+                      <a:solidFill>
+                        <a:schemeClr val="tx1"/>
+                      </a:solidFill>
+                      <a:prstDash val="solid"/>
+                      <a:round/>
+                      <a:headEnd type="none" w="med" len="med"/>
+                      <a:tailEnd type="none" w="med" len="med"/>
+                    </a:lnL>
+                    <a:lnR w="12700" cap="flat" cmpd="sng" algn="ctr">
+                      <a:solidFill>
+                        <a:schemeClr val="tx1"/>
+                      </a:solidFill>
+                      <a:prstDash val="solid"/>
+                      <a:round/>
+                      <a:headEnd type="none" w="med" len="med"/>
+                      <a:tailEnd type="none" w="med" len="med"/>
+                    </a:lnR>
+                    <a:lnT w="12700" cap="flat" cmpd="sng" algn="ctr">
+                      <a:solidFill>
+                        <a:schemeClr val="tx1"/>
+                      </a:solidFill>
+                      <a:prstDash val="solid"/>
+                      <a:round/>
+                      <a:headEnd type="none" w="med" len="med"/>
+                      <a:tailEnd type="none" w="med" len="med"/>
+                    </a:lnT>
+                    <a:lnB w="12700" cap="flat" cmpd="sng" algn="ctr">
+                      <a:solidFill>
+                        <a:schemeClr val="tx1"/>
+                      </a:solidFill>
+                      <a:prstDash val="solid"/>
+                      <a:round/>
+                      <a:headEnd type="none" w="med" len="med"/>
+                      <a:tailEnd type="none" w="med" len="med"/>
+                    </a:lnB>
+                    <a:solidFill>
+                      <a:schemeClr val="bg1"/>
+                    </a:solidFill>
+                  </a:tcPr>
+                </a:tc>
+                <a:extLst>
+                  <a:ext uri="{0D108BD9-81ED-4DB2-BD59-A6C34878D82A}">
+                    <a16:rowId xmlns:a16="http://schemas.microsoft.com/office/drawing/2014/main" val="2981119026"/>
+                  </a:ext>
+                </a:extLst>
+              </a:tr>
+              <a:tr h="0">
                 <a:tc>
                   <a:txBody>
                     <a:bodyPr/>
                     <a:lstStyle/>
                     <a:p>
                       <a:r>
-                        <a:rPr b="1" sz="1500">
-                          <a:solidFill>
-                            <a:srgbClr val="102A43"/>
-                          </a:solidFill>
+                        <a:rPr lang="en-US" altLang="ko-KR" sz="1600" b="1" dirty="0">
+                          <a:effectLst/>
                         </a:rPr>
-                        <a:t>NeRF concept</a:t>
+                        <a:t>5D Input</a:t>
+                      </a:r>
+                      <a:r>
+                        <a:rPr lang="en-US" altLang="ko-KR" sz="1600" dirty="0">
+                          <a:effectLst/>
+                        </a:rPr>
+                        <a:t>, position (</a:t>
+                      </a:r>
+                      <a:r>
+                        <a:rPr lang="en-US" altLang="ko-KR" sz="1600" dirty="0" err="1">
+                          <a:effectLst/>
+                        </a:rPr>
+                        <a:t>x,y,z</a:t>
+                      </a:r>
+                      <a:r>
+                        <a:rPr lang="en-US" altLang="ko-KR" sz="1600" dirty="0">
+                          <a:effectLst/>
+                        </a:rPr>
+                        <a:t>) + view direction (</a:t>
+                      </a:r>
+                      <a:r>
+                        <a:rPr lang="el-GR" altLang="ko-KR" sz="1600" dirty="0">
+                          <a:effectLst/>
+                        </a:rPr>
+                        <a:t>θ,φ)</a:t>
                       </a:r>
                     </a:p>
                   </a:txBody>
-                  <a:tcPr/>
+                  <a:tcPr marL="45720" marR="45720" anchor="ctr">
+                    <a:lnL w="12700" cap="flat" cmpd="sng" algn="ctr">
+                      <a:solidFill>
+                        <a:schemeClr val="tx1"/>
+                      </a:solidFill>
+                      <a:prstDash val="solid"/>
+                      <a:round/>
+                      <a:headEnd type="none" w="med" len="med"/>
+                      <a:tailEnd type="none" w="med" len="med"/>
+                    </a:lnL>
+                    <a:lnR w="12700" cap="flat" cmpd="sng" algn="ctr">
+                      <a:solidFill>
+                        <a:schemeClr val="tx1"/>
+                      </a:solidFill>
+                      <a:prstDash val="solid"/>
+                      <a:round/>
+                      <a:headEnd type="none" w="med" len="med"/>
+                      <a:tailEnd type="none" w="med" len="med"/>
+                    </a:lnR>
+                    <a:lnT w="12700" cap="flat" cmpd="sng" algn="ctr">
+                      <a:solidFill>
+                        <a:schemeClr val="tx1"/>
+                      </a:solidFill>
+                      <a:prstDash val="solid"/>
+                      <a:round/>
+                      <a:headEnd type="none" w="med" len="med"/>
+                      <a:tailEnd type="none" w="med" len="med"/>
+                    </a:lnT>
+                    <a:lnB w="12700" cap="flat" cmpd="sng" algn="ctr">
+                      <a:solidFill>
+                        <a:schemeClr val="tx1"/>
+                      </a:solidFill>
+                      <a:prstDash val="solid"/>
+                      <a:round/>
+                      <a:headEnd type="none" w="med" len="med"/>
+                      <a:tailEnd type="none" w="med" len="med"/>
+                    </a:lnB>
+                    <a:noFill/>
+                  </a:tcPr>
+                </a:tc>
+                <a:tc>
+                  <a:txBody>
+                    <a:bodyPr/>
+                    <a:lstStyle/>
+                    <a:p>
+                      <a:pPr>
+                        <a:buNone/>
+                      </a:pPr>
+                      <a:r>
+                        <a:rPr lang="en-US" sz="1600" dirty="0"/>
+                        <a:t>Comoving 3D coordinate input in the box</a:t>
+                      </a:r>
+                    </a:p>
+                  </a:txBody>
+                  <a:tcPr marL="45720" marR="45720" anchor="ctr">
+                    <a:lnL w="12700" cap="flat" cmpd="sng" algn="ctr">
+                      <a:solidFill>
+                        <a:schemeClr val="tx1"/>
+                      </a:solidFill>
+                      <a:prstDash val="solid"/>
+                      <a:round/>
+                      <a:headEnd type="none" w="med" len="med"/>
+                      <a:tailEnd type="none" w="med" len="med"/>
+                    </a:lnL>
+                    <a:lnR w="12700" cap="flat" cmpd="sng" algn="ctr">
+                      <a:solidFill>
+                        <a:schemeClr val="tx1"/>
+                      </a:solidFill>
+                      <a:prstDash val="solid"/>
+                      <a:round/>
+                      <a:headEnd type="none" w="med" len="med"/>
+                      <a:tailEnd type="none" w="med" len="med"/>
+                    </a:lnR>
+                    <a:lnT w="12700" cap="flat" cmpd="sng" algn="ctr">
+                      <a:solidFill>
+                        <a:schemeClr val="tx1"/>
+                      </a:solidFill>
+                      <a:prstDash val="solid"/>
+                      <a:round/>
+                      <a:headEnd type="none" w="med" len="med"/>
+                      <a:tailEnd type="none" w="med" len="med"/>
+                    </a:lnT>
+                    <a:lnB w="12700" cap="flat" cmpd="sng" algn="ctr">
+                      <a:solidFill>
+                        <a:schemeClr val="tx1"/>
+                      </a:solidFill>
+                      <a:prstDash val="solid"/>
+                      <a:round/>
+                      <a:headEnd type="none" w="med" len="med"/>
+                      <a:tailEnd type="none" w="med" len="med"/>
+                    </a:lnB>
+                    <a:noFill/>
+                  </a:tcPr>
                 </a:tc>
                 <a:tc>
                   <a:txBody>
@@ -4923,16 +5963,150 @@
                     <a:lstStyle/>
                     <a:p>
                       <a:r>
-                        <a:rPr b="1" sz="1500">
-                          <a:solidFill>
-                            <a:srgbClr val="102A43"/>
-                          </a:solidFill>
+                        <a:rPr lang="en-US" altLang="ko-KR" sz="1600" dirty="0">
+                          <a:effectLst/>
                         </a:rPr>
-                        <a:t>IGM NeRF analogue</a:t>
+                        <a:t>physics is view-independent</a:t>
                       </a:r>
                     </a:p>
                   </a:txBody>
-                  <a:tcPr/>
+                  <a:tcPr marL="45720" marR="45720" anchor="ctr">
+                    <a:lnL w="12700" cap="flat" cmpd="sng" algn="ctr">
+                      <a:solidFill>
+                        <a:schemeClr val="tx1"/>
+                      </a:solidFill>
+                      <a:prstDash val="solid"/>
+                      <a:round/>
+                      <a:headEnd type="none" w="med" len="med"/>
+                      <a:tailEnd type="none" w="med" len="med"/>
+                    </a:lnL>
+                    <a:lnR w="12700" cap="flat" cmpd="sng" algn="ctr">
+                      <a:solidFill>
+                        <a:schemeClr val="tx1"/>
+                      </a:solidFill>
+                      <a:prstDash val="solid"/>
+                      <a:round/>
+                      <a:headEnd type="none" w="med" len="med"/>
+                      <a:tailEnd type="none" w="med" len="med"/>
+                    </a:lnR>
+                    <a:lnT w="12700" cap="flat" cmpd="sng" algn="ctr">
+                      <a:solidFill>
+                        <a:schemeClr val="tx1"/>
+                      </a:solidFill>
+                      <a:prstDash val="solid"/>
+                      <a:round/>
+                      <a:headEnd type="none" w="med" len="med"/>
+                      <a:tailEnd type="none" w="med" len="med"/>
+                    </a:lnT>
+                    <a:lnB w="12700" cap="flat" cmpd="sng" algn="ctr">
+                      <a:solidFill>
+                        <a:schemeClr val="tx1"/>
+                      </a:solidFill>
+                      <a:prstDash val="solid"/>
+                      <a:round/>
+                      <a:headEnd type="none" w="med" len="med"/>
+                      <a:tailEnd type="none" w="med" len="med"/>
+                    </a:lnB>
+                    <a:noFill/>
+                  </a:tcPr>
+                </a:tc>
+                <a:extLst>
+                  <a:ext uri="{0D108BD9-81ED-4DB2-BD59-A6C34878D82A}">
+                    <a16:rowId xmlns:a16="http://schemas.microsoft.com/office/drawing/2014/main" val="1282919892"/>
+                  </a:ext>
+                </a:extLst>
+              </a:tr>
+              <a:tr h="0">
+                <a:tc>
+                  <a:txBody>
+                    <a:bodyPr/>
+                    <a:lstStyle/>
+                    <a:p>
+                      <a:pPr>
+                        <a:buNone/>
+                      </a:pPr>
+                      <a:r>
+                        <a:rPr lang="en-US" altLang="ko-KR" sz="1600" b="1" dirty="0">
+                          <a:effectLst/>
+                        </a:rPr>
+                        <a:t>Fourier Positional Encoding</a:t>
+                      </a:r>
+                      <a:r>
+                        <a:rPr lang="en-US" altLang="ko-KR" sz="1600" dirty="0">
+                          <a:effectLst/>
+                        </a:rPr>
+                        <a:t> </a:t>
+                      </a:r>
+                    </a:p>
+                    <a:p>
+                      <a:pPr>
+                        <a:buNone/>
+                      </a:pPr>
+                      <a:r>
+                        <a:rPr lang="en-US" altLang="ko-KR" sz="1600" dirty="0" err="1">
+                          <a:effectLst/>
+                        </a:rPr>
+                        <a:t>L_pos</a:t>
+                      </a:r>
+                      <a:r>
+                        <a:rPr lang="en-US" altLang="ko-KR" sz="1600" dirty="0">
+                          <a:effectLst/>
+                        </a:rPr>
+                        <a:t>=10, </a:t>
+                      </a:r>
+                      <a:r>
+                        <a:rPr lang="en-US" altLang="ko-KR" sz="1600" dirty="0" err="1">
+                          <a:effectLst/>
+                        </a:rPr>
+                        <a:t>L_dir</a:t>
+                      </a:r>
+                      <a:r>
+                        <a:rPr lang="en-US" altLang="ko-KR" sz="1600" dirty="0">
+                          <a:effectLst/>
+                        </a:rPr>
+                        <a:t>=4</a:t>
+                      </a:r>
+                    </a:p>
+                  </a:txBody>
+                  <a:tcPr marL="45720" marR="45720" anchor="ctr">
+                    <a:lnL w="12700" cap="flat" cmpd="sng" algn="ctr">
+                      <a:solidFill>
+                        <a:schemeClr val="tx1"/>
+                      </a:solidFill>
+                      <a:prstDash val="solid"/>
+                      <a:round/>
+                      <a:headEnd type="none" w="med" len="med"/>
+                      <a:tailEnd type="none" w="med" len="med"/>
+                    </a:lnL>
+                    <a:lnR w="12700" cap="flat" cmpd="sng" algn="ctr">
+                      <a:solidFill>
+                        <a:schemeClr val="tx1"/>
+                      </a:solidFill>
+                      <a:prstDash val="solid"/>
+                      <a:round/>
+                      <a:headEnd type="none" w="med" len="med"/>
+                      <a:tailEnd type="none" w="med" len="med"/>
+                    </a:lnR>
+                    <a:lnT w="12700" cap="flat" cmpd="sng" algn="ctr">
+                      <a:solidFill>
+                        <a:schemeClr val="tx1"/>
+                      </a:solidFill>
+                      <a:prstDash val="solid"/>
+                      <a:round/>
+                      <a:headEnd type="none" w="med" len="med"/>
+                      <a:tailEnd type="none" w="med" len="med"/>
+                    </a:lnT>
+                    <a:lnB w="12700" cap="flat" cmpd="sng" algn="ctr">
+                      <a:solidFill>
+                        <a:schemeClr val="tx1"/>
+                      </a:solidFill>
+                      <a:prstDash val="solid"/>
+                      <a:round/>
+                      <a:headEnd type="none" w="med" len="med"/>
+                      <a:tailEnd type="none" w="med" len="med"/>
+                    </a:lnB>
+                    <a:noFill/>
+                  </a:tcPr>
                 </a:tc>
                 <a:tc>
                   <a:txBody>
@@ -4940,374 +6114,639 @@
                     <a:lstStyle/>
                     <a:p>
                       <a:r>
-                        <a:rPr b="1" sz="1500">
-                          <a:solidFill>
-                            <a:srgbClr val="102A43"/>
-                          </a:solidFill>
+                        <a:rPr lang="en-US" altLang="ko-KR" sz="1600" dirty="0">
+                          <a:effectLst/>
                         </a:rPr>
-                        <a:t>Why the analogy holds</a:t>
+                        <a:t>Fourier Positional Encoding</a:t>
+                      </a:r>
+                    </a:p>
+                    <a:p>
+                      <a:r>
+                        <a:rPr lang="en-US" altLang="ko-KR" sz="1600" dirty="0">
+                          <a:effectLst/>
+                        </a:rPr>
+                        <a:t>L=10 (no direction encoding)</a:t>
                       </a:r>
                     </a:p>
                   </a:txBody>
-                  <a:tcPr/>
-                </a:tc>
-              </a:tr>
-              <a:tr h="692331">
-                <a:tc>
-                  <a:txBody>
-                    <a:bodyPr/>
-                    <a:lstStyle/>
-                    <a:p>
-                      <a:r>
-                        <a:rPr sz="1100">
-                          <a:solidFill>
-                            <a:srgbClr val="102A43"/>
-                          </a:solidFill>
-                        </a:rPr>
-                        <a:t>3D position  $(x, y, z)$</a:t>
-                      </a:r>
-                    </a:p>
-                  </a:txBody>
-                  <a:tcPr/>
+                  <a:tcPr marL="45720" marR="45720" anchor="ctr">
+                    <a:lnL w="12700" cap="flat" cmpd="sng" algn="ctr">
+                      <a:solidFill>
+                        <a:schemeClr val="tx1"/>
+                      </a:solidFill>
+                      <a:prstDash val="solid"/>
+                      <a:round/>
+                      <a:headEnd type="none" w="med" len="med"/>
+                      <a:tailEnd type="none" w="med" len="med"/>
+                    </a:lnL>
+                    <a:lnR w="12700" cap="flat" cmpd="sng" algn="ctr">
+                      <a:solidFill>
+                        <a:schemeClr val="tx1"/>
+                      </a:solidFill>
+                      <a:prstDash val="solid"/>
+                      <a:round/>
+                      <a:headEnd type="none" w="med" len="med"/>
+                      <a:tailEnd type="none" w="med" len="med"/>
+                    </a:lnR>
+                    <a:lnT w="12700" cap="flat" cmpd="sng" algn="ctr">
+                      <a:solidFill>
+                        <a:schemeClr val="tx1"/>
+                      </a:solidFill>
+                      <a:prstDash val="solid"/>
+                      <a:round/>
+                      <a:headEnd type="none" w="med" len="med"/>
+                      <a:tailEnd type="none" w="med" len="med"/>
+                    </a:lnT>
+                    <a:lnB w="12700" cap="flat" cmpd="sng" algn="ctr">
+                      <a:solidFill>
+                        <a:schemeClr val="tx1"/>
+                      </a:solidFill>
+                      <a:prstDash val="solid"/>
+                      <a:round/>
+                      <a:headEnd type="none" w="med" len="med"/>
+                      <a:tailEnd type="none" w="med" len="med"/>
+                    </a:lnB>
+                    <a:noFill/>
+                  </a:tcPr>
                 </a:tc>
                 <a:tc>
                   <a:txBody>
                     <a:bodyPr/>
                     <a:lstStyle/>
                     <a:p>
+                      <a:pPr>
+                        <a:buNone/>
+                      </a:pPr>
                       <a:r>
-                        <a:rPr sz="1100" b="1">
-                          <a:solidFill>
-                            <a:srgbClr val="C0392B"/>
-                          </a:solidFill>
-                        </a:rPr>
-                        <a:t>Comoving position in the volume</a:t>
+                        <a:rPr lang="en-US" sz="1600"/>
+                        <a:t>Captures multi-scale filaments + voids</a:t>
                       </a:r>
                     </a:p>
                   </a:txBody>
-                  <a:tcPr/>
+                  <a:tcPr marL="45720" marR="45720" anchor="ctr">
+                    <a:lnL w="12700" cap="flat" cmpd="sng" algn="ctr">
+                      <a:solidFill>
+                        <a:schemeClr val="tx1"/>
+                      </a:solidFill>
+                      <a:prstDash val="solid"/>
+                      <a:round/>
+                      <a:headEnd type="none" w="med" len="med"/>
+                      <a:tailEnd type="none" w="med" len="med"/>
+                    </a:lnL>
+                    <a:lnR w="12700" cap="flat" cmpd="sng" algn="ctr">
+                      <a:solidFill>
+                        <a:schemeClr val="tx1"/>
+                      </a:solidFill>
+                      <a:prstDash val="solid"/>
+                      <a:round/>
+                      <a:headEnd type="none" w="med" len="med"/>
+                      <a:tailEnd type="none" w="med" len="med"/>
+                    </a:lnR>
+                    <a:lnT w="12700" cap="flat" cmpd="sng" algn="ctr">
+                      <a:solidFill>
+                        <a:schemeClr val="tx1"/>
+                      </a:solidFill>
+                      <a:prstDash val="solid"/>
+                      <a:round/>
+                      <a:headEnd type="none" w="med" len="med"/>
+                      <a:tailEnd type="none" w="med" len="med"/>
+                    </a:lnT>
+                    <a:lnB w="12700" cap="flat" cmpd="sng" algn="ctr">
+                      <a:solidFill>
+                        <a:schemeClr val="tx1"/>
+                      </a:solidFill>
+                      <a:prstDash val="solid"/>
+                      <a:round/>
+                      <a:headEnd type="none" w="med" len="med"/>
+                      <a:tailEnd type="none" w="med" len="med"/>
+                    </a:lnB>
+                    <a:noFill/>
+                  </a:tcPr>
+                </a:tc>
+                <a:extLst>
+                  <a:ext uri="{0D108BD9-81ED-4DB2-BD59-A6C34878D82A}">
+                    <a16:rowId xmlns:a16="http://schemas.microsoft.com/office/drawing/2014/main" val="2640047248"/>
+                  </a:ext>
+                </a:extLst>
+              </a:tr>
+              <a:tr h="0">
+                <a:tc>
+                  <a:txBody>
+                    <a:bodyPr/>
+                    <a:lstStyle/>
+                    <a:p>
+                      <a:pPr>
+                        <a:buNone/>
+                      </a:pPr>
+                      <a:r>
+                        <a:rPr lang="en-US" sz="1600" b="1"/>
+                        <a:t>Volume density </a:t>
+                      </a:r>
+                      <a:r>
+                        <a:rPr lang="el-GR" sz="1600" b="1"/>
+                        <a:t>σ</a:t>
+                      </a:r>
+                      <a:endParaRPr lang="el-GR" sz="1600"/>
+                    </a:p>
+                  </a:txBody>
+                  <a:tcPr marL="45720" marR="45720" anchor="ctr">
+                    <a:lnL w="12700" cap="flat" cmpd="sng" algn="ctr">
+                      <a:solidFill>
+                        <a:schemeClr val="tx1"/>
+                      </a:solidFill>
+                      <a:prstDash val="solid"/>
+                      <a:round/>
+                      <a:headEnd type="none" w="med" len="med"/>
+                      <a:tailEnd type="none" w="med" len="med"/>
+                    </a:lnL>
+                    <a:lnR w="12700" cap="flat" cmpd="sng" algn="ctr">
+                      <a:solidFill>
+                        <a:schemeClr val="tx1"/>
+                      </a:solidFill>
+                      <a:prstDash val="solid"/>
+                      <a:round/>
+                      <a:headEnd type="none" w="med" len="med"/>
+                      <a:tailEnd type="none" w="med" len="med"/>
+                    </a:lnR>
+                    <a:lnT w="12700" cap="flat" cmpd="sng" algn="ctr">
+                      <a:solidFill>
+                        <a:schemeClr val="tx1"/>
+                      </a:solidFill>
+                      <a:prstDash val="solid"/>
+                      <a:round/>
+                      <a:headEnd type="none" w="med" len="med"/>
+                      <a:tailEnd type="none" w="med" len="med"/>
+                    </a:lnT>
+                    <a:lnB w="12700" cap="flat" cmpd="sng" algn="ctr">
+                      <a:solidFill>
+                        <a:schemeClr val="tx1"/>
+                      </a:solidFill>
+                      <a:prstDash val="solid"/>
+                      <a:round/>
+                      <a:headEnd type="none" w="med" len="med"/>
+                      <a:tailEnd type="none" w="med" len="med"/>
+                    </a:lnB>
+                    <a:noFill/>
+                  </a:tcPr>
                 </a:tc>
                 <a:tc>
                   <a:txBody>
                     <a:bodyPr/>
                     <a:lstStyle/>
                     <a:p>
+                      <a:pPr>
+                        <a:buNone/>
+                      </a:pPr>
                       <a:r>
-                        <a:rPr sz="1100">
-                          <a:solidFill>
-                            <a:srgbClr val="102A43"/>
-                          </a:solidFill>
-                        </a:rPr>
-                        <a:t>Both index a 3D scalar/vector field over a bounded scene.</a:t>
+                        <a:rPr lang="sv-SE" sz="1600" dirty="0"/>
+                        <a:t>Neutral hydrogen density (ρ × X_HI)</a:t>
                       </a:r>
                     </a:p>
                   </a:txBody>
-                  <a:tcPr/>
-                </a:tc>
-              </a:tr>
-              <a:tr h="692331">
-                <a:tc>
-                  <a:txBody>
-                    <a:bodyPr/>
-                    <a:lstStyle/>
-                    <a:p>
-                      <a:r>
-                        <a:rPr sz="1100">
-                          <a:solidFill>
-                            <a:srgbClr val="102A43"/>
-                          </a:solidFill>
-                        </a:rPr>
-                        <a:t>Positional encoding  γ(x)</a:t>
-                      </a:r>
-                    </a:p>
-                  </a:txBody>
-                  <a:tcPr/>
+                  <a:tcPr marL="45720" marR="45720" anchor="ctr">
+                    <a:lnL w="12700" cap="flat" cmpd="sng" algn="ctr">
+                      <a:solidFill>
+                        <a:schemeClr val="tx1"/>
+                      </a:solidFill>
+                      <a:prstDash val="solid"/>
+                      <a:round/>
+                      <a:headEnd type="none" w="med" len="med"/>
+                      <a:tailEnd type="none" w="med" len="med"/>
+                    </a:lnL>
+                    <a:lnR w="12700" cap="flat" cmpd="sng" algn="ctr">
+                      <a:solidFill>
+                        <a:schemeClr val="tx1"/>
+                      </a:solidFill>
+                      <a:prstDash val="solid"/>
+                      <a:round/>
+                      <a:headEnd type="none" w="med" len="med"/>
+                      <a:tailEnd type="none" w="med" len="med"/>
+                    </a:lnR>
+                    <a:lnT w="12700" cap="flat" cmpd="sng" algn="ctr">
+                      <a:solidFill>
+                        <a:schemeClr val="tx1"/>
+                      </a:solidFill>
+                      <a:prstDash val="solid"/>
+                      <a:round/>
+                      <a:headEnd type="none" w="med" len="med"/>
+                      <a:tailEnd type="none" w="med" len="med"/>
+                    </a:lnT>
+                    <a:lnB w="12700" cap="flat" cmpd="sng" algn="ctr">
+                      <a:solidFill>
+                        <a:schemeClr val="tx1"/>
+                      </a:solidFill>
+                      <a:prstDash val="solid"/>
+                      <a:round/>
+                      <a:headEnd type="none" w="med" len="med"/>
+                      <a:tailEnd type="none" w="med" len="med"/>
+                    </a:lnB>
+                    <a:noFill/>
+                  </a:tcPr>
                 </a:tc>
                 <a:tc>
                   <a:txBody>
                     <a:bodyPr/>
                     <a:lstStyle/>
                     <a:p>
+                      <a:pPr>
+                        <a:buNone/>
+                      </a:pPr>
                       <a:r>
-                        <a:rPr sz="1100" b="1">
-                          <a:solidFill>
-                            <a:srgbClr val="C0392B"/>
-                          </a:solidFill>
-                        </a:rPr>
-                        <a:t>Fourier features, identical (L = 10)</a:t>
+                        <a:rPr lang="en-US" sz="1600"/>
+                        <a:t>Opacity along the ray</a:t>
                       </a:r>
                     </a:p>
                   </a:txBody>
-                  <a:tcPr/>
+                  <a:tcPr marL="45720" marR="45720" anchor="ctr">
+                    <a:lnL w="12700" cap="flat" cmpd="sng" algn="ctr">
+                      <a:solidFill>
+                        <a:schemeClr val="tx1"/>
+                      </a:solidFill>
+                      <a:prstDash val="solid"/>
+                      <a:round/>
+                      <a:headEnd type="none" w="med" len="med"/>
+                      <a:tailEnd type="none" w="med" len="med"/>
+                    </a:lnL>
+                    <a:lnR w="12700" cap="flat" cmpd="sng" algn="ctr">
+                      <a:solidFill>
+                        <a:schemeClr val="tx1"/>
+                      </a:solidFill>
+                      <a:prstDash val="solid"/>
+                      <a:round/>
+                      <a:headEnd type="none" w="med" len="med"/>
+                      <a:tailEnd type="none" w="med" len="med"/>
+                    </a:lnR>
+                    <a:lnT w="12700" cap="flat" cmpd="sng" algn="ctr">
+                      <a:solidFill>
+                        <a:schemeClr val="tx1"/>
+                      </a:solidFill>
+                      <a:prstDash val="solid"/>
+                      <a:round/>
+                      <a:headEnd type="none" w="med" len="med"/>
+                      <a:tailEnd type="none" w="med" len="med"/>
+                    </a:lnT>
+                    <a:lnB w="12700" cap="flat" cmpd="sng" algn="ctr">
+                      <a:solidFill>
+                        <a:schemeClr val="tx1"/>
+                      </a:solidFill>
+                      <a:prstDash val="solid"/>
+                      <a:round/>
+                      <a:headEnd type="none" w="med" len="med"/>
+                      <a:tailEnd type="none" w="med" len="med"/>
+                    </a:lnB>
+                    <a:noFill/>
+                  </a:tcPr>
+                </a:tc>
+                <a:extLst>
+                  <a:ext uri="{0D108BD9-81ED-4DB2-BD59-A6C34878D82A}">
+                    <a16:rowId xmlns:a16="http://schemas.microsoft.com/office/drawing/2014/main" val="3658249481"/>
+                  </a:ext>
+                </a:extLst>
+              </a:tr>
+              <a:tr h="0">
+                <a:tc>
+                  <a:txBody>
+                    <a:bodyPr/>
+                    <a:lstStyle/>
+                    <a:p>
+                      <a:pPr>
+                        <a:buNone/>
+                      </a:pPr>
+                      <a:r>
+                        <a:rPr lang="en-US" sz="1600" b="1"/>
+                        <a:t>View-dependent color c</a:t>
+                      </a:r>
+                      <a:endParaRPr lang="en-US" sz="1600"/>
+                    </a:p>
+                  </a:txBody>
+                  <a:tcPr marL="45720" marR="45720" anchor="ctr">
+                    <a:lnL w="12700" cap="flat" cmpd="sng" algn="ctr">
+                      <a:solidFill>
+                        <a:schemeClr val="tx1"/>
+                      </a:solidFill>
+                      <a:prstDash val="solid"/>
+                      <a:round/>
+                      <a:headEnd type="none" w="med" len="med"/>
+                      <a:tailEnd type="none" w="med" len="med"/>
+                    </a:lnL>
+                    <a:lnR w="12700" cap="flat" cmpd="sng" algn="ctr">
+                      <a:solidFill>
+                        <a:schemeClr val="tx1"/>
+                      </a:solidFill>
+                      <a:prstDash val="solid"/>
+                      <a:round/>
+                      <a:headEnd type="none" w="med" len="med"/>
+                      <a:tailEnd type="none" w="med" len="med"/>
+                    </a:lnR>
+                    <a:lnT w="12700" cap="flat" cmpd="sng" algn="ctr">
+                      <a:solidFill>
+                        <a:schemeClr val="tx1"/>
+                      </a:solidFill>
+                      <a:prstDash val="solid"/>
+                      <a:round/>
+                      <a:headEnd type="none" w="med" len="med"/>
+                      <a:tailEnd type="none" w="med" len="med"/>
+                    </a:lnT>
+                    <a:lnB w="12700" cap="flat" cmpd="sng" algn="ctr">
+                      <a:solidFill>
+                        <a:schemeClr val="tx1"/>
+                      </a:solidFill>
+                      <a:prstDash val="solid"/>
+                      <a:round/>
+                      <a:headEnd type="none" w="med" len="med"/>
+                      <a:tailEnd type="none" w="med" len="med"/>
+                    </a:lnB>
+                    <a:noFill/>
+                  </a:tcPr>
                 </a:tc>
                 <a:tc>
                   <a:txBody>
                     <a:bodyPr/>
                     <a:lstStyle/>
                     <a:p>
+                      <a:pPr>
+                        <a:buNone/>
+                      </a:pPr>
                       <a:r>
-                        <a:rPr sz="1100">
-                          <a:solidFill>
-                            <a:srgbClr val="102A43"/>
-                          </a:solidFill>
-                        </a:rPr>
-                        <a:t>Cosmic structure is multi-scale: filaments + voids → high-frequency basis.</a:t>
+                        <a:rPr lang="en-US" sz="1600"/>
+                        <a:t>Voigt absorption kernel H(a,x)</a:t>
                       </a:r>
                     </a:p>
                   </a:txBody>
-                  <a:tcPr/>
-                </a:tc>
-              </a:tr>
-              <a:tr h="692331">
-                <a:tc>
-                  <a:txBody>
-                    <a:bodyPr/>
-                    <a:lstStyle/>
-                    <a:p>
-                      <a:r>
-                        <a:rPr sz="1100">
-                          <a:solidFill>
-                            <a:srgbClr val="102A43"/>
-                          </a:solidFill>
-                        </a:rPr>
-                        <a:t>Volume density  σ</a:t>
-                      </a:r>
-                    </a:p>
-                  </a:txBody>
-                  <a:tcPr/>
+                  <a:tcPr marL="45720" marR="45720" anchor="ctr">
+                    <a:lnL w="12700" cap="flat" cmpd="sng" algn="ctr">
+                      <a:solidFill>
+                        <a:schemeClr val="tx1"/>
+                      </a:solidFill>
+                      <a:prstDash val="solid"/>
+                      <a:round/>
+                      <a:headEnd type="none" w="med" len="med"/>
+                      <a:tailEnd type="none" w="med" len="med"/>
+                    </a:lnL>
+                    <a:lnR w="12700" cap="flat" cmpd="sng" algn="ctr">
+                      <a:solidFill>
+                        <a:schemeClr val="tx1"/>
+                      </a:solidFill>
+                      <a:prstDash val="solid"/>
+                      <a:round/>
+                      <a:headEnd type="none" w="med" len="med"/>
+                      <a:tailEnd type="none" w="med" len="med"/>
+                    </a:lnR>
+                    <a:lnT w="12700" cap="flat" cmpd="sng" algn="ctr">
+                      <a:solidFill>
+                        <a:schemeClr val="tx1"/>
+                      </a:solidFill>
+                      <a:prstDash val="solid"/>
+                      <a:round/>
+                      <a:headEnd type="none" w="med" len="med"/>
+                      <a:tailEnd type="none" w="med" len="med"/>
+                    </a:lnT>
+                    <a:lnB w="12700" cap="flat" cmpd="sng" algn="ctr">
+                      <a:solidFill>
+                        <a:schemeClr val="tx1"/>
+                      </a:solidFill>
+                      <a:prstDash val="solid"/>
+                      <a:round/>
+                      <a:headEnd type="none" w="med" len="med"/>
+                      <a:tailEnd type="none" w="med" len="med"/>
+                    </a:lnB>
+                    <a:noFill/>
+                  </a:tcPr>
                 </a:tc>
                 <a:tc>
                   <a:txBody>
                     <a:bodyPr/>
                     <a:lstStyle/>
                     <a:p>
+                      <a:pPr>
+                        <a:buNone/>
+                      </a:pPr>
                       <a:r>
-                        <a:rPr sz="1100" b="1">
-                          <a:solidFill>
-                            <a:srgbClr val="C0392B"/>
-                          </a:solidFill>
-                        </a:rPr>
-                        <a:t>Neutral hydrogen density  n_HI = ρ · X_HI</a:t>
+                        <a:rPr lang="en-US" sz="1600"/>
+                        <a:t>Known physics function, not learned</a:t>
                       </a:r>
                     </a:p>
                   </a:txBody>
-                  <a:tcPr/>
+                  <a:tcPr marL="45720" marR="45720" anchor="ctr">
+                    <a:lnL w="12700" cap="flat" cmpd="sng" algn="ctr">
+                      <a:solidFill>
+                        <a:schemeClr val="tx1"/>
+                      </a:solidFill>
+                      <a:prstDash val="solid"/>
+                      <a:round/>
+                      <a:headEnd type="none" w="med" len="med"/>
+                      <a:tailEnd type="none" w="med" len="med"/>
+                    </a:lnL>
+                    <a:lnR w="12700" cap="flat" cmpd="sng" algn="ctr">
+                      <a:solidFill>
+                        <a:schemeClr val="tx1"/>
+                      </a:solidFill>
+                      <a:prstDash val="solid"/>
+                      <a:round/>
+                      <a:headEnd type="none" w="med" len="med"/>
+                      <a:tailEnd type="none" w="med" len="med"/>
+                    </a:lnR>
+                    <a:lnT w="12700" cap="flat" cmpd="sng" algn="ctr">
+                      <a:solidFill>
+                        <a:schemeClr val="tx1"/>
+                      </a:solidFill>
+                      <a:prstDash val="solid"/>
+                      <a:round/>
+                      <a:headEnd type="none" w="med" len="med"/>
+                      <a:tailEnd type="none" w="med" len="med"/>
+                    </a:lnT>
+                    <a:lnB w="12700" cap="flat" cmpd="sng" algn="ctr">
+                      <a:solidFill>
+                        <a:schemeClr val="tx1"/>
+                      </a:solidFill>
+                      <a:prstDash val="solid"/>
+                      <a:round/>
+                      <a:headEnd type="none" w="med" len="med"/>
+                      <a:tailEnd type="none" w="med" len="med"/>
+                    </a:lnB>
+                    <a:noFill/>
+                  </a:tcPr>
+                </a:tc>
+                <a:extLst>
+                  <a:ext uri="{0D108BD9-81ED-4DB2-BD59-A6C34878D82A}">
+                    <a16:rowId xmlns:a16="http://schemas.microsoft.com/office/drawing/2014/main" val="134802872"/>
+                  </a:ext>
+                </a:extLst>
+              </a:tr>
+              <a:tr h="0">
+                <a:tc>
+                  <a:txBody>
+                    <a:bodyPr/>
+                    <a:lstStyle/>
+                    <a:p>
+                      <a:pPr>
+                        <a:buNone/>
+                      </a:pPr>
+                      <a:r>
+                        <a:rPr lang="en-US" sz="1600" b="1"/>
+                        <a:t>Volume rendering integral</a:t>
+                      </a:r>
+                      <a:endParaRPr lang="en-US" sz="1600"/>
+                    </a:p>
+                  </a:txBody>
+                  <a:tcPr marL="45720" marR="45720" anchor="ctr">
+                    <a:lnL w="12700" cap="flat" cmpd="sng" algn="ctr">
+                      <a:solidFill>
+                        <a:schemeClr val="tx1"/>
+                      </a:solidFill>
+                      <a:prstDash val="solid"/>
+                      <a:round/>
+                      <a:headEnd type="none" w="med" len="med"/>
+                      <a:tailEnd type="none" w="med" len="med"/>
+                    </a:lnL>
+                    <a:lnR w="12700" cap="flat" cmpd="sng" algn="ctr">
+                      <a:solidFill>
+                        <a:schemeClr val="tx1"/>
+                      </a:solidFill>
+                      <a:prstDash val="solid"/>
+                      <a:round/>
+                      <a:headEnd type="none" w="med" len="med"/>
+                      <a:tailEnd type="none" w="med" len="med"/>
+                    </a:lnR>
+                    <a:lnT w="12700" cap="flat" cmpd="sng" algn="ctr">
+                      <a:solidFill>
+                        <a:schemeClr val="tx1"/>
+                      </a:solidFill>
+                      <a:prstDash val="solid"/>
+                      <a:round/>
+                      <a:headEnd type="none" w="med" len="med"/>
+                      <a:tailEnd type="none" w="med" len="med"/>
+                    </a:lnT>
+                    <a:lnB w="12700" cap="flat" cmpd="sng" algn="ctr">
+                      <a:solidFill>
+                        <a:schemeClr val="tx1"/>
+                      </a:solidFill>
+                      <a:prstDash val="solid"/>
+                      <a:round/>
+                      <a:headEnd type="none" w="med" len="med"/>
+                      <a:tailEnd type="none" w="med" len="med"/>
+                    </a:lnB>
+                    <a:noFill/>
+                  </a:tcPr>
                 </a:tc>
                 <a:tc>
                   <a:txBody>
                     <a:bodyPr/>
                     <a:lstStyle/>
                     <a:p>
+                      <a:pPr>
+                        <a:buNone/>
+                      </a:pPr>
                       <a:r>
-                        <a:rPr sz="1100">
-                          <a:solidFill>
-                            <a:srgbClr val="102A43"/>
-                          </a:solidFill>
-                        </a:rPr>
-                        <a:t>Both are 'opacity per unit length' along a ray.</a:t>
+                        <a:rPr lang="en-US" sz="1600"/>
+                        <a:t>Differentiable optical depth integral</a:t>
                       </a:r>
                     </a:p>
                   </a:txBody>
-                  <a:tcPr/>
-                </a:tc>
-              </a:tr>
-              <a:tr h="692331">
-                <a:tc>
-                  <a:txBody>
-                    <a:bodyPr/>
-                    <a:lstStyle/>
-                    <a:p>
-                      <a:r>
-                        <a:rPr sz="1100">
-                          <a:solidFill>
-                            <a:srgbClr val="102A43"/>
-                          </a:solidFill>
-                        </a:rPr>
-                        <a:t>View-dependent color  c(x, d)</a:t>
-                      </a:r>
-                    </a:p>
-                  </a:txBody>
-                  <a:tcPr/>
+                  <a:tcPr marL="45720" marR="45720" anchor="ctr">
+                    <a:lnL w="12700" cap="flat" cmpd="sng" algn="ctr">
+                      <a:solidFill>
+                        <a:schemeClr val="tx1"/>
+                      </a:solidFill>
+                      <a:prstDash val="solid"/>
+                      <a:round/>
+                      <a:headEnd type="none" w="med" len="med"/>
+                      <a:tailEnd type="none" w="med" len="med"/>
+                    </a:lnL>
+                    <a:lnR w="12700" cap="flat" cmpd="sng" algn="ctr">
+                      <a:solidFill>
+                        <a:schemeClr val="tx1"/>
+                      </a:solidFill>
+                      <a:prstDash val="solid"/>
+                      <a:round/>
+                      <a:headEnd type="none" w="med" len="med"/>
+                      <a:tailEnd type="none" w="med" len="med"/>
+                    </a:lnR>
+                    <a:lnT w="12700" cap="flat" cmpd="sng" algn="ctr">
+                      <a:solidFill>
+                        <a:schemeClr val="tx1"/>
+                      </a:solidFill>
+                      <a:prstDash val="solid"/>
+                      <a:round/>
+                      <a:headEnd type="none" w="med" len="med"/>
+                      <a:tailEnd type="none" w="med" len="med"/>
+                    </a:lnT>
+                    <a:lnB w="12700" cap="flat" cmpd="sng" algn="ctr">
+                      <a:solidFill>
+                        <a:schemeClr val="tx1"/>
+                      </a:solidFill>
+                      <a:prstDash val="solid"/>
+                      <a:round/>
+                      <a:headEnd type="none" w="med" len="med"/>
+                      <a:tailEnd type="none" w="med" len="med"/>
+                    </a:lnB>
+                    <a:noFill/>
+                  </a:tcPr>
                 </a:tc>
                 <a:tc>
                   <a:txBody>
                     <a:bodyPr/>
                     <a:lstStyle/>
                     <a:p>
+                      <a:pPr>
+                        <a:buNone/>
+                      </a:pPr>
                       <a:r>
-                        <a:rPr sz="1100" b="1">
-                          <a:solidFill>
-                            <a:srgbClr val="C0392B"/>
-                          </a:solidFill>
-                        </a:rPr>
-                        <a:t>Voigt absorption kernel  H(a, x) / (b√π)</a:t>
+                        <a:rPr lang="en-US" sz="1600" dirty="0"/>
+                        <a:t>Line integral along the ray</a:t>
                       </a:r>
                     </a:p>
                   </a:txBody>
-                  <a:tcPr/>
+                  <a:tcPr marL="45720" marR="45720" anchor="ctr">
+                    <a:lnL w="12700" cap="flat" cmpd="sng" algn="ctr">
+                      <a:solidFill>
+                        <a:schemeClr val="tx1"/>
+                      </a:solidFill>
+                      <a:prstDash val="solid"/>
+                      <a:round/>
+                      <a:headEnd type="none" w="med" len="med"/>
+                      <a:tailEnd type="none" w="med" len="med"/>
+                    </a:lnL>
+                    <a:lnR w="12700" cap="flat" cmpd="sng" algn="ctr">
+                      <a:solidFill>
+                        <a:schemeClr val="tx1"/>
+                      </a:solidFill>
+                      <a:prstDash val="solid"/>
+                      <a:round/>
+                      <a:headEnd type="none" w="med" len="med"/>
+                      <a:tailEnd type="none" w="med" len="med"/>
+                    </a:lnR>
+                    <a:lnT w="12700" cap="flat" cmpd="sng" algn="ctr">
+                      <a:solidFill>
+                        <a:schemeClr val="tx1"/>
+                      </a:solidFill>
+                      <a:prstDash val="solid"/>
+                      <a:round/>
+                      <a:headEnd type="none" w="med" len="med"/>
+                      <a:tailEnd type="none" w="med" len="med"/>
+                    </a:lnT>
+                    <a:lnB w="12700" cap="flat" cmpd="sng" algn="ctr">
+                      <a:solidFill>
+                        <a:schemeClr val="tx1"/>
+                      </a:solidFill>
+                      <a:prstDash val="solid"/>
+                      <a:round/>
+                      <a:headEnd type="none" w="med" len="med"/>
+                      <a:tailEnd type="none" w="med" len="med"/>
+                    </a:lnB>
+                    <a:noFill/>
+                  </a:tcPr>
                 </a:tc>
-                <a:tc>
-                  <a:txBody>
-                    <a:bodyPr/>
-                    <a:lstStyle/>
-                    <a:p>
-                      <a:r>
-                        <a:rPr sz="1100">
-                          <a:solidFill>
-                            <a:srgbClr val="102A43"/>
-                          </a:solidFill>
-                        </a:rPr>
-                        <a:t>The 'what gets emitted/absorbed at a sample' function — but ours is a known closed-form, not learned.</a:t>
-                      </a:r>
-                    </a:p>
-                  </a:txBody>
-                  <a:tcPr/>
-                </a:tc>
-              </a:tr>
-              <a:tr h="692331">
-                <a:tc>
-                  <a:txBody>
-                    <a:bodyPr/>
-                    <a:lstStyle/>
-                    <a:p>
-                      <a:r>
-                        <a:rPr sz="1100">
-                          <a:solidFill>
-                            <a:srgbClr val="102A43"/>
-                          </a:solidFill>
-                        </a:rPr>
-                        <a:t>View direction  (θ, φ)</a:t>
-                      </a:r>
-                    </a:p>
-                  </a:txBody>
-                  <a:tcPr/>
-                </a:tc>
-                <a:tc>
-                  <a:txBody>
-                    <a:bodyPr/>
-                    <a:lstStyle/>
-                    <a:p>
-                      <a:r>
-                        <a:rPr sz="1100" b="1">
-                          <a:solidFill>
-                            <a:srgbClr val="C0392B"/>
-                          </a:solidFill>
-                        </a:rPr>
-                        <a:t>Line-of-sight orientation</a:t>
-                      </a:r>
-                    </a:p>
-                  </a:txBody>
-                  <a:tcPr/>
-                </a:tc>
-                <a:tc>
-                  <a:txBody>
-                    <a:bodyPr/>
-                    <a:lstStyle/>
-                    <a:p>
-                      <a:r>
-                        <a:rPr sz="1100">
-                          <a:solidFill>
-                            <a:srgbClr val="102A43"/>
-                          </a:solidFill>
-                        </a:rPr>
-                        <a:t>Sherwood sightlines are pre-aligned along z, so we predict only the LOS-projected v_pec — no view conditioning needed.</a:t>
-                      </a:r>
-                    </a:p>
-                  </a:txBody>
-                  <a:tcPr/>
-                </a:tc>
-              </a:tr>
-              <a:tr h="692334">
-                <a:tc>
-                  <a:txBody>
-                    <a:bodyPr/>
-                    <a:lstStyle/>
-                    <a:p>
-                      <a:r>
-                        <a:rPr sz="1100">
-                          <a:solidFill>
-                            <a:srgbClr val="102A43"/>
-                          </a:solidFill>
-                        </a:rPr>
-                        <a:t>Volume rendering integral</a:t>
-                      </a:r>
-                    </a:p>
-                  </a:txBody>
-                  <a:tcPr/>
-                </a:tc>
-                <a:tc>
-                  <a:txBody>
-                    <a:bodyPr/>
-                    <a:lstStyle/>
-                    <a:p>
-                      <a:r>
-                        <a:rPr sz="1100" b="1">
-                          <a:solidFill>
-                            <a:srgbClr val="C0392B"/>
-                          </a:solidFill>
-                        </a:rPr>
-                        <a:t>Optical depth integral (Voigt + RSD)</a:t>
-                      </a:r>
-                    </a:p>
-                  </a:txBody>
-                  <a:tcPr/>
-                </a:tc>
-                <a:tc>
-                  <a:txBody>
-                    <a:bodyPr/>
-                    <a:lstStyle/>
-                    <a:p>
-                      <a:r>
-                        <a:rPr sz="1100">
-                          <a:solidFill>
-                            <a:srgbClr val="102A43"/>
-                          </a:solidFill>
-                        </a:rPr>
-                        <a:t>Both are line integrals along a camera ray. Ours is convolutional in velocity space.</a:t>
-                      </a:r>
-                    </a:p>
-                  </a:txBody>
-                  <a:tcPr/>
-                </a:tc>
+                <a:extLst>
+                  <a:ext uri="{0D108BD9-81ED-4DB2-BD59-A6C34878D82A}">
+                    <a16:rowId xmlns:a16="http://schemas.microsoft.com/office/drawing/2014/main" val="3999391278"/>
+                  </a:ext>
+                </a:extLst>
               </a:tr>
             </a:tbl>
           </a:graphicData>
         </a:graphic>
       </p:graphicFrame>
-      <p:sp>
-        <p:nvSpPr>
-          <p:cNvPr id="4" name="TextBox 3"/>
-          <p:cNvSpPr txBox="1"/>
-          <p:nvPr/>
-        </p:nvSpPr>
-        <p:spPr>
-          <a:xfrm>
-            <a:off x="457200" y="6492240"/>
-            <a:ext cx="11247120" cy="274320"/>
-          </a:xfrm>
-          <a:prstGeom prst="rect">
-            <a:avLst/>
-          </a:prstGeom>
-          <a:noFill/>
-        </p:spPr>
-        <p:txBody>
-          <a:bodyPr wrap="none">
-            <a:spAutoFit/>
-          </a:bodyPr>
-          <a:lstStyle/>
-          <a:p>
-            <a:pPr algn="r"/>
-            <a:r>
-              <a:rPr sz="1000" i="1">
-                <a:solidFill>
-                  <a:srgbClr val="555555"/>
-                </a:solidFill>
-              </a:rPr>
-              <a:t>slide 3 / 7  ·  the analogy bridge</a:t>
-            </a:r>
-          </a:p>
-        </p:txBody>
-      </p:sp>
     </p:spTree>
   </p:cSld>
   <p:clrMapOvr>
@@ -5317,7 +6756,7 @@
 </file>
 
 <file path=ppt/slides/slide4.xml><?xml version="1.0" encoding="utf-8"?>
-<p:sld xmlns:a="http://schemas.openxmlformats.org/drawingml/2006/main" xmlns:p="http://schemas.openxmlformats.org/presentationml/2006/main" xmlns:r="http://schemas.openxmlformats.org/officeDocument/2006/relationships">
+<p:sld xmlns:a="http://schemas.openxmlformats.org/drawingml/2006/main" xmlns:r="http://schemas.openxmlformats.org/officeDocument/2006/relationships" xmlns:p="http://schemas.openxmlformats.org/presentationml/2006/main">
   <p:cSld>
     <p:spTree>
       <p:nvGrpSpPr>
@@ -5325,7 +6764,884 @@
         <p:cNvGrpSpPr/>
         <p:nvPr/>
       </p:nvGrpSpPr>
-      <p:grpSpPr/>
+      <p:grpSpPr>
+        <a:xfrm>
+          <a:off x="0" y="0"/>
+          <a:ext cx="0" cy="0"/>
+          <a:chOff x="0" y="0"/>
+          <a:chExt cx="0" cy="0"/>
+        </a:xfrm>
+      </p:grpSpPr>
+      <p:sp>
+        <p:nvSpPr>
+          <p:cNvPr id="2" name="TextBox 1"/>
+          <p:cNvSpPr txBox="1"/>
+          <p:nvPr/>
+        </p:nvSpPr>
+        <p:spPr>
+          <a:xfrm>
+            <a:off x="457200" y="182880"/>
+            <a:ext cx="11247120" cy="523220"/>
+          </a:xfrm>
+          <a:prstGeom prst="rect">
+            <a:avLst/>
+          </a:prstGeom>
+          <a:noFill/>
+        </p:spPr>
+        <p:txBody>
+          <a:bodyPr wrap="square">
+            <a:spAutoFit/>
+          </a:bodyPr>
+          <a:lstStyle/>
+          <a:p>
+            <a:pPr algn="l"/>
+            <a:r>
+              <a:rPr lang="en-US" sz="2800" b="1" dirty="0" err="1">
+                <a:solidFill>
+                  <a:srgbClr val="102A43"/>
+                </a:solidFill>
+              </a:rPr>
+              <a:t>NeRF</a:t>
+            </a:r>
+            <a:r>
+              <a:rPr lang="en-US" sz="2800" b="1" dirty="0">
+                <a:solidFill>
+                  <a:srgbClr val="102A43"/>
+                </a:solidFill>
+              </a:rPr>
+              <a:t> vs IGM </a:t>
+            </a:r>
+            <a:r>
+              <a:rPr lang="en-US" sz="2800" b="1" dirty="0" err="1">
+                <a:solidFill>
+                  <a:srgbClr val="102A43"/>
+                </a:solidFill>
+              </a:rPr>
+              <a:t>NeRF</a:t>
+            </a:r>
+            <a:endParaRPr sz="2800" b="1" dirty="0">
+              <a:solidFill>
+                <a:srgbClr val="102A43"/>
+              </a:solidFill>
+            </a:endParaRPr>
+          </a:p>
+        </p:txBody>
+      </p:sp>
+      <p:pic>
+        <p:nvPicPr>
+          <p:cNvPr id="3" name="Picture 2" descr="nerf_vs_igmnerf_arch.png"/>
+          <p:cNvPicPr>
+            <a:picLocks noChangeAspect="1"/>
+          </p:cNvPicPr>
+          <p:nvPr/>
+        </p:nvPicPr>
+        <p:blipFill>
+          <a:blip r:embed="rId3"/>
+          <a:stretch>
+            <a:fillRect/>
+          </a:stretch>
+        </p:blipFill>
+        <p:spPr>
+          <a:xfrm>
+            <a:off x="-556739" y="657252"/>
+            <a:ext cx="8019657" cy="5955213"/>
+          </a:xfrm>
+          <a:prstGeom prst="rect">
+            <a:avLst/>
+          </a:prstGeom>
+        </p:spPr>
+      </p:pic>
+      <p:graphicFrame>
+        <p:nvGraphicFramePr>
+          <p:cNvPr id="7" name="Table 6">
+            <a:extLst>
+              <a:ext uri="{FF2B5EF4-FFF2-40B4-BE49-F238E27FC236}">
+                <a16:creationId xmlns:a16="http://schemas.microsoft.com/office/drawing/2014/main" id="{C51E4390-F65F-476D-6F95-96BE7BC9B8C2}"/>
+              </a:ext>
+            </a:extLst>
+          </p:cNvPr>
+          <p:cNvGraphicFramePr>
+            <a:graphicFrameLocks noGrp="1"/>
+          </p:cNvGraphicFramePr>
+          <p:nvPr>
+            <p:extLst>
+              <p:ext uri="{D42A27DB-BD31-4B8C-83A1-F6EECF244321}">
+                <p14:modId xmlns:p14="http://schemas.microsoft.com/office/powerpoint/2010/main" val="2336355500"/>
+              </p:ext>
+            </p:extLst>
+          </p:nvPr>
+        </p:nvGraphicFramePr>
+        <p:xfrm>
+          <a:off x="7462918" y="4001836"/>
+          <a:ext cx="4515447" cy="2651760"/>
+        </p:xfrm>
+        <a:graphic>
+          <a:graphicData uri="http://schemas.openxmlformats.org/drawingml/2006/table">
+            <a:tbl>
+              <a:tblPr/>
+              <a:tblGrid>
+                <a:gridCol w="1122578">
+                  <a:extLst>
+                    <a:ext uri="{9D8B030D-6E8A-4147-A177-3AD203B41FA5}">
+                      <a16:colId xmlns:a16="http://schemas.microsoft.com/office/drawing/2014/main" val="3531813338"/>
+                    </a:ext>
+                  </a:extLst>
+                </a:gridCol>
+                <a:gridCol w="1445111">
+                  <a:extLst>
+                    <a:ext uri="{9D8B030D-6E8A-4147-A177-3AD203B41FA5}">
+                      <a16:colId xmlns:a16="http://schemas.microsoft.com/office/drawing/2014/main" val="157639118"/>
+                    </a:ext>
+                  </a:extLst>
+                </a:gridCol>
+                <a:gridCol w="1947758">
+                  <a:extLst>
+                    <a:ext uri="{9D8B030D-6E8A-4147-A177-3AD203B41FA5}">
+                      <a16:colId xmlns:a16="http://schemas.microsoft.com/office/drawing/2014/main" val="1061042097"/>
+                    </a:ext>
+                  </a:extLst>
+                </a:gridCol>
+              </a:tblGrid>
+              <a:tr h="0">
+                <a:tc>
+                  <a:txBody>
+                    <a:bodyPr/>
+                    <a:lstStyle/>
+                    <a:p>
+                      <a:pPr>
+                        <a:buNone/>
+                      </a:pPr>
+                      <a:r>
+                        <a:rPr lang="en-US" sz="1200" dirty="0"/>
+                        <a:t>Field</a:t>
+                      </a:r>
+                    </a:p>
+                  </a:txBody>
+                  <a:tcPr marL="45720" marR="45720" anchor="ctr">
+                    <a:lnL w="12700" cap="flat" cmpd="sng" algn="ctr">
+                      <a:solidFill>
+                        <a:schemeClr val="tx1"/>
+                      </a:solidFill>
+                      <a:prstDash val="solid"/>
+                      <a:round/>
+                      <a:headEnd type="none" w="med" len="med"/>
+                      <a:tailEnd type="none" w="med" len="med"/>
+                    </a:lnL>
+                    <a:lnR>
+                      <a:noFill/>
+                    </a:lnR>
+                    <a:lnT w="12700" cap="flat" cmpd="sng" algn="ctr">
+                      <a:solidFill>
+                        <a:schemeClr val="tx1"/>
+                      </a:solidFill>
+                      <a:prstDash val="solid"/>
+                      <a:round/>
+                      <a:headEnd type="none" w="med" len="med"/>
+                      <a:tailEnd type="none" w="med" len="med"/>
+                    </a:lnT>
+                    <a:lnB>
+                      <a:noFill/>
+                    </a:lnB>
+                    <a:solidFill>
+                      <a:schemeClr val="accent1">
+                        <a:lumMod val="20000"/>
+                        <a:lumOff val="80000"/>
+                      </a:schemeClr>
+                    </a:solidFill>
+                  </a:tcPr>
+                </a:tc>
+                <a:tc>
+                  <a:txBody>
+                    <a:bodyPr/>
+                    <a:lstStyle/>
+                    <a:p>
+                      <a:pPr>
+                        <a:buNone/>
+                      </a:pPr>
+                      <a:r>
+                        <a:rPr lang="en-US" sz="1200" dirty="0"/>
+                        <a:t>Activation</a:t>
+                      </a:r>
+                    </a:p>
+                  </a:txBody>
+                  <a:tcPr marL="45720" marR="45720" anchor="ctr">
+                    <a:lnL>
+                      <a:noFill/>
+                    </a:lnL>
+                    <a:lnR>
+                      <a:noFill/>
+                    </a:lnR>
+                    <a:lnT w="12700" cap="flat" cmpd="sng" algn="ctr">
+                      <a:solidFill>
+                        <a:schemeClr val="tx1"/>
+                      </a:solidFill>
+                      <a:prstDash val="solid"/>
+                      <a:round/>
+                      <a:headEnd type="none" w="med" len="med"/>
+                      <a:tailEnd type="none" w="med" len="med"/>
+                    </a:lnT>
+                    <a:lnB>
+                      <a:noFill/>
+                    </a:lnB>
+                    <a:solidFill>
+                      <a:schemeClr val="accent1">
+                        <a:lumMod val="20000"/>
+                        <a:lumOff val="80000"/>
+                      </a:schemeClr>
+                    </a:solidFill>
+                  </a:tcPr>
+                </a:tc>
+                <a:tc>
+                  <a:txBody>
+                    <a:bodyPr/>
+                    <a:lstStyle/>
+                    <a:p>
+                      <a:pPr>
+                        <a:buNone/>
+                      </a:pPr>
+                      <a:r>
+                        <a:rPr lang="en-US" sz="1200" dirty="0"/>
+                        <a:t>Notes</a:t>
+                      </a:r>
+                    </a:p>
+                  </a:txBody>
+                  <a:tcPr marL="45720" marR="45720" anchor="ctr">
+                    <a:lnL>
+                      <a:noFill/>
+                    </a:lnL>
+                    <a:lnR w="12700" cap="flat" cmpd="sng" algn="ctr">
+                      <a:solidFill>
+                        <a:schemeClr val="tx1"/>
+                      </a:solidFill>
+                      <a:prstDash val="solid"/>
+                      <a:round/>
+                      <a:headEnd type="none" w="med" len="med"/>
+                      <a:tailEnd type="none" w="med" len="med"/>
+                    </a:lnR>
+                    <a:lnT w="12700" cap="flat" cmpd="sng" algn="ctr">
+                      <a:solidFill>
+                        <a:schemeClr val="tx1"/>
+                      </a:solidFill>
+                      <a:prstDash val="solid"/>
+                      <a:round/>
+                      <a:headEnd type="none" w="med" len="med"/>
+                      <a:tailEnd type="none" w="med" len="med"/>
+                    </a:lnT>
+                    <a:lnB>
+                      <a:noFill/>
+                    </a:lnB>
+                    <a:solidFill>
+                      <a:schemeClr val="accent1">
+                        <a:lumMod val="20000"/>
+                        <a:lumOff val="80000"/>
+                      </a:schemeClr>
+                    </a:solidFill>
+                  </a:tcPr>
+                </a:tc>
+                <a:extLst>
+                  <a:ext uri="{0D108BD9-81ED-4DB2-BD59-A6C34878D82A}">
+                    <a16:rowId xmlns:a16="http://schemas.microsoft.com/office/drawing/2014/main" val="4049407283"/>
+                  </a:ext>
+                </a:extLst>
+              </a:tr>
+              <a:tr h="122413">
+                <a:tc>
+                  <a:txBody>
+                    <a:bodyPr/>
+                    <a:lstStyle/>
+                    <a:p>
+                      <a:pPr>
+                        <a:buNone/>
+                      </a:pPr>
+                      <a:r>
+                        <a:rPr lang="en-US" sz="1200" b="1" dirty="0"/>
+                        <a:t>Density</a:t>
+                      </a:r>
+                      <a:r>
+                        <a:rPr lang="en-US" sz="1200" dirty="0"/>
+                        <a:t> (</a:t>
+                      </a:r>
+                      <a:r>
+                        <a:rPr lang="el-GR" sz="1200" dirty="0"/>
+                        <a:t>ρ / ρ̄)</a:t>
+                      </a:r>
+                    </a:p>
+                  </a:txBody>
+                  <a:tcPr marL="45720" marR="45720" anchor="ctr">
+                    <a:lnL w="12700" cap="flat" cmpd="sng" algn="ctr">
+                      <a:solidFill>
+                        <a:schemeClr val="tx1"/>
+                      </a:solidFill>
+                      <a:prstDash val="solid"/>
+                      <a:round/>
+                      <a:headEnd type="none" w="med" len="med"/>
+                      <a:tailEnd type="none" w="med" len="med"/>
+                    </a:lnL>
+                    <a:lnR>
+                      <a:noFill/>
+                    </a:lnR>
+                    <a:lnT>
+                      <a:noFill/>
+                    </a:lnT>
+                    <a:lnB>
+                      <a:noFill/>
+                    </a:lnB>
+                    <a:solidFill>
+                      <a:schemeClr val="bg1">
+                        <a:lumMod val="95000"/>
+                      </a:schemeClr>
+                    </a:solidFill>
+                  </a:tcPr>
+                </a:tc>
+                <a:tc>
+                  <a:txBody>
+                    <a:bodyPr/>
+                    <a:lstStyle/>
+                    <a:p>
+                      <a:pPr>
+                        <a:buNone/>
+                      </a:pPr>
+                      <a:r>
+                        <a:rPr lang="en-US" sz="1200" dirty="0" err="1"/>
+                        <a:t>Softplus</a:t>
+                      </a:r>
+                      <a:endParaRPr lang="en-US" sz="1200" dirty="0"/>
+                    </a:p>
+                  </a:txBody>
+                  <a:tcPr marL="45720" marR="45720" anchor="ctr">
+                    <a:lnL>
+                      <a:noFill/>
+                    </a:lnL>
+                    <a:lnR>
+                      <a:noFill/>
+                    </a:lnR>
+                    <a:lnT>
+                      <a:noFill/>
+                    </a:lnT>
+                    <a:lnB>
+                      <a:noFill/>
+                    </a:lnB>
+                    <a:solidFill>
+                      <a:schemeClr val="bg1">
+                        <a:lumMod val="95000"/>
+                      </a:schemeClr>
+                    </a:solidFill>
+                  </a:tcPr>
+                </a:tc>
+                <a:tc>
+                  <a:txBody>
+                    <a:bodyPr/>
+                    <a:lstStyle/>
+                    <a:p>
+                      <a:pPr>
+                        <a:buNone/>
+                      </a:pPr>
+                      <a:r>
+                        <a:rPr lang="en-US" sz="1200"/>
+                        <a:t>Ensures positivity. Filament peaks ~100× mean.</a:t>
+                      </a:r>
+                    </a:p>
+                  </a:txBody>
+                  <a:tcPr marL="45720" marR="45720" anchor="ctr">
+                    <a:lnL>
+                      <a:noFill/>
+                    </a:lnL>
+                    <a:lnR w="12700" cap="flat" cmpd="sng" algn="ctr">
+                      <a:solidFill>
+                        <a:schemeClr val="tx1"/>
+                      </a:solidFill>
+                      <a:prstDash val="solid"/>
+                      <a:round/>
+                      <a:headEnd type="none" w="med" len="med"/>
+                      <a:tailEnd type="none" w="med" len="med"/>
+                    </a:lnR>
+                    <a:lnT>
+                      <a:noFill/>
+                    </a:lnT>
+                    <a:lnB>
+                      <a:noFill/>
+                    </a:lnB>
+                    <a:solidFill>
+                      <a:schemeClr val="bg1">
+                        <a:lumMod val="95000"/>
+                      </a:schemeClr>
+                    </a:solidFill>
+                  </a:tcPr>
+                </a:tc>
+                <a:extLst>
+                  <a:ext uri="{0D108BD9-81ED-4DB2-BD59-A6C34878D82A}">
+                    <a16:rowId xmlns:a16="http://schemas.microsoft.com/office/drawing/2014/main" val="459948351"/>
+                  </a:ext>
+                </a:extLst>
+              </a:tr>
+              <a:tr h="171378">
+                <a:tc>
+                  <a:txBody>
+                    <a:bodyPr/>
+                    <a:lstStyle/>
+                    <a:p>
+                      <a:pPr>
+                        <a:buNone/>
+                      </a:pPr>
+                      <a:r>
+                        <a:rPr lang="en-US" sz="1200" b="1"/>
+                        <a:t>Temperature</a:t>
+                      </a:r>
+                      <a:r>
+                        <a:rPr lang="en-US" sz="1200"/>
+                        <a:t> (T)</a:t>
+                      </a:r>
+                    </a:p>
+                  </a:txBody>
+                  <a:tcPr marL="45720" marR="45720" anchor="ctr">
+                    <a:lnL w="12700" cap="flat" cmpd="sng" algn="ctr">
+                      <a:solidFill>
+                        <a:schemeClr val="tx1"/>
+                      </a:solidFill>
+                      <a:prstDash val="solid"/>
+                      <a:round/>
+                      <a:headEnd type="none" w="med" len="med"/>
+                      <a:tailEnd type="none" w="med" len="med"/>
+                    </a:lnL>
+                    <a:lnR>
+                      <a:noFill/>
+                    </a:lnR>
+                    <a:lnT>
+                      <a:noFill/>
+                    </a:lnT>
+                    <a:lnB>
+                      <a:noFill/>
+                    </a:lnB>
+                    <a:solidFill>
+                      <a:schemeClr val="bg1">
+                        <a:lumMod val="95000"/>
+                      </a:schemeClr>
+                    </a:solidFill>
+                  </a:tcPr>
+                </a:tc>
+                <a:tc>
+                  <a:txBody>
+                    <a:bodyPr/>
+                    <a:lstStyle/>
+                    <a:p>
+                      <a:pPr>
+                        <a:buNone/>
+                      </a:pPr>
+                      <a:r>
+                        <a:rPr lang="en-US" sz="1200" dirty="0" err="1"/>
+                        <a:t>Softplus</a:t>
+                      </a:r>
+                      <a:r>
+                        <a:rPr lang="en-US" sz="1200" dirty="0"/>
+                        <a:t>(x) × 10⁴ + 10³ K</a:t>
+                      </a:r>
+                    </a:p>
+                  </a:txBody>
+                  <a:tcPr marL="45720" marR="45720" anchor="ctr">
+                    <a:lnL>
+                      <a:noFill/>
+                    </a:lnL>
+                    <a:lnR>
+                      <a:noFill/>
+                    </a:lnR>
+                    <a:lnT>
+                      <a:noFill/>
+                    </a:lnT>
+                    <a:lnB>
+                      <a:noFill/>
+                    </a:lnB>
+                    <a:solidFill>
+                      <a:schemeClr val="bg1">
+                        <a:lumMod val="95000"/>
+                      </a:schemeClr>
+                    </a:solidFill>
+                  </a:tcPr>
+                </a:tc>
+                <a:tc>
+                  <a:txBody>
+                    <a:bodyPr/>
+                    <a:lstStyle/>
+                    <a:p>
+                      <a:pPr>
+                        <a:buNone/>
+                      </a:pPr>
+                      <a:r>
+                        <a:rPr lang="en-US" sz="1200" dirty="0"/>
+                        <a:t>Floor at 10³ K (cold gas). Anchored at 10⁴ K. WHIM tail reachable.</a:t>
+                      </a:r>
+                    </a:p>
+                  </a:txBody>
+                  <a:tcPr marL="45720" marR="45720" anchor="ctr">
+                    <a:lnL>
+                      <a:noFill/>
+                    </a:lnL>
+                    <a:lnR w="12700" cap="flat" cmpd="sng" algn="ctr">
+                      <a:solidFill>
+                        <a:schemeClr val="tx1"/>
+                      </a:solidFill>
+                      <a:prstDash val="solid"/>
+                      <a:round/>
+                      <a:headEnd type="none" w="med" len="med"/>
+                      <a:tailEnd type="none" w="med" len="med"/>
+                    </a:lnR>
+                    <a:lnT>
+                      <a:noFill/>
+                    </a:lnT>
+                    <a:lnB>
+                      <a:noFill/>
+                    </a:lnB>
+                    <a:solidFill>
+                      <a:schemeClr val="bg1">
+                        <a:lumMod val="95000"/>
+                      </a:schemeClr>
+                    </a:solidFill>
+                  </a:tcPr>
+                </a:tc>
+                <a:extLst>
+                  <a:ext uri="{0D108BD9-81ED-4DB2-BD59-A6C34878D82A}">
+                    <a16:rowId xmlns:a16="http://schemas.microsoft.com/office/drawing/2014/main" val="3267059703"/>
+                  </a:ext>
+                </a:extLst>
+              </a:tr>
+              <a:tr h="122413">
+                <a:tc>
+                  <a:txBody>
+                    <a:bodyPr/>
+                    <a:lstStyle/>
+                    <a:p>
+                      <a:pPr>
+                        <a:buNone/>
+                      </a:pPr>
+                      <a:r>
+                        <a:rPr lang="en-US" sz="1200" b="1"/>
+                        <a:t>HI Fraction</a:t>
+                      </a:r>
+                      <a:r>
+                        <a:rPr lang="en-US" sz="1200"/>
+                        <a:t> (X_HI)</a:t>
+                      </a:r>
+                    </a:p>
+                  </a:txBody>
+                  <a:tcPr marL="45720" marR="45720" anchor="ctr">
+                    <a:lnL w="12700" cap="flat" cmpd="sng" algn="ctr">
+                      <a:solidFill>
+                        <a:schemeClr val="tx1"/>
+                      </a:solidFill>
+                      <a:prstDash val="solid"/>
+                      <a:round/>
+                      <a:headEnd type="none" w="med" len="med"/>
+                      <a:tailEnd type="none" w="med" len="med"/>
+                    </a:lnL>
+                    <a:lnR>
+                      <a:noFill/>
+                    </a:lnR>
+                    <a:lnT>
+                      <a:noFill/>
+                    </a:lnT>
+                    <a:lnB>
+                      <a:noFill/>
+                    </a:lnB>
+                    <a:solidFill>
+                      <a:schemeClr val="bg1">
+                        <a:lumMod val="95000"/>
+                      </a:schemeClr>
+                    </a:solidFill>
+                  </a:tcPr>
+                </a:tc>
+                <a:tc>
+                  <a:txBody>
+                    <a:bodyPr/>
+                    <a:lstStyle/>
+                    <a:p>
+                      <a:pPr>
+                        <a:buNone/>
+                      </a:pPr>
+                      <a:r>
+                        <a:rPr lang="en-US" sz="1200"/>
+                        <a:t>Sigmoid</a:t>
+                      </a:r>
+                    </a:p>
+                  </a:txBody>
+                  <a:tcPr marL="45720" marR="45720" anchor="ctr">
+                    <a:lnL>
+                      <a:noFill/>
+                    </a:lnL>
+                    <a:lnR>
+                      <a:noFill/>
+                    </a:lnR>
+                    <a:lnT>
+                      <a:noFill/>
+                    </a:lnT>
+                    <a:lnB>
+                      <a:noFill/>
+                    </a:lnB>
+                    <a:solidFill>
+                      <a:schemeClr val="bg1">
+                        <a:lumMod val="95000"/>
+                      </a:schemeClr>
+                    </a:solidFill>
+                  </a:tcPr>
+                </a:tc>
+                <a:tc>
+                  <a:txBody>
+                    <a:bodyPr/>
+                    <a:lstStyle/>
+                    <a:p>
+                      <a:pPr>
+                        <a:buNone/>
+                      </a:pPr>
+                      <a:r>
+                        <a:rPr lang="en-US" sz="1200" dirty="0"/>
+                        <a:t>Constrains to [0, 1].</a:t>
+                      </a:r>
+                    </a:p>
+                  </a:txBody>
+                  <a:tcPr marL="45720" marR="45720" anchor="ctr">
+                    <a:lnL>
+                      <a:noFill/>
+                    </a:lnL>
+                    <a:lnR w="12700" cap="flat" cmpd="sng" algn="ctr">
+                      <a:solidFill>
+                        <a:schemeClr val="tx1"/>
+                      </a:solidFill>
+                      <a:prstDash val="solid"/>
+                      <a:round/>
+                      <a:headEnd type="none" w="med" len="med"/>
+                      <a:tailEnd type="none" w="med" len="med"/>
+                    </a:lnR>
+                    <a:lnT>
+                      <a:noFill/>
+                    </a:lnT>
+                    <a:lnB>
+                      <a:noFill/>
+                    </a:lnB>
+                    <a:solidFill>
+                      <a:schemeClr val="bg1">
+                        <a:lumMod val="95000"/>
+                      </a:schemeClr>
+                    </a:solidFill>
+                  </a:tcPr>
+                </a:tc>
+                <a:extLst>
+                  <a:ext uri="{0D108BD9-81ED-4DB2-BD59-A6C34878D82A}">
+                    <a16:rowId xmlns:a16="http://schemas.microsoft.com/office/drawing/2014/main" val="3457708263"/>
+                  </a:ext>
+                </a:extLst>
+              </a:tr>
+              <a:tr h="220344">
+                <a:tc>
+                  <a:txBody>
+                    <a:bodyPr/>
+                    <a:lstStyle/>
+                    <a:p>
+                      <a:pPr>
+                        <a:buNone/>
+                      </a:pPr>
+                      <a:r>
+                        <a:rPr lang="en-US" sz="1200" b="1"/>
+                        <a:t>Peculiar Velocity</a:t>
+                      </a:r>
+                      <a:r>
+                        <a:rPr lang="en-US" sz="1200"/>
+                        <a:t> (v_pec)</a:t>
+                      </a:r>
+                    </a:p>
+                  </a:txBody>
+                  <a:tcPr marL="45720" marR="45720" anchor="ctr">
+                    <a:lnL w="12700" cap="flat" cmpd="sng" algn="ctr">
+                      <a:solidFill>
+                        <a:schemeClr val="tx1"/>
+                      </a:solidFill>
+                      <a:prstDash val="solid"/>
+                      <a:round/>
+                      <a:headEnd type="none" w="med" len="med"/>
+                      <a:tailEnd type="none" w="med" len="med"/>
+                    </a:lnL>
+                    <a:lnR>
+                      <a:noFill/>
+                    </a:lnR>
+                    <a:lnT>
+                      <a:noFill/>
+                    </a:lnT>
+                    <a:lnB w="12700" cap="flat" cmpd="sng" algn="ctr">
+                      <a:solidFill>
+                        <a:schemeClr val="tx1"/>
+                      </a:solidFill>
+                      <a:prstDash val="solid"/>
+                      <a:round/>
+                      <a:headEnd type="none" w="med" len="med"/>
+                      <a:tailEnd type="none" w="med" len="med"/>
+                    </a:lnB>
+                    <a:solidFill>
+                      <a:schemeClr val="bg1">
+                        <a:lumMod val="95000"/>
+                      </a:schemeClr>
+                    </a:solidFill>
+                  </a:tcPr>
+                </a:tc>
+                <a:tc>
+                  <a:txBody>
+                    <a:bodyPr/>
+                    <a:lstStyle/>
+                    <a:p>
+                      <a:pPr>
+                        <a:buNone/>
+                      </a:pPr>
+                      <a:r>
+                        <a:rPr lang="pt-BR" sz="1200"/>
+                        <a:t>Tanh(x) × 500 km/s</a:t>
+                      </a:r>
+                    </a:p>
+                  </a:txBody>
+                  <a:tcPr marL="45720" marR="45720" anchor="ctr">
+                    <a:lnL>
+                      <a:noFill/>
+                    </a:lnL>
+                    <a:lnR>
+                      <a:noFill/>
+                    </a:lnR>
+                    <a:lnT>
+                      <a:noFill/>
+                    </a:lnT>
+                    <a:lnB w="12700" cap="flat" cmpd="sng" algn="ctr">
+                      <a:solidFill>
+                        <a:schemeClr val="tx1"/>
+                      </a:solidFill>
+                      <a:prstDash val="solid"/>
+                      <a:round/>
+                      <a:headEnd type="none" w="med" len="med"/>
+                      <a:tailEnd type="none" w="med" len="med"/>
+                    </a:lnB>
+                    <a:solidFill>
+                      <a:schemeClr val="bg1">
+                        <a:lumMod val="95000"/>
+                      </a:schemeClr>
+                    </a:solidFill>
+                  </a:tcPr>
+                </a:tc>
+                <a:tc>
+                  <a:txBody>
+                    <a:bodyPr/>
+                    <a:lstStyle/>
+                    <a:p>
+                      <a:pPr>
+                        <a:buNone/>
+                      </a:pPr>
+                      <a:r>
+                        <a:rPr lang="en-US" sz="1200" dirty="0"/>
+                        <a:t>Suitable for diffuse IGM at z=0.3 (±200–300 km/s typical). Soft clipping for extremes.</a:t>
+                      </a:r>
+                    </a:p>
+                  </a:txBody>
+                  <a:tcPr marL="45720" marR="45720" anchor="ctr">
+                    <a:lnL>
+                      <a:noFill/>
+                    </a:lnL>
+                    <a:lnR w="12700" cap="flat" cmpd="sng" algn="ctr">
+                      <a:solidFill>
+                        <a:schemeClr val="tx1"/>
+                      </a:solidFill>
+                      <a:prstDash val="solid"/>
+                      <a:round/>
+                      <a:headEnd type="none" w="med" len="med"/>
+                      <a:tailEnd type="none" w="med" len="med"/>
+                    </a:lnR>
+                    <a:lnT>
+                      <a:noFill/>
+                    </a:lnT>
+                    <a:lnB w="12700" cap="flat" cmpd="sng" algn="ctr">
+                      <a:solidFill>
+                        <a:schemeClr val="tx1"/>
+                      </a:solidFill>
+                      <a:prstDash val="solid"/>
+                      <a:round/>
+                      <a:headEnd type="none" w="med" len="med"/>
+                      <a:tailEnd type="none" w="med" len="med"/>
+                    </a:lnB>
+                    <a:solidFill>
+                      <a:schemeClr val="bg1">
+                        <a:lumMod val="95000"/>
+                      </a:schemeClr>
+                    </a:solidFill>
+                  </a:tcPr>
+                </a:tc>
+                <a:extLst>
+                  <a:ext uri="{0D108BD9-81ED-4DB2-BD59-A6C34878D82A}">
+                    <a16:rowId xmlns:a16="http://schemas.microsoft.com/office/drawing/2014/main" val="2950697467"/>
+                  </a:ext>
+                </a:extLst>
+              </a:tr>
+            </a:tbl>
+          </a:graphicData>
+        </a:graphic>
+      </p:graphicFrame>
+      <p:cxnSp>
+        <p:nvCxnSpPr>
+          <p:cNvPr id="17" name="Straight Arrow Connector 16">
+            <a:extLst>
+              <a:ext uri="{FF2B5EF4-FFF2-40B4-BE49-F238E27FC236}">
+                <a16:creationId xmlns:a16="http://schemas.microsoft.com/office/drawing/2014/main" id="{0CA023C4-5835-872F-8C7E-1D98251D1A44}"/>
+              </a:ext>
+            </a:extLst>
+          </p:cNvPr>
+          <p:cNvCxnSpPr>
+            <a:cxnSpLocks/>
+          </p:cNvCxnSpPr>
+          <p:nvPr/>
+        </p:nvCxnSpPr>
+        <p:spPr>
+          <a:xfrm>
+            <a:off x="6597650" y="5803900"/>
+            <a:ext cx="800100" cy="0"/>
+          </a:xfrm>
+          <a:prstGeom prst="straightConnector1">
+            <a:avLst/>
+          </a:prstGeom>
+          <a:ln>
+            <a:tailEnd type="triangle"/>
+          </a:ln>
+          <a:effectLst/>
+        </p:spPr>
+        <p:style>
+          <a:lnRef idx="2">
+            <a:schemeClr val="accent1"/>
+          </a:lnRef>
+          <a:fillRef idx="0">
+            <a:schemeClr val="accent1"/>
+          </a:fillRef>
+          <a:effectRef idx="1">
+            <a:schemeClr val="accent1"/>
+          </a:effectRef>
+          <a:fontRef idx="minor">
+            <a:schemeClr val="tx1"/>
+          </a:fontRef>
+        </p:style>
+      </p:cxnSp>
+    </p:spTree>
+  </p:cSld>
+  <p:clrMapOvr>
+    <a:masterClrMapping/>
+  </p:clrMapOvr>
+</p:sld>
+</file>
+
+<file path=ppt/slides/slide5.xml><?xml version="1.0" encoding="utf-8"?>
+<p:sld xmlns:a="http://schemas.openxmlformats.org/drawingml/2006/main" xmlns:r="http://schemas.openxmlformats.org/officeDocument/2006/relationships" xmlns:p="http://schemas.openxmlformats.org/presentationml/2006/main">
+  <p:cSld>
+    <p:spTree>
+      <p:nvGrpSpPr>
+        <p:cNvPr id="1" name=""/>
+        <p:cNvGrpSpPr/>
+        <p:nvPr/>
+      </p:nvGrpSpPr>
+      <p:grpSpPr>
+        <a:xfrm>
+          <a:off x="0" y="0"/>
+          <a:ext cx="0" cy="0"/>
+          <a:chOff x="0" y="0"/>
+          <a:chExt cx="0" cy="0"/>
+        </a:xfrm>
+      </p:grpSpPr>
       <p:sp>
         <p:nvSpPr>
           <p:cNvPr id="2" name="TextBox 1"/>
@@ -5350,40 +7666,63 @@
           <a:p>
             <a:pPr algn="l"/>
             <a:r>
-              <a:rPr sz="2800" b="1">
+              <a:rPr sz="2800" b="1" dirty="0">
                 <a:solidFill>
                   <a:srgbClr val="102A43"/>
                 </a:solidFill>
               </a:rPr>
-              <a:t>What we kept from NeRF, what we replaced</a:t>
+              <a:t>Differentiable physics rendering + loss design</a:t>
             </a:r>
           </a:p>
         </p:txBody>
       </p:sp>
-      <p:pic>
-        <p:nvPicPr>
-          <p:cNvPr id="3" name="Picture 2" descr="nerf_vs_igmnerf_arch.png"/>
-          <p:cNvPicPr>
-            <a:picLocks noChangeAspect="1"/>
-          </p:cNvPicPr>
+      <p:sp>
+        <p:nvSpPr>
+          <p:cNvPr id="3" name="TextBox 2"/>
+          <p:cNvSpPr txBox="1"/>
           <p:nvPr/>
-        </p:nvPicPr>
-        <p:blipFill>
-          <a:blip r:embed="rId2"/>
-          <a:stretch>
-            <a:fillRect/>
-          </a:stretch>
-        </p:blipFill>
+        </p:nvSpPr>
         <p:spPr>
           <a:xfrm>
-            <a:off x="274320" y="914400"/>
-            <a:ext cx="11612880" cy="8766534"/>
+            <a:off x="457200" y="1005840"/>
+            <a:ext cx="5943600" cy="984885"/>
           </a:xfrm>
           <a:prstGeom prst="rect">
             <a:avLst/>
           </a:prstGeom>
+          <a:noFill/>
         </p:spPr>
-      </p:pic>
+        <p:txBody>
+          <a:bodyPr wrap="square">
+            <a:spAutoFit/>
+          </a:bodyPr>
+          <a:lstStyle/>
+          <a:p>
+            <a:r>
+              <a:rPr sz="1800" b="1" dirty="0">
+                <a:solidFill>
+                  <a:srgbClr val="C0392B"/>
+                </a:solidFill>
+              </a:rPr>
+              <a:t>Optical-depth rendering</a:t>
+            </a:r>
+          </a:p>
+          <a:p>
+            <a:endParaRPr lang="en-US" sz="2000" b="1" dirty="0">
+              <a:solidFill>
+                <a:srgbClr val="102A43"/>
+              </a:solidFill>
+            </a:endParaRPr>
+          </a:p>
+          <a:p>
+            <a:endParaRPr sz="2000" b="1" dirty="0">
+              <a:solidFill>
+                <a:srgbClr val="102A43"/>
+              </a:solidFill>
+            </a:endParaRPr>
+          </a:p>
+        </p:txBody>
+      </p:sp>
       <p:sp>
         <p:nvSpPr>
           <p:cNvPr id="4" name="TextBox 3"/>
@@ -5392,8 +7731,8 @@
         </p:nvSpPr>
         <p:spPr>
           <a:xfrm>
-            <a:off x="457200" y="6492240"/>
-            <a:ext cx="11247120" cy="274320"/>
+            <a:off x="6492240" y="1005840"/>
+            <a:ext cx="5303520" cy="2462213"/>
           </a:xfrm>
           <a:prstGeom prst="rect">
             <a:avLst/>
@@ -5401,23 +7740,909 @@
           <a:noFill/>
         </p:spPr>
         <p:txBody>
-          <a:bodyPr wrap="none">
+          <a:bodyPr wrap="square">
             <a:spAutoFit/>
           </a:bodyPr>
           <a:lstStyle/>
           <a:p>
-            <a:pPr algn="r"/>
-            <a:r>
-              <a:rPr sz="1000" i="1">
+            <a:r>
+              <a:rPr sz="1800" b="1" dirty="0">
                 <a:solidFill>
-                  <a:srgbClr val="555555"/>
+                  <a:srgbClr val="C0392B"/>
                 </a:solidFill>
               </a:rPr>
-              <a:t>slide 4 / 7  ·  side-by-side architecture</a:t>
+              <a:t>Loss design </a:t>
+            </a:r>
+            <a:endParaRPr lang="en-US" sz="1800" b="1" dirty="0">
+              <a:solidFill>
+                <a:srgbClr val="C0392B"/>
+              </a:solidFill>
+            </a:endParaRPr>
+          </a:p>
+          <a:p>
+            <a:endParaRPr lang="en-US" sz="1300" b="1" dirty="0">
+              <a:solidFill>
+                <a:srgbClr val="102A43"/>
+              </a:solidFill>
+            </a:endParaRPr>
+          </a:p>
+          <a:p>
+            <a:endParaRPr sz="1300" b="1" dirty="0">
+              <a:solidFill>
+                <a:srgbClr val="102A43"/>
+              </a:solidFill>
+            </a:endParaRPr>
+          </a:p>
+          <a:p>
+            <a:r>
+              <a:rPr sz="1100" dirty="0">
+                <a:solidFill>
+                  <a:srgbClr val="102A43"/>
+                </a:solidFill>
+              </a:rPr>
+              <a:t>(1) </a:t>
+            </a:r>
+            <a:r>
+              <a:rPr lang="en-US" altLang="ko-KR" sz="1100" dirty="0"/>
+              <a:t>Mask (Saturated-absorber mask) </a:t>
+            </a:r>
+            <a:br>
+              <a:rPr lang="en-US" altLang="ko-KR" sz="1100" dirty="0"/>
+            </a:br>
+            <a:r>
+              <a:rPr lang="en-US" altLang="ko-KR" sz="1100" dirty="0"/>
+              <a:t>Completely ignore bins where τ is extremely high (saturated cores). These bins contain almost no useful spatial information anyway (the light is fully absorbed).</a:t>
+            </a:r>
+          </a:p>
+          <a:p>
+            <a:endParaRPr lang="en-US" altLang="ko-KR" sz="1100" dirty="0"/>
+          </a:p>
+          <a:p>
+            <a:r>
+              <a:rPr sz="1100" dirty="0">
+                <a:solidFill>
+                  <a:srgbClr val="102A43"/>
+                </a:solidFill>
+              </a:rPr>
+              <a:t>(2) </a:t>
+            </a:r>
+            <a:r>
+              <a:rPr lang="en-US" altLang="ko-KR" sz="1100" dirty="0"/>
+              <a:t>Cap (at </a:t>
+            </a:r>
+            <a:r>
+              <a:rPr lang="en-US" altLang="ko-KR" sz="1100" dirty="0" err="1"/>
+              <a:t>τ_max</a:t>
+            </a:r>
+            <a:r>
+              <a:rPr lang="en-US" altLang="ko-KR" sz="1100" dirty="0"/>
+              <a:t>=10) </a:t>
+            </a:r>
+          </a:p>
+          <a:p>
+            <a:r>
+              <a:rPr lang="en-US" altLang="ko-KR" sz="1100" dirty="0"/>
+              <a:t>For all remaining bins, clip both prediction and ground truth at τ = 10. This prevents strong-but-not-fully-saturated lines from producing huge gradients.</a:t>
+            </a:r>
+          </a:p>
+          <a:p>
+            <a:endParaRPr sz="1100" dirty="0">
+              <a:solidFill>
+                <a:srgbClr val="555555"/>
+              </a:solidFill>
+            </a:endParaRPr>
+          </a:p>
+          <a:p>
+            <a:r>
+              <a:rPr sz="1100" dirty="0">
+                <a:solidFill>
+                  <a:srgbClr val="102A43"/>
+                </a:solidFill>
+              </a:rPr>
+              <a:t>(3) </a:t>
+            </a:r>
+            <a:r>
+              <a:rPr lang="en-US" altLang="ko-KR" sz="1100" dirty="0"/>
+              <a:t>log1p supervision </a:t>
+            </a:r>
+          </a:p>
+          <a:p>
+            <a:r>
+              <a:rPr lang="en-US" altLang="ko-KR" sz="1100" dirty="0"/>
+              <a:t>Instead of MSE(</a:t>
+            </a:r>
+            <a:r>
+              <a:rPr lang="en-US" altLang="ko-KR" sz="1100" dirty="0" err="1"/>
+              <a:t>τ_pred</a:t>
+            </a:r>
+            <a:r>
+              <a:rPr lang="en-US" altLang="ko-KR" sz="1100" dirty="0"/>
+              <a:t>, </a:t>
+            </a:r>
+            <a:r>
+              <a:rPr lang="en-US" altLang="ko-KR" sz="1100" dirty="0" err="1"/>
+              <a:t>τ_gt</a:t>
+            </a:r>
+            <a:r>
+              <a:rPr lang="en-US" altLang="ko-KR" sz="1100" dirty="0"/>
+              <a:t>), compute</a:t>
             </a:r>
           </a:p>
         </p:txBody>
       </p:sp>
+      <p:sp>
+        <p:nvSpPr>
+          <p:cNvPr id="6" name="TextBox 5"/>
+          <p:cNvSpPr txBox="1"/>
+          <p:nvPr/>
+        </p:nvSpPr>
+        <p:spPr>
+          <a:xfrm>
+            <a:off x="6574790" y="5136536"/>
+            <a:ext cx="5303520" cy="830997"/>
+          </a:xfrm>
+          <a:prstGeom prst="rect">
+            <a:avLst/>
+          </a:prstGeom>
+          <a:noFill/>
+        </p:spPr>
+        <p:txBody>
+          <a:bodyPr wrap="square">
+            <a:spAutoFit/>
+          </a:bodyPr>
+          <a:lstStyle/>
+          <a:p>
+            <a:r>
+              <a:rPr lang="en-US" altLang="ko-KR" sz="1200" dirty="0"/>
+              <a:t>Why log(1+</a:t>
+            </a:r>
+            <a:r>
+              <a:rPr lang="el-GR" altLang="ko-KR" sz="1200" dirty="0"/>
+              <a:t>τ)? </a:t>
+            </a:r>
+            <a:r>
+              <a:rPr lang="en-US" altLang="ko-KR" sz="1200" dirty="0"/>
+              <a:t>The IGM opacity distribution is approximately log-normal (Fluctuating Gunn-Peterson Approximation; Bi &amp; Davidsen 1997). Log-space supervision matches this natural noise model, analogous to log-depth supervision in computer vision.</a:t>
+            </a:r>
+            <a:endParaRPr lang="en-US" altLang="ko-KR" sz="1200" dirty="0">
+              <a:effectLst/>
+            </a:endParaRPr>
+          </a:p>
+        </p:txBody>
+      </p:sp>
+      <p:pic>
+        <p:nvPicPr>
+          <p:cNvPr id="10" name="Picture 9">
+            <a:extLst>
+              <a:ext uri="{FF2B5EF4-FFF2-40B4-BE49-F238E27FC236}">
+                <a16:creationId xmlns:a16="http://schemas.microsoft.com/office/drawing/2014/main" id="{2507B073-3CB4-B2B9-29AF-7EBD0666C46A}"/>
+              </a:ext>
+            </a:extLst>
+          </p:cNvPr>
+          <p:cNvPicPr>
+            <a:picLocks noChangeAspect="1"/>
+          </p:cNvPicPr>
+          <p:nvPr/>
+        </p:nvPicPr>
+        <p:blipFill>
+          <a:blip r:embed="rId3"/>
+          <a:srcRect t="13021" b="27957"/>
+          <a:stretch>
+            <a:fillRect/>
+          </a:stretch>
+        </p:blipFill>
+        <p:spPr>
+          <a:xfrm>
+            <a:off x="1044194" y="1401406"/>
+            <a:ext cx="4248201" cy="741853"/>
+          </a:xfrm>
+          <a:prstGeom prst="rect">
+            <a:avLst/>
+          </a:prstGeom>
+        </p:spPr>
+      </p:pic>
+      <p:pic>
+        <p:nvPicPr>
+          <p:cNvPr id="16" name="Picture 15">
+            <a:extLst>
+              <a:ext uri="{FF2B5EF4-FFF2-40B4-BE49-F238E27FC236}">
+                <a16:creationId xmlns:a16="http://schemas.microsoft.com/office/drawing/2014/main" id="{5C8BC417-2F33-4237-69B4-ED25B003BD8C}"/>
+              </a:ext>
+            </a:extLst>
+          </p:cNvPr>
+          <p:cNvPicPr>
+            <a:picLocks noChangeAspect="1"/>
+          </p:cNvPicPr>
+          <p:nvPr/>
+        </p:nvPicPr>
+        <p:blipFill>
+          <a:blip r:embed="rId4"/>
+          <a:stretch>
+            <a:fillRect/>
+          </a:stretch>
+        </p:blipFill>
+        <p:spPr>
+          <a:xfrm>
+            <a:off x="7993156" y="4251551"/>
+            <a:ext cx="1855885" cy="251318"/>
+          </a:xfrm>
+          <a:prstGeom prst="rect">
+            <a:avLst/>
+          </a:prstGeom>
+        </p:spPr>
+      </p:pic>
+      <p:pic>
+        <p:nvPicPr>
+          <p:cNvPr id="17" name="Picture 16">
+            <a:extLst>
+              <a:ext uri="{FF2B5EF4-FFF2-40B4-BE49-F238E27FC236}">
+                <a16:creationId xmlns:a16="http://schemas.microsoft.com/office/drawing/2014/main" id="{8C33DA1E-5FF1-D887-05D1-C551DFF714CB}"/>
+              </a:ext>
+            </a:extLst>
+          </p:cNvPr>
+          <p:cNvPicPr>
+            <a:picLocks noChangeAspect="1"/>
+          </p:cNvPicPr>
+          <p:nvPr/>
+        </p:nvPicPr>
+        <p:blipFill>
+          <a:blip r:embed="rId5"/>
+          <a:srcRect r="39256"/>
+          <a:stretch>
+            <a:fillRect/>
+          </a:stretch>
+        </p:blipFill>
+        <p:spPr>
+          <a:xfrm>
+            <a:off x="6946900" y="3668107"/>
+            <a:ext cx="4405168" cy="609338"/>
+          </a:xfrm>
+          <a:prstGeom prst="rect">
+            <a:avLst/>
+          </a:prstGeom>
+        </p:spPr>
+      </p:pic>
+      <p:graphicFrame>
+        <p:nvGraphicFramePr>
+          <p:cNvPr id="18" name="Table 17">
+            <a:extLst>
+              <a:ext uri="{FF2B5EF4-FFF2-40B4-BE49-F238E27FC236}">
+                <a16:creationId xmlns:a16="http://schemas.microsoft.com/office/drawing/2014/main" id="{34D0AB00-86DE-D362-F15C-454B8A67D034}"/>
+              </a:ext>
+            </a:extLst>
+          </p:cNvPr>
+          <p:cNvGraphicFramePr>
+            <a:graphicFrameLocks noGrp="1"/>
+          </p:cNvGraphicFramePr>
+          <p:nvPr>
+            <p:extLst>
+              <p:ext uri="{D42A27DB-BD31-4B8C-83A1-F6EECF244321}">
+                <p14:modId xmlns:p14="http://schemas.microsoft.com/office/powerpoint/2010/main" val="1797498755"/>
+              </p:ext>
+            </p:extLst>
+          </p:nvPr>
+        </p:nvGraphicFramePr>
+        <p:xfrm>
+          <a:off x="280630" y="3493362"/>
+          <a:ext cx="5850468" cy="1981200"/>
+        </p:xfrm>
+        <a:graphic>
+          <a:graphicData uri="http://schemas.openxmlformats.org/drawingml/2006/table">
+            <a:tbl>
+              <a:tblPr/>
+              <a:tblGrid>
+                <a:gridCol w="1950156">
+                  <a:extLst>
+                    <a:ext uri="{9D8B030D-6E8A-4147-A177-3AD203B41FA5}">
+                      <a16:colId xmlns:a16="http://schemas.microsoft.com/office/drawing/2014/main" val="1682559264"/>
+                    </a:ext>
+                  </a:extLst>
+                </a:gridCol>
+                <a:gridCol w="1950156">
+                  <a:extLst>
+                    <a:ext uri="{9D8B030D-6E8A-4147-A177-3AD203B41FA5}">
+                      <a16:colId xmlns:a16="http://schemas.microsoft.com/office/drawing/2014/main" val="1293279138"/>
+                    </a:ext>
+                  </a:extLst>
+                </a:gridCol>
+                <a:gridCol w="1950156">
+                  <a:extLst>
+                    <a:ext uri="{9D8B030D-6E8A-4147-A177-3AD203B41FA5}">
+                      <a16:colId xmlns:a16="http://schemas.microsoft.com/office/drawing/2014/main" val="2173453516"/>
+                    </a:ext>
+                  </a:extLst>
+                </a:gridCol>
+              </a:tblGrid>
+              <a:tr h="296374">
+                <a:tc>
+                  <a:txBody>
+                    <a:bodyPr/>
+                    <a:lstStyle/>
+                    <a:p>
+                      <a:pPr>
+                        <a:buNone/>
+                      </a:pPr>
+                      <a:r>
+                        <a:rPr lang="en-US" sz="1600" dirty="0" err="1"/>
+                        <a:t>NeRF</a:t>
+                      </a:r>
+                      <a:endParaRPr lang="en-US" sz="1600" dirty="0"/>
+                    </a:p>
+                  </a:txBody>
+                  <a:tcPr marL="45720" marR="45720" anchor="ctr">
+                    <a:lnL w="12700" cap="flat" cmpd="sng" algn="ctr">
+                      <a:solidFill>
+                        <a:schemeClr val="tx1"/>
+                      </a:solidFill>
+                      <a:prstDash val="solid"/>
+                      <a:round/>
+                      <a:headEnd type="none" w="med" len="med"/>
+                      <a:tailEnd type="none" w="med" len="med"/>
+                    </a:lnL>
+                    <a:lnR w="12700" cap="flat" cmpd="sng" algn="ctr">
+                      <a:solidFill>
+                        <a:schemeClr val="tx1"/>
+                      </a:solidFill>
+                      <a:prstDash val="solid"/>
+                      <a:round/>
+                      <a:headEnd type="none" w="med" len="med"/>
+                      <a:tailEnd type="none" w="med" len="med"/>
+                    </a:lnR>
+                    <a:lnT w="12700" cap="flat" cmpd="sng" algn="ctr">
+                      <a:solidFill>
+                        <a:schemeClr val="tx1"/>
+                      </a:solidFill>
+                      <a:prstDash val="solid"/>
+                      <a:round/>
+                      <a:headEnd type="none" w="med" len="med"/>
+                      <a:tailEnd type="none" w="med" len="med"/>
+                    </a:lnT>
+                    <a:lnB w="12700" cap="flat" cmpd="sng" algn="ctr">
+                      <a:solidFill>
+                        <a:schemeClr val="tx1"/>
+                      </a:solidFill>
+                      <a:prstDash val="solid"/>
+                      <a:round/>
+                      <a:headEnd type="none" w="med" len="med"/>
+                      <a:tailEnd type="none" w="med" len="med"/>
+                    </a:lnB>
+                    <a:solidFill>
+                      <a:schemeClr val="bg1">
+                        <a:lumMod val="95000"/>
+                      </a:schemeClr>
+                    </a:solidFill>
+                  </a:tcPr>
+                </a:tc>
+                <a:tc>
+                  <a:txBody>
+                    <a:bodyPr/>
+                    <a:lstStyle/>
+                    <a:p>
+                      <a:pPr>
+                        <a:buNone/>
+                      </a:pPr>
+                      <a:r>
+                        <a:rPr lang="en-US" sz="1600" dirty="0"/>
+                        <a:t>IGM-</a:t>
+                      </a:r>
+                      <a:r>
+                        <a:rPr lang="en-US" sz="1600" dirty="0" err="1"/>
+                        <a:t>NeRF</a:t>
+                      </a:r>
+                      <a:endParaRPr lang="en-US" sz="1600" dirty="0"/>
+                    </a:p>
+                  </a:txBody>
+                  <a:tcPr marL="45720" marR="45720" anchor="ctr">
+                    <a:lnL w="12700" cap="flat" cmpd="sng" algn="ctr">
+                      <a:solidFill>
+                        <a:schemeClr val="tx1"/>
+                      </a:solidFill>
+                      <a:prstDash val="solid"/>
+                      <a:round/>
+                      <a:headEnd type="none" w="med" len="med"/>
+                      <a:tailEnd type="none" w="med" len="med"/>
+                    </a:lnL>
+                    <a:lnR w="12700" cap="flat" cmpd="sng" algn="ctr">
+                      <a:solidFill>
+                        <a:schemeClr val="tx1"/>
+                      </a:solidFill>
+                      <a:prstDash val="solid"/>
+                      <a:round/>
+                      <a:headEnd type="none" w="med" len="med"/>
+                      <a:tailEnd type="none" w="med" len="med"/>
+                    </a:lnR>
+                    <a:lnT w="12700" cap="flat" cmpd="sng" algn="ctr">
+                      <a:solidFill>
+                        <a:schemeClr val="tx1"/>
+                      </a:solidFill>
+                      <a:prstDash val="solid"/>
+                      <a:round/>
+                      <a:headEnd type="none" w="med" len="med"/>
+                      <a:tailEnd type="none" w="med" len="med"/>
+                    </a:lnT>
+                    <a:lnB w="12700" cap="flat" cmpd="sng" algn="ctr">
+                      <a:solidFill>
+                        <a:schemeClr val="tx1"/>
+                      </a:solidFill>
+                      <a:prstDash val="solid"/>
+                      <a:round/>
+                      <a:headEnd type="none" w="med" len="med"/>
+                      <a:tailEnd type="none" w="med" len="med"/>
+                    </a:lnB>
+                    <a:solidFill>
+                      <a:schemeClr val="bg1">
+                        <a:lumMod val="95000"/>
+                      </a:schemeClr>
+                    </a:solidFill>
+                  </a:tcPr>
+                </a:tc>
+                <a:tc>
+                  <a:txBody>
+                    <a:bodyPr/>
+                    <a:lstStyle/>
+                    <a:p>
+                      <a:pPr>
+                        <a:buNone/>
+                      </a:pPr>
+                      <a:r>
+                        <a:rPr lang="en-US" sz="1600" dirty="0"/>
+                        <a:t>Notes</a:t>
+                      </a:r>
+                    </a:p>
+                  </a:txBody>
+                  <a:tcPr marL="45720" marR="45720" anchor="ctr">
+                    <a:lnL w="12700" cap="flat" cmpd="sng" algn="ctr">
+                      <a:solidFill>
+                        <a:schemeClr val="tx1"/>
+                      </a:solidFill>
+                      <a:prstDash val="solid"/>
+                      <a:round/>
+                      <a:headEnd type="none" w="med" len="med"/>
+                      <a:tailEnd type="none" w="med" len="med"/>
+                    </a:lnL>
+                    <a:lnR w="12700" cap="flat" cmpd="sng" algn="ctr">
+                      <a:solidFill>
+                        <a:schemeClr val="tx1"/>
+                      </a:solidFill>
+                      <a:prstDash val="solid"/>
+                      <a:round/>
+                      <a:headEnd type="none" w="med" len="med"/>
+                      <a:tailEnd type="none" w="med" len="med"/>
+                    </a:lnR>
+                    <a:lnT w="12700" cap="flat" cmpd="sng" algn="ctr">
+                      <a:solidFill>
+                        <a:schemeClr val="tx1"/>
+                      </a:solidFill>
+                      <a:prstDash val="solid"/>
+                      <a:round/>
+                      <a:headEnd type="none" w="med" len="med"/>
+                      <a:tailEnd type="none" w="med" len="med"/>
+                    </a:lnT>
+                    <a:lnB w="12700" cap="flat" cmpd="sng" algn="ctr">
+                      <a:solidFill>
+                        <a:schemeClr val="tx1"/>
+                      </a:solidFill>
+                      <a:prstDash val="solid"/>
+                      <a:round/>
+                      <a:headEnd type="none" w="med" len="med"/>
+                      <a:tailEnd type="none" w="med" len="med"/>
+                    </a:lnB>
+                    <a:solidFill>
+                      <a:schemeClr val="bg1">
+                        <a:lumMod val="95000"/>
+                      </a:schemeClr>
+                    </a:solidFill>
+                  </a:tcPr>
+                </a:tc>
+                <a:extLst>
+                  <a:ext uri="{0D108BD9-81ED-4DB2-BD59-A6C34878D82A}">
+                    <a16:rowId xmlns:a16="http://schemas.microsoft.com/office/drawing/2014/main" val="2905785796"/>
+                  </a:ext>
+                </a:extLst>
+              </a:tr>
+              <a:tr h="511918">
+                <a:tc>
+                  <a:txBody>
+                    <a:bodyPr/>
+                    <a:lstStyle/>
+                    <a:p>
+                      <a:pPr>
+                        <a:buNone/>
+                      </a:pPr>
+                      <a:r>
+                        <a:rPr lang="en-US" sz="1600" b="1" dirty="0"/>
+                        <a:t>Volume rendering integral</a:t>
+                      </a:r>
+                      <a:endParaRPr lang="en-US" sz="1600" dirty="0"/>
+                    </a:p>
+                  </a:txBody>
+                  <a:tcPr marL="45720" marR="45720" anchor="ctr">
+                    <a:lnL w="12700" cap="flat" cmpd="sng" algn="ctr">
+                      <a:solidFill>
+                        <a:schemeClr val="tx1"/>
+                      </a:solidFill>
+                      <a:prstDash val="solid"/>
+                      <a:round/>
+                      <a:headEnd type="none" w="med" len="med"/>
+                      <a:tailEnd type="none" w="med" len="med"/>
+                    </a:lnL>
+                    <a:lnR w="12700" cap="flat" cmpd="sng" algn="ctr">
+                      <a:solidFill>
+                        <a:schemeClr val="tx1"/>
+                      </a:solidFill>
+                      <a:prstDash val="solid"/>
+                      <a:round/>
+                      <a:headEnd type="none" w="med" len="med"/>
+                      <a:tailEnd type="none" w="med" len="med"/>
+                    </a:lnR>
+                    <a:lnT w="12700" cap="flat" cmpd="sng" algn="ctr">
+                      <a:solidFill>
+                        <a:schemeClr val="tx1"/>
+                      </a:solidFill>
+                      <a:prstDash val="solid"/>
+                      <a:round/>
+                      <a:headEnd type="none" w="med" len="med"/>
+                      <a:tailEnd type="none" w="med" len="med"/>
+                    </a:lnT>
+                    <a:lnB w="12700" cap="flat" cmpd="sng" algn="ctr">
+                      <a:solidFill>
+                        <a:schemeClr val="tx1"/>
+                      </a:solidFill>
+                      <a:prstDash val="solid"/>
+                      <a:round/>
+                      <a:headEnd type="none" w="med" len="med"/>
+                      <a:tailEnd type="none" w="med" len="med"/>
+                    </a:lnB>
+                    <a:noFill/>
+                  </a:tcPr>
+                </a:tc>
+                <a:tc>
+                  <a:txBody>
+                    <a:bodyPr/>
+                    <a:lstStyle/>
+                    <a:p>
+                      <a:pPr>
+                        <a:buNone/>
+                      </a:pPr>
+                      <a:r>
+                        <a:rPr lang="en-US" sz="1600" dirty="0"/>
+                        <a:t>Differentiable optical depth integral</a:t>
+                      </a:r>
+                    </a:p>
+                  </a:txBody>
+                  <a:tcPr marL="45720" marR="45720" anchor="ctr">
+                    <a:lnL w="12700" cap="flat" cmpd="sng" algn="ctr">
+                      <a:solidFill>
+                        <a:schemeClr val="tx1"/>
+                      </a:solidFill>
+                      <a:prstDash val="solid"/>
+                      <a:round/>
+                      <a:headEnd type="none" w="med" len="med"/>
+                      <a:tailEnd type="none" w="med" len="med"/>
+                    </a:lnL>
+                    <a:lnR w="12700" cap="flat" cmpd="sng" algn="ctr">
+                      <a:solidFill>
+                        <a:schemeClr val="tx1"/>
+                      </a:solidFill>
+                      <a:prstDash val="solid"/>
+                      <a:round/>
+                      <a:headEnd type="none" w="med" len="med"/>
+                      <a:tailEnd type="none" w="med" len="med"/>
+                    </a:lnR>
+                    <a:lnT w="12700" cap="flat" cmpd="sng" algn="ctr">
+                      <a:solidFill>
+                        <a:schemeClr val="tx1"/>
+                      </a:solidFill>
+                      <a:prstDash val="solid"/>
+                      <a:round/>
+                      <a:headEnd type="none" w="med" len="med"/>
+                      <a:tailEnd type="none" w="med" len="med"/>
+                    </a:lnT>
+                    <a:lnB w="12700" cap="flat" cmpd="sng" algn="ctr">
+                      <a:solidFill>
+                        <a:schemeClr val="tx1"/>
+                      </a:solidFill>
+                      <a:prstDash val="solid"/>
+                      <a:round/>
+                      <a:headEnd type="none" w="med" len="med"/>
+                      <a:tailEnd type="none" w="med" len="med"/>
+                    </a:lnB>
+                    <a:noFill/>
+                  </a:tcPr>
+                </a:tc>
+                <a:tc>
+                  <a:txBody>
+                    <a:bodyPr/>
+                    <a:lstStyle/>
+                    <a:p>
+                      <a:pPr>
+                        <a:buNone/>
+                      </a:pPr>
+                      <a:r>
+                        <a:rPr lang="en-US" sz="1600" dirty="0"/>
+                        <a:t>Line integral along the ray</a:t>
+                      </a:r>
+                    </a:p>
+                  </a:txBody>
+                  <a:tcPr marL="45720" marR="45720" anchor="ctr">
+                    <a:lnL w="12700" cap="flat" cmpd="sng" algn="ctr">
+                      <a:solidFill>
+                        <a:schemeClr val="tx1"/>
+                      </a:solidFill>
+                      <a:prstDash val="solid"/>
+                      <a:round/>
+                      <a:headEnd type="none" w="med" len="med"/>
+                      <a:tailEnd type="none" w="med" len="med"/>
+                    </a:lnL>
+                    <a:lnR w="12700" cap="flat" cmpd="sng" algn="ctr">
+                      <a:solidFill>
+                        <a:schemeClr val="tx1"/>
+                      </a:solidFill>
+                      <a:prstDash val="solid"/>
+                      <a:round/>
+                      <a:headEnd type="none" w="med" len="med"/>
+                      <a:tailEnd type="none" w="med" len="med"/>
+                    </a:lnR>
+                    <a:lnT w="12700" cap="flat" cmpd="sng" algn="ctr">
+                      <a:solidFill>
+                        <a:schemeClr val="tx1"/>
+                      </a:solidFill>
+                      <a:prstDash val="solid"/>
+                      <a:round/>
+                      <a:headEnd type="none" w="med" len="med"/>
+                      <a:tailEnd type="none" w="med" len="med"/>
+                    </a:lnT>
+                    <a:lnB w="12700" cap="flat" cmpd="sng" algn="ctr">
+                      <a:solidFill>
+                        <a:schemeClr val="tx1"/>
+                      </a:solidFill>
+                      <a:prstDash val="solid"/>
+                      <a:round/>
+                      <a:headEnd type="none" w="med" len="med"/>
+                      <a:tailEnd type="none" w="med" len="med"/>
+                    </a:lnB>
+                    <a:noFill/>
+                  </a:tcPr>
+                </a:tc>
+                <a:extLst>
+                  <a:ext uri="{0D108BD9-81ED-4DB2-BD59-A6C34878D82A}">
+                    <a16:rowId xmlns:a16="http://schemas.microsoft.com/office/drawing/2014/main" val="760136512"/>
+                  </a:ext>
+                </a:extLst>
+              </a:tr>
+              <a:tr h="511918">
+                <a:tc>
+                  <a:txBody>
+                    <a:bodyPr/>
+                    <a:lstStyle/>
+                    <a:p>
+                      <a:pPr marL="0" marR="0" lvl="0" indent="0" algn="l" defTabSz="457200" rtl="0" eaLnBrk="1" fontAlgn="auto" latinLnBrk="0" hangingPunct="1">
+                        <a:lnSpc>
+                          <a:spcPct val="100000"/>
+                        </a:lnSpc>
+                        <a:spcBef>
+                          <a:spcPts val="0"/>
+                        </a:spcBef>
+                        <a:spcAft>
+                          <a:spcPts val="0"/>
+                        </a:spcAft>
+                        <a:buClrTx/>
+                        <a:buSzTx/>
+                        <a:buFontTx/>
+                        <a:buNone/>
+                        <a:tabLst/>
+                        <a:defRPr/>
+                      </a:pPr>
+                      <a:r>
+                        <a:rPr lang="en-US" altLang="ko-KR" sz="1600" b="1" dirty="0">
+                          <a:effectLst/>
+                        </a:rPr>
+                        <a:t>Per-pixel MSE on RGB</a:t>
+                      </a:r>
+                      <a:endParaRPr lang="en-US" sz="1600" b="1" dirty="0"/>
+                    </a:p>
+                  </a:txBody>
+                  <a:tcPr marL="45720" marR="45720" anchor="ctr">
+                    <a:lnL w="12700" cap="flat" cmpd="sng" algn="ctr">
+                      <a:solidFill>
+                        <a:schemeClr val="tx1"/>
+                      </a:solidFill>
+                      <a:prstDash val="solid"/>
+                      <a:round/>
+                      <a:headEnd type="none" w="med" len="med"/>
+                      <a:tailEnd type="none" w="med" len="med"/>
+                    </a:lnL>
+                    <a:lnR w="12700" cap="flat" cmpd="sng" algn="ctr">
+                      <a:solidFill>
+                        <a:schemeClr val="tx1"/>
+                      </a:solidFill>
+                      <a:prstDash val="solid"/>
+                      <a:round/>
+                      <a:headEnd type="none" w="med" len="med"/>
+                      <a:tailEnd type="none" w="med" len="med"/>
+                    </a:lnR>
+                    <a:lnT w="12700" cap="flat" cmpd="sng" algn="ctr">
+                      <a:solidFill>
+                        <a:schemeClr val="tx1"/>
+                      </a:solidFill>
+                      <a:prstDash val="solid"/>
+                      <a:round/>
+                      <a:headEnd type="none" w="med" len="med"/>
+                      <a:tailEnd type="none" w="med" len="med"/>
+                    </a:lnT>
+                    <a:lnB w="12700" cap="flat" cmpd="sng" algn="ctr">
+                      <a:solidFill>
+                        <a:schemeClr val="tx1"/>
+                      </a:solidFill>
+                      <a:prstDash val="solid"/>
+                      <a:round/>
+                      <a:headEnd type="none" w="med" len="med"/>
+                      <a:tailEnd type="none" w="med" len="med"/>
+                    </a:lnB>
+                    <a:noFill/>
+                  </a:tcPr>
+                </a:tc>
+                <a:tc>
+                  <a:txBody>
+                    <a:bodyPr/>
+                    <a:lstStyle/>
+                    <a:p>
+                      <a:pPr marL="0" marR="0" lvl="0" indent="0" algn="l" defTabSz="457200" rtl="0" eaLnBrk="1" fontAlgn="auto" latinLnBrk="0" hangingPunct="1">
+                        <a:lnSpc>
+                          <a:spcPct val="100000"/>
+                        </a:lnSpc>
+                        <a:spcBef>
+                          <a:spcPts val="0"/>
+                        </a:spcBef>
+                        <a:spcAft>
+                          <a:spcPts val="0"/>
+                        </a:spcAft>
+                        <a:buClrTx/>
+                        <a:buSzTx/>
+                        <a:buFontTx/>
+                        <a:buNone/>
+                        <a:tabLst/>
+                        <a:defRPr/>
+                      </a:pPr>
+                      <a:r>
+                        <a:rPr lang="en-US" altLang="ko-KR" sz="1600" dirty="0">
+                          <a:effectLst/>
+                        </a:rPr>
+                        <a:t>log(1+</a:t>
+                      </a:r>
+                      <a:r>
+                        <a:rPr lang="el-GR" altLang="ko-KR" sz="1600" dirty="0">
+                          <a:effectLst/>
+                        </a:rPr>
+                        <a:t>τ) + </a:t>
+                      </a:r>
+                      <a:r>
+                        <a:rPr lang="en-US" altLang="ko-KR" sz="1600" dirty="0">
+                          <a:effectLst/>
+                        </a:rPr>
+                        <a:t>cap + mask MSE on </a:t>
+                      </a:r>
+                      <a:r>
+                        <a:rPr lang="el-GR" altLang="ko-KR" sz="1600" dirty="0">
+                          <a:effectLst/>
+                        </a:rPr>
+                        <a:t>τ + </a:t>
+                      </a:r>
+                      <a:r>
+                        <a:rPr lang="en-US" altLang="ko-KR" sz="1600" dirty="0">
+                          <a:effectLst/>
+                        </a:rPr>
+                        <a:t>soft mean-flux anchor</a:t>
+                      </a:r>
+                    </a:p>
+                    <a:p>
+                      <a:pPr>
+                        <a:buNone/>
+                      </a:pPr>
+                      <a:endParaRPr lang="en-US" sz="1600" dirty="0"/>
+                    </a:p>
+                  </a:txBody>
+                  <a:tcPr marL="45720" marR="45720" anchor="ctr">
+                    <a:lnL w="12700" cap="flat" cmpd="sng" algn="ctr">
+                      <a:solidFill>
+                        <a:schemeClr val="tx1"/>
+                      </a:solidFill>
+                      <a:prstDash val="solid"/>
+                      <a:round/>
+                      <a:headEnd type="none" w="med" len="med"/>
+                      <a:tailEnd type="none" w="med" len="med"/>
+                    </a:lnL>
+                    <a:lnR w="12700" cap="flat" cmpd="sng" algn="ctr">
+                      <a:solidFill>
+                        <a:schemeClr val="tx1"/>
+                      </a:solidFill>
+                      <a:prstDash val="solid"/>
+                      <a:round/>
+                      <a:headEnd type="none" w="med" len="med"/>
+                      <a:tailEnd type="none" w="med" len="med"/>
+                    </a:lnR>
+                    <a:lnT w="12700" cap="flat" cmpd="sng" algn="ctr">
+                      <a:solidFill>
+                        <a:schemeClr val="tx1"/>
+                      </a:solidFill>
+                      <a:prstDash val="solid"/>
+                      <a:round/>
+                      <a:headEnd type="none" w="med" len="med"/>
+                      <a:tailEnd type="none" w="med" len="med"/>
+                    </a:lnT>
+                    <a:lnB w="12700" cap="flat" cmpd="sng" algn="ctr">
+                      <a:solidFill>
+                        <a:schemeClr val="tx1"/>
+                      </a:solidFill>
+                      <a:prstDash val="solid"/>
+                      <a:round/>
+                      <a:headEnd type="none" w="med" len="med"/>
+                      <a:tailEnd type="none" w="med" len="med"/>
+                    </a:lnB>
+                    <a:noFill/>
+                  </a:tcPr>
+                </a:tc>
+                <a:tc>
+                  <a:txBody>
+                    <a:bodyPr/>
+                    <a:lstStyle/>
+                    <a:p>
+                      <a:pPr>
+                        <a:buNone/>
+                      </a:pPr>
+                      <a:endParaRPr lang="en-US" sz="1600" dirty="0"/>
+                    </a:p>
+                  </a:txBody>
+                  <a:tcPr marL="45720" marR="45720" anchor="ctr">
+                    <a:lnL w="12700" cap="flat" cmpd="sng" algn="ctr">
+                      <a:solidFill>
+                        <a:schemeClr val="tx1"/>
+                      </a:solidFill>
+                      <a:prstDash val="solid"/>
+                      <a:round/>
+                      <a:headEnd type="none" w="med" len="med"/>
+                      <a:tailEnd type="none" w="med" len="med"/>
+                    </a:lnL>
+                    <a:lnR w="12700" cap="flat" cmpd="sng" algn="ctr">
+                      <a:solidFill>
+                        <a:schemeClr val="tx1"/>
+                      </a:solidFill>
+                      <a:prstDash val="solid"/>
+                      <a:round/>
+                      <a:headEnd type="none" w="med" len="med"/>
+                      <a:tailEnd type="none" w="med" len="med"/>
+                    </a:lnR>
+                    <a:lnT w="12700" cap="flat" cmpd="sng" algn="ctr">
+                      <a:solidFill>
+                        <a:schemeClr val="tx1"/>
+                      </a:solidFill>
+                      <a:prstDash val="solid"/>
+                      <a:round/>
+                      <a:headEnd type="none" w="med" len="med"/>
+                      <a:tailEnd type="none" w="med" len="med"/>
+                    </a:lnT>
+                    <a:lnB w="12700" cap="flat" cmpd="sng" algn="ctr">
+                      <a:solidFill>
+                        <a:schemeClr val="tx1"/>
+                      </a:solidFill>
+                      <a:prstDash val="solid"/>
+                      <a:round/>
+                      <a:headEnd type="none" w="med" len="med"/>
+                      <a:tailEnd type="none" w="med" len="med"/>
+                    </a:lnB>
+                    <a:noFill/>
+                  </a:tcPr>
+                </a:tc>
+                <a:extLst>
+                  <a:ext uri="{0D108BD9-81ED-4DB2-BD59-A6C34878D82A}">
+                    <a16:rowId xmlns:a16="http://schemas.microsoft.com/office/drawing/2014/main" val="4029859120"/>
+                  </a:ext>
+                </a:extLst>
+              </a:tr>
+            </a:tbl>
+          </a:graphicData>
+        </a:graphic>
+      </p:graphicFrame>
     </p:spTree>
   </p:cSld>
   <p:clrMapOvr>
@@ -5426,8 +8651,8 @@
 </p:sld>
 </file>
 
-<file path=ppt/slides/slide5.xml><?xml version="1.0" encoding="utf-8"?>
-<p:sld xmlns:a="http://schemas.openxmlformats.org/drawingml/2006/main" xmlns:p="http://schemas.openxmlformats.org/presentationml/2006/main" xmlns:r="http://schemas.openxmlformats.org/officeDocument/2006/relationships">
+<file path=ppt/slides/slide6.xml><?xml version="1.0" encoding="utf-8"?>
+<p:sld xmlns:a="http://schemas.openxmlformats.org/drawingml/2006/main" xmlns:r="http://schemas.openxmlformats.org/officeDocument/2006/relationships" xmlns:p="http://schemas.openxmlformats.org/presentationml/2006/main">
   <p:cSld>
     <p:spTree>
       <p:nvGrpSpPr>
@@ -5435,7 +8660,14 @@
         <p:cNvGrpSpPr/>
         <p:nvPr/>
       </p:nvGrpSpPr>
-      <p:grpSpPr/>
+      <p:grpSpPr>
+        <a:xfrm>
+          <a:off x="0" y="0"/>
+          <a:ext cx="0" cy="0"/>
+          <a:chOff x="0" y="0"/>
+          <a:chExt cx="0" cy="0"/>
+        </a:xfrm>
+      </p:grpSpPr>
       <p:sp>
         <p:nvSpPr>
           <p:cNvPr id="2" name="TextBox 1"/>
@@ -5460,414 +8692,7 @@
           <a:p>
             <a:pPr algn="l"/>
             <a:r>
-              <a:rPr sz="2800" b="1">
-                <a:solidFill>
-                  <a:srgbClr val="102A43"/>
-                </a:solidFill>
-              </a:rPr>
-              <a:t>Differentiable physics rendering + loss design</a:t>
-            </a:r>
-          </a:p>
-        </p:txBody>
-      </p:sp>
-      <p:sp>
-        <p:nvSpPr>
-          <p:cNvPr id="3" name="TextBox 2"/>
-          <p:cNvSpPr txBox="1"/>
-          <p:nvPr/>
-        </p:nvSpPr>
-        <p:spPr>
-          <a:xfrm>
-            <a:off x="457200" y="1005840"/>
-            <a:ext cx="5943600" cy="2011680"/>
-          </a:xfrm>
-          <a:prstGeom prst="rect">
-            <a:avLst/>
-          </a:prstGeom>
-          <a:noFill/>
-        </p:spPr>
-        <p:txBody>
-          <a:bodyPr wrap="square">
-            <a:spAutoFit/>
-          </a:bodyPr>
-          <a:lstStyle/>
-          <a:p>
-            <a:r>
-              <a:rPr sz="1800" b="1">
-                <a:solidFill>
-                  <a:srgbClr val="C0392B"/>
-                </a:solidFill>
-              </a:rPr>
-              <a:t>Optical-depth rendering</a:t>
-            </a:r>
-          </a:p>
-          <a:p>
-            <a:r>
-              <a:rPr sz="2000" b="1">
-                <a:solidFill>
-                  <a:srgbClr val="102A43"/>
-                </a:solidFill>
-              </a:rPr>
-              <a:t>τ(v_obs)  =  𝒜 · Σ_src  n_HI · H(a, x) / (b√π)</a:t>
-            </a:r>
-          </a:p>
-          <a:p/>
-          <a:p>
-            <a:r>
-              <a:rPr sz="1300" i="1">
-                <a:solidFill>
-                  <a:srgbClr val="555555"/>
-                </a:solidFill>
-              </a:rPr>
-              <a:t>CV mapping:</a:t>
-            </a:r>
-          </a:p>
-          <a:p>
-            <a:r>
-              <a:rPr sz="1200">
-                <a:solidFill>
-                  <a:srgbClr val="102A43"/>
-                </a:solidFill>
-              </a:rPr>
-              <a:t>•  n_HI  ↔  σ in NeRF  (positive opacity)</a:t>
-            </a:r>
-          </a:p>
-          <a:p>
-            <a:r>
-              <a:rPr sz="1200">
-                <a:solidFill>
-                  <a:srgbClr val="102A43"/>
-                </a:solidFill>
-              </a:rPr>
-              <a:t>•  H(a, x)  ↔  c (radiance) — closed-form kernel</a:t>
-            </a:r>
-          </a:p>
-          <a:p>
-            <a:r>
-              <a:rPr sz="1200">
-                <a:solidFill>
-                  <a:srgbClr val="102A43"/>
-                </a:solidFill>
-              </a:rPr>
-              <a:t>•  v_obs  ↔  pixel coordinate (1D here)</a:t>
-            </a:r>
-          </a:p>
-          <a:p>
-            <a:r>
-              <a:rPr sz="1200">
-                <a:solidFill>
-                  <a:srgbClr val="102A43"/>
-                </a:solidFill>
-              </a:rPr>
-              <a:t>•  𝒜  ↔  global brightness scalar (one learnable)</a:t>
-            </a:r>
-          </a:p>
-          <a:p>
-            <a:r>
-              <a:rPr sz="1200">
-                <a:solidFill>
-                  <a:srgbClr val="102A43"/>
-                </a:solidFill>
-              </a:rPr>
-              <a:t>•  b(T)  =  thermal Doppler width  =  kernel bandwidth, T-dependent</a:t>
-            </a:r>
-          </a:p>
-          <a:p>
-            <a:r>
-              <a:rPr sz="1200">
-                <a:solidFill>
-                  <a:srgbClr val="102A43"/>
-                </a:solidFill>
-              </a:rPr>
-              <a:t>•  x  =  (v_obs − v_src − v_pec) / b   →  RSD enters via v_pec</a:t>
-            </a:r>
-          </a:p>
-        </p:txBody>
-      </p:sp>
-      <p:sp>
-        <p:nvSpPr>
-          <p:cNvPr id="4" name="TextBox 3"/>
-          <p:cNvSpPr txBox="1"/>
-          <p:nvPr/>
-        </p:nvSpPr>
-        <p:spPr>
-          <a:xfrm>
-            <a:off x="6492240" y="1005840"/>
-            <a:ext cx="5303520" cy="2286000"/>
-          </a:xfrm>
-          <a:prstGeom prst="rect">
-            <a:avLst/>
-          </a:prstGeom>
-          <a:noFill/>
-        </p:spPr>
-        <p:txBody>
-          <a:bodyPr wrap="square">
-            <a:spAutoFit/>
-          </a:bodyPr>
-          <a:lstStyle/>
-          <a:p>
-            <a:r>
-              <a:rPr sz="1800" b="1">
-                <a:solidFill>
-                  <a:srgbClr val="C0392B"/>
-                </a:solidFill>
-              </a:rPr>
-              <a:t>Loss design (the methods contribution)</a:t>
-            </a:r>
-          </a:p>
-          <a:p/>
-          <a:p>
-            <a:r>
-              <a:rPr sz="1500" b="1">
-                <a:solidFill>
-                  <a:srgbClr val="102A43"/>
-                </a:solidFill>
-              </a:rPr>
-              <a:t>ℒ = ⟨ ( log(1+τ̂_eff) − log(1+τ_eff) )² ⟩_non-DLA</a:t>
-            </a:r>
-          </a:p>
-          <a:p>
-            <a:r>
-              <a:rPr sz="1200" i="1">
-                <a:solidFill>
-                  <a:srgbClr val="555555"/>
-                </a:solidFill>
-              </a:rPr>
-              <a:t>with  τ_eff = min(τ, τ_max=10)   +   saturated-absorber mask</a:t>
-            </a:r>
-          </a:p>
-          <a:p/>
-          <a:p>
-            <a:r>
-              <a:rPr sz="1300" b="1">
-                <a:solidFill>
-                  <a:srgbClr val="102A43"/>
-                </a:solidFill>
-              </a:rPr>
-              <a:t>Three coupled rulings:</a:t>
-            </a:r>
-          </a:p>
-          <a:p>
-            <a:r>
-              <a:rPr sz="1100">
-                <a:solidFill>
-                  <a:srgbClr val="102A43"/>
-                </a:solidFill>
-              </a:rPr>
-              <a:t>(1)  Mask saturated cores (τ ≈ 10⁷ outliers)</a:t>
-            </a:r>
-          </a:p>
-          <a:p>
-            <a:r>
-              <a:rPr sz="1100">
-                <a:solidFill>
-                  <a:srgbClr val="102A43"/>
-                </a:solidFill>
-              </a:rPr>
-              <a:t>(2)  Cap forest at τ_max = 10 — calibrated, not chosen</a:t>
-            </a:r>
-          </a:p>
-          <a:p>
-            <a:r>
-              <a:rPr sz="1100">
-                <a:solidFill>
-                  <a:srgbClr val="555555"/>
-                </a:solidFill>
-              </a:rPr>
-              <a:t>      sensitivity:  max |ΔP_F/P_F|  ≤  0.018 %</a:t>
-            </a:r>
-          </a:p>
-          <a:p>
-            <a:r>
-              <a:rPr sz="1100">
-                <a:solidFill>
-                  <a:srgbClr val="555555"/>
-                </a:solidFill>
-              </a:rPr>
-              <a:t>      (~100× under the 2 % pass criterion)</a:t>
-            </a:r>
-          </a:p>
-          <a:p>
-            <a:r>
-              <a:rPr sz="1100">
-                <a:solidFill>
-                  <a:srgbClr val="102A43"/>
-                </a:solidFill>
-              </a:rPr>
-              <a:t>(3)  log-space supervision  ↔  IGM opacity is log-normal</a:t>
-            </a:r>
-          </a:p>
-        </p:txBody>
-      </p:sp>
-      <p:pic>
-        <p:nvPicPr>
-          <p:cNvPr id="5" name="Picture 4" descr="tau_max_sensitivity.png"/>
-          <p:cNvPicPr>
-            <a:picLocks noChangeAspect="1"/>
-          </p:cNvPicPr>
-          <p:nvPr/>
-        </p:nvPicPr>
-        <p:blipFill>
-          <a:blip r:embed="rId2"/>
-          <a:stretch>
-            <a:fillRect/>
-          </a:stretch>
-        </p:blipFill>
-        <p:spPr>
-          <a:xfrm>
-            <a:off x="457200" y="3383280"/>
-            <a:ext cx="5943600" cy="4636762"/>
-          </a:xfrm>
-          <a:prstGeom prst="rect">
-            <a:avLst/>
-          </a:prstGeom>
-        </p:spPr>
-      </p:pic>
-      <p:sp>
-        <p:nvSpPr>
-          <p:cNvPr id="6" name="TextBox 5"/>
-          <p:cNvSpPr txBox="1"/>
-          <p:nvPr/>
-        </p:nvSpPr>
-        <p:spPr>
-          <a:xfrm>
-            <a:off x="6492240" y="3383280"/>
-            <a:ext cx="5303520" cy="1828800"/>
-          </a:xfrm>
-          <a:prstGeom prst="rect">
-            <a:avLst/>
-          </a:prstGeom>
-          <a:noFill/>
-        </p:spPr>
-        <p:txBody>
-          <a:bodyPr wrap="square">
-            <a:spAutoFit/>
-          </a:bodyPr>
-          <a:lstStyle/>
-          <a:p>
-            <a:pPr algn="l"/>
-            <a:r>
-              <a:rPr sz="1100" b="0" i="1">
-                <a:solidFill>
-                  <a:srgbClr val="102A43"/>
-                </a:solidFill>
-              </a:rPr>
-              <a:t>Why log1p?  The IGM opacity distribution is approximately log-normal (Fluctuating Gunn-Peterson Approximation; Bi &amp; Davidsen 1997). Log-space supervision matches the natural noise model — analogous to log-depth supervision in CV.</a:t>
-            </a:r>
-          </a:p>
-        </p:txBody>
-      </p:sp>
-      <p:sp>
-        <p:nvSpPr>
-          <p:cNvPr id="7" name="TextBox 6"/>
-          <p:cNvSpPr txBox="1"/>
-          <p:nvPr/>
-        </p:nvSpPr>
-        <p:spPr>
-          <a:xfrm>
-            <a:off x="457200" y="5989320"/>
-            <a:ext cx="5943600" cy="365760"/>
-          </a:xfrm>
-          <a:prstGeom prst="rect">
-            <a:avLst/>
-          </a:prstGeom>
-          <a:noFill/>
-        </p:spPr>
-        <p:txBody>
-          <a:bodyPr wrap="square">
-            <a:spAutoFit/>
-          </a:bodyPr>
-          <a:lstStyle/>
-          <a:p>
-            <a:pPr algn="ctr"/>
-            <a:r>
-              <a:rPr sz="1000" b="0" i="1">
-                <a:solidFill>
-                  <a:srgbClr val="555555"/>
-                </a:solidFill>
-              </a:rPr>
-              <a:t>τ_max sensitivity gate — change in 1D flux power across τ_max ∈ {5,10,20}</a:t>
-            </a:r>
-          </a:p>
-        </p:txBody>
-      </p:sp>
-      <p:sp>
-        <p:nvSpPr>
-          <p:cNvPr id="8" name="TextBox 7"/>
-          <p:cNvSpPr txBox="1"/>
-          <p:nvPr/>
-        </p:nvSpPr>
-        <p:spPr>
-          <a:xfrm>
-            <a:off x="457200" y="6492240"/>
-            <a:ext cx="11247120" cy="274320"/>
-          </a:xfrm>
-          <a:prstGeom prst="rect">
-            <a:avLst/>
-          </a:prstGeom>
-          <a:noFill/>
-        </p:spPr>
-        <p:txBody>
-          <a:bodyPr wrap="none">
-            <a:spAutoFit/>
-          </a:bodyPr>
-          <a:lstStyle/>
-          <a:p>
-            <a:pPr algn="r"/>
-            <a:r>
-              <a:rPr sz="1000" i="1">
-                <a:solidFill>
-                  <a:srgbClr val="555555"/>
-                </a:solidFill>
-              </a:rPr>
-              <a:t>slide 5 / 7  ·  forward model + loss</a:t>
-            </a:r>
-          </a:p>
-        </p:txBody>
-      </p:sp>
-    </p:spTree>
-  </p:cSld>
-  <p:clrMapOvr>
-    <a:masterClrMapping/>
-  </p:clrMapOvr>
-</p:sld>
-</file>
-
-<file path=ppt/slides/slide6.xml><?xml version="1.0" encoding="utf-8"?>
-<p:sld xmlns:a="http://schemas.openxmlformats.org/drawingml/2006/main" xmlns:p="http://schemas.openxmlformats.org/presentationml/2006/main" xmlns:r="http://schemas.openxmlformats.org/officeDocument/2006/relationships">
-  <p:cSld>
-    <p:spTree>
-      <p:nvGrpSpPr>
-        <p:cNvPr id="1" name=""/>
-        <p:cNvGrpSpPr/>
-        <p:nvPr/>
-      </p:nvGrpSpPr>
-      <p:grpSpPr/>
-      <p:sp>
-        <p:nvSpPr>
-          <p:cNvPr id="2" name="TextBox 1"/>
-          <p:cNvSpPr txBox="1"/>
-          <p:nvPr/>
-        </p:nvSpPr>
-        <p:spPr>
-          <a:xfrm>
-            <a:off x="457200" y="182880"/>
-            <a:ext cx="11247120" cy="640080"/>
-          </a:xfrm>
-          <a:prstGeom prst="rect">
-            <a:avLst/>
-          </a:prstGeom>
-          <a:noFill/>
-        </p:spPr>
-        <p:txBody>
-          <a:bodyPr wrap="square">
-            <a:spAutoFit/>
-          </a:bodyPr>
-          <a:lstStyle/>
-          <a:p>
-            <a:pPr algn="l"/>
-            <a:r>
-              <a:rPr sz="2800" b="1">
+              <a:rPr sz="2800" b="1" dirty="0">
                 <a:solidFill>
                   <a:srgbClr val="102A43"/>
                 </a:solidFill>
@@ -5896,11 +8721,41 @@
                 <a:tableStyleId>{5C22544A-7EE6-4342-B048-85BDC9FD1C3A}</a:tableStyleId>
               </a:tblPr>
               <a:tblGrid>
-                <a:gridCol w="1463040"/>
-                <a:gridCol w="1463040"/>
-                <a:gridCol w="1463040"/>
-                <a:gridCol w="1463040"/>
-                <a:gridCol w="1463040"/>
+                <a:gridCol w="1463040">
+                  <a:extLst>
+                    <a:ext uri="{9D8B030D-6E8A-4147-A177-3AD203B41FA5}">
+                      <a16:colId xmlns:a16="http://schemas.microsoft.com/office/drawing/2014/main" val="20000"/>
+                    </a:ext>
+                  </a:extLst>
+                </a:gridCol>
+                <a:gridCol w="1463040">
+                  <a:extLst>
+                    <a:ext uri="{9D8B030D-6E8A-4147-A177-3AD203B41FA5}">
+                      <a16:colId xmlns:a16="http://schemas.microsoft.com/office/drawing/2014/main" val="20001"/>
+                    </a:ext>
+                  </a:extLst>
+                </a:gridCol>
+                <a:gridCol w="1463040">
+                  <a:extLst>
+                    <a:ext uri="{9D8B030D-6E8A-4147-A177-3AD203B41FA5}">
+                      <a16:colId xmlns:a16="http://schemas.microsoft.com/office/drawing/2014/main" val="20002"/>
+                    </a:ext>
+                  </a:extLst>
+                </a:gridCol>
+                <a:gridCol w="1463040">
+                  <a:extLst>
+                    <a:ext uri="{9D8B030D-6E8A-4147-A177-3AD203B41FA5}">
+                      <a16:colId xmlns:a16="http://schemas.microsoft.com/office/drawing/2014/main" val="20003"/>
+                    </a:ext>
+                  </a:extLst>
+                </a:gridCol>
+                <a:gridCol w="1463040">
+                  <a:extLst>
+                    <a:ext uri="{9D8B030D-6E8A-4147-A177-3AD203B41FA5}">
+                      <a16:colId xmlns:a16="http://schemas.microsoft.com/office/drawing/2014/main" val="20004"/>
+                    </a:ext>
+                  </a:extLst>
+                </a:gridCol>
               </a:tblGrid>
               <a:tr h="475488">
                 <a:tc>
@@ -5909,7 +8764,7 @@
                     <a:lstStyle/>
                     <a:p>
                       <a:r>
-                        <a:rPr b="1" sz="1300">
+                        <a:rPr sz="1300" b="1" dirty="0">
                           <a:solidFill>
                             <a:srgbClr val="102A43"/>
                           </a:solidFill>
@@ -5926,7 +8781,7 @@
                     <a:lstStyle/>
                     <a:p>
                       <a:r>
-                        <a:rPr b="1" sz="1300">
+                        <a:rPr sz="1300" b="1" dirty="0">
                           <a:solidFill>
                             <a:srgbClr val="102A43"/>
                           </a:solidFill>
@@ -5943,7 +8798,7 @@
                     <a:lstStyle/>
                     <a:p>
                       <a:r>
-                        <a:rPr b="1" sz="1300">
+                        <a:rPr sz="1300" b="1" dirty="0">
                           <a:solidFill>
                             <a:srgbClr val="102A43"/>
                           </a:solidFill>
@@ -5960,7 +8815,7 @@
                     <a:lstStyle/>
                     <a:p>
                       <a:r>
-                        <a:rPr b="1" sz="1300">
+                        <a:rPr sz="1300" b="1" dirty="0">
                           <a:solidFill>
                             <a:srgbClr val="102A43"/>
                           </a:solidFill>
@@ -5977,7 +8832,7 @@
                     <a:lstStyle/>
                     <a:p>
                       <a:r>
-                        <a:rPr b="1" sz="1300">
+                        <a:rPr sz="1300" b="1" dirty="0">
                           <a:solidFill>
                             <a:srgbClr val="102A43"/>
                           </a:solidFill>
@@ -5988,6 +8843,11 @@
                   </a:txBody>
                   <a:tcPr/>
                 </a:tc>
+                <a:extLst>
+                  <a:ext uri="{0D108BD9-81ED-4DB2-BD59-A6C34878D82A}">
+                    <a16:rowId xmlns:a16="http://schemas.microsoft.com/office/drawing/2014/main" val="10000"/>
+                  </a:ext>
+                </a:extLst>
               </a:tr>
               <a:tr h="475488">
                 <a:tc>
@@ -5996,12 +8856,28 @@
                     <a:lstStyle/>
                     <a:p>
                       <a:r>
-                        <a:rPr sz="1200">
+                        <a:rPr sz="1200" dirty="0">
                           <a:solidFill>
                             <a:srgbClr val="102A43"/>
                           </a:solidFill>
                         </a:rPr>
-                        <a:t>P1  (no fdbk)</a:t>
+                        <a:t>P1  (no </a:t>
+                      </a:r>
+                      <a:r>
+                        <a:rPr sz="1200" dirty="0" err="1">
+                          <a:solidFill>
+                            <a:srgbClr val="102A43"/>
+                          </a:solidFill>
+                        </a:rPr>
+                        <a:t>fdbk</a:t>
+                      </a:r>
+                      <a:r>
+                        <a:rPr sz="1200" dirty="0">
+                          <a:solidFill>
+                            <a:srgbClr val="102A43"/>
+                          </a:solidFill>
+                        </a:rPr>
+                        <a:t>)</a:t>
                       </a:r>
                     </a:p>
                   </a:txBody>
@@ -6075,6 +8951,11 @@
                   </a:txBody>
                   <a:tcPr/>
                 </a:tc>
+                <a:extLst>
+                  <a:ext uri="{0D108BD9-81ED-4DB2-BD59-A6C34878D82A}">
+                    <a16:rowId xmlns:a16="http://schemas.microsoft.com/office/drawing/2014/main" val="10001"/>
+                  </a:ext>
+                </a:extLst>
               </a:tr>
               <a:tr h="475488">
                 <a:tc>
@@ -6162,6 +9043,11 @@
                   </a:txBody>
                   <a:tcPr/>
                 </a:tc>
+                <a:extLst>
+                  <a:ext uri="{0D108BD9-81ED-4DB2-BD59-A6C34878D82A}">
+                    <a16:rowId xmlns:a16="http://schemas.microsoft.com/office/drawing/2014/main" val="10002"/>
+                  </a:ext>
+                </a:extLst>
               </a:tr>
               <a:tr h="475488">
                 <a:tc>
@@ -6249,6 +9135,11 @@
                   </a:txBody>
                   <a:tcPr/>
                 </a:tc>
+                <a:extLst>
+                  <a:ext uri="{0D108BD9-81ED-4DB2-BD59-A6C34878D82A}">
+                    <a16:rowId xmlns:a16="http://schemas.microsoft.com/office/drawing/2014/main" val="10003"/>
+                  </a:ext>
+                </a:extLst>
               </a:tr>
               <a:tr h="475488">
                 <a:tc>
@@ -6336,21 +9227,196 @@
                   </a:txBody>
                   <a:tcPr/>
                 </a:tc>
+                <a:extLst>
+                  <a:ext uri="{0D108BD9-81ED-4DB2-BD59-A6C34878D82A}">
+                    <a16:rowId xmlns:a16="http://schemas.microsoft.com/office/drawing/2014/main" val="10004"/>
+                  </a:ext>
+                </a:extLst>
               </a:tr>
             </a:tbl>
           </a:graphicData>
         </a:graphic>
       </p:graphicFrame>
+      <p:grpSp>
+        <p:nvGrpSpPr>
+          <p:cNvPr id="11" name="Group 10">
+            <a:extLst>
+              <a:ext uri="{FF2B5EF4-FFF2-40B4-BE49-F238E27FC236}">
+                <a16:creationId xmlns:a16="http://schemas.microsoft.com/office/drawing/2014/main" id="{877ACEAE-5F99-2D44-A6F0-D2E98F3CF247}"/>
+              </a:ext>
+            </a:extLst>
+          </p:cNvPr>
+          <p:cNvGrpSpPr/>
+          <p:nvPr/>
+        </p:nvGrpSpPr>
+        <p:grpSpPr>
+          <a:xfrm>
+            <a:off x="457200" y="3566160"/>
+            <a:ext cx="7315200" cy="1193185"/>
+            <a:chOff x="412750" y="2216142"/>
+            <a:chExt cx="7315200" cy="1193185"/>
+          </a:xfrm>
+        </p:grpSpPr>
+        <p:sp>
+          <p:nvSpPr>
+            <p:cNvPr id="4" name="TextBox 3"/>
+            <p:cNvSpPr txBox="1"/>
+            <p:nvPr/>
+          </p:nvSpPr>
+          <p:spPr>
+            <a:xfrm>
+              <a:off x="412750" y="2216142"/>
+              <a:ext cx="7315200" cy="365760"/>
+            </a:xfrm>
+            <a:prstGeom prst="rect">
+              <a:avLst/>
+            </a:prstGeom>
+            <a:noFill/>
+          </p:spPr>
+          <p:txBody>
+            <a:bodyPr wrap="square">
+              <a:spAutoFit/>
+            </a:bodyPr>
+            <a:lstStyle/>
+            <a:p>
+              <a:pPr algn="l"/>
+              <a:r>
+                <a:rPr sz="1200" b="0" i="1" dirty="0">
+                  <a:solidFill>
+                    <a:srgbClr val="555555"/>
+                  </a:solidFill>
+                </a:rPr>
+                <a:t>Cell:  ⟨</a:t>
+              </a:r>
+              <a:r>
+                <a:rPr sz="1200" b="0" i="1" dirty="0" err="1">
+                  <a:solidFill>
+                    <a:srgbClr val="555555"/>
+                  </a:solidFill>
+                </a:rPr>
+                <a:t>F⟩_pred</a:t>
+              </a:r>
+              <a:r>
+                <a:rPr sz="1200" b="0" i="1" dirty="0">
+                  <a:solidFill>
+                    <a:srgbClr val="555555"/>
+                  </a:solidFill>
+                </a:rPr>
+                <a:t> / 𝒜  at the production schedule  (50,000 steps each).</a:t>
+              </a:r>
+            </a:p>
+          </p:txBody>
+        </p:sp>
+        <p:sp>
+          <p:nvSpPr>
+            <p:cNvPr id="5" name="TextBox 4"/>
+            <p:cNvSpPr txBox="1"/>
+            <p:nvPr/>
+          </p:nvSpPr>
+          <p:spPr>
+            <a:xfrm>
+              <a:off x="412750" y="2581902"/>
+              <a:ext cx="7315200" cy="457200"/>
+            </a:xfrm>
+            <a:prstGeom prst="rect">
+              <a:avLst/>
+            </a:prstGeom>
+            <a:noFill/>
+          </p:spPr>
+          <p:txBody>
+            <a:bodyPr wrap="square">
+              <a:spAutoFit/>
+            </a:bodyPr>
+            <a:lstStyle/>
+            <a:p>
+              <a:pPr algn="l"/>
+              <a:r>
+                <a:rPr sz="1500" b="1" i="0" dirty="0">
+                  <a:solidFill>
+                    <a:srgbClr val="102A43"/>
+                  </a:solidFill>
+                </a:rPr>
+                <a:t>Mean-flux spread across four physics:  0.9247 → 0.9308   (0.66 %)</a:t>
+              </a:r>
+            </a:p>
+          </p:txBody>
+        </p:sp>
+        <p:sp>
+          <p:nvSpPr>
+            <p:cNvPr id="6" name="TextBox 5"/>
+            <p:cNvSpPr txBox="1"/>
+            <p:nvPr/>
+          </p:nvSpPr>
+          <p:spPr>
+            <a:xfrm>
+              <a:off x="412750" y="2947662"/>
+              <a:ext cx="7315200" cy="461665"/>
+            </a:xfrm>
+            <a:prstGeom prst="rect">
+              <a:avLst/>
+            </a:prstGeom>
+            <a:noFill/>
+          </p:spPr>
+          <p:txBody>
+            <a:bodyPr wrap="square">
+              <a:spAutoFit/>
+            </a:bodyPr>
+            <a:lstStyle/>
+            <a:p>
+              <a:pPr algn="l"/>
+              <a:r>
+                <a:rPr sz="1200" b="0" i="0" dirty="0">
+                  <a:solidFill>
+                    <a:srgbClr val="555555"/>
+                  </a:solidFill>
+                </a:rPr>
+                <a:t>Well within the 5 % calibration tolerance vs the observational anchor </a:t>
+              </a:r>
+              <a:br>
+                <a:rPr lang="en-US" sz="1200" b="0" i="0" dirty="0">
+                  <a:solidFill>
+                    <a:srgbClr val="555555"/>
+                  </a:solidFill>
+                </a:rPr>
+              </a:br>
+              <a:r>
+                <a:rPr sz="1200" b="0" i="0" dirty="0">
+                  <a:solidFill>
+                    <a:srgbClr val="555555"/>
+                  </a:solidFill>
+                </a:rPr>
+                <a:t>(Danforth+ 2016, ⟨F⟩_</a:t>
+              </a:r>
+              <a:r>
+                <a:rPr sz="1200" b="0" i="0" dirty="0" err="1">
+                  <a:solidFill>
+                    <a:srgbClr val="555555"/>
+                  </a:solidFill>
+                </a:rPr>
+                <a:t>obs</a:t>
+              </a:r>
+              <a:r>
+                <a:rPr sz="1200" b="0" i="0" dirty="0">
+                  <a:solidFill>
+                    <a:srgbClr val="555555"/>
+                  </a:solidFill>
+                </a:rPr>
+                <a:t> = 0.877 ± 15 % at z = 0.3).</a:t>
+              </a:r>
+            </a:p>
+          </p:txBody>
+        </p:sp>
+      </p:grpSp>
       <p:sp>
         <p:nvSpPr>
-          <p:cNvPr id="4" name="TextBox 3"/>
+          <p:cNvPr id="7" name="TextBox 6"/>
           <p:cNvSpPr txBox="1"/>
           <p:nvPr/>
         </p:nvSpPr>
         <p:spPr>
           <a:xfrm>
-            <a:off x="457200" y="3657600"/>
-            <a:ext cx="7315200" cy="365760"/>
+            <a:off x="8046720" y="1097280"/>
+            <a:ext cx="3840480" cy="1692771"/>
           </a:xfrm>
           <a:prstGeom prst="rect">
             <a:avLst/>
@@ -6363,28 +9429,157 @@
           </a:bodyPr>
           <a:lstStyle/>
           <a:p>
-            <a:pPr algn="l"/>
-            <a:r>
-              <a:rPr sz="1200" b="0" i="1">
+            <a:r>
+              <a:rPr sz="1300" dirty="0">
                 <a:solidFill>
-                  <a:srgbClr val="555555"/>
+                  <a:srgbClr val="102A43"/>
                 </a:solidFill>
               </a:rPr>
-              <a:t>Cell:  ⟨F⟩_pred / 𝒜  at the production schedule  (50,000 steps each).</a:t>
-            </a:r>
+              <a:t>Same architecture</a:t>
+            </a:r>
+          </a:p>
+          <a:p>
+            <a:r>
+              <a:rPr sz="1300" dirty="0">
+                <a:solidFill>
+                  <a:srgbClr val="102A43"/>
+                </a:solidFill>
+              </a:rPr>
+              <a:t>Same loss</a:t>
+            </a:r>
+          </a:p>
+          <a:p>
+            <a:r>
+              <a:rPr sz="1300" dirty="0">
+                <a:solidFill>
+                  <a:srgbClr val="102A43"/>
+                </a:solidFill>
+              </a:rPr>
+              <a:t>Same hyperparameters</a:t>
+            </a:r>
+          </a:p>
+          <a:p>
+            <a:endParaRPr sz="1300" dirty="0">
+              <a:solidFill>
+                <a:srgbClr val="102A43"/>
+              </a:solidFill>
+            </a:endParaRPr>
+          </a:p>
+          <a:p>
+            <a:r>
+              <a:rPr sz="1300" dirty="0">
+                <a:solidFill>
+                  <a:srgbClr val="102A43"/>
+                </a:solidFill>
+              </a:rPr>
+              <a:t>Four different physics priors</a:t>
+            </a:r>
+          </a:p>
+          <a:p>
+            <a:r>
+              <a:rPr sz="1300" dirty="0">
+                <a:solidFill>
+                  <a:srgbClr val="102A43"/>
+                </a:solidFill>
+              </a:rPr>
+              <a:t>Four consistent reconstructions</a:t>
+            </a:r>
+          </a:p>
+          <a:p>
+            <a:r>
+              <a:rPr sz="1300" b="1" dirty="0">
+                <a:solidFill>
+                  <a:srgbClr val="102A43"/>
+                </a:solidFill>
+              </a:rPr>
+              <a:t>Calibration constraint holds across all four</a:t>
+            </a:r>
+          </a:p>
+          <a:p>
+            <a:endParaRPr sz="1300" b="1" dirty="0">
+              <a:solidFill>
+                <a:srgbClr val="102A43"/>
+              </a:solidFill>
+            </a:endParaRPr>
           </a:p>
         </p:txBody>
       </p:sp>
+      <p:pic>
+        <p:nvPicPr>
+          <p:cNvPr id="10" name="Picture 9">
+            <a:extLst>
+              <a:ext uri="{FF2B5EF4-FFF2-40B4-BE49-F238E27FC236}">
+                <a16:creationId xmlns:a16="http://schemas.microsoft.com/office/drawing/2014/main" id="{D9668465-BF3F-E042-6DBC-14A4058A5C06}"/>
+              </a:ext>
+            </a:extLst>
+          </p:cNvPr>
+          <p:cNvPicPr>
+            <a:picLocks noChangeAspect="1"/>
+          </p:cNvPicPr>
+          <p:nvPr/>
+        </p:nvPicPr>
+        <p:blipFill>
+          <a:blip r:embed="rId3"/>
+          <a:stretch>
+            <a:fillRect/>
+          </a:stretch>
+        </p:blipFill>
+        <p:spPr>
+          <a:xfrm>
+            <a:off x="8044162" y="2790051"/>
+            <a:ext cx="3282449" cy="1441458"/>
+          </a:xfrm>
+          <a:prstGeom prst="rect">
+            <a:avLst/>
+          </a:prstGeom>
+        </p:spPr>
+      </p:pic>
+      <p:pic>
+        <p:nvPicPr>
+          <p:cNvPr id="12" name="Picture 11">
+            <a:extLst>
+              <a:ext uri="{FF2B5EF4-FFF2-40B4-BE49-F238E27FC236}">
+                <a16:creationId xmlns:a16="http://schemas.microsoft.com/office/drawing/2014/main" id="{04545001-EAE0-680D-B987-522E4E03EAA6}"/>
+              </a:ext>
+            </a:extLst>
+          </p:cNvPr>
+          <p:cNvPicPr>
+            <a:picLocks noChangeAspect="1"/>
+          </p:cNvPicPr>
+          <p:nvPr/>
+        </p:nvPicPr>
+        <p:blipFill>
+          <a:blip r:embed="rId4"/>
+          <a:stretch>
+            <a:fillRect/>
+          </a:stretch>
+        </p:blipFill>
+        <p:spPr>
+          <a:xfrm>
+            <a:off x="4237990" y="5067739"/>
+            <a:ext cx="7617460" cy="966862"/>
+          </a:xfrm>
+          <a:prstGeom prst="rect">
+            <a:avLst/>
+          </a:prstGeom>
+        </p:spPr>
+      </p:pic>
       <p:sp>
         <p:nvSpPr>
-          <p:cNvPr id="5" name="TextBox 4"/>
+          <p:cNvPr id="13" name="TextBox 12">
+            <a:extLst>
+              <a:ext uri="{FF2B5EF4-FFF2-40B4-BE49-F238E27FC236}">
+                <a16:creationId xmlns:a16="http://schemas.microsoft.com/office/drawing/2014/main" id="{7371228D-B1CD-0D26-0B99-85DEB977C256}"/>
+              </a:ext>
+            </a:extLst>
+          </p:cNvPr>
           <p:cNvSpPr txBox="1"/>
           <p:nvPr/>
         </p:nvSpPr>
         <p:spPr>
           <a:xfrm>
-            <a:off x="457200" y="4114800"/>
-            <a:ext cx="7315200" cy="457200"/>
+            <a:off x="5214870" y="4697514"/>
+            <a:ext cx="6111741" cy="646331"/>
           </a:xfrm>
           <a:prstGeom prst="rect">
             <a:avLst/>
@@ -6392,193 +9587,22 @@
           <a:noFill/>
         </p:spPr>
         <p:txBody>
-          <a:bodyPr wrap="square">
+          <a:bodyPr wrap="square" rtlCol="0">
             <a:spAutoFit/>
           </a:bodyPr>
           <a:lstStyle/>
           <a:p>
-            <a:pPr algn="l"/>
-            <a:r>
-              <a:rPr sz="1500" b="1" i="0">
+            <a:r>
+              <a:rPr lang="en-US" altLang="ko-KR" dirty="0">
                 <a:solidFill>
                   <a:srgbClr val="102A43"/>
                 </a:solidFill>
               </a:rPr>
-              <a:t>Mean-flux spread across four physics:  0.9247 → 0.9308   (0.66 %)</a:t>
-            </a:r>
-          </a:p>
-        </p:txBody>
-      </p:sp>
-      <p:sp>
-        <p:nvSpPr>
-          <p:cNvPr id="6" name="TextBox 5"/>
-          <p:cNvSpPr txBox="1"/>
-          <p:nvPr/>
-        </p:nvSpPr>
-        <p:spPr>
-          <a:xfrm>
-            <a:off x="457200" y="4617720"/>
-            <a:ext cx="7315200" cy="640080"/>
-          </a:xfrm>
-          <a:prstGeom prst="rect">
-            <a:avLst/>
-          </a:prstGeom>
-          <a:noFill/>
-        </p:spPr>
-        <p:txBody>
-          <a:bodyPr wrap="square">
-            <a:spAutoFit/>
-          </a:bodyPr>
-          <a:lstStyle/>
-          <a:p>
-            <a:pPr algn="l"/>
-            <a:r>
-              <a:rPr sz="1200" b="0" i="0">
-                <a:solidFill>
-                  <a:srgbClr val="555555"/>
-                </a:solidFill>
-              </a:rPr>
-              <a:t>Well within the 5 % calibration tolerance vs the observational anchor (Danforth+ 2016, ⟨F⟩_obs = 0.877 ± 15 % at z = 0.3).</a:t>
-            </a:r>
-          </a:p>
-        </p:txBody>
-      </p:sp>
-      <p:sp>
-        <p:nvSpPr>
-          <p:cNvPr id="7" name="TextBox 6"/>
-          <p:cNvSpPr txBox="1"/>
-          <p:nvPr/>
-        </p:nvSpPr>
-        <p:spPr>
-          <a:xfrm>
-            <a:off x="8046720" y="1097280"/>
-            <a:ext cx="3840480" cy="5029200"/>
-          </a:xfrm>
-          <a:prstGeom prst="rect">
-            <a:avLst/>
-          </a:prstGeom>
-          <a:noFill/>
-        </p:spPr>
-        <p:txBody>
-          <a:bodyPr wrap="square">
-            <a:spAutoFit/>
-          </a:bodyPr>
-          <a:lstStyle/>
-          <a:p>
-            <a:r>
-              <a:rPr sz="1800" b="1">
-                <a:solidFill>
-                  <a:srgbClr val="C0392B"/>
-                </a:solidFill>
-              </a:rPr>
-              <a:t>What this shows</a:t>
-            </a:r>
-          </a:p>
-          <a:p>
-            <a:r>
-              <a:rPr sz="1300">
-                <a:solidFill>
-                  <a:srgbClr val="102A43"/>
-                </a:solidFill>
-              </a:rPr>
-              <a:t>Same architecture</a:t>
-            </a:r>
-          </a:p>
-          <a:p>
-            <a:r>
-              <a:rPr sz="1300">
-                <a:solidFill>
-                  <a:srgbClr val="102A43"/>
-                </a:solidFill>
-              </a:rPr>
-              <a:t>Same loss</a:t>
-            </a:r>
-          </a:p>
-          <a:p>
-            <a:r>
-              <a:rPr sz="1300">
-                <a:solidFill>
-                  <a:srgbClr val="102A43"/>
-                </a:solidFill>
-              </a:rPr>
-              <a:t>Same hyperparameters</a:t>
-            </a:r>
-          </a:p>
-          <a:p/>
-          <a:p>
-            <a:r>
-              <a:rPr sz="1300">
-                <a:solidFill>
-                  <a:srgbClr val="102A43"/>
-                </a:solidFill>
-              </a:rPr>
-              <a:t>Four different physics priors</a:t>
-            </a:r>
-          </a:p>
-          <a:p>
-            <a:r>
-              <a:rPr sz="1300">
-                <a:solidFill>
-                  <a:srgbClr val="102A43"/>
-                </a:solidFill>
-              </a:rPr>
-              <a:t>Four consistent reconstructions</a:t>
-            </a:r>
-          </a:p>
-          <a:p>
-            <a:r>
-              <a:rPr sz="1300" b="1">
-                <a:solidFill>
-                  <a:srgbClr val="102A43"/>
-                </a:solidFill>
-              </a:rPr>
-              <a:t>Calibration constraint holds across all four</a:t>
-            </a:r>
-          </a:p>
-          <a:p/>
-          <a:p>
-            <a:r>
-              <a:rPr sz="1300">
-                <a:solidFill>
-                  <a:srgbClr val="102A43"/>
-                </a:solidFill>
-              </a:rPr>
               <a:t>T2 / T3 / T4: identical methodology, paused on compute quota</a:t>
             </a:r>
           </a:p>
-        </p:txBody>
-      </p:sp>
-      <p:sp>
-        <p:nvSpPr>
-          <p:cNvPr id="8" name="TextBox 7"/>
-          <p:cNvSpPr txBox="1"/>
-          <p:nvPr/>
-        </p:nvSpPr>
-        <p:spPr>
-          <a:xfrm>
-            <a:off x="457200" y="6492240"/>
-            <a:ext cx="11247120" cy="274320"/>
-          </a:xfrm>
-          <a:prstGeom prst="rect">
-            <a:avLst/>
-          </a:prstGeom>
-          <a:noFill/>
-        </p:spPr>
-        <p:txBody>
-          <a:bodyPr wrap="none">
-            <a:spAutoFit/>
-          </a:bodyPr>
-          <a:lstStyle/>
-          <a:p>
-            <a:pPr algn="r"/>
-            <a:r>
-              <a:rPr sz="1000" i="1">
-                <a:solidFill>
-                  <a:srgbClr val="555555"/>
-                </a:solidFill>
-              </a:rPr>
-              <a:t>slide 6 / 7  ·  Tier-1 ablation matrix  (n_rays = 64)</a:t>
-            </a:r>
+          <a:p>
+            <a:endParaRPr lang="ko-KR" altLang="en-US" dirty="0"/>
           </a:p>
         </p:txBody>
       </p:sp>
@@ -6591,7 +9615,7 @@
 </file>
 
 <file path=ppt/slides/slide7.xml><?xml version="1.0" encoding="utf-8"?>
-<p:sld xmlns:a="http://schemas.openxmlformats.org/drawingml/2006/main" xmlns:p="http://schemas.openxmlformats.org/presentationml/2006/main" xmlns:r="http://schemas.openxmlformats.org/officeDocument/2006/relationships">
+<p:sld xmlns:a="http://schemas.openxmlformats.org/drawingml/2006/main" xmlns:r="http://schemas.openxmlformats.org/officeDocument/2006/relationships" xmlns:p="http://schemas.openxmlformats.org/presentationml/2006/main">
   <p:cSld>
     <p:spTree>
       <p:nvGrpSpPr>
@@ -6599,7 +9623,14 @@
         <p:cNvGrpSpPr/>
         <p:nvPr/>
       </p:nvGrpSpPr>
-      <p:grpSpPr/>
+      <p:grpSpPr>
+        <a:xfrm>
+          <a:off x="0" y="0"/>
+          <a:ext cx="0" cy="0"/>
+          <a:chOff x="0" y="0"/>
+          <a:chExt cx="0" cy="0"/>
+        </a:xfrm>
+      </p:grpSpPr>
       <p:sp>
         <p:nvSpPr>
           <p:cNvPr id="2" name="TextBox 1"/>
@@ -6643,7 +9674,7 @@
         <p:spPr>
           <a:xfrm>
             <a:off x="457200" y="1097280"/>
-            <a:ext cx="5486400" cy="4572000"/>
+            <a:ext cx="5486400" cy="1754326"/>
           </a:xfrm>
           <a:prstGeom prst="rect">
             <a:avLst/>
@@ -6657,7 +9688,7 @@
           <a:lstStyle/>
           <a:p>
             <a:r>
-              <a:rPr sz="1800" b="1">
+              <a:rPr sz="1800" b="1" dirty="0">
                 <a:solidFill>
                   <a:srgbClr val="C0392B"/>
                 </a:solidFill>
@@ -6667,7 +9698,7 @@
           </a:p>
           <a:p>
             <a:r>
-              <a:rPr sz="1500">
+              <a:rPr sz="1500" dirty="0">
                 <a:solidFill>
                   <a:srgbClr val="102A43"/>
                 </a:solidFill>
@@ -6677,7 +9708,7 @@
           </a:p>
           <a:p>
             <a:r>
-              <a:rPr sz="1500">
+              <a:rPr sz="1500" dirty="0">
                 <a:solidFill>
                   <a:srgbClr val="102A43"/>
                 </a:solidFill>
@@ -6687,42 +9718,58 @@
           </a:p>
           <a:p>
             <a:r>
-              <a:rPr sz="1500">
+              <a:rPr sz="1500" dirty="0">
                 <a:solidFill>
                   <a:srgbClr val="102A43"/>
                 </a:solidFill>
               </a:rPr>
-              <a:t>•  ~792 GPU-hr in Tier 4 alone  (96.5 %)</a:t>
-            </a:r>
-          </a:p>
-          <a:p>
-            <a:r>
-              <a:rPr sz="1500">
+              <a:t>•  ~792 GPU-</a:t>
+            </a:r>
+            <a:r>
+              <a:rPr sz="1500" dirty="0" err="1">
                 <a:solidFill>
                   <a:srgbClr val="102A43"/>
                 </a:solidFill>
               </a:rPr>
-              <a:t>•  9 calendar days  @ 4-way parallel</a:t>
-            </a:r>
-          </a:p>
-          <a:p>
-            <a:r>
-              <a:rPr sz="1500">
+              <a:t>hr</a:t>
+            </a:r>
+            <a:r>
+              <a:rPr sz="1500" dirty="0">
                 <a:solidFill>
                   <a:srgbClr val="102A43"/>
                 </a:solidFill>
               </a:rPr>
-              <a:t>•  ≥ 12 GB VRAM, Ampere or newer</a:t>
-            </a:r>
-          </a:p>
-          <a:p>
-            <a:r>
-              <a:rPr sz="1500">
+              <a:t> in Tier 4 alone  (96.5 %)</a:t>
+            </a:r>
+          </a:p>
+          <a:p>
+            <a:r>
+              <a:rPr sz="1500" dirty="0">
                 <a:solidFill>
                   <a:srgbClr val="102A43"/>
                 </a:solidFill>
               </a:rPr>
-              <a:t>•  Single-GPU per job, embarrassingly parallel</a:t>
+              <a:t>•  9 calendar days  @ 4-way parallel</a:t>
+            </a:r>
+          </a:p>
+          <a:p>
+            <a:r>
+              <a:rPr sz="1500" dirty="0">
+                <a:solidFill>
+                  <a:srgbClr val="102A43"/>
+                </a:solidFill>
+              </a:rPr>
+              <a:t>•  ≥ 12 GB VRAM</a:t>
+            </a:r>
+          </a:p>
+          <a:p>
+            <a:r>
+              <a:rPr sz="1500" dirty="0">
+                <a:solidFill>
+                  <a:srgbClr val="102A43"/>
+                </a:solidFill>
+              </a:rPr>
+              <a:t>•  Single-GPU per job, parallel</a:t>
             </a:r>
           </a:p>
         </p:txBody>
@@ -6736,7 +9783,7 @@
         <p:spPr>
           <a:xfrm>
             <a:off x="6217920" y="1097280"/>
-            <a:ext cx="5577840" cy="4572000"/>
+            <a:ext cx="5577840" cy="1754326"/>
           </a:xfrm>
           <a:prstGeom prst="rect">
             <a:avLst/>
@@ -6750,7 +9797,7 @@
           <a:lstStyle/>
           <a:p>
             <a:r>
-              <a:rPr sz="1800" b="1">
+              <a:rPr sz="1800" b="1" dirty="0">
                 <a:solidFill>
                   <a:srgbClr val="C0392B"/>
                 </a:solidFill>
@@ -6760,7 +9807,7 @@
           </a:p>
           <a:p>
             <a:r>
-              <a:rPr sz="1500">
+              <a:rPr sz="1500" dirty="0">
                 <a:solidFill>
                   <a:srgbClr val="102A43"/>
                 </a:solidFill>
@@ -6770,111 +9817,94 @@
           </a:p>
           <a:p>
             <a:r>
-              <a:rPr sz="1500">
+              <a:rPr sz="1500" dirty="0">
                 <a:solidFill>
                   <a:srgbClr val="102A43"/>
                 </a:solidFill>
               </a:rPr>
-              <a:t>•  Pearson  ξ_{ρ̂,ρ}(2 Mpc/h)</a:t>
-            </a:r>
-          </a:p>
-          <a:p>
-            <a:r>
-              <a:rPr sz="1500">
+              <a:t>•  Pearson  ξ_{</a:t>
+            </a:r>
+            <a:r>
+              <a:rPr sz="1500" dirty="0" err="1">
                 <a:solidFill>
                   <a:srgbClr val="102A43"/>
                 </a:solidFill>
               </a:rPr>
-              <a:t>•  Flux-PDF KS distance</a:t>
-            </a:r>
-          </a:p>
-          <a:p/>
-          <a:p>
-            <a:r>
-              <a:rPr sz="1500">
+              <a:t>ρ̂,ρ</a:t>
+            </a:r>
+            <a:r>
+              <a:rPr sz="1500" dirty="0">
                 <a:solidFill>
                   <a:srgbClr val="102A43"/>
                 </a:solidFill>
               </a:rPr>
-              <a:t>•  Implemented in src/analysis/{p_flux, cross_corr, flux_pdf}.py</a:t>
-            </a:r>
-          </a:p>
-          <a:p>
-            <a:r>
-              <a:rPr sz="1500">
+              <a:t>}(2 Mpc/h)</a:t>
+            </a:r>
+          </a:p>
+          <a:p>
+            <a:r>
+              <a:rPr sz="1500" dirty="0">
                 <a:solidFill>
                   <a:srgbClr val="102A43"/>
                 </a:solidFill>
               </a:rPr>
-              <a:t>•  Awaiting Tier-3 fiducial cell to evaluate against</a:t>
-            </a:r>
-          </a:p>
-        </p:txBody>
-      </p:sp>
-      <p:sp>
-        <p:nvSpPr>
-          <p:cNvPr id="5" name="TextBox 4"/>
-          <p:cNvSpPr txBox="1"/>
-          <p:nvPr/>
-        </p:nvSpPr>
-        <p:spPr>
-          <a:xfrm>
-            <a:off x="457200" y="5486400"/>
-            <a:ext cx="11247120" cy="914400"/>
-          </a:xfrm>
-          <a:prstGeom prst="rect">
-            <a:avLst/>
-          </a:prstGeom>
-          <a:noFill/>
-        </p:spPr>
-        <p:txBody>
-          <a:bodyPr wrap="square">
-            <a:spAutoFit/>
-          </a:bodyPr>
-          <a:lstStyle/>
-          <a:p>
-            <a:pPr algn="ctr"/>
-            <a:r>
-              <a:rPr sz="1500" i="1">
+              <a:t>•  Flux-PDF KS distance</a:t>
+            </a:r>
+          </a:p>
+          <a:p>
+            <a:endParaRPr sz="1500" dirty="0">
+              <a:solidFill>
+                <a:srgbClr val="102A43"/>
+              </a:solidFill>
+            </a:endParaRPr>
+          </a:p>
+          <a:p>
+            <a:r>
+              <a:rPr sz="1500" dirty="0">
                 <a:solidFill>
                   <a:srgbClr val="102A43"/>
                 </a:solidFill>
               </a:rPr>
-              <a:t>The architecture is the easy part. The contribution is the differentiable forward model and the loss design that makes per-pixel supervision behave under heavy-tailed targets.</a:t>
-            </a:r>
-          </a:p>
-        </p:txBody>
-      </p:sp>
-      <p:sp>
-        <p:nvSpPr>
-          <p:cNvPr id="6" name="TextBox 5"/>
-          <p:cNvSpPr txBox="1"/>
-          <p:nvPr/>
-        </p:nvSpPr>
-        <p:spPr>
-          <a:xfrm>
-            <a:off x="457200" y="6492240"/>
-            <a:ext cx="11247120" cy="274320"/>
-          </a:xfrm>
-          <a:prstGeom prst="rect">
-            <a:avLst/>
-          </a:prstGeom>
-          <a:noFill/>
-        </p:spPr>
-        <p:txBody>
-          <a:bodyPr wrap="none">
-            <a:spAutoFit/>
-          </a:bodyPr>
-          <a:lstStyle/>
-          <a:p>
-            <a:pPr algn="r"/>
-            <a:r>
-              <a:rPr sz="1000" i="1">
+              <a:t>•  Implemen</a:t>
+            </a:r>
+            <a:r>
+              <a:rPr lang="en-US" sz="1500" dirty="0">
                 <a:solidFill>
-                  <a:srgbClr val="555555"/>
+                  <a:srgbClr val="102A43"/>
                 </a:solidFill>
               </a:rPr>
-              <a:t>slide 7 / 7  ·  thank you</a:t>
+              <a:t>ted and</a:t>
+            </a:r>
+            <a:r>
+              <a:rPr sz="1500" dirty="0">
+                <a:solidFill>
+                  <a:srgbClr val="102A43"/>
+                </a:solidFill>
+              </a:rPr>
+              <a:t> </a:t>
+            </a:r>
+            <a:r>
+              <a:rPr lang="en-US" sz="1500" dirty="0">
+                <a:solidFill>
+                  <a:srgbClr val="102A43"/>
+                </a:solidFill>
+              </a:rPr>
+              <a:t>ready</a:t>
+            </a:r>
+            <a:endParaRPr sz="1500" dirty="0">
+              <a:solidFill>
+                <a:srgbClr val="102A43"/>
+              </a:solidFill>
+            </a:endParaRPr>
+          </a:p>
+          <a:p>
+            <a:r>
+              <a:rPr sz="1500" dirty="0">
+                <a:solidFill>
+                  <a:srgbClr val="102A43"/>
+                </a:solidFill>
+              </a:rPr>
+              <a:t>•  Awaiting Tier-3 fiducial cell to evaluate against</a:t>
             </a:r>
           </a:p>
         </p:txBody>
@@ -7218,44 +10248,44 @@
         <a:sysClr val="window" lastClr="FFFFFF"/>
       </a:lt1>
       <a:dk2>
-        <a:srgbClr val="1F497D"/>
+        <a:srgbClr val="44546A"/>
       </a:dk2>
       <a:lt2>
-        <a:srgbClr val="EEECE1"/>
+        <a:srgbClr val="E7E6E6"/>
       </a:lt2>
       <a:accent1>
-        <a:srgbClr val="4F81BD"/>
+        <a:srgbClr val="4472C4"/>
       </a:accent1>
       <a:accent2>
-        <a:srgbClr val="C0504D"/>
+        <a:srgbClr val="ED7D31"/>
       </a:accent2>
       <a:accent3>
-        <a:srgbClr val="9BBB59"/>
+        <a:srgbClr val="A5A5A5"/>
       </a:accent3>
       <a:accent4>
-        <a:srgbClr val="8064A2"/>
+        <a:srgbClr val="FFC000"/>
       </a:accent4>
       <a:accent5>
-        <a:srgbClr val="4BACC6"/>
+        <a:srgbClr val="5B9BD5"/>
       </a:accent5>
       <a:accent6>
-        <a:srgbClr val="F79646"/>
+        <a:srgbClr val="70AD47"/>
       </a:accent6>
       <a:hlink>
-        <a:srgbClr val="0000FF"/>
+        <a:srgbClr val="0563C1"/>
       </a:hlink>
       <a:folHlink>
-        <a:srgbClr val="800080"/>
+        <a:srgbClr val="954F72"/>
       </a:folHlink>
     </a:clrScheme>
     <a:fontScheme name="Office">
       <a:majorFont>
-        <a:latin typeface="Calibri"/>
+        <a:latin typeface="맑은 고딕" panose="020F0302020204030204"/>
         <a:ea typeface=""/>
         <a:cs typeface=""/>
-        <a:font script="Jpan" typeface="ＭＳ Ｐゴシック"/>
+        <a:font script="Jpan" typeface="游ゴシック Light"/>
         <a:font script="Hang" typeface="맑은 고딕"/>
-        <a:font script="Hans" typeface="宋体"/>
+        <a:font script="Hans" typeface="等线 Light"/>
         <a:font script="Hant" typeface="新細明體"/>
         <a:font script="Arab" typeface="Times New Roman"/>
         <a:font script="Hebr" typeface="Times New Roman"/>
@@ -7283,14 +10313,31 @@
         <a:font script="Viet" typeface="Times New Roman"/>
         <a:font script="Uigh" typeface="Microsoft Uighur"/>
         <a:font script="Geor" typeface="Sylfaen"/>
+        <a:font script="Armn" typeface="Arial"/>
+        <a:font script="Bugi" typeface="Leelawadee UI"/>
+        <a:font script="Bopo" typeface="Microsoft JhengHei"/>
+        <a:font script="Java" typeface="Javanese Text"/>
+        <a:font script="Lisu" typeface="Segoe UI"/>
+        <a:font script="Mymr" typeface="Myanmar Text"/>
+        <a:font script="Nkoo" typeface="Ebrima"/>
+        <a:font script="Olck" typeface="Nirmala UI"/>
+        <a:font script="Osma" typeface="Ebrima"/>
+        <a:font script="Phag" typeface="Phagspa"/>
+        <a:font script="Syrn" typeface="Estrangelo Edessa"/>
+        <a:font script="Syrj" typeface="Estrangelo Edessa"/>
+        <a:font script="Syre" typeface="Estrangelo Edessa"/>
+        <a:font script="Sora" typeface="Nirmala UI"/>
+        <a:font script="Tale" typeface="Microsoft Tai Le"/>
+        <a:font script="Talu" typeface="Microsoft New Tai Lue"/>
+        <a:font script="Tfng" typeface="Ebrima"/>
       </a:majorFont>
       <a:minorFont>
-        <a:latin typeface="Calibri"/>
+        <a:latin typeface="맑은 고딕" panose="020F0502020204030204"/>
         <a:ea typeface=""/>
         <a:cs typeface=""/>
-        <a:font script="Jpan" typeface="ＭＳ Ｐゴシック"/>
+        <a:font script="Jpan" typeface="游ゴシック"/>
         <a:font script="Hang" typeface="맑은 고딕"/>
-        <a:font script="Hans" typeface="宋体"/>
+        <a:font script="Hans" typeface="等线"/>
         <a:font script="Hant" typeface="新細明體"/>
         <a:font script="Arab" typeface="Arial"/>
         <a:font script="Hebr" typeface="Arial"/>
@@ -7318,6 +10365,23 @@
         <a:font script="Viet" typeface="Arial"/>
         <a:font script="Uigh" typeface="Microsoft Uighur"/>
         <a:font script="Geor" typeface="Sylfaen"/>
+        <a:font script="Armn" typeface="Arial"/>
+        <a:font script="Bugi" typeface="Leelawadee UI"/>
+        <a:font script="Bopo" typeface="Microsoft JhengHei"/>
+        <a:font script="Java" typeface="Javanese Text"/>
+        <a:font script="Lisu" typeface="Segoe UI"/>
+        <a:font script="Mymr" typeface="Myanmar Text"/>
+        <a:font script="Nkoo" typeface="Ebrima"/>
+        <a:font script="Olck" typeface="Nirmala UI"/>
+        <a:font script="Osma" typeface="Ebrima"/>
+        <a:font script="Phag" typeface="Phagspa"/>
+        <a:font script="Syrn" typeface="Estrangelo Edessa"/>
+        <a:font script="Syrj" typeface="Estrangelo Edessa"/>
+        <a:font script="Syre" typeface="Estrangelo Edessa"/>
+        <a:font script="Sora" typeface="Nirmala UI"/>
+        <a:font script="Tale" typeface="Microsoft Tai Le"/>
+        <a:font script="Talu" typeface="Microsoft New Tai Lue"/>
+        <a:font script="Tfng" typeface="Ebrima"/>
       </a:minorFont>
     </a:fontScheme>
     <a:fmtScheme name="Office">
@@ -7329,200 +10393,141 @@
           <a:gsLst>
             <a:gs pos="0">
               <a:schemeClr val="phClr">
-                <a:tint val="50000"/>
-                <a:satMod val="300000"/>
+                <a:lumMod val="110000"/>
+                <a:satMod val="105000"/>
+                <a:tint val="67000"/>
               </a:schemeClr>
             </a:gs>
-            <a:gs pos="35000">
+            <a:gs pos="50000">
               <a:schemeClr val="phClr">
-                <a:tint val="37000"/>
-                <a:satMod val="300000"/>
+                <a:lumMod val="105000"/>
+                <a:satMod val="103000"/>
+                <a:tint val="73000"/>
               </a:schemeClr>
             </a:gs>
             <a:gs pos="100000">
               <a:schemeClr val="phClr">
-                <a:tint val="15000"/>
-                <a:satMod val="350000"/>
+                <a:lumMod val="105000"/>
+                <a:satMod val="109000"/>
+                <a:tint val="81000"/>
               </a:schemeClr>
             </a:gs>
           </a:gsLst>
-          <a:lin ang="16200000" scaled="1"/>
+          <a:lin ang="5400000" scaled="0"/>
         </a:gradFill>
         <a:gradFill rotWithShape="1">
           <a:gsLst>
             <a:gs pos="0">
               <a:schemeClr val="phClr">
-                <a:tint val="100000"/>
+                <a:satMod val="103000"/>
+                <a:lumMod val="102000"/>
+                <a:tint val="94000"/>
+              </a:schemeClr>
+            </a:gs>
+            <a:gs pos="50000">
+              <a:schemeClr val="phClr">
+                <a:satMod val="110000"/>
+                <a:lumMod val="100000"/>
                 <a:shade val="100000"/>
-                <a:satMod val="130000"/>
               </a:schemeClr>
             </a:gs>
             <a:gs pos="100000">
               <a:schemeClr val="phClr">
-                <a:tint val="50000"/>
-                <a:shade val="100000"/>
-                <a:satMod val="350000"/>
+                <a:lumMod val="99000"/>
+                <a:satMod val="120000"/>
+                <a:shade val="78000"/>
               </a:schemeClr>
             </a:gs>
           </a:gsLst>
-          <a:lin ang="16200000" scaled="0"/>
+          <a:lin ang="5400000" scaled="0"/>
         </a:gradFill>
       </a:fillStyleLst>
       <a:lnStyleLst>
-        <a:ln w="9525" cap="flat" cmpd="sng" algn="ctr">
-          <a:solidFill>
-            <a:schemeClr val="phClr">
-              <a:shade val="95000"/>
-              <a:satMod val="105000"/>
-            </a:schemeClr>
-          </a:solidFill>
-          <a:prstDash val="solid"/>
-        </a:ln>
-        <a:ln w="25400" cap="flat" cmpd="sng" algn="ctr">
+        <a:ln w="6350" cap="flat" cmpd="sng" algn="ctr">
           <a:solidFill>
             <a:schemeClr val="phClr"/>
           </a:solidFill>
           <a:prstDash val="solid"/>
+          <a:miter lim="800000"/>
         </a:ln>
-        <a:ln w="38100" cap="flat" cmpd="sng" algn="ctr">
+        <a:ln w="12700" cap="flat" cmpd="sng" algn="ctr">
           <a:solidFill>
             <a:schemeClr val="phClr"/>
           </a:solidFill>
           <a:prstDash val="solid"/>
+          <a:miter lim="800000"/>
+        </a:ln>
+        <a:ln w="19050" cap="flat" cmpd="sng" algn="ctr">
+          <a:solidFill>
+            <a:schemeClr val="phClr"/>
+          </a:solidFill>
+          <a:prstDash val="solid"/>
+          <a:miter lim="800000"/>
         </a:ln>
       </a:lnStyleLst>
       <a:effectStyleLst>
         <a:effectStyle>
+          <a:effectLst/>
+        </a:effectStyle>
+        <a:effectStyle>
+          <a:effectLst/>
+        </a:effectStyle>
+        <a:effectStyle>
           <a:effectLst>
-            <a:outerShdw blurRad="40000" dist="20000" dir="5400000" rotWithShape="0">
+            <a:outerShdw blurRad="57150" dist="19050" dir="5400000" algn="ctr" rotWithShape="0">
               <a:srgbClr val="000000">
-                <a:alpha val="38000"/>
+                <a:alpha val="63000"/>
               </a:srgbClr>
             </a:outerShdw>
           </a:effectLst>
-        </a:effectStyle>
-        <a:effectStyle>
-          <a:effectLst>
-            <a:outerShdw blurRad="40000" dist="23000" dir="5400000" rotWithShape="0">
-              <a:srgbClr val="000000">
-                <a:alpha val="35000"/>
-              </a:srgbClr>
-            </a:outerShdw>
-          </a:effectLst>
-        </a:effectStyle>
-        <a:effectStyle>
-          <a:effectLst>
-            <a:outerShdw blurRad="40000" dist="23000" dir="5400000" rotWithShape="0">
-              <a:srgbClr val="000000">
-                <a:alpha val="35000"/>
-              </a:srgbClr>
-            </a:outerShdw>
-          </a:effectLst>
-          <a:scene3d>
-            <a:camera prst="orthographicFront">
-              <a:rot lat="0" lon="0" rev="0"/>
-            </a:camera>
-            <a:lightRig rig="threePt" dir="t">
-              <a:rot lat="0" lon="0" rev="1200000"/>
-            </a:lightRig>
-          </a:scene3d>
-          <a:sp3d>
-            <a:bevelT w="63500" h="25400"/>
-          </a:sp3d>
         </a:effectStyle>
       </a:effectStyleLst>
       <a:bgFillStyleLst>
         <a:solidFill>
           <a:schemeClr val="phClr"/>
         </a:solidFill>
+        <a:solidFill>
+          <a:schemeClr val="phClr">
+            <a:tint val="95000"/>
+            <a:satMod val="170000"/>
+          </a:schemeClr>
+        </a:solidFill>
         <a:gradFill rotWithShape="1">
           <a:gsLst>
             <a:gs pos="0">
               <a:schemeClr val="phClr">
-                <a:tint val="40000"/>
-                <a:satMod val="350000"/>
+                <a:tint val="93000"/>
+                <a:satMod val="150000"/>
+                <a:shade val="98000"/>
+                <a:lumMod val="102000"/>
               </a:schemeClr>
             </a:gs>
-            <a:gs pos="40000">
+            <a:gs pos="50000">
               <a:schemeClr val="phClr">
-                <a:tint val="45000"/>
-                <a:shade val="99000"/>
-                <a:satMod val="350000"/>
+                <a:tint val="98000"/>
+                <a:satMod val="130000"/>
+                <a:shade val="90000"/>
+                <a:lumMod val="103000"/>
               </a:schemeClr>
             </a:gs>
             <a:gs pos="100000">
               <a:schemeClr val="phClr">
-                <a:shade val="20000"/>
-                <a:satMod val="255000"/>
+                <a:shade val="63000"/>
+                <a:satMod val="120000"/>
               </a:schemeClr>
             </a:gs>
           </a:gsLst>
-          <a:path path="circle">
-            <a:fillToRect l="50000" t="-80000" r="50000" b="180000"/>
-          </a:path>
-        </a:gradFill>
-        <a:gradFill rotWithShape="1">
-          <a:gsLst>
-            <a:gs pos="0">
-              <a:schemeClr val="phClr">
-                <a:tint val="80000"/>
-                <a:satMod val="300000"/>
-              </a:schemeClr>
-            </a:gs>
-            <a:gs pos="100000">
-              <a:schemeClr val="phClr">
-                <a:shade val="30000"/>
-                <a:satMod val="200000"/>
-              </a:schemeClr>
-            </a:gs>
-          </a:gsLst>
-          <a:path path="circle">
-            <a:fillToRect l="50000" t="50000" r="50000" b="50000"/>
-          </a:path>
+          <a:lin ang="5400000" scaled="0"/>
         </a:gradFill>
       </a:bgFillStyleLst>
     </a:fmtScheme>
   </a:themeElements>
-  <a:objectDefaults>
-    <a:spDef>
-      <a:spPr/>
-      <a:bodyPr/>
-      <a:lstStyle/>
-      <a:style>
-        <a:lnRef idx="1">
-          <a:schemeClr val="accent1"/>
-        </a:lnRef>
-        <a:fillRef idx="3">
-          <a:schemeClr val="accent1"/>
-        </a:fillRef>
-        <a:effectRef idx="2">
-          <a:schemeClr val="accent1"/>
-        </a:effectRef>
-        <a:fontRef idx="minor">
-          <a:schemeClr val="lt1"/>
-        </a:fontRef>
-      </a:style>
-    </a:spDef>
-    <a:lnDef>
-      <a:spPr/>
-      <a:bodyPr/>
-      <a:lstStyle/>
-      <a:style>
-        <a:lnRef idx="2">
-          <a:schemeClr val="accent1"/>
-        </a:lnRef>
-        <a:fillRef idx="0">
-          <a:schemeClr val="accent1"/>
-        </a:fillRef>
-        <a:effectRef idx="1">
-          <a:schemeClr val="accent1"/>
-        </a:effectRef>
-        <a:fontRef idx="minor">
-          <a:schemeClr val="tx1"/>
-        </a:fontRef>
-      </a:style>
-    </a:lnDef>
-  </a:objectDefaults>
+  <a:objectDefaults/>
   <a:extraClrSchemeLst/>
+  <a:extLst>
+    <a:ext uri="{05A4C25C-085E-4340-85A3-A5531E510DB2}">
+      <thm15:themeFamily xmlns:thm15="http://schemas.microsoft.com/office/thememl/2012/main" name="Office Theme" id="{62F939B6-93AF-4DB8-9C6B-D6C7DFDC589F}" vid="{4A3C46E8-61CC-4603-A589-7422A47A8E4A}"/>
+    </a:ext>
+  </a:extLst>
 </a:theme>
 </file>